--- a/Onyx_進度報告_1013.pptx
+++ b/Onyx_進度報告_1013.pptx
@@ -5,17 +5,21 @@
     <p:sldMasterId id="2147483658" r:id="rId1"/>
   </p:sldMasterIdLst>
   <p:notesMasterIdLst>
-    <p:notesMasterId r:id="rId10"/>
+    <p:notesMasterId r:id="rId14"/>
   </p:notesMasterIdLst>
   <p:sldIdLst>
     <p:sldId id="277" r:id="rId2"/>
     <p:sldId id="2022" r:id="rId3"/>
     <p:sldId id="2024" r:id="rId4"/>
-    <p:sldId id="2031" r:id="rId5"/>
-    <p:sldId id="2023" r:id="rId6"/>
-    <p:sldId id="2025" r:id="rId7"/>
-    <p:sldId id="2032" r:id="rId8"/>
-    <p:sldId id="286" r:id="rId9"/>
+    <p:sldId id="2025" r:id="rId5"/>
+    <p:sldId id="2032" r:id="rId6"/>
+    <p:sldId id="2034" r:id="rId7"/>
+    <p:sldId id="2035" r:id="rId8"/>
+    <p:sldId id="2037" r:id="rId9"/>
+    <p:sldId id="2038" r:id="rId10"/>
+    <p:sldId id="2039" r:id="rId11"/>
+    <p:sldId id="286" r:id="rId12"/>
+    <p:sldId id="2036" r:id="rId13"/>
   </p:sldIdLst>
   <p:sldSz cx="9906000" cy="6858000" type="A4"/>
   <p:notesSz cx="7315200" cy="9601200"/>
@@ -260,19 +264,23 @@
           <p14:sldIdLst>
             <p14:sldId id="2022"/>
             <p14:sldId id="2024"/>
-            <p14:sldId id="2031"/>
-            <p14:sldId id="2023"/>
           </p14:sldIdLst>
         </p14:section>
         <p14:section name="Video Capture Card" id="{FA8538CB-EEBB-42F8-BEE8-82DA04CEC9C1}">
           <p14:sldIdLst>
             <p14:sldId id="2025"/>
             <p14:sldId id="2032"/>
+            <p14:sldId id="2034"/>
+            <p14:sldId id="2035"/>
+            <p14:sldId id="2037"/>
+            <p14:sldId id="2038"/>
+            <p14:sldId id="2039"/>
           </p14:sldIdLst>
         </p14:section>
         <p14:section name="End" id="{33EEDC85-A799-4CB3-BF13-F4955B8630BE}">
           <p14:sldIdLst>
             <p14:sldId id="286"/>
+            <p14:sldId id="2036"/>
           </p14:sldIdLst>
         </p14:section>
       </p14:sectionLst>
@@ -1619,6 +1627,483 @@
 </p:notes>
 </file>
 
+<file path=ppt/notesSlides/notesSlide10.xml><?xml version="1.0" encoding="utf-8"?>
+<p:notes xmlns:a="http://schemas.openxmlformats.org/drawingml/2006/main" xmlns:r="http://schemas.openxmlformats.org/officeDocument/2006/relationships" xmlns:p="http://schemas.openxmlformats.org/presentationml/2006/main">
+  <p:cSld>
+    <p:spTree>
+      <p:nvGrpSpPr>
+        <p:cNvPr id="1" name="">
+          <a:extLst>
+            <a:ext uri="{FF2B5EF4-FFF2-40B4-BE49-F238E27FC236}">
+              <a16:creationId xmlns:a16="http://schemas.microsoft.com/office/drawing/2014/main" id="{9A851A70-D7FF-B69E-2F1F-5276D7F44C59}"/>
+            </a:ext>
+          </a:extLst>
+        </p:cNvPr>
+        <p:cNvGrpSpPr/>
+        <p:nvPr/>
+      </p:nvGrpSpPr>
+      <p:grpSpPr>
+        <a:xfrm>
+          <a:off x="0" y="0"/>
+          <a:ext cx="0" cy="0"/>
+          <a:chOff x="0" y="0"/>
+          <a:chExt cx="0" cy="0"/>
+        </a:xfrm>
+      </p:grpSpPr>
+      <p:sp>
+        <p:nvSpPr>
+          <p:cNvPr id="2" name="投影片影像版面配置區 1">
+            <a:extLst>
+              <a:ext uri="{FF2B5EF4-FFF2-40B4-BE49-F238E27FC236}">
+                <a16:creationId xmlns:a16="http://schemas.microsoft.com/office/drawing/2014/main" id="{4FB2E1DE-40DE-B1BA-7135-64BFFB1631B9}"/>
+              </a:ext>
+            </a:extLst>
+          </p:cNvPr>
+          <p:cNvSpPr>
+            <a:spLocks noGrp="1" noRot="1" noChangeAspect="1"/>
+          </p:cNvSpPr>
+          <p:nvPr>
+            <p:ph type="sldImg"/>
+          </p:nvPr>
+        </p:nvSpPr>
+        <p:spPr/>
+      </p:sp>
+      <p:sp>
+        <p:nvSpPr>
+          <p:cNvPr id="3" name="備忘稿版面配置區 2">
+            <a:extLst>
+              <a:ext uri="{FF2B5EF4-FFF2-40B4-BE49-F238E27FC236}">
+                <a16:creationId xmlns:a16="http://schemas.microsoft.com/office/drawing/2014/main" id="{C4F8DB8E-F5F1-21EB-D41F-2C635FB715D5}"/>
+              </a:ext>
+            </a:extLst>
+          </p:cNvPr>
+          <p:cNvSpPr>
+            <a:spLocks noGrp="1"/>
+          </p:cNvSpPr>
+          <p:nvPr>
+            <p:ph type="body" idx="1"/>
+          </p:nvPr>
+        </p:nvSpPr>
+        <p:spPr/>
+        <p:txBody>
+          <a:bodyPr/>
+          <a:lstStyle/>
+          <a:p>
+            <a:pPr marL="0" marR="0" lvl="0" indent="0" algn="l" defTabSz="914400" rtl="0" eaLnBrk="1" fontAlgn="auto" latinLnBrk="0" hangingPunct="1">
+              <a:lnSpc>
+                <a:spcPct val="100000"/>
+              </a:lnSpc>
+              <a:spcBef>
+                <a:spcPts val="360"/>
+              </a:spcBef>
+              <a:spcAft>
+                <a:spcPts val="0"/>
+              </a:spcAft>
+              <a:buClr>
+                <a:srgbClr val="000000"/>
+              </a:buClr>
+              <a:buSzPts val="1400"/>
+              <a:buFont typeface="Arial"/>
+              <a:buNone/>
+              <a:tabLst/>
+              <a:defRPr/>
+            </a:pPr>
+            <a:r>
+              <a:rPr lang="en-US" altLang="zh-TW" dirty="0"/>
+              <a:t>HDMI </a:t>
+            </a:r>
+            <a:r>
+              <a:rPr lang="zh-TW" altLang="en-US" dirty="0"/>
+              <a:t>影格緩衝、</a:t>
+            </a:r>
+            <a:r>
+              <a:rPr lang="en-US" altLang="zh-TW" dirty="0"/>
+              <a:t>DDR3</a:t>
+            </a:r>
+            <a:r>
+              <a:rPr lang="zh-TW" altLang="en-US" dirty="0"/>
+              <a:t>／</a:t>
+            </a:r>
+            <a:r>
+              <a:rPr lang="en-US" altLang="zh-TW" dirty="0"/>
+              <a:t>AXI </a:t>
+            </a:r>
+            <a:r>
+              <a:rPr lang="zh-TW" altLang="en-US" dirty="0"/>
+              <a:t>記憶體整合、廠商 </a:t>
+            </a:r>
+            <a:r>
+              <a:rPr lang="en-US" altLang="zh-TW" dirty="0"/>
+              <a:t>PCIe IP </a:t>
+            </a:r>
+            <a:r>
+              <a:rPr lang="zh-TW" altLang="en-US" dirty="0"/>
+              <a:t>與 </a:t>
+            </a:r>
+            <a:r>
+              <a:rPr lang="en-US" altLang="zh-TW" dirty="0"/>
+              <a:t>PC </a:t>
+            </a:r>
+            <a:r>
+              <a:rPr lang="zh-TW" altLang="en-US" dirty="0"/>
+              <a:t>軟體介面的整體架構。</a:t>
+            </a:r>
+          </a:p>
+          <a:p>
+            <a:pPr marL="0" indent="0"/>
+            <a:endParaRPr lang="zh-TW" altLang="en-US" dirty="0"/>
+          </a:p>
+        </p:txBody>
+      </p:sp>
+      <p:sp>
+        <p:nvSpPr>
+          <p:cNvPr id="4" name="投影片編號版面配置區 3">
+            <a:extLst>
+              <a:ext uri="{FF2B5EF4-FFF2-40B4-BE49-F238E27FC236}">
+                <a16:creationId xmlns:a16="http://schemas.microsoft.com/office/drawing/2014/main" id="{A81AD260-1FA1-46D2-EEFC-6CE390861C06}"/>
+              </a:ext>
+            </a:extLst>
+          </p:cNvPr>
+          <p:cNvSpPr>
+            <a:spLocks noGrp="1"/>
+          </p:cNvSpPr>
+          <p:nvPr>
+            <p:ph type="sldNum" idx="12"/>
+          </p:nvPr>
+        </p:nvSpPr>
+        <p:spPr/>
+        <p:txBody>
+          <a:bodyPr/>
+          <a:lstStyle/>
+          <a:p>
+            <a:pPr marL="0" marR="0" lvl="0" indent="0" algn="r" rtl="0">
+              <a:spcBef>
+                <a:spcPts val="0"/>
+              </a:spcBef>
+              <a:spcAft>
+                <a:spcPts val="0"/>
+              </a:spcAft>
+              <a:buNone/>
+            </a:pPr>
+            <a:fld id="{00000000-1234-1234-1234-123412341234}" type="slidenum">
+              <a:rPr lang="en-US" sz="2000" b="0" i="0" u="none" strike="noStrike" cap="none" smtClean="0">
+                <a:solidFill>
+                  <a:schemeClr val="dk1"/>
+                </a:solidFill>
+                <a:latin typeface="Times New Roman"/>
+                <a:ea typeface="Times New Roman"/>
+                <a:cs typeface="Times New Roman"/>
+                <a:sym typeface="Times New Roman"/>
+              </a:rPr>
+              <a:t>10</a:t>
+            </a:fld>
+            <a:endParaRPr lang="en-US" sz="2000" b="0" i="0" u="none" strike="noStrike" cap="none" dirty="0">
+              <a:solidFill>
+                <a:schemeClr val="dk1"/>
+              </a:solidFill>
+              <a:latin typeface="Times New Roman"/>
+              <a:ea typeface="Times New Roman"/>
+              <a:cs typeface="Times New Roman"/>
+              <a:sym typeface="Times New Roman"/>
+            </a:endParaRPr>
+          </a:p>
+        </p:txBody>
+      </p:sp>
+    </p:spTree>
+    <p:extLst>
+      <p:ext uri="{BB962C8B-B14F-4D97-AF65-F5344CB8AC3E}">
+        <p14:creationId xmlns:p14="http://schemas.microsoft.com/office/powerpoint/2010/main" val="131158438"/>
+      </p:ext>
+    </p:extLst>
+  </p:cSld>
+  <p:clrMapOvr>
+    <a:masterClrMapping/>
+  </p:clrMapOvr>
+</p:notes>
+</file>
+
+<file path=ppt/notesSlides/notesSlide11.xml><?xml version="1.0" encoding="utf-8"?>
+<p:notes xmlns:a="http://schemas.openxmlformats.org/drawingml/2006/main" xmlns:r="http://schemas.openxmlformats.org/officeDocument/2006/relationships" xmlns:p="http://schemas.openxmlformats.org/presentationml/2006/main">
+  <p:cSld>
+    <p:spTree>
+      <p:nvGrpSpPr>
+        <p:cNvPr id="1" name=""/>
+        <p:cNvGrpSpPr/>
+        <p:nvPr/>
+      </p:nvGrpSpPr>
+      <p:grpSpPr>
+        <a:xfrm>
+          <a:off x="0" y="0"/>
+          <a:ext cx="0" cy="0"/>
+          <a:chOff x="0" y="0"/>
+          <a:chExt cx="0" cy="0"/>
+        </a:xfrm>
+      </p:grpSpPr>
+      <p:sp>
+        <p:nvSpPr>
+          <p:cNvPr id="1048641" name="投影片影像版面配置區 1"/>
+          <p:cNvSpPr>
+            <a:spLocks noGrp="1" noRot="1" noChangeAspect="1"/>
+          </p:cNvSpPr>
+          <p:nvPr>
+            <p:ph type="sldImg"/>
+          </p:nvPr>
+        </p:nvSpPr>
+        <p:spPr/>
+      </p:sp>
+      <p:sp>
+        <p:nvSpPr>
+          <p:cNvPr id="1048642" name="備忘稿版面配置區 2"/>
+          <p:cNvSpPr>
+            <a:spLocks noGrp="1"/>
+          </p:cNvSpPr>
+          <p:nvPr>
+            <p:ph type="body" idx="1"/>
+          </p:nvPr>
+        </p:nvSpPr>
+        <p:spPr/>
+        <p:txBody>
+          <a:bodyPr/>
+          <a:lstStyle/>
+          <a:p>
+            <a:pPr marL="228600" indent="0">
+              <a:buNone/>
+            </a:pPr>
+            <a:endParaRPr lang="en-US" altLang="zh-TW" dirty="0"/>
+          </a:p>
+        </p:txBody>
+      </p:sp>
+      <p:sp>
+        <p:nvSpPr>
+          <p:cNvPr id="1048643" name="投影片編號版面配置區 3"/>
+          <p:cNvSpPr>
+            <a:spLocks noGrp="1"/>
+          </p:cNvSpPr>
+          <p:nvPr>
+            <p:ph type="sldNum" sz="quarter" idx="5"/>
+          </p:nvPr>
+        </p:nvSpPr>
+        <p:spPr/>
+        <p:txBody>
+          <a:bodyPr/>
+          <a:lstStyle/>
+          <a:p>
+            <a:fld id="{F5753A29-9D77-4C26-8BEC-432FE5D4B0A4}" type="slidenum">
+              <a:rPr lang="en-US" altLang="zh-TW" smtClean="0"/>
+              <a:t>11</a:t>
+            </a:fld>
+            <a:endParaRPr lang="en-US" altLang="zh-TW" dirty="0"/>
+          </a:p>
+        </p:txBody>
+      </p:sp>
+    </p:spTree>
+    <p:extLst>
+      <p:ext uri="{BB962C8B-B14F-4D97-AF65-F5344CB8AC3E}">
+        <p14:creationId xmlns:p14="http://schemas.microsoft.com/office/powerpoint/2010/main" val="1154148578"/>
+      </p:ext>
+    </p:extLst>
+  </p:cSld>
+  <p:clrMapOvr>
+    <a:masterClrMapping/>
+  </p:clrMapOvr>
+</p:notes>
+</file>
+
+<file path=ppt/notesSlides/notesSlide12.xml><?xml version="1.0" encoding="utf-8"?>
+<p:notes xmlns:a="http://schemas.openxmlformats.org/drawingml/2006/main" xmlns:r="http://schemas.openxmlformats.org/officeDocument/2006/relationships" xmlns:p="http://schemas.openxmlformats.org/presentationml/2006/main">
+  <p:cSld>
+    <p:spTree>
+      <p:nvGrpSpPr>
+        <p:cNvPr id="1" name="">
+          <a:extLst>
+            <a:ext uri="{FF2B5EF4-FFF2-40B4-BE49-F238E27FC236}">
+              <a16:creationId xmlns:a16="http://schemas.microsoft.com/office/drawing/2014/main" id="{9A851A70-D7FF-B69E-2F1F-5276D7F44C59}"/>
+            </a:ext>
+          </a:extLst>
+        </p:cNvPr>
+        <p:cNvGrpSpPr/>
+        <p:nvPr/>
+      </p:nvGrpSpPr>
+      <p:grpSpPr>
+        <a:xfrm>
+          <a:off x="0" y="0"/>
+          <a:ext cx="0" cy="0"/>
+          <a:chOff x="0" y="0"/>
+          <a:chExt cx="0" cy="0"/>
+        </a:xfrm>
+      </p:grpSpPr>
+      <p:sp>
+        <p:nvSpPr>
+          <p:cNvPr id="2" name="投影片影像版面配置區 1">
+            <a:extLst>
+              <a:ext uri="{FF2B5EF4-FFF2-40B4-BE49-F238E27FC236}">
+                <a16:creationId xmlns:a16="http://schemas.microsoft.com/office/drawing/2014/main" id="{4FB2E1DE-40DE-B1BA-7135-64BFFB1631B9}"/>
+              </a:ext>
+            </a:extLst>
+          </p:cNvPr>
+          <p:cNvSpPr>
+            <a:spLocks noGrp="1" noRot="1" noChangeAspect="1"/>
+          </p:cNvSpPr>
+          <p:nvPr>
+            <p:ph type="sldImg"/>
+          </p:nvPr>
+        </p:nvSpPr>
+        <p:spPr/>
+      </p:sp>
+      <p:sp>
+        <p:nvSpPr>
+          <p:cNvPr id="3" name="備忘稿版面配置區 2">
+            <a:extLst>
+              <a:ext uri="{FF2B5EF4-FFF2-40B4-BE49-F238E27FC236}">
+                <a16:creationId xmlns:a16="http://schemas.microsoft.com/office/drawing/2014/main" id="{C4F8DB8E-F5F1-21EB-D41F-2C635FB715D5}"/>
+              </a:ext>
+            </a:extLst>
+          </p:cNvPr>
+          <p:cNvSpPr>
+            <a:spLocks noGrp="1"/>
+          </p:cNvSpPr>
+          <p:nvPr>
+            <p:ph type="body" idx="1"/>
+          </p:nvPr>
+        </p:nvSpPr>
+        <p:spPr/>
+        <p:txBody>
+          <a:bodyPr/>
+          <a:lstStyle/>
+          <a:p>
+            <a:pPr marL="0" marR="0" lvl="0" indent="0" algn="l" defTabSz="914400" rtl="0" eaLnBrk="1" fontAlgn="auto" latinLnBrk="0" hangingPunct="1">
+              <a:lnSpc>
+                <a:spcPct val="100000"/>
+              </a:lnSpc>
+              <a:spcBef>
+                <a:spcPts val="360"/>
+              </a:spcBef>
+              <a:spcAft>
+                <a:spcPts val="0"/>
+              </a:spcAft>
+              <a:buClr>
+                <a:srgbClr val="000000"/>
+              </a:buClr>
+              <a:buSzPts val="1400"/>
+              <a:buFont typeface="Arial"/>
+              <a:buNone/>
+              <a:tabLst/>
+              <a:defRPr/>
+            </a:pPr>
+            <a:r>
+              <a:rPr lang="en-US" altLang="zh-TW" dirty="0"/>
+              <a:t>HDMI </a:t>
+            </a:r>
+            <a:r>
+              <a:rPr lang="zh-TW" altLang="en-US" dirty="0"/>
+              <a:t>影格緩衝、</a:t>
+            </a:r>
+            <a:r>
+              <a:rPr lang="en-US" altLang="zh-TW" dirty="0"/>
+              <a:t>DDR3</a:t>
+            </a:r>
+            <a:r>
+              <a:rPr lang="zh-TW" altLang="en-US" dirty="0"/>
+              <a:t>／</a:t>
+            </a:r>
+            <a:r>
+              <a:rPr lang="en-US" altLang="zh-TW" dirty="0"/>
+              <a:t>AXI </a:t>
+            </a:r>
+            <a:r>
+              <a:rPr lang="zh-TW" altLang="en-US" dirty="0"/>
+              <a:t>記憶體整合、廠商 </a:t>
+            </a:r>
+            <a:r>
+              <a:rPr lang="en-US" altLang="zh-TW" dirty="0"/>
+              <a:t>PCIe IP </a:t>
+            </a:r>
+            <a:r>
+              <a:rPr lang="zh-TW" altLang="en-US" dirty="0"/>
+              <a:t>與 </a:t>
+            </a:r>
+            <a:r>
+              <a:rPr lang="en-US" altLang="zh-TW" dirty="0"/>
+              <a:t>PC </a:t>
+            </a:r>
+            <a:r>
+              <a:rPr lang="zh-TW" altLang="en-US" dirty="0"/>
+              <a:t>軟體介面的整體架構。</a:t>
+            </a:r>
+          </a:p>
+          <a:p>
+            <a:pPr marL="0" indent="0"/>
+            <a:endParaRPr lang="zh-TW" altLang="en-US" dirty="0"/>
+          </a:p>
+        </p:txBody>
+      </p:sp>
+      <p:sp>
+        <p:nvSpPr>
+          <p:cNvPr id="4" name="投影片編號版面配置區 3">
+            <a:extLst>
+              <a:ext uri="{FF2B5EF4-FFF2-40B4-BE49-F238E27FC236}">
+                <a16:creationId xmlns:a16="http://schemas.microsoft.com/office/drawing/2014/main" id="{A81AD260-1FA1-46D2-EEFC-6CE390861C06}"/>
+              </a:ext>
+            </a:extLst>
+          </p:cNvPr>
+          <p:cNvSpPr>
+            <a:spLocks noGrp="1"/>
+          </p:cNvSpPr>
+          <p:nvPr>
+            <p:ph type="sldNum" idx="12"/>
+          </p:nvPr>
+        </p:nvSpPr>
+        <p:spPr/>
+        <p:txBody>
+          <a:bodyPr/>
+          <a:lstStyle/>
+          <a:p>
+            <a:pPr marL="0" marR="0" lvl="0" indent="0" algn="r" rtl="0">
+              <a:spcBef>
+                <a:spcPts val="0"/>
+              </a:spcBef>
+              <a:spcAft>
+                <a:spcPts val="0"/>
+              </a:spcAft>
+              <a:buNone/>
+            </a:pPr>
+            <a:fld id="{00000000-1234-1234-1234-123412341234}" type="slidenum">
+              <a:rPr lang="en-US" sz="2000" b="0" i="0" u="none" strike="noStrike" cap="none" smtClean="0">
+                <a:solidFill>
+                  <a:schemeClr val="dk1"/>
+                </a:solidFill>
+                <a:latin typeface="Times New Roman"/>
+                <a:ea typeface="Times New Roman"/>
+                <a:cs typeface="Times New Roman"/>
+                <a:sym typeface="Times New Roman"/>
+              </a:rPr>
+              <a:t>12</a:t>
+            </a:fld>
+            <a:endParaRPr lang="en-US" sz="2000" b="0" i="0" u="none" strike="noStrike" cap="none" dirty="0">
+              <a:solidFill>
+                <a:schemeClr val="dk1"/>
+              </a:solidFill>
+              <a:latin typeface="Times New Roman"/>
+              <a:ea typeface="Times New Roman"/>
+              <a:cs typeface="Times New Roman"/>
+              <a:sym typeface="Times New Roman"/>
+            </a:endParaRPr>
+          </a:p>
+        </p:txBody>
+      </p:sp>
+    </p:spTree>
+    <p:extLst>
+      <p:ext uri="{BB962C8B-B14F-4D97-AF65-F5344CB8AC3E}">
+        <p14:creationId xmlns:p14="http://schemas.microsoft.com/office/powerpoint/2010/main" val="3764392625"/>
+      </p:ext>
+    </p:extLst>
+  </p:cSld>
+  <p:clrMapOvr>
+    <a:masterClrMapping/>
+  </p:clrMapOvr>
+</p:notes>
+</file>
+
 <file path=ppt/notesSlides/notesSlide2.xml><?xml version="1.0" encoding="utf-8"?>
 <p:notes xmlns:a="http://schemas.openxmlformats.org/drawingml/2006/main" xmlns:r="http://schemas.openxmlformats.org/officeDocument/2006/relationships" xmlns:p="http://schemas.openxmlformats.org/presentationml/2006/main">
   <p:cSld>
@@ -1950,7 +2435,97 @@
           <a:lstStyle/>
           <a:p>
             <a:pPr marL="0" indent="0"/>
-            <a:endParaRPr lang="zh-TW" altLang="en-US" dirty="0"/>
+            <a:r>
+              <a:rPr lang="en-US" altLang="zh-TW" dirty="0"/>
+              <a:t>FPGA HDMI RX</a:t>
+            </a:r>
+            <a:r>
+              <a:rPr lang="zh-TW" altLang="en-US" dirty="0"/>
+              <a:t>：</a:t>
+            </a:r>
+            <a:r>
+              <a:rPr lang="en-US" altLang="zh-TW" dirty="0"/>
+              <a:t>TMDS </a:t>
+            </a:r>
+            <a:r>
+              <a:rPr lang="zh-TW" altLang="en-US" dirty="0"/>
+              <a:t>解碼、辨識有效像素、輸出標準像素資料</a:t>
+            </a:r>
+            <a:r>
+              <a:rPr lang="en-US" altLang="zh-TW" dirty="0"/>
+              <a:t>(pixel data</a:t>
+            </a:r>
+            <a:r>
+              <a:rPr lang="zh-TW" altLang="en-US" dirty="0"/>
+              <a:t>、</a:t>
+            </a:r>
+            <a:r>
+              <a:rPr lang="en-US" altLang="zh-TW" dirty="0"/>
+              <a:t>HSYNC</a:t>
+            </a:r>
+            <a:r>
+              <a:rPr lang="zh-TW" altLang="en-US" dirty="0"/>
+              <a:t>、</a:t>
+            </a:r>
+            <a:r>
+              <a:rPr lang="en-US" altLang="zh-TW" dirty="0"/>
+              <a:t>VSYNC)</a:t>
+            </a:r>
+          </a:p>
+          <a:p>
+            <a:pPr marL="0" indent="0"/>
+            <a:r>
+              <a:rPr lang="en-US" altLang="zh-TW" dirty="0"/>
+              <a:t>FIFO</a:t>
+            </a:r>
+            <a:r>
+              <a:rPr lang="zh-TW" altLang="en-US" dirty="0"/>
+              <a:t>／</a:t>
+            </a:r>
+            <a:r>
+              <a:rPr lang="en-US" altLang="zh-TW" dirty="0"/>
+              <a:t>DDR Frame Buffer</a:t>
+            </a:r>
+            <a:r>
+              <a:rPr lang="zh-TW" altLang="en-US" dirty="0"/>
+              <a:t>：跨時脈、影像緩衝</a:t>
+            </a:r>
+            <a:endParaRPr lang="en-US" altLang="zh-TW" dirty="0"/>
+          </a:p>
+          <a:p>
+            <a:pPr marL="0" indent="0"/>
+            <a:r>
+              <a:rPr lang="en-US" altLang="zh-TW" dirty="0"/>
+              <a:t>PCIe Endpoint</a:t>
+            </a:r>
+            <a:r>
+              <a:rPr lang="zh-TW" altLang="en-US" dirty="0"/>
+              <a:t>：讓 </a:t>
+            </a:r>
+            <a:r>
+              <a:rPr lang="en-US" altLang="zh-TW" dirty="0"/>
+              <a:t>FPGA </a:t>
+            </a:r>
+            <a:r>
+              <a:rPr lang="zh-TW" altLang="en-US" dirty="0"/>
+              <a:t>成為 </a:t>
+            </a:r>
+            <a:r>
+              <a:rPr lang="en-US" altLang="zh-TW" dirty="0"/>
+              <a:t>PC </a:t>
+            </a:r>
+            <a:r>
+              <a:rPr lang="zh-TW" altLang="en-US" dirty="0"/>
+              <a:t>可以辨識與存取的 </a:t>
+            </a:r>
+            <a:r>
+              <a:rPr lang="en-US" altLang="zh-TW" dirty="0"/>
+              <a:t>PCIe </a:t>
+            </a:r>
+            <a:r>
+              <a:rPr lang="zh-TW" altLang="en-US" dirty="0"/>
+              <a:t>裝置</a:t>
+            </a:r>
           </a:p>
         </p:txBody>
       </p:sp>
@@ -2011,7 +2586,7 @@
     </p:spTree>
     <p:extLst>
       <p:ext uri="{BB962C8B-B14F-4D97-AF65-F5344CB8AC3E}">
-        <p14:creationId xmlns:p14="http://schemas.microsoft.com/office/powerpoint/2010/main" val="789682737"/>
+        <p14:creationId xmlns:p14="http://schemas.microsoft.com/office/powerpoint/2010/main" val="3275490434"/>
       </p:ext>
     </p:extLst>
   </p:cSld>
@@ -2145,7 +2720,7 @@
     </p:spTree>
     <p:extLst>
       <p:ext uri="{BB962C8B-B14F-4D97-AF65-F5344CB8AC3E}">
-        <p14:creationId xmlns:p14="http://schemas.microsoft.com/office/powerpoint/2010/main" val="239197680"/>
+        <p14:creationId xmlns:p14="http://schemas.microsoft.com/office/powerpoint/2010/main" val="3473690080"/>
       </p:ext>
     </p:extLst>
   </p:cSld>
@@ -2279,7 +2854,7 @@
     </p:spTree>
     <p:extLst>
       <p:ext uri="{BB962C8B-B14F-4D97-AF65-F5344CB8AC3E}">
-        <p14:creationId xmlns:p14="http://schemas.microsoft.com/office/powerpoint/2010/main" val="3275490434"/>
+        <p14:creationId xmlns:p14="http://schemas.microsoft.com/office/powerpoint/2010/main" val="3960645603"/>
       </p:ext>
     </p:extLst>
   </p:cSld>
@@ -2351,6 +2926,32 @@
           <a:bodyPr/>
           <a:lstStyle/>
           <a:p>
+            <a:r>
+              <a:rPr lang="en-US" altLang="zh-TW" dirty="0"/>
+              <a:t>FPGA </a:t>
+            </a:r>
+            <a:r>
+              <a:rPr lang="zh-TW" altLang="en-US" dirty="0"/>
+              <a:t>系統 </a:t>
+            </a:r>
+            <a:r>
+              <a:rPr lang="en-US" altLang="zh-TW" dirty="0"/>
+              <a:t>framework</a:t>
+            </a:r>
+          </a:p>
+          <a:p>
+            <a:r>
+              <a:rPr lang="zh-TW" altLang="en-US" dirty="0"/>
+              <a:t>連接模組（系統整合）： 決定哪些模組要連接，以及如何組成完整系統。</a:t>
+            </a:r>
+          </a:p>
+          <a:p>
+            <a:r>
+              <a:rPr lang="zh-TW" altLang="en-US" dirty="0"/>
+              <a:t>連接介面（通訊規則）： 規定模組連接後，如何交換資料、位址、控制訊號，以及如何協調傳輸。</a:t>
+            </a:r>
+          </a:p>
+          <a:p>
             <a:pPr marL="0" indent="0"/>
             <a:endParaRPr lang="zh-TW" altLang="en-US" dirty="0"/>
           </a:p>
@@ -2413,7 +3014,7 @@
     </p:spTree>
     <p:extLst>
       <p:ext uri="{BB962C8B-B14F-4D97-AF65-F5344CB8AC3E}">
-        <p14:creationId xmlns:p14="http://schemas.microsoft.com/office/powerpoint/2010/main" val="3473690080"/>
+        <p14:creationId xmlns:p14="http://schemas.microsoft.com/office/powerpoint/2010/main" val="1673705244"/>
       </p:ext>
     </p:extLst>
   </p:cSld>
@@ -2428,7 +3029,13 @@
   <p:cSld>
     <p:spTree>
       <p:nvGrpSpPr>
-        <p:cNvPr id="1" name=""/>
+        <p:cNvPr id="1" name="">
+          <a:extLst>
+            <a:ext uri="{FF2B5EF4-FFF2-40B4-BE49-F238E27FC236}">
+              <a16:creationId xmlns:a16="http://schemas.microsoft.com/office/drawing/2014/main" id="{9A851A70-D7FF-B69E-2F1F-5276D7F44C59}"/>
+            </a:ext>
+          </a:extLst>
+        </p:cNvPr>
         <p:cNvGrpSpPr/>
         <p:nvPr/>
       </p:nvGrpSpPr>
@@ -2442,7 +3049,13 @@
       </p:grpSpPr>
       <p:sp>
         <p:nvSpPr>
-          <p:cNvPr id="1048641" name="投影片影像版面配置區 1"/>
+          <p:cNvPr id="2" name="投影片影像版面配置區 1">
+            <a:extLst>
+              <a:ext uri="{FF2B5EF4-FFF2-40B4-BE49-F238E27FC236}">
+                <a16:creationId xmlns:a16="http://schemas.microsoft.com/office/drawing/2014/main" id="{4FB2E1DE-40DE-B1BA-7135-64BFFB1631B9}"/>
+              </a:ext>
+            </a:extLst>
+          </p:cNvPr>
           <p:cNvSpPr>
             <a:spLocks noGrp="1" noRot="1" noChangeAspect="1"/>
           </p:cNvSpPr>
@@ -2454,7 +3067,13 @@
       </p:sp>
       <p:sp>
         <p:nvSpPr>
-          <p:cNvPr id="1048642" name="備忘稿版面配置區 2"/>
+          <p:cNvPr id="3" name="備忘稿版面配置區 2">
+            <a:extLst>
+              <a:ext uri="{FF2B5EF4-FFF2-40B4-BE49-F238E27FC236}">
+                <a16:creationId xmlns:a16="http://schemas.microsoft.com/office/drawing/2014/main" id="{C4F8DB8E-F5F1-21EB-D41F-2C635FB715D5}"/>
+              </a:ext>
+            </a:extLst>
+          </p:cNvPr>
           <p:cNvSpPr>
             <a:spLocks noGrp="1"/>
           </p:cNvSpPr>
@@ -2467,21 +3086,86 @@
           <a:bodyPr/>
           <a:lstStyle/>
           <a:p>
-            <a:pPr marL="228600" indent="0">
+            <a:pPr marL="0" marR="0" lvl="0" indent="0" algn="l" defTabSz="914400" rtl="0" eaLnBrk="1" fontAlgn="auto" latinLnBrk="0" hangingPunct="1">
+              <a:lnSpc>
+                <a:spcPct val="100000"/>
+              </a:lnSpc>
+              <a:spcBef>
+                <a:spcPts val="360"/>
+              </a:spcBef>
+              <a:spcAft>
+                <a:spcPts val="0"/>
+              </a:spcAft>
+              <a:buClr>
+                <a:srgbClr val="000000"/>
+              </a:buClr>
+              <a:buSzPts val="1400"/>
+              <a:buFont typeface="Arial"/>
               <a:buNone/>
+              <a:tabLst/>
+              <a:defRPr/>
             </a:pPr>
-            <a:endParaRPr lang="en-US" altLang="zh-TW" dirty="0"/>
+            <a:r>
+              <a:rPr lang="en-US" altLang="zh-TW" dirty="0"/>
+              <a:t>HDMI </a:t>
+            </a:r>
+            <a:r>
+              <a:rPr lang="zh-TW" altLang="en-US" dirty="0"/>
+              <a:t>影格緩衝、</a:t>
+            </a:r>
+            <a:r>
+              <a:rPr lang="en-US" altLang="zh-TW" dirty="0"/>
+              <a:t>DDR3</a:t>
+            </a:r>
+            <a:r>
+              <a:rPr lang="zh-TW" altLang="en-US" dirty="0"/>
+              <a:t>／</a:t>
+            </a:r>
+            <a:r>
+              <a:rPr lang="en-US" altLang="zh-TW" dirty="0"/>
+              <a:t>AXI </a:t>
+            </a:r>
+            <a:r>
+              <a:rPr lang="zh-TW" altLang="en-US" dirty="0"/>
+              <a:t>記憶體整合、廠商 </a:t>
+            </a:r>
+            <a:r>
+              <a:rPr lang="en-US" altLang="zh-TW" dirty="0"/>
+              <a:t>PCIe IP </a:t>
+            </a:r>
+            <a:r>
+              <a:rPr lang="zh-TW" altLang="en-US" dirty="0"/>
+              <a:t>與 </a:t>
+            </a:r>
+            <a:r>
+              <a:rPr lang="en-US" altLang="zh-TW" dirty="0"/>
+              <a:t>PC </a:t>
+            </a:r>
+            <a:r>
+              <a:rPr lang="zh-TW" altLang="en-US" dirty="0"/>
+              <a:t>軟體介面的整體架構。</a:t>
+            </a:r>
+          </a:p>
+          <a:p>
+            <a:pPr marL="0" indent="0"/>
+            <a:endParaRPr lang="zh-TW" altLang="en-US" dirty="0"/>
           </a:p>
         </p:txBody>
       </p:sp>
       <p:sp>
         <p:nvSpPr>
-          <p:cNvPr id="1048643" name="投影片編號版面配置區 3"/>
+          <p:cNvPr id="4" name="投影片編號版面配置區 3">
+            <a:extLst>
+              <a:ext uri="{FF2B5EF4-FFF2-40B4-BE49-F238E27FC236}">
+                <a16:creationId xmlns:a16="http://schemas.microsoft.com/office/drawing/2014/main" id="{A81AD260-1FA1-46D2-EEFC-6CE390861C06}"/>
+              </a:ext>
+            </a:extLst>
+          </p:cNvPr>
           <p:cNvSpPr>
             <a:spLocks noGrp="1"/>
           </p:cNvSpPr>
           <p:nvPr>
-            <p:ph type="sldNum" sz="quarter" idx="5"/>
+            <p:ph type="sldNum" idx="12"/>
           </p:nvPr>
         </p:nvSpPr>
         <p:spPr/>
@@ -2489,18 +3173,238 @@
           <a:bodyPr/>
           <a:lstStyle/>
           <a:p>
-            <a:fld id="{F5753A29-9D77-4C26-8BEC-432FE5D4B0A4}" type="slidenum">
-              <a:rPr lang="en-US" altLang="zh-TW" smtClean="0"/>
+            <a:pPr marL="0" marR="0" lvl="0" indent="0" algn="r" rtl="0">
+              <a:spcBef>
+                <a:spcPts val="0"/>
+              </a:spcBef>
+              <a:spcAft>
+                <a:spcPts val="0"/>
+              </a:spcAft>
+              <a:buNone/>
+            </a:pPr>
+            <a:fld id="{00000000-1234-1234-1234-123412341234}" type="slidenum">
+              <a:rPr lang="en-US" sz="2000" b="0" i="0" u="none" strike="noStrike" cap="none" smtClean="0">
+                <a:solidFill>
+                  <a:schemeClr val="dk1"/>
+                </a:solidFill>
+                <a:latin typeface="Times New Roman"/>
+                <a:ea typeface="Times New Roman"/>
+                <a:cs typeface="Times New Roman"/>
+                <a:sym typeface="Times New Roman"/>
+              </a:rPr>
               <a:t>8</a:t>
             </a:fld>
-            <a:endParaRPr lang="en-US" altLang="zh-TW" dirty="0"/>
+            <a:endParaRPr lang="en-US" sz="2000" b="0" i="0" u="none" strike="noStrike" cap="none" dirty="0">
+              <a:solidFill>
+                <a:schemeClr val="dk1"/>
+              </a:solidFill>
+              <a:latin typeface="Times New Roman"/>
+              <a:ea typeface="Times New Roman"/>
+              <a:cs typeface="Times New Roman"/>
+              <a:sym typeface="Times New Roman"/>
+            </a:endParaRPr>
           </a:p>
         </p:txBody>
       </p:sp>
     </p:spTree>
     <p:extLst>
       <p:ext uri="{BB962C8B-B14F-4D97-AF65-F5344CB8AC3E}">
-        <p14:creationId xmlns:p14="http://schemas.microsoft.com/office/powerpoint/2010/main" val="1154148578"/>
+        <p14:creationId xmlns:p14="http://schemas.microsoft.com/office/powerpoint/2010/main" val="3022149497"/>
+      </p:ext>
+    </p:extLst>
+  </p:cSld>
+  <p:clrMapOvr>
+    <a:masterClrMapping/>
+  </p:clrMapOvr>
+</p:notes>
+</file>
+
+<file path=ppt/notesSlides/notesSlide9.xml><?xml version="1.0" encoding="utf-8"?>
+<p:notes xmlns:a="http://schemas.openxmlformats.org/drawingml/2006/main" xmlns:r="http://schemas.openxmlformats.org/officeDocument/2006/relationships" xmlns:p="http://schemas.openxmlformats.org/presentationml/2006/main">
+  <p:cSld>
+    <p:spTree>
+      <p:nvGrpSpPr>
+        <p:cNvPr id="1" name="">
+          <a:extLst>
+            <a:ext uri="{FF2B5EF4-FFF2-40B4-BE49-F238E27FC236}">
+              <a16:creationId xmlns:a16="http://schemas.microsoft.com/office/drawing/2014/main" id="{9A851A70-D7FF-B69E-2F1F-5276D7F44C59}"/>
+            </a:ext>
+          </a:extLst>
+        </p:cNvPr>
+        <p:cNvGrpSpPr/>
+        <p:nvPr/>
+      </p:nvGrpSpPr>
+      <p:grpSpPr>
+        <a:xfrm>
+          <a:off x="0" y="0"/>
+          <a:ext cx="0" cy="0"/>
+          <a:chOff x="0" y="0"/>
+          <a:chExt cx="0" cy="0"/>
+        </a:xfrm>
+      </p:grpSpPr>
+      <p:sp>
+        <p:nvSpPr>
+          <p:cNvPr id="2" name="投影片影像版面配置區 1">
+            <a:extLst>
+              <a:ext uri="{FF2B5EF4-FFF2-40B4-BE49-F238E27FC236}">
+                <a16:creationId xmlns:a16="http://schemas.microsoft.com/office/drawing/2014/main" id="{4FB2E1DE-40DE-B1BA-7135-64BFFB1631B9}"/>
+              </a:ext>
+            </a:extLst>
+          </p:cNvPr>
+          <p:cNvSpPr>
+            <a:spLocks noGrp="1" noRot="1" noChangeAspect="1"/>
+          </p:cNvSpPr>
+          <p:nvPr>
+            <p:ph type="sldImg"/>
+          </p:nvPr>
+        </p:nvSpPr>
+        <p:spPr/>
+      </p:sp>
+      <p:sp>
+        <p:nvSpPr>
+          <p:cNvPr id="3" name="備忘稿版面配置區 2">
+            <a:extLst>
+              <a:ext uri="{FF2B5EF4-FFF2-40B4-BE49-F238E27FC236}">
+                <a16:creationId xmlns:a16="http://schemas.microsoft.com/office/drawing/2014/main" id="{C4F8DB8E-F5F1-21EB-D41F-2C635FB715D5}"/>
+              </a:ext>
+            </a:extLst>
+          </p:cNvPr>
+          <p:cNvSpPr>
+            <a:spLocks noGrp="1"/>
+          </p:cNvSpPr>
+          <p:nvPr>
+            <p:ph type="body" idx="1"/>
+          </p:nvPr>
+        </p:nvSpPr>
+        <p:spPr/>
+        <p:txBody>
+          <a:bodyPr/>
+          <a:lstStyle/>
+          <a:p>
+            <a:pPr marL="0" marR="0" lvl="0" indent="0" algn="l" defTabSz="914400" rtl="0" eaLnBrk="1" fontAlgn="auto" latinLnBrk="0" hangingPunct="1">
+              <a:lnSpc>
+                <a:spcPct val="100000"/>
+              </a:lnSpc>
+              <a:spcBef>
+                <a:spcPts val="360"/>
+              </a:spcBef>
+              <a:spcAft>
+                <a:spcPts val="0"/>
+              </a:spcAft>
+              <a:buClr>
+                <a:srgbClr val="000000"/>
+              </a:buClr>
+              <a:buSzPts val="1400"/>
+              <a:buFont typeface="Arial"/>
+              <a:buNone/>
+              <a:tabLst/>
+              <a:defRPr/>
+            </a:pPr>
+            <a:r>
+              <a:rPr lang="en-US" altLang="zh-TW" dirty="0"/>
+              <a:t>HDMI </a:t>
+            </a:r>
+            <a:r>
+              <a:rPr lang="zh-TW" altLang="en-US" dirty="0"/>
+              <a:t>影格緩衝、</a:t>
+            </a:r>
+            <a:r>
+              <a:rPr lang="en-US" altLang="zh-TW" dirty="0"/>
+              <a:t>DDR3</a:t>
+            </a:r>
+            <a:r>
+              <a:rPr lang="zh-TW" altLang="en-US" dirty="0"/>
+              <a:t>／</a:t>
+            </a:r>
+            <a:r>
+              <a:rPr lang="en-US" altLang="zh-TW" dirty="0"/>
+              <a:t>AXI </a:t>
+            </a:r>
+            <a:r>
+              <a:rPr lang="zh-TW" altLang="en-US" dirty="0"/>
+              <a:t>記憶體整合、廠商 </a:t>
+            </a:r>
+            <a:r>
+              <a:rPr lang="en-US" altLang="zh-TW" dirty="0"/>
+              <a:t>PCIe IP </a:t>
+            </a:r>
+            <a:r>
+              <a:rPr lang="zh-TW" altLang="en-US" dirty="0"/>
+              <a:t>與 </a:t>
+            </a:r>
+            <a:r>
+              <a:rPr lang="en-US" altLang="zh-TW" dirty="0"/>
+              <a:t>PC </a:t>
+            </a:r>
+            <a:r>
+              <a:rPr lang="zh-TW" altLang="en-US" dirty="0"/>
+              <a:t>軟體介面的整體架構。</a:t>
+            </a:r>
+          </a:p>
+          <a:p>
+            <a:pPr marL="0" indent="0"/>
+            <a:endParaRPr lang="zh-TW" altLang="en-US" dirty="0"/>
+          </a:p>
+        </p:txBody>
+      </p:sp>
+      <p:sp>
+        <p:nvSpPr>
+          <p:cNvPr id="4" name="投影片編號版面配置區 3">
+            <a:extLst>
+              <a:ext uri="{FF2B5EF4-FFF2-40B4-BE49-F238E27FC236}">
+                <a16:creationId xmlns:a16="http://schemas.microsoft.com/office/drawing/2014/main" id="{A81AD260-1FA1-46D2-EEFC-6CE390861C06}"/>
+              </a:ext>
+            </a:extLst>
+          </p:cNvPr>
+          <p:cNvSpPr>
+            <a:spLocks noGrp="1"/>
+          </p:cNvSpPr>
+          <p:nvPr>
+            <p:ph type="sldNum" idx="12"/>
+          </p:nvPr>
+        </p:nvSpPr>
+        <p:spPr/>
+        <p:txBody>
+          <a:bodyPr/>
+          <a:lstStyle/>
+          <a:p>
+            <a:pPr marL="0" marR="0" lvl="0" indent="0" algn="r" rtl="0">
+              <a:spcBef>
+                <a:spcPts val="0"/>
+              </a:spcBef>
+              <a:spcAft>
+                <a:spcPts val="0"/>
+              </a:spcAft>
+              <a:buNone/>
+            </a:pPr>
+            <a:fld id="{00000000-1234-1234-1234-123412341234}" type="slidenum">
+              <a:rPr lang="en-US" sz="2000" b="0" i="0" u="none" strike="noStrike" cap="none" smtClean="0">
+                <a:solidFill>
+                  <a:schemeClr val="dk1"/>
+                </a:solidFill>
+                <a:latin typeface="Times New Roman"/>
+                <a:ea typeface="Times New Roman"/>
+                <a:cs typeface="Times New Roman"/>
+                <a:sym typeface="Times New Roman"/>
+              </a:rPr>
+              <a:t>9</a:t>
+            </a:fld>
+            <a:endParaRPr lang="en-US" sz="2000" b="0" i="0" u="none" strike="noStrike" cap="none" dirty="0">
+              <a:solidFill>
+                <a:schemeClr val="dk1"/>
+              </a:solidFill>
+              <a:latin typeface="Times New Roman"/>
+              <a:ea typeface="Times New Roman"/>
+              <a:cs typeface="Times New Roman"/>
+              <a:sym typeface="Times New Roman"/>
+            </a:endParaRPr>
+          </a:p>
+        </p:txBody>
+      </p:sp>
+    </p:spTree>
+    <p:extLst>
+      <p:ext uri="{BB962C8B-B14F-4D97-AF65-F5344CB8AC3E}">
+        <p14:creationId xmlns:p14="http://schemas.microsoft.com/office/powerpoint/2010/main" val="530770412"/>
       </p:ext>
     </p:extLst>
   </p:cSld>
@@ -7480,6 +8384,1374 @@
         </p:txBody>
       </p:sp>
     </p:spTree>
+  </p:cSld>
+  <p:clrMapOvr>
+    <a:masterClrMapping/>
+  </p:clrMapOvr>
+</p:sld>
+</file>
+
+<file path=ppt/slides/slide10.xml><?xml version="1.0" encoding="utf-8"?>
+<p:sld xmlns:a="http://schemas.openxmlformats.org/drawingml/2006/main" xmlns:r="http://schemas.openxmlformats.org/officeDocument/2006/relationships" xmlns:p="http://schemas.openxmlformats.org/presentationml/2006/main">
+  <p:cSld>
+    <p:spTree>
+      <p:nvGrpSpPr>
+        <p:cNvPr id="1" name="">
+          <a:extLst>
+            <a:ext uri="{FF2B5EF4-FFF2-40B4-BE49-F238E27FC236}">
+              <a16:creationId xmlns:a16="http://schemas.microsoft.com/office/drawing/2014/main" id="{C25E9AAA-7E36-1E17-83F9-FD3A18A28BE9}"/>
+            </a:ext>
+          </a:extLst>
+        </p:cNvPr>
+        <p:cNvGrpSpPr/>
+        <p:nvPr/>
+      </p:nvGrpSpPr>
+      <p:grpSpPr>
+        <a:xfrm>
+          <a:off x="0" y="0"/>
+          <a:ext cx="0" cy="0"/>
+          <a:chOff x="0" y="0"/>
+          <a:chExt cx="0" cy="0"/>
+        </a:xfrm>
+      </p:grpSpPr>
+      <p:sp>
+        <p:nvSpPr>
+          <p:cNvPr id="15" name="標題 1">
+            <a:extLst>
+              <a:ext uri="{FF2B5EF4-FFF2-40B4-BE49-F238E27FC236}">
+                <a16:creationId xmlns:a16="http://schemas.microsoft.com/office/drawing/2014/main" id="{142C8726-E890-9988-40FC-8984FDA21FEE}"/>
+              </a:ext>
+            </a:extLst>
+          </p:cNvPr>
+          <p:cNvSpPr>
+            <a:spLocks noGrp="1"/>
+          </p:cNvSpPr>
+          <p:nvPr>
+            <p:ph type="title"/>
+          </p:nvPr>
+        </p:nvSpPr>
+        <p:spPr>
+          <a:xfrm>
+            <a:off x="609602" y="609600"/>
+            <a:ext cx="8077200" cy="533400"/>
+          </a:xfrm>
+          <a:ln>
+            <a:noFill/>
+          </a:ln>
+        </p:spPr>
+        <p:txBody>
+          <a:bodyPr/>
+          <a:lstStyle/>
+          <a:p>
+            <a:pPr algn="l" fontAlgn="t"/>
+            <a:r>
+              <a:rPr lang="zh-TW" altLang="en-US" dirty="0">
+                <a:latin typeface="Times New Roman" panose="02020603050405020304" pitchFamily="18" charset="0"/>
+                <a:ea typeface="標楷體" panose="03000509000000000000" pitchFamily="65" charset="-120"/>
+                <a:cs typeface="Times New Roman" panose="02020603050405020304" pitchFamily="18" charset="0"/>
+              </a:rPr>
+              <a:t>本次進度</a:t>
+            </a:r>
+            <a:r>
+              <a:rPr lang="en-US" altLang="zh-TW" dirty="0">
+                <a:latin typeface="Times New Roman" panose="02020603050405020304" pitchFamily="18" charset="0"/>
+                <a:ea typeface="標楷體" panose="03000509000000000000" pitchFamily="65" charset="-120"/>
+                <a:cs typeface="Times New Roman" panose="02020603050405020304" pitchFamily="18" charset="0"/>
+              </a:rPr>
+              <a:t>: AX7103 — HDMI to PCIe</a:t>
+            </a:r>
+            <a:endParaRPr lang="zh-TW" altLang="en-US" dirty="0">
+              <a:latin typeface="Times New Roman" panose="02020603050405020304" pitchFamily="18" charset="0"/>
+              <a:ea typeface="標楷體" panose="03000509000000000000" pitchFamily="65" charset="-120"/>
+              <a:cs typeface="Times New Roman" panose="02020603050405020304" pitchFamily="18" charset="0"/>
+            </a:endParaRPr>
+          </a:p>
+        </p:txBody>
+      </p:sp>
+      <p:sp>
+        <p:nvSpPr>
+          <p:cNvPr id="2" name="文字版面配置區 6">
+            <a:extLst>
+              <a:ext uri="{FF2B5EF4-FFF2-40B4-BE49-F238E27FC236}">
+                <a16:creationId xmlns:a16="http://schemas.microsoft.com/office/drawing/2014/main" id="{D929304B-5341-8BBF-E71F-AF5F2FE7268A}"/>
+              </a:ext>
+            </a:extLst>
+          </p:cNvPr>
+          <p:cNvSpPr txBox="1"/>
+          <p:nvPr/>
+        </p:nvSpPr>
+        <p:spPr>
+          <a:xfrm>
+            <a:off x="609602" y="935857"/>
+            <a:ext cx="8686796" cy="4700685"/>
+          </a:xfrm>
+          <a:prstGeom prst="rect">
+            <a:avLst/>
+          </a:prstGeom>
+          <a:noFill/>
+          <a:ln>
+            <a:noFill/>
+          </a:ln>
+        </p:spPr>
+        <p:txBody>
+          <a:bodyPr spcFirstLastPara="1" wrap="square" lIns="91425" tIns="45700" rIns="91425" bIns="45700" anchor="t" anchorCtr="0">
+            <a:noAutofit/>
+          </a:bodyPr>
+          <a:lstStyle>
+            <a:defPPr marR="0" lvl="0" algn="l" rtl="0">
+              <a:lnSpc>
+                <a:spcPct val="100000"/>
+              </a:lnSpc>
+              <a:spcBef>
+                <a:spcPts val="0"/>
+              </a:spcBef>
+              <a:spcAft>
+                <a:spcPts val="0"/>
+              </a:spcAft>
+            </a:defPPr>
+            <a:lvl1pPr marL="457200" marR="0" lvl="0" indent="-406400" algn="l" rtl="0">
+              <a:lnSpc>
+                <a:spcPct val="100000"/>
+              </a:lnSpc>
+              <a:spcBef>
+                <a:spcPts val="560"/>
+              </a:spcBef>
+              <a:spcAft>
+                <a:spcPts val="0"/>
+              </a:spcAft>
+              <a:buClr>
+                <a:schemeClr val="accent2"/>
+              </a:buClr>
+              <a:buSzPts val="2800"/>
+              <a:buFont typeface="Noto Sans Symbols"/>
+              <a:buChar char="❖"/>
+              <a:defRPr sz="2800" b="0" i="0" u="none" strike="noStrike" cap="none">
+                <a:solidFill>
+                  <a:schemeClr val="dk1"/>
+                </a:solidFill>
+                <a:latin typeface="Times New Roman"/>
+                <a:ea typeface="Times New Roman"/>
+                <a:cs typeface="Times New Roman"/>
+                <a:sym typeface="Times New Roman"/>
+              </a:defRPr>
+            </a:lvl1pPr>
+            <a:lvl2pPr marL="914400" marR="0" lvl="1" indent="-381000" algn="l" rtl="0">
+              <a:lnSpc>
+                <a:spcPct val="100000"/>
+              </a:lnSpc>
+              <a:spcBef>
+                <a:spcPts val="480"/>
+              </a:spcBef>
+              <a:spcAft>
+                <a:spcPts val="0"/>
+              </a:spcAft>
+              <a:buClr>
+                <a:srgbClr val="FF5050"/>
+              </a:buClr>
+              <a:buSzPts val="2400"/>
+              <a:buFont typeface="Noto Sans Symbols"/>
+              <a:buChar char="▪"/>
+              <a:defRPr sz="2400" b="0" i="0" u="none" strike="noStrike" cap="none">
+                <a:solidFill>
+                  <a:schemeClr val="dk1"/>
+                </a:solidFill>
+                <a:latin typeface="Times New Roman"/>
+                <a:ea typeface="Times New Roman"/>
+                <a:cs typeface="Times New Roman"/>
+                <a:sym typeface="Times New Roman"/>
+              </a:defRPr>
+            </a:lvl2pPr>
+            <a:lvl3pPr marL="1371600" marR="0" lvl="2" indent="-355600" algn="l" rtl="0">
+              <a:lnSpc>
+                <a:spcPct val="100000"/>
+              </a:lnSpc>
+              <a:spcBef>
+                <a:spcPts val="400"/>
+              </a:spcBef>
+              <a:spcAft>
+                <a:spcPts val="0"/>
+              </a:spcAft>
+              <a:buClr>
+                <a:srgbClr val="6699FF"/>
+              </a:buClr>
+              <a:buSzPts val="2000"/>
+              <a:buFont typeface="Times New Roman"/>
+              <a:buChar char="•"/>
+              <a:defRPr sz="2000" b="0" i="0" u="none" strike="noStrike" cap="none">
+                <a:solidFill>
+                  <a:schemeClr val="dk1"/>
+                </a:solidFill>
+                <a:latin typeface="Times New Roman"/>
+                <a:ea typeface="Times New Roman"/>
+                <a:cs typeface="Times New Roman"/>
+                <a:sym typeface="Times New Roman"/>
+              </a:defRPr>
+            </a:lvl3pPr>
+            <a:lvl4pPr marL="1828800" marR="0" lvl="3" indent="-355600" algn="l" rtl="0">
+              <a:lnSpc>
+                <a:spcPct val="100000"/>
+              </a:lnSpc>
+              <a:spcBef>
+                <a:spcPts val="400"/>
+              </a:spcBef>
+              <a:spcAft>
+                <a:spcPts val="0"/>
+              </a:spcAft>
+              <a:buClr>
+                <a:srgbClr val="FF5050"/>
+              </a:buClr>
+              <a:buSzPts val="2000"/>
+              <a:buFont typeface="Times New Roman"/>
+              <a:buChar char="o"/>
+              <a:defRPr sz="2000" b="0" i="0" u="none" strike="noStrike" cap="none">
+                <a:solidFill>
+                  <a:schemeClr val="dk1"/>
+                </a:solidFill>
+                <a:latin typeface="Times New Roman"/>
+                <a:ea typeface="Times New Roman"/>
+                <a:cs typeface="Times New Roman"/>
+                <a:sym typeface="Times New Roman"/>
+              </a:defRPr>
+            </a:lvl4pPr>
+            <a:lvl5pPr marL="2286000" marR="0" lvl="4" indent="-355600" algn="l" rtl="0">
+              <a:lnSpc>
+                <a:spcPct val="100000"/>
+              </a:lnSpc>
+              <a:spcBef>
+                <a:spcPts val="400"/>
+              </a:spcBef>
+              <a:spcAft>
+                <a:spcPts val="0"/>
+              </a:spcAft>
+              <a:buClr>
+                <a:srgbClr val="FF5050"/>
+              </a:buClr>
+              <a:buSzPts val="2000"/>
+              <a:buFont typeface="Times New Roman"/>
+              <a:buChar char="o"/>
+              <a:defRPr sz="2000" b="0" i="0" u="none" strike="noStrike" cap="none">
+                <a:solidFill>
+                  <a:schemeClr val="dk1"/>
+                </a:solidFill>
+                <a:latin typeface="Times New Roman"/>
+                <a:ea typeface="Times New Roman"/>
+                <a:cs typeface="Times New Roman"/>
+                <a:sym typeface="Times New Roman"/>
+              </a:defRPr>
+            </a:lvl5pPr>
+            <a:lvl6pPr marL="2743200" marR="0" lvl="5" indent="-355600" algn="l" rtl="0">
+              <a:lnSpc>
+                <a:spcPct val="100000"/>
+              </a:lnSpc>
+              <a:spcBef>
+                <a:spcPts val="400"/>
+              </a:spcBef>
+              <a:spcAft>
+                <a:spcPts val="0"/>
+              </a:spcAft>
+              <a:buClr>
+                <a:srgbClr val="FF5050"/>
+              </a:buClr>
+              <a:buSzPts val="2000"/>
+              <a:buFont typeface="Times New Roman"/>
+              <a:buChar char="o"/>
+              <a:defRPr sz="2000" b="0" i="0" u="none" strike="noStrike" cap="none">
+                <a:solidFill>
+                  <a:schemeClr val="dk1"/>
+                </a:solidFill>
+                <a:latin typeface="Times New Roman"/>
+                <a:ea typeface="Times New Roman"/>
+                <a:cs typeface="Times New Roman"/>
+                <a:sym typeface="Times New Roman"/>
+              </a:defRPr>
+            </a:lvl6pPr>
+            <a:lvl7pPr marL="3200400" marR="0" lvl="6" indent="-355600" algn="l" rtl="0">
+              <a:lnSpc>
+                <a:spcPct val="100000"/>
+              </a:lnSpc>
+              <a:spcBef>
+                <a:spcPts val="400"/>
+              </a:spcBef>
+              <a:spcAft>
+                <a:spcPts val="0"/>
+              </a:spcAft>
+              <a:buClr>
+                <a:srgbClr val="FF5050"/>
+              </a:buClr>
+              <a:buSzPts val="2000"/>
+              <a:buFont typeface="Times New Roman"/>
+              <a:buChar char="o"/>
+              <a:defRPr sz="2000" b="0" i="0" u="none" strike="noStrike" cap="none">
+                <a:solidFill>
+                  <a:schemeClr val="dk1"/>
+                </a:solidFill>
+                <a:latin typeface="Times New Roman"/>
+                <a:ea typeface="Times New Roman"/>
+                <a:cs typeface="Times New Roman"/>
+                <a:sym typeface="Times New Roman"/>
+              </a:defRPr>
+            </a:lvl7pPr>
+            <a:lvl8pPr marL="3657600" marR="0" lvl="7" indent="-355600" algn="l" rtl="0">
+              <a:lnSpc>
+                <a:spcPct val="100000"/>
+              </a:lnSpc>
+              <a:spcBef>
+                <a:spcPts val="400"/>
+              </a:spcBef>
+              <a:spcAft>
+                <a:spcPts val="0"/>
+              </a:spcAft>
+              <a:buClr>
+                <a:srgbClr val="FF5050"/>
+              </a:buClr>
+              <a:buSzPts val="2000"/>
+              <a:buFont typeface="Times New Roman"/>
+              <a:buChar char="o"/>
+              <a:defRPr sz="2000" b="0" i="0" u="none" strike="noStrike" cap="none">
+                <a:solidFill>
+                  <a:schemeClr val="dk1"/>
+                </a:solidFill>
+                <a:latin typeface="Times New Roman"/>
+                <a:ea typeface="Times New Roman"/>
+                <a:cs typeface="Times New Roman"/>
+                <a:sym typeface="Times New Roman"/>
+              </a:defRPr>
+            </a:lvl8pPr>
+            <a:lvl9pPr marL="4114800" marR="0" lvl="8" indent="-355600" algn="l" rtl="0">
+              <a:lnSpc>
+                <a:spcPct val="100000"/>
+              </a:lnSpc>
+              <a:spcBef>
+                <a:spcPts val="400"/>
+              </a:spcBef>
+              <a:spcAft>
+                <a:spcPts val="0"/>
+              </a:spcAft>
+              <a:buClr>
+                <a:srgbClr val="FF5050"/>
+              </a:buClr>
+              <a:buSzPts val="2000"/>
+              <a:buFont typeface="Times New Roman"/>
+              <a:buChar char="o"/>
+              <a:defRPr sz="2000" b="0" i="0" u="none" strike="noStrike" cap="none">
+                <a:solidFill>
+                  <a:schemeClr val="dk1"/>
+                </a:solidFill>
+                <a:latin typeface="Times New Roman"/>
+                <a:ea typeface="Times New Roman"/>
+                <a:cs typeface="Times New Roman"/>
+                <a:sym typeface="Times New Roman"/>
+              </a:defRPr>
+            </a:lvl9pPr>
+          </a:lstStyle>
+          <a:p>
+            <a:pPr>
+              <a:lnSpc>
+                <a:spcPct val="150000"/>
+              </a:lnSpc>
+            </a:pPr>
+            <a:r>
+              <a:rPr lang="zh-TW" altLang="en-US" sz="2000" dirty="0">
+                <a:solidFill>
+                  <a:schemeClr val="tx1"/>
+                </a:solidFill>
+                <a:latin typeface="Times New Roman" panose="02020603050405020304" pitchFamily="18" charset="0"/>
+                <a:ea typeface="標楷體" panose="03000509000000000000" pitchFamily="65" charset="-120"/>
+                <a:cs typeface="Times New Roman" panose="02020603050405020304" pitchFamily="18" charset="0"/>
+              </a:rPr>
+              <a:t>定位</a:t>
+            </a:r>
+            <a:endParaRPr lang="en-US" altLang="zh-TW" sz="2000" dirty="0">
+              <a:solidFill>
+                <a:schemeClr val="tx1"/>
+              </a:solidFill>
+              <a:latin typeface="Times New Roman" panose="02020603050405020304" pitchFamily="18" charset="0"/>
+              <a:ea typeface="標楷體" panose="03000509000000000000" pitchFamily="65" charset="-120"/>
+              <a:cs typeface="Times New Roman" panose="02020603050405020304" pitchFamily="18" charset="0"/>
+            </a:endParaRPr>
+          </a:p>
+          <a:p>
+            <a:pPr lvl="1">
+              <a:lnSpc>
+                <a:spcPts val="3000"/>
+              </a:lnSpc>
+            </a:pPr>
+            <a:r>
+              <a:rPr lang="zh-TW" altLang="en-US" sz="1600" dirty="0">
+                <a:latin typeface="Times New Roman" panose="02020603050405020304" pitchFamily="18" charset="0"/>
+                <a:ea typeface="標楷體" panose="03000509000000000000" pitchFamily="65" charset="-120"/>
+                <a:cs typeface="Times New Roman" panose="02020603050405020304" pitchFamily="18" charset="0"/>
+              </a:rPr>
+              <a:t>整合 </a:t>
+            </a:r>
+            <a:r>
+              <a:rPr lang="en-US" altLang="zh-TW" sz="1600" dirty="0">
+                <a:latin typeface="Times New Roman" panose="02020603050405020304" pitchFamily="18" charset="0"/>
+                <a:ea typeface="標楷體" panose="03000509000000000000" pitchFamily="65" charset="-120"/>
+                <a:cs typeface="Times New Roman" panose="02020603050405020304" pitchFamily="18" charset="0"/>
+              </a:rPr>
+              <a:t>HDMI </a:t>
+            </a:r>
+            <a:r>
+              <a:rPr lang="zh-TW" altLang="en-US" sz="1600" dirty="0">
+                <a:latin typeface="Times New Roman" panose="02020603050405020304" pitchFamily="18" charset="0"/>
+                <a:ea typeface="標楷體" panose="03000509000000000000" pitchFamily="65" charset="-120"/>
+                <a:cs typeface="Times New Roman" panose="02020603050405020304" pitchFamily="18" charset="0"/>
+              </a:rPr>
+              <a:t>影像處理、</a:t>
+            </a:r>
+            <a:r>
+              <a:rPr lang="en-US" altLang="zh-TW" sz="1600" dirty="0">
+                <a:latin typeface="Times New Roman" panose="02020603050405020304" pitchFamily="18" charset="0"/>
+                <a:ea typeface="標楷體" panose="03000509000000000000" pitchFamily="65" charset="-120"/>
+                <a:cs typeface="Times New Roman" panose="02020603050405020304" pitchFamily="18" charset="0"/>
+              </a:rPr>
+              <a:t>DDR3 </a:t>
+            </a:r>
+            <a:r>
+              <a:rPr lang="zh-TW" altLang="en-US" sz="1600" dirty="0">
+                <a:latin typeface="Times New Roman" panose="02020603050405020304" pitchFamily="18" charset="0"/>
+                <a:ea typeface="標楷體" panose="03000509000000000000" pitchFamily="65" charset="-120"/>
+                <a:cs typeface="Times New Roman" panose="02020603050405020304" pitchFamily="18" charset="0"/>
+              </a:rPr>
+              <a:t>影格緩衝與 </a:t>
+            </a:r>
+            <a:r>
+              <a:rPr lang="en-US" altLang="zh-TW" sz="1600" dirty="0">
+                <a:latin typeface="Times New Roman" panose="02020603050405020304" pitchFamily="18" charset="0"/>
+                <a:ea typeface="標楷體" panose="03000509000000000000" pitchFamily="65" charset="-120"/>
+                <a:cs typeface="Times New Roman" panose="02020603050405020304" pitchFamily="18" charset="0"/>
+              </a:rPr>
+              <a:t>PCIe</a:t>
+            </a:r>
+            <a:r>
+              <a:rPr lang="zh-TW" altLang="en-US" sz="1600" dirty="0">
+                <a:latin typeface="Times New Roman" panose="02020603050405020304" pitchFamily="18" charset="0"/>
+                <a:ea typeface="標楷體" panose="03000509000000000000" pitchFamily="65" charset="-120"/>
+                <a:cs typeface="Times New Roman" panose="02020603050405020304" pitchFamily="18" charset="0"/>
+              </a:rPr>
+              <a:t>，並提供 </a:t>
+            </a:r>
+            <a:r>
+              <a:rPr lang="en-US" altLang="zh-TW" sz="1600" dirty="0">
+                <a:latin typeface="Times New Roman" panose="02020603050405020304" pitchFamily="18" charset="0"/>
+                <a:ea typeface="標楷體" panose="03000509000000000000" pitchFamily="65" charset="-120"/>
+                <a:cs typeface="Times New Roman" panose="02020603050405020304" pitchFamily="18" charset="0"/>
+              </a:rPr>
+              <a:t>Windows </a:t>
+            </a:r>
+            <a:r>
+              <a:rPr lang="zh-TW" altLang="en-US" sz="1600" dirty="0">
+                <a:latin typeface="Times New Roman" panose="02020603050405020304" pitchFamily="18" charset="0"/>
+                <a:ea typeface="標楷體" panose="03000509000000000000" pitchFamily="65" charset="-120"/>
+                <a:cs typeface="Times New Roman" panose="02020603050405020304" pitchFamily="18" charset="0"/>
+              </a:rPr>
+              <a:t>端影格讀取程式</a:t>
+            </a:r>
+          </a:p>
+          <a:p>
+            <a:pPr lvl="1">
+              <a:lnSpc>
+                <a:spcPts val="3000"/>
+              </a:lnSpc>
+            </a:pPr>
+            <a:endParaRPr lang="en-US" altLang="zh-TW" sz="1600" dirty="0">
+              <a:solidFill>
+                <a:schemeClr val="tx1"/>
+              </a:solidFill>
+              <a:latin typeface="Times New Roman" panose="02020603050405020304" pitchFamily="18" charset="0"/>
+              <a:ea typeface="標楷體" panose="03000509000000000000" pitchFamily="65" charset="-120"/>
+              <a:cs typeface="Times New Roman" panose="02020603050405020304" pitchFamily="18" charset="0"/>
+            </a:endParaRPr>
+          </a:p>
+        </p:txBody>
+      </p:sp>
+    </p:spTree>
+    <p:extLst>
+      <p:ext uri="{BB962C8B-B14F-4D97-AF65-F5344CB8AC3E}">
+        <p14:creationId xmlns:p14="http://schemas.microsoft.com/office/powerpoint/2010/main" val="2172022747"/>
+      </p:ext>
+    </p:extLst>
+  </p:cSld>
+  <p:clrMapOvr>
+    <a:masterClrMapping/>
+  </p:clrMapOvr>
+</p:sld>
+</file>
+
+<file path=ppt/slides/slide11.xml><?xml version="1.0" encoding="utf-8"?>
+<p:sld xmlns:a="http://schemas.openxmlformats.org/drawingml/2006/main" xmlns:r="http://schemas.openxmlformats.org/officeDocument/2006/relationships" xmlns:p="http://schemas.openxmlformats.org/presentationml/2006/main">
+  <p:cSld>
+    <p:spTree>
+      <p:nvGrpSpPr>
+        <p:cNvPr id="1" name=""/>
+        <p:cNvGrpSpPr/>
+        <p:nvPr/>
+      </p:nvGrpSpPr>
+      <p:grpSpPr>
+        <a:xfrm>
+          <a:off x="0" y="0"/>
+          <a:ext cx="0" cy="0"/>
+          <a:chOff x="0" y="0"/>
+          <a:chExt cx="0" cy="0"/>
+        </a:xfrm>
+      </p:grpSpPr>
+      <p:pic>
+        <p:nvPicPr>
+          <p:cNvPr id="2097164" name="圖片 6"/>
+          <p:cNvPicPr>
+            <a:picLocks noChangeAspect="1"/>
+          </p:cNvPicPr>
+          <p:nvPr/>
+        </p:nvPicPr>
+        <p:blipFill>
+          <a:blip r:embed="rId3"/>
+          <a:srcRect/>
+          <a:stretch>
+            <a:fillRect/>
+          </a:stretch>
+        </p:blipFill>
+        <p:spPr bwMode="auto">
+          <a:xfrm>
+            <a:off x="3357746" y="3004771"/>
+            <a:ext cx="5556738" cy="848458"/>
+          </a:xfrm>
+          <a:prstGeom prst="rect">
+            <a:avLst/>
+          </a:prstGeom>
+          <a:effectLst>
+            <a:outerShdw blurRad="50800" dist="38100" dir="5400000" algn="t" rotWithShape="0">
+              <a:prstClr val="black">
+                <a:alpha val="40000"/>
+              </a:prstClr>
+            </a:outerShdw>
+          </a:effectLst>
+        </p:spPr>
+      </p:pic>
+      <p:pic>
+        <p:nvPicPr>
+          <p:cNvPr id="2097165" name="Picture 2" descr="http://www.secretariat.ntust.edu.tw/ezfiles/20/1020/img/1688/09.png"/>
+          <p:cNvPicPr>
+            <a:picLocks noChangeAspect="1" noChangeArrowheads="1"/>
+          </p:cNvPicPr>
+          <p:nvPr/>
+        </p:nvPicPr>
+        <p:blipFill>
+          <a:blip r:embed="rId4" cstate="print"/>
+          <a:srcRect/>
+          <a:stretch>
+            <a:fillRect/>
+          </a:stretch>
+        </p:blipFill>
+        <p:spPr bwMode="auto">
+          <a:xfrm>
+            <a:off x="964866" y="1628181"/>
+            <a:ext cx="6260123" cy="1186962"/>
+          </a:xfrm>
+          <a:prstGeom prst="rect">
+            <a:avLst/>
+          </a:prstGeom>
+          <a:noFill/>
+          <a:ln>
+            <a:noFill/>
+          </a:ln>
+          <a:effectLst>
+            <a:outerShdw blurRad="63500" sx="102000" sy="102000" algn="ctr" rotWithShape="0">
+              <a:prstClr val="black">
+                <a:alpha val="40000"/>
+              </a:prstClr>
+            </a:outerShdw>
+          </a:effectLst>
+        </p:spPr>
+      </p:pic>
+      <p:pic>
+        <p:nvPicPr>
+          <p:cNvPr id="2097166" name="圖片 7"/>
+          <p:cNvPicPr>
+            <a:picLocks noChangeAspect="1"/>
+          </p:cNvPicPr>
+          <p:nvPr/>
+        </p:nvPicPr>
+        <p:blipFill>
+          <a:blip r:embed="rId5"/>
+          <a:stretch>
+            <a:fillRect/>
+          </a:stretch>
+        </p:blipFill>
+        <p:spPr>
+          <a:xfrm>
+            <a:off x="2493650" y="4226628"/>
+            <a:ext cx="4266522" cy="930565"/>
+          </a:xfrm>
+          <a:prstGeom prst="rect">
+            <a:avLst/>
+          </a:prstGeom>
+        </p:spPr>
+      </p:pic>
+    </p:spTree>
+  </p:cSld>
+  <p:clrMapOvr>
+    <a:masterClrMapping/>
+  </p:clrMapOvr>
+</p:sld>
+</file>
+
+<file path=ppt/slides/slide12.xml><?xml version="1.0" encoding="utf-8"?>
+<p:sld xmlns:a="http://schemas.openxmlformats.org/drawingml/2006/main" xmlns:r="http://schemas.openxmlformats.org/officeDocument/2006/relationships" xmlns:p="http://schemas.openxmlformats.org/presentationml/2006/main" show="0">
+  <p:cSld>
+    <p:spTree>
+      <p:nvGrpSpPr>
+        <p:cNvPr id="1" name="">
+          <a:extLst>
+            <a:ext uri="{FF2B5EF4-FFF2-40B4-BE49-F238E27FC236}">
+              <a16:creationId xmlns:a16="http://schemas.microsoft.com/office/drawing/2014/main" id="{C25E9AAA-7E36-1E17-83F9-FD3A18A28BE9}"/>
+            </a:ext>
+          </a:extLst>
+        </p:cNvPr>
+        <p:cNvGrpSpPr/>
+        <p:nvPr/>
+      </p:nvGrpSpPr>
+      <p:grpSpPr>
+        <a:xfrm>
+          <a:off x="0" y="0"/>
+          <a:ext cx="0" cy="0"/>
+          <a:chOff x="0" y="0"/>
+          <a:chExt cx="0" cy="0"/>
+        </a:xfrm>
+      </p:grpSpPr>
+      <p:sp>
+        <p:nvSpPr>
+          <p:cNvPr id="15" name="標題 1">
+            <a:extLst>
+              <a:ext uri="{FF2B5EF4-FFF2-40B4-BE49-F238E27FC236}">
+                <a16:creationId xmlns:a16="http://schemas.microsoft.com/office/drawing/2014/main" id="{142C8726-E890-9988-40FC-8984FDA21FEE}"/>
+              </a:ext>
+            </a:extLst>
+          </p:cNvPr>
+          <p:cNvSpPr>
+            <a:spLocks noGrp="1"/>
+          </p:cNvSpPr>
+          <p:nvPr>
+            <p:ph type="title"/>
+          </p:nvPr>
+        </p:nvSpPr>
+        <p:spPr>
+          <a:xfrm>
+            <a:off x="609602" y="609600"/>
+            <a:ext cx="8077200" cy="533400"/>
+          </a:xfrm>
+          <a:ln>
+            <a:noFill/>
+          </a:ln>
+        </p:spPr>
+        <p:txBody>
+          <a:bodyPr/>
+          <a:lstStyle/>
+          <a:p>
+            <a:pPr algn="l" fontAlgn="t"/>
+            <a:r>
+              <a:rPr lang="zh-TW" altLang="en-US" dirty="0">
+                <a:latin typeface="Times New Roman" panose="02020603050405020304" pitchFamily="18" charset="0"/>
+                <a:ea typeface="標楷體" panose="03000509000000000000" pitchFamily="65" charset="-120"/>
+                <a:cs typeface="Times New Roman" panose="02020603050405020304" pitchFamily="18" charset="0"/>
+              </a:rPr>
+              <a:t>本次進度</a:t>
+            </a:r>
+            <a:r>
+              <a:rPr lang="en-US" altLang="zh-TW" dirty="0">
+                <a:latin typeface="Times New Roman" panose="02020603050405020304" pitchFamily="18" charset="0"/>
+                <a:ea typeface="標楷體" panose="03000509000000000000" pitchFamily="65" charset="-120"/>
+                <a:cs typeface="Times New Roman" panose="02020603050405020304" pitchFamily="18" charset="0"/>
+              </a:rPr>
+              <a:t>: AX7103 — HDMI to PCIe</a:t>
+            </a:r>
+            <a:endParaRPr lang="zh-TW" altLang="en-US" dirty="0">
+              <a:latin typeface="Times New Roman" panose="02020603050405020304" pitchFamily="18" charset="0"/>
+              <a:ea typeface="標楷體" panose="03000509000000000000" pitchFamily="65" charset="-120"/>
+              <a:cs typeface="Times New Roman" panose="02020603050405020304" pitchFamily="18" charset="0"/>
+            </a:endParaRPr>
+          </a:p>
+        </p:txBody>
+      </p:sp>
+      <p:sp>
+        <p:nvSpPr>
+          <p:cNvPr id="2" name="文字版面配置區 6">
+            <a:extLst>
+              <a:ext uri="{FF2B5EF4-FFF2-40B4-BE49-F238E27FC236}">
+                <a16:creationId xmlns:a16="http://schemas.microsoft.com/office/drawing/2014/main" id="{D929304B-5341-8BBF-E71F-AF5F2FE7268A}"/>
+              </a:ext>
+            </a:extLst>
+          </p:cNvPr>
+          <p:cNvSpPr txBox="1"/>
+          <p:nvPr/>
+        </p:nvSpPr>
+        <p:spPr>
+          <a:xfrm>
+            <a:off x="609602" y="935857"/>
+            <a:ext cx="8686796" cy="4700685"/>
+          </a:xfrm>
+          <a:prstGeom prst="rect">
+            <a:avLst/>
+          </a:prstGeom>
+          <a:noFill/>
+          <a:ln>
+            <a:noFill/>
+          </a:ln>
+        </p:spPr>
+        <p:txBody>
+          <a:bodyPr spcFirstLastPara="1" wrap="square" lIns="91425" tIns="45700" rIns="91425" bIns="45700" anchor="t" anchorCtr="0">
+            <a:noAutofit/>
+          </a:bodyPr>
+          <a:lstStyle>
+            <a:defPPr marR="0" lvl="0" algn="l" rtl="0">
+              <a:lnSpc>
+                <a:spcPct val="100000"/>
+              </a:lnSpc>
+              <a:spcBef>
+                <a:spcPts val="0"/>
+              </a:spcBef>
+              <a:spcAft>
+                <a:spcPts val="0"/>
+              </a:spcAft>
+            </a:defPPr>
+            <a:lvl1pPr marL="457200" marR="0" lvl="0" indent="-406400" algn="l" rtl="0">
+              <a:lnSpc>
+                <a:spcPct val="100000"/>
+              </a:lnSpc>
+              <a:spcBef>
+                <a:spcPts val="560"/>
+              </a:spcBef>
+              <a:spcAft>
+                <a:spcPts val="0"/>
+              </a:spcAft>
+              <a:buClr>
+                <a:schemeClr val="accent2"/>
+              </a:buClr>
+              <a:buSzPts val="2800"/>
+              <a:buFont typeface="Noto Sans Symbols"/>
+              <a:buChar char="❖"/>
+              <a:defRPr sz="2800" b="0" i="0" u="none" strike="noStrike" cap="none">
+                <a:solidFill>
+                  <a:schemeClr val="dk1"/>
+                </a:solidFill>
+                <a:latin typeface="Times New Roman"/>
+                <a:ea typeface="Times New Roman"/>
+                <a:cs typeface="Times New Roman"/>
+                <a:sym typeface="Times New Roman"/>
+              </a:defRPr>
+            </a:lvl1pPr>
+            <a:lvl2pPr marL="914400" marR="0" lvl="1" indent="-381000" algn="l" rtl="0">
+              <a:lnSpc>
+                <a:spcPct val="100000"/>
+              </a:lnSpc>
+              <a:spcBef>
+                <a:spcPts val="480"/>
+              </a:spcBef>
+              <a:spcAft>
+                <a:spcPts val="0"/>
+              </a:spcAft>
+              <a:buClr>
+                <a:srgbClr val="FF5050"/>
+              </a:buClr>
+              <a:buSzPts val="2400"/>
+              <a:buFont typeface="Noto Sans Symbols"/>
+              <a:buChar char="▪"/>
+              <a:defRPr sz="2400" b="0" i="0" u="none" strike="noStrike" cap="none">
+                <a:solidFill>
+                  <a:schemeClr val="dk1"/>
+                </a:solidFill>
+                <a:latin typeface="Times New Roman"/>
+                <a:ea typeface="Times New Roman"/>
+                <a:cs typeface="Times New Roman"/>
+                <a:sym typeface="Times New Roman"/>
+              </a:defRPr>
+            </a:lvl2pPr>
+            <a:lvl3pPr marL="1371600" marR="0" lvl="2" indent="-355600" algn="l" rtl="0">
+              <a:lnSpc>
+                <a:spcPct val="100000"/>
+              </a:lnSpc>
+              <a:spcBef>
+                <a:spcPts val="400"/>
+              </a:spcBef>
+              <a:spcAft>
+                <a:spcPts val="0"/>
+              </a:spcAft>
+              <a:buClr>
+                <a:srgbClr val="6699FF"/>
+              </a:buClr>
+              <a:buSzPts val="2000"/>
+              <a:buFont typeface="Times New Roman"/>
+              <a:buChar char="•"/>
+              <a:defRPr sz="2000" b="0" i="0" u="none" strike="noStrike" cap="none">
+                <a:solidFill>
+                  <a:schemeClr val="dk1"/>
+                </a:solidFill>
+                <a:latin typeface="Times New Roman"/>
+                <a:ea typeface="Times New Roman"/>
+                <a:cs typeface="Times New Roman"/>
+                <a:sym typeface="Times New Roman"/>
+              </a:defRPr>
+            </a:lvl3pPr>
+            <a:lvl4pPr marL="1828800" marR="0" lvl="3" indent="-355600" algn="l" rtl="0">
+              <a:lnSpc>
+                <a:spcPct val="100000"/>
+              </a:lnSpc>
+              <a:spcBef>
+                <a:spcPts val="400"/>
+              </a:spcBef>
+              <a:spcAft>
+                <a:spcPts val="0"/>
+              </a:spcAft>
+              <a:buClr>
+                <a:srgbClr val="FF5050"/>
+              </a:buClr>
+              <a:buSzPts val="2000"/>
+              <a:buFont typeface="Times New Roman"/>
+              <a:buChar char="o"/>
+              <a:defRPr sz="2000" b="0" i="0" u="none" strike="noStrike" cap="none">
+                <a:solidFill>
+                  <a:schemeClr val="dk1"/>
+                </a:solidFill>
+                <a:latin typeface="Times New Roman"/>
+                <a:ea typeface="Times New Roman"/>
+                <a:cs typeface="Times New Roman"/>
+                <a:sym typeface="Times New Roman"/>
+              </a:defRPr>
+            </a:lvl4pPr>
+            <a:lvl5pPr marL="2286000" marR="0" lvl="4" indent="-355600" algn="l" rtl="0">
+              <a:lnSpc>
+                <a:spcPct val="100000"/>
+              </a:lnSpc>
+              <a:spcBef>
+                <a:spcPts val="400"/>
+              </a:spcBef>
+              <a:spcAft>
+                <a:spcPts val="0"/>
+              </a:spcAft>
+              <a:buClr>
+                <a:srgbClr val="FF5050"/>
+              </a:buClr>
+              <a:buSzPts val="2000"/>
+              <a:buFont typeface="Times New Roman"/>
+              <a:buChar char="o"/>
+              <a:defRPr sz="2000" b="0" i="0" u="none" strike="noStrike" cap="none">
+                <a:solidFill>
+                  <a:schemeClr val="dk1"/>
+                </a:solidFill>
+                <a:latin typeface="Times New Roman"/>
+                <a:ea typeface="Times New Roman"/>
+                <a:cs typeface="Times New Roman"/>
+                <a:sym typeface="Times New Roman"/>
+              </a:defRPr>
+            </a:lvl5pPr>
+            <a:lvl6pPr marL="2743200" marR="0" lvl="5" indent="-355600" algn="l" rtl="0">
+              <a:lnSpc>
+                <a:spcPct val="100000"/>
+              </a:lnSpc>
+              <a:spcBef>
+                <a:spcPts val="400"/>
+              </a:spcBef>
+              <a:spcAft>
+                <a:spcPts val="0"/>
+              </a:spcAft>
+              <a:buClr>
+                <a:srgbClr val="FF5050"/>
+              </a:buClr>
+              <a:buSzPts val="2000"/>
+              <a:buFont typeface="Times New Roman"/>
+              <a:buChar char="o"/>
+              <a:defRPr sz="2000" b="0" i="0" u="none" strike="noStrike" cap="none">
+                <a:solidFill>
+                  <a:schemeClr val="dk1"/>
+                </a:solidFill>
+                <a:latin typeface="Times New Roman"/>
+                <a:ea typeface="Times New Roman"/>
+                <a:cs typeface="Times New Roman"/>
+                <a:sym typeface="Times New Roman"/>
+              </a:defRPr>
+            </a:lvl6pPr>
+            <a:lvl7pPr marL="3200400" marR="0" lvl="6" indent="-355600" algn="l" rtl="0">
+              <a:lnSpc>
+                <a:spcPct val="100000"/>
+              </a:lnSpc>
+              <a:spcBef>
+                <a:spcPts val="400"/>
+              </a:spcBef>
+              <a:spcAft>
+                <a:spcPts val="0"/>
+              </a:spcAft>
+              <a:buClr>
+                <a:srgbClr val="FF5050"/>
+              </a:buClr>
+              <a:buSzPts val="2000"/>
+              <a:buFont typeface="Times New Roman"/>
+              <a:buChar char="o"/>
+              <a:defRPr sz="2000" b="0" i="0" u="none" strike="noStrike" cap="none">
+                <a:solidFill>
+                  <a:schemeClr val="dk1"/>
+                </a:solidFill>
+                <a:latin typeface="Times New Roman"/>
+                <a:ea typeface="Times New Roman"/>
+                <a:cs typeface="Times New Roman"/>
+                <a:sym typeface="Times New Roman"/>
+              </a:defRPr>
+            </a:lvl7pPr>
+            <a:lvl8pPr marL="3657600" marR="0" lvl="7" indent="-355600" algn="l" rtl="0">
+              <a:lnSpc>
+                <a:spcPct val="100000"/>
+              </a:lnSpc>
+              <a:spcBef>
+                <a:spcPts val="400"/>
+              </a:spcBef>
+              <a:spcAft>
+                <a:spcPts val="0"/>
+              </a:spcAft>
+              <a:buClr>
+                <a:srgbClr val="FF5050"/>
+              </a:buClr>
+              <a:buSzPts val="2000"/>
+              <a:buFont typeface="Times New Roman"/>
+              <a:buChar char="o"/>
+              <a:defRPr sz="2000" b="0" i="0" u="none" strike="noStrike" cap="none">
+                <a:solidFill>
+                  <a:schemeClr val="dk1"/>
+                </a:solidFill>
+                <a:latin typeface="Times New Roman"/>
+                <a:ea typeface="Times New Roman"/>
+                <a:cs typeface="Times New Roman"/>
+                <a:sym typeface="Times New Roman"/>
+              </a:defRPr>
+            </a:lvl8pPr>
+            <a:lvl9pPr marL="4114800" marR="0" lvl="8" indent="-355600" algn="l" rtl="0">
+              <a:lnSpc>
+                <a:spcPct val="100000"/>
+              </a:lnSpc>
+              <a:spcBef>
+                <a:spcPts val="400"/>
+              </a:spcBef>
+              <a:spcAft>
+                <a:spcPts val="0"/>
+              </a:spcAft>
+              <a:buClr>
+                <a:srgbClr val="FF5050"/>
+              </a:buClr>
+              <a:buSzPts val="2000"/>
+              <a:buFont typeface="Times New Roman"/>
+              <a:buChar char="o"/>
+              <a:defRPr sz="2000" b="0" i="0" u="none" strike="noStrike" cap="none">
+                <a:solidFill>
+                  <a:schemeClr val="dk1"/>
+                </a:solidFill>
+                <a:latin typeface="Times New Roman"/>
+                <a:ea typeface="Times New Roman"/>
+                <a:cs typeface="Times New Roman"/>
+                <a:sym typeface="Times New Roman"/>
+              </a:defRPr>
+            </a:lvl9pPr>
+          </a:lstStyle>
+          <a:p>
+            <a:pPr>
+              <a:lnSpc>
+                <a:spcPct val="150000"/>
+              </a:lnSpc>
+            </a:pPr>
+            <a:r>
+              <a:rPr lang="zh-TW" altLang="en-US" sz="2000" dirty="0">
+                <a:solidFill>
+                  <a:schemeClr val="tx1"/>
+                </a:solidFill>
+                <a:latin typeface="Times New Roman" panose="02020603050405020304" pitchFamily="18" charset="0"/>
+                <a:ea typeface="標楷體" panose="03000509000000000000" pitchFamily="65" charset="-120"/>
+                <a:cs typeface="Times New Roman" panose="02020603050405020304" pitchFamily="18" charset="0"/>
+              </a:rPr>
+              <a:t>定位</a:t>
+            </a:r>
+            <a:endParaRPr lang="en-US" altLang="zh-TW" sz="2000" dirty="0">
+              <a:solidFill>
+                <a:schemeClr val="tx1"/>
+              </a:solidFill>
+              <a:latin typeface="Times New Roman" panose="02020603050405020304" pitchFamily="18" charset="0"/>
+              <a:ea typeface="標楷體" panose="03000509000000000000" pitchFamily="65" charset="-120"/>
+              <a:cs typeface="Times New Roman" panose="02020603050405020304" pitchFamily="18" charset="0"/>
+            </a:endParaRPr>
+          </a:p>
+          <a:p>
+            <a:pPr lvl="1">
+              <a:lnSpc>
+                <a:spcPts val="3000"/>
+              </a:lnSpc>
+            </a:pPr>
+            <a:r>
+              <a:rPr lang="zh-TW" altLang="en-US" sz="1600" dirty="0">
+                <a:latin typeface="Times New Roman" panose="02020603050405020304" pitchFamily="18" charset="0"/>
+                <a:ea typeface="標楷體" panose="03000509000000000000" pitchFamily="65" charset="-120"/>
+                <a:cs typeface="Times New Roman" panose="02020603050405020304" pitchFamily="18" charset="0"/>
+              </a:rPr>
+              <a:t>整合 </a:t>
+            </a:r>
+            <a:r>
+              <a:rPr lang="en-US" altLang="zh-TW" sz="1600" dirty="0">
+                <a:latin typeface="Times New Roman" panose="02020603050405020304" pitchFamily="18" charset="0"/>
+                <a:ea typeface="標楷體" panose="03000509000000000000" pitchFamily="65" charset="-120"/>
+                <a:cs typeface="Times New Roman" panose="02020603050405020304" pitchFamily="18" charset="0"/>
+              </a:rPr>
+              <a:t>HDMI </a:t>
+            </a:r>
+            <a:r>
+              <a:rPr lang="zh-TW" altLang="en-US" sz="1600" dirty="0">
+                <a:latin typeface="Times New Roman" panose="02020603050405020304" pitchFamily="18" charset="0"/>
+                <a:ea typeface="標楷體" panose="03000509000000000000" pitchFamily="65" charset="-120"/>
+                <a:cs typeface="Times New Roman" panose="02020603050405020304" pitchFamily="18" charset="0"/>
+              </a:rPr>
+              <a:t>影像處理、</a:t>
+            </a:r>
+            <a:r>
+              <a:rPr lang="en-US" altLang="zh-TW" sz="1600" dirty="0">
+                <a:latin typeface="Times New Roman" panose="02020603050405020304" pitchFamily="18" charset="0"/>
+                <a:ea typeface="標楷體" panose="03000509000000000000" pitchFamily="65" charset="-120"/>
+                <a:cs typeface="Times New Roman" panose="02020603050405020304" pitchFamily="18" charset="0"/>
+              </a:rPr>
+              <a:t>DDR3 </a:t>
+            </a:r>
+            <a:r>
+              <a:rPr lang="zh-TW" altLang="en-US" sz="1600" dirty="0">
+                <a:latin typeface="Times New Roman" panose="02020603050405020304" pitchFamily="18" charset="0"/>
+                <a:ea typeface="標楷體" panose="03000509000000000000" pitchFamily="65" charset="-120"/>
+                <a:cs typeface="Times New Roman" panose="02020603050405020304" pitchFamily="18" charset="0"/>
+              </a:rPr>
+              <a:t>影格緩衝與 </a:t>
+            </a:r>
+            <a:r>
+              <a:rPr lang="en-US" altLang="zh-TW" sz="1600" dirty="0">
+                <a:latin typeface="Times New Roman" panose="02020603050405020304" pitchFamily="18" charset="0"/>
+                <a:ea typeface="標楷體" panose="03000509000000000000" pitchFamily="65" charset="-120"/>
+                <a:cs typeface="Times New Roman" panose="02020603050405020304" pitchFamily="18" charset="0"/>
+              </a:rPr>
+              <a:t>PCIe</a:t>
+            </a:r>
+            <a:r>
+              <a:rPr lang="zh-TW" altLang="en-US" sz="1600" dirty="0">
+                <a:latin typeface="Times New Roman" panose="02020603050405020304" pitchFamily="18" charset="0"/>
+                <a:ea typeface="標楷體" panose="03000509000000000000" pitchFamily="65" charset="-120"/>
+                <a:cs typeface="Times New Roman" panose="02020603050405020304" pitchFamily="18" charset="0"/>
+              </a:rPr>
+              <a:t>，並提供 </a:t>
+            </a:r>
+            <a:r>
+              <a:rPr lang="en-US" altLang="zh-TW" sz="1600" dirty="0">
+                <a:latin typeface="Times New Roman" panose="02020603050405020304" pitchFamily="18" charset="0"/>
+                <a:ea typeface="標楷體" panose="03000509000000000000" pitchFamily="65" charset="-120"/>
+                <a:cs typeface="Times New Roman" panose="02020603050405020304" pitchFamily="18" charset="0"/>
+              </a:rPr>
+              <a:t>Windows </a:t>
+            </a:r>
+            <a:r>
+              <a:rPr lang="zh-TW" altLang="en-US" sz="1600" dirty="0">
+                <a:latin typeface="Times New Roman" panose="02020603050405020304" pitchFamily="18" charset="0"/>
+                <a:ea typeface="標楷體" panose="03000509000000000000" pitchFamily="65" charset="-120"/>
+                <a:cs typeface="Times New Roman" panose="02020603050405020304" pitchFamily="18" charset="0"/>
+              </a:rPr>
+              <a:t>端影格讀取程式</a:t>
+            </a:r>
+          </a:p>
+          <a:p>
+            <a:pPr>
+              <a:lnSpc>
+                <a:spcPts val="3000"/>
+              </a:lnSpc>
+            </a:pPr>
+            <a:r>
+              <a:rPr lang="zh-TW" altLang="en-US" sz="2000" dirty="0">
+                <a:latin typeface="Times New Roman" panose="02020603050405020304" pitchFamily="18" charset="0"/>
+                <a:ea typeface="標楷體" panose="03000509000000000000" pitchFamily="65" charset="-120"/>
+                <a:cs typeface="Times New Roman" panose="02020603050405020304" pitchFamily="18" charset="0"/>
+              </a:rPr>
+              <a:t>架構</a:t>
+            </a:r>
+            <a:endParaRPr lang="en-US" altLang="zh-TW" sz="2000" dirty="0">
+              <a:latin typeface="Times New Roman" panose="02020603050405020304" pitchFamily="18" charset="0"/>
+              <a:ea typeface="標楷體" panose="03000509000000000000" pitchFamily="65" charset="-120"/>
+              <a:cs typeface="Times New Roman" panose="02020603050405020304" pitchFamily="18" charset="0"/>
+            </a:endParaRPr>
+          </a:p>
+          <a:p>
+            <a:pPr>
+              <a:lnSpc>
+                <a:spcPts val="3000"/>
+              </a:lnSpc>
+            </a:pPr>
+            <a:endParaRPr lang="en-US" altLang="zh-TW" sz="2000" dirty="0">
+              <a:latin typeface="Times New Roman" panose="02020603050405020304" pitchFamily="18" charset="0"/>
+              <a:ea typeface="標楷體" panose="03000509000000000000" pitchFamily="65" charset="-120"/>
+              <a:cs typeface="Times New Roman" panose="02020603050405020304" pitchFamily="18" charset="0"/>
+            </a:endParaRPr>
+          </a:p>
+          <a:p>
+            <a:pPr>
+              <a:lnSpc>
+                <a:spcPts val="3000"/>
+              </a:lnSpc>
+            </a:pPr>
+            <a:endParaRPr lang="en-US" altLang="zh-TW" sz="2000" dirty="0">
+              <a:latin typeface="Times New Roman" panose="02020603050405020304" pitchFamily="18" charset="0"/>
+              <a:ea typeface="標楷體" panose="03000509000000000000" pitchFamily="65" charset="-120"/>
+              <a:cs typeface="Times New Roman" panose="02020603050405020304" pitchFamily="18" charset="0"/>
+            </a:endParaRPr>
+          </a:p>
+          <a:p>
+            <a:pPr>
+              <a:lnSpc>
+                <a:spcPts val="3000"/>
+              </a:lnSpc>
+            </a:pPr>
+            <a:endParaRPr lang="en-US" altLang="zh-TW" sz="2000" dirty="0">
+              <a:latin typeface="Times New Roman" panose="02020603050405020304" pitchFamily="18" charset="0"/>
+              <a:ea typeface="標楷體" panose="03000509000000000000" pitchFamily="65" charset="-120"/>
+              <a:cs typeface="Times New Roman" panose="02020603050405020304" pitchFamily="18" charset="0"/>
+            </a:endParaRPr>
+          </a:p>
+          <a:p>
+            <a:pPr>
+              <a:lnSpc>
+                <a:spcPts val="3000"/>
+              </a:lnSpc>
+            </a:pPr>
+            <a:r>
+              <a:rPr lang="zh-TW" altLang="en-US" sz="2000" dirty="0">
+                <a:latin typeface="Times New Roman" panose="02020603050405020304" pitchFamily="18" charset="0"/>
+                <a:ea typeface="標楷體" panose="03000509000000000000" pitchFamily="65" charset="-120"/>
+                <a:cs typeface="Times New Roman" panose="02020603050405020304" pitchFamily="18" charset="0"/>
+              </a:rPr>
+              <a:t>開發環境與硬體</a:t>
+            </a:r>
+          </a:p>
+          <a:p>
+            <a:pPr lvl="1">
+              <a:lnSpc>
+                <a:spcPts val="3000"/>
+              </a:lnSpc>
+            </a:pPr>
+            <a:r>
+              <a:rPr lang="en-US" altLang="zh-TW" sz="1600" dirty="0">
+                <a:latin typeface="Times New Roman" panose="02020603050405020304" pitchFamily="18" charset="0"/>
+                <a:ea typeface="標楷體" panose="03000509000000000000" pitchFamily="65" charset="-120"/>
+                <a:cs typeface="Times New Roman" panose="02020603050405020304" pitchFamily="18" charset="0"/>
+              </a:rPr>
+              <a:t>FPGA</a:t>
+            </a:r>
+            <a:r>
+              <a:rPr lang="zh-TW" altLang="en-US" sz="1600" dirty="0">
+                <a:latin typeface="Times New Roman" panose="02020603050405020304" pitchFamily="18" charset="0"/>
+                <a:ea typeface="標楷體" panose="03000509000000000000" pitchFamily="65" charset="-120"/>
+                <a:cs typeface="Times New Roman" panose="02020603050405020304" pitchFamily="18" charset="0"/>
+              </a:rPr>
+              <a:t>：</a:t>
+            </a:r>
+            <a:r>
+              <a:rPr lang="en-US" altLang="zh-TW" sz="1600" dirty="0">
+                <a:latin typeface="Times New Roman" panose="02020603050405020304" pitchFamily="18" charset="0"/>
+                <a:ea typeface="標楷體" panose="03000509000000000000" pitchFamily="65" charset="-120"/>
+                <a:cs typeface="Times New Roman" panose="02020603050405020304" pitchFamily="18" charset="0"/>
+              </a:rPr>
+              <a:t>Artix-7 XC7A100T-2FGG484</a:t>
+            </a:r>
+          </a:p>
+          <a:p>
+            <a:pPr lvl="1">
+              <a:lnSpc>
+                <a:spcPts val="3000"/>
+              </a:lnSpc>
+            </a:pPr>
+            <a:r>
+              <a:rPr lang="zh-TW" altLang="en-US" sz="1600" dirty="0">
+                <a:latin typeface="Times New Roman" panose="02020603050405020304" pitchFamily="18" charset="0"/>
+                <a:ea typeface="標楷體" panose="03000509000000000000" pitchFamily="65" charset="-120"/>
+                <a:cs typeface="Times New Roman" panose="02020603050405020304" pitchFamily="18" charset="0"/>
+              </a:rPr>
+              <a:t>工具：</a:t>
+            </a:r>
+            <a:r>
+              <a:rPr lang="en-US" altLang="zh-TW" sz="1600" dirty="0" err="1">
+                <a:latin typeface="Times New Roman" panose="02020603050405020304" pitchFamily="18" charset="0"/>
+                <a:ea typeface="標楷體" panose="03000509000000000000" pitchFamily="65" charset="-120"/>
+                <a:cs typeface="Times New Roman" panose="02020603050405020304" pitchFamily="18" charset="0"/>
+              </a:rPr>
+              <a:t>Vivado</a:t>
+            </a:r>
+            <a:r>
+              <a:rPr lang="en-US" altLang="zh-TW" sz="1600" dirty="0">
+                <a:latin typeface="Times New Roman" panose="02020603050405020304" pitchFamily="18" charset="0"/>
+                <a:ea typeface="標楷體" panose="03000509000000000000" pitchFamily="65" charset="-120"/>
+                <a:cs typeface="Times New Roman" panose="02020603050405020304" pitchFamily="18" charset="0"/>
+              </a:rPr>
+              <a:t> 2017.2</a:t>
+            </a:r>
+          </a:p>
+          <a:p>
+            <a:pPr lvl="1">
+              <a:lnSpc>
+                <a:spcPts val="3000"/>
+              </a:lnSpc>
+            </a:pPr>
+            <a:r>
+              <a:rPr lang="en-US" altLang="zh-TW" sz="1600" dirty="0">
+                <a:latin typeface="Times New Roman" panose="02020603050405020304" pitchFamily="18" charset="0"/>
+                <a:ea typeface="標楷體" panose="03000509000000000000" pitchFamily="65" charset="-120"/>
+                <a:cs typeface="Times New Roman" panose="02020603050405020304" pitchFamily="18" charset="0"/>
+              </a:rPr>
+              <a:t>IP</a:t>
+            </a:r>
+            <a:r>
+              <a:rPr lang="zh-TW" altLang="en-US" sz="1600" dirty="0">
+                <a:latin typeface="Times New Roman" panose="02020603050405020304" pitchFamily="18" charset="0"/>
+                <a:ea typeface="標楷體" panose="03000509000000000000" pitchFamily="65" charset="-120"/>
+                <a:cs typeface="Times New Roman" panose="02020603050405020304" pitchFamily="18" charset="0"/>
+              </a:rPr>
+              <a:t>：</a:t>
+            </a:r>
+            <a:r>
+              <a:rPr lang="en-US" altLang="zh-TW" sz="1600" dirty="0">
+                <a:latin typeface="Times New Roman" panose="02020603050405020304" pitchFamily="18" charset="0"/>
+                <a:ea typeface="標楷體" panose="03000509000000000000" pitchFamily="65" charset="-120"/>
+                <a:cs typeface="Times New Roman" panose="02020603050405020304" pitchFamily="18" charset="0"/>
+              </a:rPr>
+              <a:t>Xilinx XDMA</a:t>
+            </a:r>
+            <a:r>
+              <a:rPr lang="zh-TW" altLang="en-US" sz="1600" dirty="0">
+                <a:latin typeface="Times New Roman" panose="02020603050405020304" pitchFamily="18" charset="0"/>
+                <a:ea typeface="標楷體" panose="03000509000000000000" pitchFamily="65" charset="-120"/>
+                <a:cs typeface="Times New Roman" panose="02020603050405020304" pitchFamily="18" charset="0"/>
+              </a:rPr>
+              <a:t>、</a:t>
+            </a:r>
+            <a:r>
+              <a:rPr lang="en-US" altLang="zh-TW" sz="1600" dirty="0">
+                <a:latin typeface="Times New Roman" panose="02020603050405020304" pitchFamily="18" charset="0"/>
+                <a:ea typeface="標楷體" panose="03000509000000000000" pitchFamily="65" charset="-120"/>
+                <a:cs typeface="Times New Roman" panose="02020603050405020304" pitchFamily="18" charset="0"/>
+              </a:rPr>
+              <a:t>7-Series MIG</a:t>
+            </a:r>
+            <a:r>
+              <a:rPr lang="zh-TW" altLang="en-US" sz="1600" dirty="0">
+                <a:latin typeface="Times New Roman" panose="02020603050405020304" pitchFamily="18" charset="0"/>
+                <a:ea typeface="標楷體" panose="03000509000000000000" pitchFamily="65" charset="-120"/>
+                <a:cs typeface="Times New Roman" panose="02020603050405020304" pitchFamily="18" charset="0"/>
+              </a:rPr>
+              <a:t>、</a:t>
+            </a:r>
+            <a:r>
+              <a:rPr lang="en-US" altLang="zh-TW" sz="1600" dirty="0">
+                <a:latin typeface="Times New Roman" panose="02020603050405020304" pitchFamily="18" charset="0"/>
+                <a:ea typeface="標楷體" panose="03000509000000000000" pitchFamily="65" charset="-120"/>
+                <a:cs typeface="Times New Roman" panose="02020603050405020304" pitchFamily="18" charset="0"/>
+              </a:rPr>
+              <a:t>AXI interconnect</a:t>
+            </a:r>
+            <a:endParaRPr lang="zh-TW" altLang="en-US" sz="1600" dirty="0">
+              <a:latin typeface="Times New Roman" panose="02020603050405020304" pitchFamily="18" charset="0"/>
+              <a:ea typeface="標楷體" panose="03000509000000000000" pitchFamily="65" charset="-120"/>
+              <a:cs typeface="Times New Roman" panose="02020603050405020304" pitchFamily="18" charset="0"/>
+            </a:endParaRPr>
+          </a:p>
+          <a:p>
+            <a:pPr lvl="1">
+              <a:lnSpc>
+                <a:spcPts val="3000"/>
+              </a:lnSpc>
+            </a:pPr>
+            <a:endParaRPr lang="en-US" altLang="zh-TW" sz="1600" dirty="0">
+              <a:solidFill>
+                <a:schemeClr val="tx1"/>
+              </a:solidFill>
+              <a:latin typeface="Times New Roman" panose="02020603050405020304" pitchFamily="18" charset="0"/>
+              <a:ea typeface="標楷體" panose="03000509000000000000" pitchFamily="65" charset="-120"/>
+              <a:cs typeface="Times New Roman" panose="02020603050405020304" pitchFamily="18" charset="0"/>
+            </a:endParaRPr>
+          </a:p>
+        </p:txBody>
+      </p:sp>
+      <p:sp>
+        <p:nvSpPr>
+          <p:cNvPr id="3" name="文字方塊 2">
+            <a:extLst>
+              <a:ext uri="{FF2B5EF4-FFF2-40B4-BE49-F238E27FC236}">
+                <a16:creationId xmlns:a16="http://schemas.microsoft.com/office/drawing/2014/main" id="{B17A7646-77F3-2568-68C1-545F7C189BE6}"/>
+              </a:ext>
+            </a:extLst>
+          </p:cNvPr>
+          <p:cNvSpPr txBox="1"/>
+          <p:nvPr/>
+        </p:nvSpPr>
+        <p:spPr>
+          <a:xfrm>
+            <a:off x="1787236" y="6384072"/>
+            <a:ext cx="5802283" cy="276999"/>
+          </a:xfrm>
+          <a:prstGeom prst="rect">
+            <a:avLst/>
+          </a:prstGeom>
+          <a:noFill/>
+        </p:spPr>
+        <p:txBody>
+          <a:bodyPr wrap="square">
+            <a:spAutoFit/>
+          </a:bodyPr>
+          <a:lstStyle/>
+          <a:p>
+            <a:r>
+              <a:rPr lang="en-US" altLang="zh-TW" sz="1200" dirty="0">
+                <a:latin typeface="Times New Roman" panose="02020603050405020304" pitchFamily="18" charset="0"/>
+                <a:ea typeface="標楷體" panose="03000509000000000000" pitchFamily="65" charset="-120"/>
+                <a:cs typeface="Times New Roman" panose="02020603050405020304" pitchFamily="18" charset="0"/>
+              </a:rPr>
+              <a:t>[4] https://github.com/alinxalinx/AX7103</a:t>
+            </a:r>
+            <a:endParaRPr lang="zh-TW" altLang="en-US" sz="1200" dirty="0">
+              <a:latin typeface="Times New Roman" panose="02020603050405020304" pitchFamily="18" charset="0"/>
+              <a:ea typeface="標楷體" panose="03000509000000000000" pitchFamily="65" charset="-120"/>
+              <a:cs typeface="Times New Roman" panose="02020603050405020304" pitchFamily="18" charset="0"/>
+            </a:endParaRPr>
+          </a:p>
+        </p:txBody>
+      </p:sp>
+      <p:pic>
+        <p:nvPicPr>
+          <p:cNvPr id="5" name="圖片 4">
+            <a:extLst>
+              <a:ext uri="{FF2B5EF4-FFF2-40B4-BE49-F238E27FC236}">
+                <a16:creationId xmlns:a16="http://schemas.microsoft.com/office/drawing/2014/main" id="{58EBB8F2-B13C-7F8E-D58E-480C51DE9882}"/>
+              </a:ext>
+            </a:extLst>
+          </p:cNvPr>
+          <p:cNvPicPr>
+            <a:picLocks noChangeAspect="1"/>
+          </p:cNvPicPr>
+          <p:nvPr/>
+        </p:nvPicPr>
+        <p:blipFill>
+          <a:blip r:embed="rId3"/>
+          <a:stretch>
+            <a:fillRect/>
+          </a:stretch>
+        </p:blipFill>
+        <p:spPr>
+          <a:xfrm>
+            <a:off x="730469" y="2584935"/>
+            <a:ext cx="8445062" cy="1030896"/>
+          </a:xfrm>
+          <a:prstGeom prst="rect">
+            <a:avLst/>
+          </a:prstGeom>
+        </p:spPr>
+      </p:pic>
+    </p:spTree>
+    <p:extLst>
+      <p:ext uri="{BB962C8B-B14F-4D97-AF65-F5344CB8AC3E}">
+        <p14:creationId xmlns:p14="http://schemas.microsoft.com/office/powerpoint/2010/main" val="1861097472"/>
+      </p:ext>
+    </p:extLst>
   </p:cSld>
   <p:clrMapOvr>
     <a:masterClrMapping/>
@@ -11969,365 +14241,6 @@
       </p:grpSpPr>
       <p:sp>
         <p:nvSpPr>
-          <p:cNvPr id="7" name="文字版面配置區 6">
-            <a:extLst>
-              <a:ext uri="{FF2B5EF4-FFF2-40B4-BE49-F238E27FC236}">
-                <a16:creationId xmlns:a16="http://schemas.microsoft.com/office/drawing/2014/main" id="{B361B4DF-3145-D829-F41F-4DFE4B01E588}"/>
-              </a:ext>
-            </a:extLst>
-          </p:cNvPr>
-          <p:cNvSpPr txBox="1"/>
-          <p:nvPr/>
-        </p:nvSpPr>
-        <p:spPr>
-          <a:xfrm>
-            <a:off x="609602" y="1012057"/>
-            <a:ext cx="8686796" cy="4700685"/>
-          </a:xfrm>
-          <a:prstGeom prst="rect">
-            <a:avLst/>
-          </a:prstGeom>
-          <a:noFill/>
-          <a:ln>
-            <a:noFill/>
-          </a:ln>
-        </p:spPr>
-        <p:txBody>
-          <a:bodyPr spcFirstLastPara="1" wrap="square" lIns="91425" tIns="45700" rIns="91425" bIns="45700" anchor="t" anchorCtr="0">
-            <a:noAutofit/>
-          </a:bodyPr>
-          <a:lstStyle>
-            <a:defPPr marR="0" lvl="0" algn="l" rtl="0">
-              <a:lnSpc>
-                <a:spcPct val="100000"/>
-              </a:lnSpc>
-              <a:spcBef>
-                <a:spcPts val="0"/>
-              </a:spcBef>
-              <a:spcAft>
-                <a:spcPts val="0"/>
-              </a:spcAft>
-            </a:defPPr>
-            <a:lvl1pPr marL="457200" marR="0" lvl="0" indent="-406400" algn="l" rtl="0">
-              <a:lnSpc>
-                <a:spcPct val="100000"/>
-              </a:lnSpc>
-              <a:spcBef>
-                <a:spcPts val="560"/>
-              </a:spcBef>
-              <a:spcAft>
-                <a:spcPts val="0"/>
-              </a:spcAft>
-              <a:buClr>
-                <a:schemeClr val="accent2"/>
-              </a:buClr>
-              <a:buSzPts val="2800"/>
-              <a:buFont typeface="Noto Sans Symbols"/>
-              <a:buChar char="❖"/>
-              <a:defRPr sz="2800" b="0" i="0" u="none" strike="noStrike" cap="none">
-                <a:solidFill>
-                  <a:schemeClr val="dk1"/>
-                </a:solidFill>
-                <a:latin typeface="Times New Roman"/>
-                <a:ea typeface="Times New Roman"/>
-                <a:cs typeface="Times New Roman"/>
-                <a:sym typeface="Times New Roman"/>
-              </a:defRPr>
-            </a:lvl1pPr>
-            <a:lvl2pPr marL="914400" marR="0" lvl="1" indent="-381000" algn="l" rtl="0">
-              <a:lnSpc>
-                <a:spcPct val="100000"/>
-              </a:lnSpc>
-              <a:spcBef>
-                <a:spcPts val="480"/>
-              </a:spcBef>
-              <a:spcAft>
-                <a:spcPts val="0"/>
-              </a:spcAft>
-              <a:buClr>
-                <a:srgbClr val="FF5050"/>
-              </a:buClr>
-              <a:buSzPts val="2400"/>
-              <a:buFont typeface="Noto Sans Symbols"/>
-              <a:buChar char="▪"/>
-              <a:defRPr sz="2400" b="0" i="0" u="none" strike="noStrike" cap="none">
-                <a:solidFill>
-                  <a:schemeClr val="dk1"/>
-                </a:solidFill>
-                <a:latin typeface="Times New Roman"/>
-                <a:ea typeface="Times New Roman"/>
-                <a:cs typeface="Times New Roman"/>
-                <a:sym typeface="Times New Roman"/>
-              </a:defRPr>
-            </a:lvl2pPr>
-            <a:lvl3pPr marL="1371600" marR="0" lvl="2" indent="-355600" algn="l" rtl="0">
-              <a:lnSpc>
-                <a:spcPct val="100000"/>
-              </a:lnSpc>
-              <a:spcBef>
-                <a:spcPts val="400"/>
-              </a:spcBef>
-              <a:spcAft>
-                <a:spcPts val="0"/>
-              </a:spcAft>
-              <a:buClr>
-                <a:srgbClr val="6699FF"/>
-              </a:buClr>
-              <a:buSzPts val="2000"/>
-              <a:buFont typeface="Times New Roman"/>
-              <a:buChar char="•"/>
-              <a:defRPr sz="2000" b="0" i="0" u="none" strike="noStrike" cap="none">
-                <a:solidFill>
-                  <a:schemeClr val="dk1"/>
-                </a:solidFill>
-                <a:latin typeface="Times New Roman"/>
-                <a:ea typeface="Times New Roman"/>
-                <a:cs typeface="Times New Roman"/>
-                <a:sym typeface="Times New Roman"/>
-              </a:defRPr>
-            </a:lvl3pPr>
-            <a:lvl4pPr marL="1828800" marR="0" lvl="3" indent="-355600" algn="l" rtl="0">
-              <a:lnSpc>
-                <a:spcPct val="100000"/>
-              </a:lnSpc>
-              <a:spcBef>
-                <a:spcPts val="400"/>
-              </a:spcBef>
-              <a:spcAft>
-                <a:spcPts val="0"/>
-              </a:spcAft>
-              <a:buClr>
-                <a:srgbClr val="FF5050"/>
-              </a:buClr>
-              <a:buSzPts val="2000"/>
-              <a:buFont typeface="Times New Roman"/>
-              <a:buChar char="o"/>
-              <a:defRPr sz="2000" b="0" i="0" u="none" strike="noStrike" cap="none">
-                <a:solidFill>
-                  <a:schemeClr val="dk1"/>
-                </a:solidFill>
-                <a:latin typeface="Times New Roman"/>
-                <a:ea typeface="Times New Roman"/>
-                <a:cs typeface="Times New Roman"/>
-                <a:sym typeface="Times New Roman"/>
-              </a:defRPr>
-            </a:lvl4pPr>
-            <a:lvl5pPr marL="2286000" marR="0" lvl="4" indent="-355600" algn="l" rtl="0">
-              <a:lnSpc>
-                <a:spcPct val="100000"/>
-              </a:lnSpc>
-              <a:spcBef>
-                <a:spcPts val="400"/>
-              </a:spcBef>
-              <a:spcAft>
-                <a:spcPts val="0"/>
-              </a:spcAft>
-              <a:buClr>
-                <a:srgbClr val="FF5050"/>
-              </a:buClr>
-              <a:buSzPts val="2000"/>
-              <a:buFont typeface="Times New Roman"/>
-              <a:buChar char="o"/>
-              <a:defRPr sz="2000" b="0" i="0" u="none" strike="noStrike" cap="none">
-                <a:solidFill>
-                  <a:schemeClr val="dk1"/>
-                </a:solidFill>
-                <a:latin typeface="Times New Roman"/>
-                <a:ea typeface="Times New Roman"/>
-                <a:cs typeface="Times New Roman"/>
-                <a:sym typeface="Times New Roman"/>
-              </a:defRPr>
-            </a:lvl5pPr>
-            <a:lvl6pPr marL="2743200" marR="0" lvl="5" indent="-355600" algn="l" rtl="0">
-              <a:lnSpc>
-                <a:spcPct val="100000"/>
-              </a:lnSpc>
-              <a:spcBef>
-                <a:spcPts val="400"/>
-              </a:spcBef>
-              <a:spcAft>
-                <a:spcPts val="0"/>
-              </a:spcAft>
-              <a:buClr>
-                <a:srgbClr val="FF5050"/>
-              </a:buClr>
-              <a:buSzPts val="2000"/>
-              <a:buFont typeface="Times New Roman"/>
-              <a:buChar char="o"/>
-              <a:defRPr sz="2000" b="0" i="0" u="none" strike="noStrike" cap="none">
-                <a:solidFill>
-                  <a:schemeClr val="dk1"/>
-                </a:solidFill>
-                <a:latin typeface="Times New Roman"/>
-                <a:ea typeface="Times New Roman"/>
-                <a:cs typeface="Times New Roman"/>
-                <a:sym typeface="Times New Roman"/>
-              </a:defRPr>
-            </a:lvl6pPr>
-            <a:lvl7pPr marL="3200400" marR="0" lvl="6" indent="-355600" algn="l" rtl="0">
-              <a:lnSpc>
-                <a:spcPct val="100000"/>
-              </a:lnSpc>
-              <a:spcBef>
-                <a:spcPts val="400"/>
-              </a:spcBef>
-              <a:spcAft>
-                <a:spcPts val="0"/>
-              </a:spcAft>
-              <a:buClr>
-                <a:srgbClr val="FF5050"/>
-              </a:buClr>
-              <a:buSzPts val="2000"/>
-              <a:buFont typeface="Times New Roman"/>
-              <a:buChar char="o"/>
-              <a:defRPr sz="2000" b="0" i="0" u="none" strike="noStrike" cap="none">
-                <a:solidFill>
-                  <a:schemeClr val="dk1"/>
-                </a:solidFill>
-                <a:latin typeface="Times New Roman"/>
-                <a:ea typeface="Times New Roman"/>
-                <a:cs typeface="Times New Roman"/>
-                <a:sym typeface="Times New Roman"/>
-              </a:defRPr>
-            </a:lvl7pPr>
-            <a:lvl8pPr marL="3657600" marR="0" lvl="7" indent="-355600" algn="l" rtl="0">
-              <a:lnSpc>
-                <a:spcPct val="100000"/>
-              </a:lnSpc>
-              <a:spcBef>
-                <a:spcPts val="400"/>
-              </a:spcBef>
-              <a:spcAft>
-                <a:spcPts val="0"/>
-              </a:spcAft>
-              <a:buClr>
-                <a:srgbClr val="FF5050"/>
-              </a:buClr>
-              <a:buSzPts val="2000"/>
-              <a:buFont typeface="Times New Roman"/>
-              <a:buChar char="o"/>
-              <a:defRPr sz="2000" b="0" i="0" u="none" strike="noStrike" cap="none">
-                <a:solidFill>
-                  <a:schemeClr val="dk1"/>
-                </a:solidFill>
-                <a:latin typeface="Times New Roman"/>
-                <a:ea typeface="Times New Roman"/>
-                <a:cs typeface="Times New Roman"/>
-                <a:sym typeface="Times New Roman"/>
-              </a:defRPr>
-            </a:lvl8pPr>
-            <a:lvl9pPr marL="4114800" marR="0" lvl="8" indent="-355600" algn="l" rtl="0">
-              <a:lnSpc>
-                <a:spcPct val="100000"/>
-              </a:lnSpc>
-              <a:spcBef>
-                <a:spcPts val="400"/>
-              </a:spcBef>
-              <a:spcAft>
-                <a:spcPts val="0"/>
-              </a:spcAft>
-              <a:buClr>
-                <a:srgbClr val="FF5050"/>
-              </a:buClr>
-              <a:buSzPts val="2000"/>
-              <a:buFont typeface="Times New Roman"/>
-              <a:buChar char="o"/>
-              <a:defRPr sz="2000" b="0" i="0" u="none" strike="noStrike" cap="none">
-                <a:solidFill>
-                  <a:schemeClr val="dk1"/>
-                </a:solidFill>
-                <a:latin typeface="Times New Roman"/>
-                <a:ea typeface="Times New Roman"/>
-                <a:cs typeface="Times New Roman"/>
-                <a:sym typeface="Times New Roman"/>
-              </a:defRPr>
-            </a:lvl9pPr>
-          </a:lstStyle>
-          <a:p>
-            <a:pPr>
-              <a:lnSpc>
-                <a:spcPts val="3000"/>
-              </a:lnSpc>
-            </a:pPr>
-            <a:r>
-              <a:rPr lang="en-US" altLang="zh-TW" sz="2000" dirty="0">
-                <a:solidFill>
-                  <a:srgbClr val="333333"/>
-                </a:solidFill>
-                <a:latin typeface="Times New Roman" panose="02020603050405020304" pitchFamily="18" charset="0"/>
-                <a:ea typeface="標楷體" panose="03000509000000000000" pitchFamily="65" charset="-120"/>
-                <a:cs typeface="Times New Roman" panose="02020603050405020304" pitchFamily="18" charset="0"/>
-              </a:rPr>
-              <a:t>Gamma</a:t>
-            </a:r>
-            <a:r>
-              <a:rPr lang="zh-TW" altLang="en-US" sz="2000" dirty="0">
-                <a:solidFill>
-                  <a:srgbClr val="333333"/>
-                </a:solidFill>
-                <a:latin typeface="Times New Roman" panose="02020603050405020304" pitchFamily="18" charset="0"/>
-                <a:ea typeface="標楷體" panose="03000509000000000000" pitchFamily="65" charset="-120"/>
-                <a:cs typeface="Times New Roman" panose="02020603050405020304" pitchFamily="18" charset="0"/>
-              </a:rPr>
-              <a:t> </a:t>
-            </a:r>
-            <a:r>
-              <a:rPr lang="en-US" altLang="zh-TW" sz="2000" dirty="0">
-                <a:solidFill>
-                  <a:srgbClr val="333333"/>
-                </a:solidFill>
-                <a:latin typeface="Times New Roman" panose="02020603050405020304" pitchFamily="18" charset="0"/>
-                <a:ea typeface="標楷體" panose="03000509000000000000" pitchFamily="65" charset="-120"/>
-                <a:cs typeface="Times New Roman" panose="02020603050405020304" pitchFamily="18" charset="0"/>
-              </a:rPr>
-              <a:t>2.2</a:t>
-            </a:r>
-            <a:r>
-              <a:rPr lang="zh-TW" altLang="en-US" sz="2000" dirty="0">
-                <a:solidFill>
-                  <a:srgbClr val="333333"/>
-                </a:solidFill>
-                <a:latin typeface="Times New Roman" panose="02020603050405020304" pitchFamily="18" charset="0"/>
-                <a:ea typeface="標楷體" panose="03000509000000000000" pitchFamily="65" charset="-120"/>
-                <a:cs typeface="Times New Roman" panose="02020603050405020304" pitchFamily="18" charset="0"/>
-              </a:rPr>
-              <a:t> </a:t>
-            </a:r>
-            <a:r>
-              <a:rPr lang="en-US" altLang="zh-TW" sz="2000" dirty="0">
-                <a:solidFill>
-                  <a:srgbClr val="333333"/>
-                </a:solidFill>
-                <a:latin typeface="Times New Roman" panose="02020603050405020304" pitchFamily="18" charset="0"/>
-                <a:ea typeface="標楷體" panose="03000509000000000000" pitchFamily="65" charset="-120"/>
-                <a:cs typeface="Times New Roman" panose="02020603050405020304" pitchFamily="18" charset="0"/>
-              </a:rPr>
-              <a:t>6500 K</a:t>
-            </a:r>
-            <a:r>
-              <a:rPr lang="zh-TW" altLang="en-US" sz="2000" dirty="0">
-                <a:solidFill>
-                  <a:srgbClr val="333333"/>
-                </a:solidFill>
-                <a:latin typeface="Times New Roman" panose="02020603050405020304" pitchFamily="18" charset="0"/>
-                <a:ea typeface="標楷體" panose="03000509000000000000" pitchFamily="65" charset="-120"/>
-                <a:cs typeface="Times New Roman" panose="02020603050405020304" pitchFamily="18" charset="0"/>
-              </a:rPr>
-              <a:t> 校正曲線</a:t>
-            </a:r>
-            <a:endParaRPr lang="en-US" altLang="zh-TW" sz="1600" dirty="0">
-              <a:solidFill>
-                <a:srgbClr val="333333"/>
-              </a:solidFill>
-              <a:latin typeface="Times New Roman" panose="02020603050405020304" pitchFamily="18" charset="0"/>
-              <a:ea typeface="標楷體" panose="03000509000000000000" pitchFamily="65" charset="-120"/>
-              <a:cs typeface="Times New Roman" panose="02020603050405020304" pitchFamily="18" charset="0"/>
-            </a:endParaRPr>
-          </a:p>
-        </p:txBody>
-      </p:sp>
-      <p:sp>
-        <p:nvSpPr>
           <p:cNvPr id="15" name="標題 1">
             <a:extLst>
               <a:ext uri="{FF2B5EF4-FFF2-40B4-BE49-F238E27FC236}">
@@ -12372,22 +14285,456 @@
               <a:t>: </a:t>
             </a:r>
             <a:r>
-              <a:rPr lang="zh-TW" altLang="en-US" dirty="0">
-                <a:latin typeface="Times New Roman" panose="02020603050405020304" pitchFamily="18" charset="0"/>
-                <a:ea typeface="標楷體" panose="03000509000000000000" pitchFamily="65" charset="-120"/>
-                <a:cs typeface="Times New Roman" panose="02020603050405020304" pitchFamily="18" charset="0"/>
-              </a:rPr>
-              <a:t>軟體校正結果</a:t>
-            </a:r>
+              <a:rPr lang="en-US" altLang="zh-TW" dirty="0"/>
+              <a:t>Video Capture Card</a:t>
+            </a:r>
+            <a:endParaRPr lang="zh-TW" altLang="en-US" dirty="0">
+              <a:latin typeface="Times New Roman" panose="02020603050405020304" pitchFamily="18" charset="0"/>
+              <a:ea typeface="標楷體" panose="03000509000000000000" pitchFamily="65" charset="-120"/>
+              <a:cs typeface="Times New Roman" panose="02020603050405020304" pitchFamily="18" charset="0"/>
+            </a:endParaRPr>
+          </a:p>
+        </p:txBody>
+      </p:sp>
+      <p:sp>
+        <p:nvSpPr>
+          <p:cNvPr id="2" name="文字版面配置區 6">
+            <a:extLst>
+              <a:ext uri="{FF2B5EF4-FFF2-40B4-BE49-F238E27FC236}">
+                <a16:creationId xmlns:a16="http://schemas.microsoft.com/office/drawing/2014/main" id="{033F0CBC-B216-A52F-8C2C-837CAED2E514}"/>
+              </a:ext>
+            </a:extLst>
+          </p:cNvPr>
+          <p:cNvSpPr txBox="1"/>
+          <p:nvPr/>
+        </p:nvSpPr>
+        <p:spPr>
+          <a:xfrm>
+            <a:off x="609602" y="935857"/>
+            <a:ext cx="8686796" cy="4700685"/>
+          </a:xfrm>
+          <a:prstGeom prst="rect">
+            <a:avLst/>
+          </a:prstGeom>
+          <a:noFill/>
+          <a:ln>
+            <a:noFill/>
+          </a:ln>
+        </p:spPr>
+        <p:txBody>
+          <a:bodyPr spcFirstLastPara="1" wrap="square" lIns="91425" tIns="45700" rIns="91425" bIns="45700" anchor="t" anchorCtr="0">
+            <a:noAutofit/>
+          </a:bodyPr>
+          <a:lstStyle>
+            <a:defPPr marR="0" lvl="0" algn="l" rtl="0">
+              <a:lnSpc>
+                <a:spcPct val="100000"/>
+              </a:lnSpc>
+              <a:spcBef>
+                <a:spcPts val="0"/>
+              </a:spcBef>
+              <a:spcAft>
+                <a:spcPts val="0"/>
+              </a:spcAft>
+            </a:defPPr>
+            <a:lvl1pPr marL="457200" marR="0" lvl="0" indent="-406400" algn="l" rtl="0">
+              <a:lnSpc>
+                <a:spcPct val="100000"/>
+              </a:lnSpc>
+              <a:spcBef>
+                <a:spcPts val="560"/>
+              </a:spcBef>
+              <a:spcAft>
+                <a:spcPts val="0"/>
+              </a:spcAft>
+              <a:buClr>
+                <a:schemeClr val="accent2"/>
+              </a:buClr>
+              <a:buSzPts val="2800"/>
+              <a:buFont typeface="Noto Sans Symbols"/>
+              <a:buChar char="❖"/>
+              <a:defRPr sz="2800" b="0" i="0" u="none" strike="noStrike" cap="none">
+                <a:solidFill>
+                  <a:schemeClr val="dk1"/>
+                </a:solidFill>
+                <a:latin typeface="Times New Roman"/>
+                <a:ea typeface="Times New Roman"/>
+                <a:cs typeface="Times New Roman"/>
+                <a:sym typeface="Times New Roman"/>
+              </a:defRPr>
+            </a:lvl1pPr>
+            <a:lvl2pPr marL="914400" marR="0" lvl="1" indent="-381000" algn="l" rtl="0">
+              <a:lnSpc>
+                <a:spcPct val="100000"/>
+              </a:lnSpc>
+              <a:spcBef>
+                <a:spcPts val="480"/>
+              </a:spcBef>
+              <a:spcAft>
+                <a:spcPts val="0"/>
+              </a:spcAft>
+              <a:buClr>
+                <a:srgbClr val="FF5050"/>
+              </a:buClr>
+              <a:buSzPts val="2400"/>
+              <a:buFont typeface="Noto Sans Symbols"/>
+              <a:buChar char="▪"/>
+              <a:defRPr sz="2400" b="0" i="0" u="none" strike="noStrike" cap="none">
+                <a:solidFill>
+                  <a:schemeClr val="dk1"/>
+                </a:solidFill>
+                <a:latin typeface="Times New Roman"/>
+                <a:ea typeface="Times New Roman"/>
+                <a:cs typeface="Times New Roman"/>
+                <a:sym typeface="Times New Roman"/>
+              </a:defRPr>
+            </a:lvl2pPr>
+            <a:lvl3pPr marL="1371600" marR="0" lvl="2" indent="-355600" algn="l" rtl="0">
+              <a:lnSpc>
+                <a:spcPct val="100000"/>
+              </a:lnSpc>
+              <a:spcBef>
+                <a:spcPts val="400"/>
+              </a:spcBef>
+              <a:spcAft>
+                <a:spcPts val="0"/>
+              </a:spcAft>
+              <a:buClr>
+                <a:srgbClr val="6699FF"/>
+              </a:buClr>
+              <a:buSzPts val="2000"/>
+              <a:buFont typeface="Times New Roman"/>
+              <a:buChar char="•"/>
+              <a:defRPr sz="2000" b="0" i="0" u="none" strike="noStrike" cap="none">
+                <a:solidFill>
+                  <a:schemeClr val="dk1"/>
+                </a:solidFill>
+                <a:latin typeface="Times New Roman"/>
+                <a:ea typeface="Times New Roman"/>
+                <a:cs typeface="Times New Roman"/>
+                <a:sym typeface="Times New Roman"/>
+              </a:defRPr>
+            </a:lvl3pPr>
+            <a:lvl4pPr marL="1828800" marR="0" lvl="3" indent="-355600" algn="l" rtl="0">
+              <a:lnSpc>
+                <a:spcPct val="100000"/>
+              </a:lnSpc>
+              <a:spcBef>
+                <a:spcPts val="400"/>
+              </a:spcBef>
+              <a:spcAft>
+                <a:spcPts val="0"/>
+              </a:spcAft>
+              <a:buClr>
+                <a:srgbClr val="FF5050"/>
+              </a:buClr>
+              <a:buSzPts val="2000"/>
+              <a:buFont typeface="Times New Roman"/>
+              <a:buChar char="o"/>
+              <a:defRPr sz="2000" b="0" i="0" u="none" strike="noStrike" cap="none">
+                <a:solidFill>
+                  <a:schemeClr val="dk1"/>
+                </a:solidFill>
+                <a:latin typeface="Times New Roman"/>
+                <a:ea typeface="Times New Roman"/>
+                <a:cs typeface="Times New Roman"/>
+                <a:sym typeface="Times New Roman"/>
+              </a:defRPr>
+            </a:lvl4pPr>
+            <a:lvl5pPr marL="2286000" marR="0" lvl="4" indent="-355600" algn="l" rtl="0">
+              <a:lnSpc>
+                <a:spcPct val="100000"/>
+              </a:lnSpc>
+              <a:spcBef>
+                <a:spcPts val="400"/>
+              </a:spcBef>
+              <a:spcAft>
+                <a:spcPts val="0"/>
+              </a:spcAft>
+              <a:buClr>
+                <a:srgbClr val="FF5050"/>
+              </a:buClr>
+              <a:buSzPts val="2000"/>
+              <a:buFont typeface="Times New Roman"/>
+              <a:buChar char="o"/>
+              <a:defRPr sz="2000" b="0" i="0" u="none" strike="noStrike" cap="none">
+                <a:solidFill>
+                  <a:schemeClr val="dk1"/>
+                </a:solidFill>
+                <a:latin typeface="Times New Roman"/>
+                <a:ea typeface="Times New Roman"/>
+                <a:cs typeface="Times New Roman"/>
+                <a:sym typeface="Times New Roman"/>
+              </a:defRPr>
+            </a:lvl5pPr>
+            <a:lvl6pPr marL="2743200" marR="0" lvl="5" indent="-355600" algn="l" rtl="0">
+              <a:lnSpc>
+                <a:spcPct val="100000"/>
+              </a:lnSpc>
+              <a:spcBef>
+                <a:spcPts val="400"/>
+              </a:spcBef>
+              <a:spcAft>
+                <a:spcPts val="0"/>
+              </a:spcAft>
+              <a:buClr>
+                <a:srgbClr val="FF5050"/>
+              </a:buClr>
+              <a:buSzPts val="2000"/>
+              <a:buFont typeface="Times New Roman"/>
+              <a:buChar char="o"/>
+              <a:defRPr sz="2000" b="0" i="0" u="none" strike="noStrike" cap="none">
+                <a:solidFill>
+                  <a:schemeClr val="dk1"/>
+                </a:solidFill>
+                <a:latin typeface="Times New Roman"/>
+                <a:ea typeface="Times New Roman"/>
+                <a:cs typeface="Times New Roman"/>
+                <a:sym typeface="Times New Roman"/>
+              </a:defRPr>
+            </a:lvl6pPr>
+            <a:lvl7pPr marL="3200400" marR="0" lvl="6" indent="-355600" algn="l" rtl="0">
+              <a:lnSpc>
+                <a:spcPct val="100000"/>
+              </a:lnSpc>
+              <a:spcBef>
+                <a:spcPts val="400"/>
+              </a:spcBef>
+              <a:spcAft>
+                <a:spcPts val="0"/>
+              </a:spcAft>
+              <a:buClr>
+                <a:srgbClr val="FF5050"/>
+              </a:buClr>
+              <a:buSzPts val="2000"/>
+              <a:buFont typeface="Times New Roman"/>
+              <a:buChar char="o"/>
+              <a:defRPr sz="2000" b="0" i="0" u="none" strike="noStrike" cap="none">
+                <a:solidFill>
+                  <a:schemeClr val="dk1"/>
+                </a:solidFill>
+                <a:latin typeface="Times New Roman"/>
+                <a:ea typeface="Times New Roman"/>
+                <a:cs typeface="Times New Roman"/>
+                <a:sym typeface="Times New Roman"/>
+              </a:defRPr>
+            </a:lvl7pPr>
+            <a:lvl8pPr marL="3657600" marR="0" lvl="7" indent="-355600" algn="l" rtl="0">
+              <a:lnSpc>
+                <a:spcPct val="100000"/>
+              </a:lnSpc>
+              <a:spcBef>
+                <a:spcPts val="400"/>
+              </a:spcBef>
+              <a:spcAft>
+                <a:spcPts val="0"/>
+              </a:spcAft>
+              <a:buClr>
+                <a:srgbClr val="FF5050"/>
+              </a:buClr>
+              <a:buSzPts val="2000"/>
+              <a:buFont typeface="Times New Roman"/>
+              <a:buChar char="o"/>
+              <a:defRPr sz="2000" b="0" i="0" u="none" strike="noStrike" cap="none">
+                <a:solidFill>
+                  <a:schemeClr val="dk1"/>
+                </a:solidFill>
+                <a:latin typeface="Times New Roman"/>
+                <a:ea typeface="Times New Roman"/>
+                <a:cs typeface="Times New Roman"/>
+                <a:sym typeface="Times New Roman"/>
+              </a:defRPr>
+            </a:lvl8pPr>
+            <a:lvl9pPr marL="4114800" marR="0" lvl="8" indent="-355600" algn="l" rtl="0">
+              <a:lnSpc>
+                <a:spcPct val="100000"/>
+              </a:lnSpc>
+              <a:spcBef>
+                <a:spcPts val="400"/>
+              </a:spcBef>
+              <a:spcAft>
+                <a:spcPts val="0"/>
+              </a:spcAft>
+              <a:buClr>
+                <a:srgbClr val="FF5050"/>
+              </a:buClr>
+              <a:buSzPts val="2000"/>
+              <a:buFont typeface="Times New Roman"/>
+              <a:buChar char="o"/>
+              <a:defRPr sz="2000" b="0" i="0" u="none" strike="noStrike" cap="none">
+                <a:solidFill>
+                  <a:schemeClr val="dk1"/>
+                </a:solidFill>
+                <a:latin typeface="Times New Roman"/>
+                <a:ea typeface="Times New Roman"/>
+                <a:cs typeface="Times New Roman"/>
+                <a:sym typeface="Times New Roman"/>
+              </a:defRPr>
+            </a:lvl9pPr>
+          </a:lstStyle>
+          <a:p>
+            <a:pPr>
+              <a:lnSpc>
+                <a:spcPct val="150000"/>
+              </a:lnSpc>
+            </a:pPr>
+            <a:r>
+              <a:rPr lang="zh-TW" altLang="en-US" sz="2000" dirty="0">
+                <a:solidFill>
+                  <a:schemeClr val="tx1"/>
+                </a:solidFill>
+                <a:latin typeface="Times New Roman" panose="02020603050405020304" pitchFamily="18" charset="0"/>
+                <a:ea typeface="標楷體" panose="03000509000000000000" pitchFamily="65" charset="-120"/>
+                <a:cs typeface="Times New Roman" panose="02020603050405020304" pitchFamily="18" charset="0"/>
+              </a:rPr>
+              <a:t>研究目的</a:t>
+            </a:r>
+            <a:endParaRPr lang="en-US" altLang="zh-TW" sz="2000" dirty="0">
+              <a:solidFill>
+                <a:schemeClr val="tx1"/>
+              </a:solidFill>
+              <a:latin typeface="Times New Roman" panose="02020603050405020304" pitchFamily="18" charset="0"/>
+              <a:ea typeface="標楷體" panose="03000509000000000000" pitchFamily="65" charset="-120"/>
+              <a:cs typeface="Times New Roman" panose="02020603050405020304" pitchFamily="18" charset="0"/>
+            </a:endParaRPr>
+          </a:p>
+          <a:p>
+            <a:pPr lvl="1">
+              <a:lnSpc>
+                <a:spcPts val="3000"/>
+              </a:lnSpc>
+            </a:pPr>
+            <a:r>
+              <a:rPr lang="zh-TW" altLang="en-US" sz="1600" dirty="0">
+                <a:solidFill>
+                  <a:schemeClr val="tx1"/>
+                </a:solidFill>
+                <a:latin typeface="Times New Roman" panose="02020603050405020304" pitchFamily="18" charset="0"/>
+                <a:ea typeface="標楷體" panose="03000509000000000000" pitchFamily="65" charset="-120"/>
+                <a:cs typeface="Times New Roman" panose="02020603050405020304" pitchFamily="18" charset="0"/>
+              </a:rPr>
+              <a:t>尋找相關開源專案，了解現有技術與實作成果</a:t>
+            </a:r>
+            <a:endParaRPr lang="en-US" altLang="zh-TW" sz="1600" dirty="0">
+              <a:solidFill>
+                <a:schemeClr val="tx1"/>
+              </a:solidFill>
+              <a:latin typeface="Times New Roman" panose="02020603050405020304" pitchFamily="18" charset="0"/>
+              <a:ea typeface="標楷體" panose="03000509000000000000" pitchFamily="65" charset="-120"/>
+              <a:cs typeface="Times New Roman" panose="02020603050405020304" pitchFamily="18" charset="0"/>
+            </a:endParaRPr>
+          </a:p>
+          <a:p>
+            <a:pPr lvl="1">
+              <a:lnSpc>
+                <a:spcPts val="3000"/>
+              </a:lnSpc>
+            </a:pPr>
+            <a:r>
+              <a:rPr lang="zh-TW" altLang="en-US" sz="1600" dirty="0">
+                <a:solidFill>
+                  <a:schemeClr val="tx1"/>
+                </a:solidFill>
+                <a:latin typeface="Times New Roman" panose="02020603050405020304" pitchFamily="18" charset="0"/>
+                <a:ea typeface="標楷體" panose="03000509000000000000" pitchFamily="65" charset="-120"/>
+                <a:cs typeface="Times New Roman" panose="02020603050405020304" pitchFamily="18" charset="0"/>
+              </a:rPr>
+              <a:t>調查各專案使用的 </a:t>
+            </a:r>
+            <a:r>
+              <a:rPr lang="en-US" altLang="zh-TW" sz="1600" dirty="0">
+                <a:solidFill>
+                  <a:schemeClr val="tx1"/>
+                </a:solidFill>
+                <a:latin typeface="Times New Roman" panose="02020603050405020304" pitchFamily="18" charset="0"/>
+                <a:ea typeface="標楷體" panose="03000509000000000000" pitchFamily="65" charset="-120"/>
+                <a:cs typeface="Times New Roman" panose="02020603050405020304" pitchFamily="18" charset="0"/>
+              </a:rPr>
+              <a:t>FPGA</a:t>
+            </a:r>
+            <a:r>
+              <a:rPr lang="zh-TW" altLang="en-US" sz="1600" dirty="0">
+                <a:solidFill>
+                  <a:schemeClr val="tx1"/>
+                </a:solidFill>
+                <a:latin typeface="Times New Roman" panose="02020603050405020304" pitchFamily="18" charset="0"/>
+                <a:ea typeface="標楷體" panose="03000509000000000000" pitchFamily="65" charset="-120"/>
+                <a:cs typeface="Times New Roman" panose="02020603050405020304" pitchFamily="18" charset="0"/>
+              </a:rPr>
+              <a:t>、開發板、框架與 </a:t>
+            </a:r>
+            <a:r>
+              <a:rPr lang="en-US" altLang="zh-TW" sz="1600" dirty="0">
+                <a:solidFill>
+                  <a:schemeClr val="tx1"/>
+                </a:solidFill>
+                <a:latin typeface="Times New Roman" panose="02020603050405020304" pitchFamily="18" charset="0"/>
+                <a:ea typeface="標楷體" panose="03000509000000000000" pitchFamily="65" charset="-120"/>
+                <a:cs typeface="Times New Roman" panose="02020603050405020304" pitchFamily="18" charset="0"/>
+              </a:rPr>
+              <a:t>IP</a:t>
+            </a:r>
+          </a:p>
+          <a:p>
+            <a:pPr lvl="1">
+              <a:lnSpc>
+                <a:spcPts val="3000"/>
+              </a:lnSpc>
+            </a:pPr>
+            <a:r>
+              <a:rPr lang="zh-TW" altLang="en-US" sz="1600" dirty="0">
+                <a:solidFill>
+                  <a:schemeClr val="tx1"/>
+                </a:solidFill>
+                <a:latin typeface="Times New Roman" panose="02020603050405020304" pitchFamily="18" charset="0"/>
+                <a:ea typeface="標楷體" panose="03000509000000000000" pitchFamily="65" charset="-120"/>
+                <a:cs typeface="Times New Roman" panose="02020603050405020304" pitchFamily="18" charset="0"/>
+              </a:rPr>
+              <a:t>比較不同開源生態，作為後續技術選型的依據</a:t>
+            </a:r>
+            <a:endParaRPr lang="en-US" altLang="zh-TW" sz="1600" dirty="0">
+              <a:solidFill>
+                <a:schemeClr val="tx1"/>
+              </a:solidFill>
+              <a:latin typeface="Times New Roman" panose="02020603050405020304" pitchFamily="18" charset="0"/>
+              <a:ea typeface="標楷體" panose="03000509000000000000" pitchFamily="65" charset="-120"/>
+              <a:cs typeface="Times New Roman" panose="02020603050405020304" pitchFamily="18" charset="0"/>
+            </a:endParaRPr>
+          </a:p>
+          <a:p>
+            <a:pPr>
+              <a:lnSpc>
+                <a:spcPts val="3000"/>
+              </a:lnSpc>
+            </a:pPr>
+            <a:r>
+              <a:rPr lang="zh-TW" altLang="en-US" sz="2000" dirty="0">
+                <a:solidFill>
+                  <a:schemeClr val="tx1"/>
+                </a:solidFill>
+                <a:latin typeface="Times New Roman" panose="02020603050405020304" pitchFamily="18" charset="0"/>
+                <a:ea typeface="標楷體" panose="03000509000000000000" pitchFamily="65" charset="-120"/>
+                <a:cs typeface="Times New Roman" panose="02020603050405020304" pitchFamily="18" charset="0"/>
+              </a:rPr>
+              <a:t>目標架構概念</a:t>
+            </a:r>
+            <a:endParaRPr lang="en-US" altLang="zh-TW" sz="2000" dirty="0">
+              <a:solidFill>
+                <a:schemeClr val="tx1"/>
+              </a:solidFill>
+              <a:latin typeface="Times New Roman" panose="02020603050405020304" pitchFamily="18" charset="0"/>
+              <a:ea typeface="標楷體" panose="03000509000000000000" pitchFamily="65" charset="-120"/>
+              <a:cs typeface="Times New Roman" panose="02020603050405020304" pitchFamily="18" charset="0"/>
+            </a:endParaRPr>
           </a:p>
         </p:txBody>
       </p:sp>
       <p:pic>
         <p:nvPicPr>
-          <p:cNvPr id="8" name="圖片 7">
+          <p:cNvPr id="14" name="圖片 13">
             <a:extLst>
               <a:ext uri="{FF2B5EF4-FFF2-40B4-BE49-F238E27FC236}">
-                <a16:creationId xmlns:a16="http://schemas.microsoft.com/office/drawing/2014/main" id="{08779111-C171-3F99-51D4-78A958D4DE1F}"/>
+                <a16:creationId xmlns:a16="http://schemas.microsoft.com/office/drawing/2014/main" id="{803CDD84-5AF2-EE5D-D012-4A7CEED12A1C}"/>
               </a:ext>
             </a:extLst>
           </p:cNvPr>
@@ -12404,38 +14751,8 @@
         </p:blipFill>
         <p:spPr>
           <a:xfrm>
-            <a:off x="2888274" y="1526132"/>
-            <a:ext cx="6974702" cy="4107106"/>
-          </a:xfrm>
-          <a:prstGeom prst="rect">
-            <a:avLst/>
-          </a:prstGeom>
-        </p:spPr>
-      </p:pic>
-      <p:pic>
-        <p:nvPicPr>
-          <p:cNvPr id="6" name="圖片 5">
-            <a:extLst>
-              <a:ext uri="{FF2B5EF4-FFF2-40B4-BE49-F238E27FC236}">
-                <a16:creationId xmlns:a16="http://schemas.microsoft.com/office/drawing/2014/main" id="{CE3BC4E0-7A21-4002-9743-F6D6FB98FAEC}"/>
-              </a:ext>
-            </a:extLst>
-          </p:cNvPr>
-          <p:cNvPicPr>
-            <a:picLocks noChangeAspect="1"/>
-          </p:cNvPicPr>
-          <p:nvPr/>
-        </p:nvPicPr>
-        <p:blipFill>
-          <a:blip r:embed="rId4"/>
-          <a:stretch>
-            <a:fillRect/>
-          </a:stretch>
-        </p:blipFill>
-        <p:spPr>
-          <a:xfrm>
-            <a:off x="202107" y="1526132"/>
-            <a:ext cx="2686167" cy="4804611"/>
+            <a:off x="429610" y="3692363"/>
+            <a:ext cx="9046779" cy="985795"/>
           </a:xfrm>
           <a:prstGeom prst="rect">
             <a:avLst/>
@@ -12445,7 +14762,7 @@
     </p:spTree>
     <p:extLst>
       <p:ext uri="{BB962C8B-B14F-4D97-AF65-F5344CB8AC3E}">
-        <p14:creationId xmlns:p14="http://schemas.microsoft.com/office/powerpoint/2010/main" val="908103831"/>
+        <p14:creationId xmlns:p14="http://schemas.microsoft.com/office/powerpoint/2010/main" val="1137652450"/>
       </p:ext>
     </p:extLst>
   </p:cSld>
@@ -12513,7 +14830,7 @@
                 <a:ea typeface="標楷體" panose="03000509000000000000" pitchFamily="65" charset="-120"/>
                 <a:cs typeface="Times New Roman" panose="02020603050405020304" pitchFamily="18" charset="0"/>
               </a:rPr>
-              <a:t>上次進度</a:t>
+              <a:t>本次進度</a:t>
             </a:r>
             <a:r>
               <a:rPr lang="en-US" altLang="zh-TW" dirty="0">
@@ -12521,10 +14838,18 @@
                 <a:ea typeface="標楷體" panose="03000509000000000000" pitchFamily="65" charset="-120"/>
                 <a:cs typeface="Times New Roman" panose="02020603050405020304" pitchFamily="18" charset="0"/>
               </a:rPr>
-              <a:t>: VCGT</a:t>
-            </a:r>
-            <a:r>
-              <a:rPr lang="zh-TW" altLang="en-US" dirty="0">
+              <a:t>: </a:t>
+            </a:r>
+            <a:r>
+              <a:rPr lang="en-US" altLang="zh-TW" sz="2400" dirty="0">
+                <a:latin typeface="Times New Roman" panose="02020603050405020304" pitchFamily="18" charset="0"/>
+                <a:ea typeface="標楷體" panose="03000509000000000000" pitchFamily="65" charset="-120"/>
+                <a:cs typeface="Times New Roman" panose="02020603050405020304" pitchFamily="18" charset="0"/>
+              </a:rPr>
+              <a:t>NeTV2</a:t>
+            </a:r>
+            <a:r>
+              <a:rPr lang="zh-TW" altLang="en-US" sz="2400" dirty="0">
                 <a:latin typeface="Times New Roman" panose="02020603050405020304" pitchFamily="18" charset="0"/>
                 <a:ea typeface="標楷體" panose="03000509000000000000" pitchFamily="65" charset="-120"/>
                 <a:cs typeface="Times New Roman" panose="02020603050405020304" pitchFamily="18" charset="0"/>
@@ -12532,15 +14857,378 @@
               <a:t> </a:t>
             </a:r>
             <a:r>
-              <a:rPr lang="en-US" altLang="zh-TW" dirty="0">
-                <a:latin typeface="Times New Roman" panose="02020603050405020304" pitchFamily="18" charset="0"/>
-                <a:ea typeface="標楷體" panose="03000509000000000000" pitchFamily="65" charset="-120"/>
-                <a:cs typeface="Times New Roman" panose="02020603050405020304" pitchFamily="18" charset="0"/>
-              </a:rPr>
-              <a:t>flow</a:t>
-            </a:r>
-            <a:r>
-              <a:rPr lang="zh-TW" altLang="en-US" dirty="0">
+              <a:rPr lang="en-US" altLang="zh-TW" sz="2400" dirty="0">
+                <a:latin typeface="Times New Roman" panose="02020603050405020304" pitchFamily="18" charset="0"/>
+                <a:ea typeface="標楷體" panose="03000509000000000000" pitchFamily="65" charset="-120"/>
+                <a:cs typeface="Times New Roman" panose="02020603050405020304" pitchFamily="18" charset="0"/>
+              </a:rPr>
+              <a:t>- FPGA</a:t>
+            </a:r>
+            <a:endParaRPr lang="zh-TW" altLang="en-US" dirty="0">
+              <a:latin typeface="Times New Roman" panose="02020603050405020304" pitchFamily="18" charset="0"/>
+              <a:ea typeface="標楷體" panose="03000509000000000000" pitchFamily="65" charset="-120"/>
+              <a:cs typeface="Times New Roman" panose="02020603050405020304" pitchFamily="18" charset="0"/>
+            </a:endParaRPr>
+          </a:p>
+        </p:txBody>
+      </p:sp>
+      <p:sp>
+        <p:nvSpPr>
+          <p:cNvPr id="2" name="文字版面配置區 6">
+            <a:extLst>
+              <a:ext uri="{FF2B5EF4-FFF2-40B4-BE49-F238E27FC236}">
+                <a16:creationId xmlns:a16="http://schemas.microsoft.com/office/drawing/2014/main" id="{D929304B-5341-8BBF-E71F-AF5F2FE7268A}"/>
+              </a:ext>
+            </a:extLst>
+          </p:cNvPr>
+          <p:cNvSpPr txBox="1"/>
+          <p:nvPr/>
+        </p:nvSpPr>
+        <p:spPr>
+          <a:xfrm>
+            <a:off x="609602" y="935857"/>
+            <a:ext cx="8808717" cy="5448215"/>
+          </a:xfrm>
+          <a:prstGeom prst="rect">
+            <a:avLst/>
+          </a:prstGeom>
+          <a:noFill/>
+          <a:ln>
+            <a:noFill/>
+          </a:ln>
+        </p:spPr>
+        <p:txBody>
+          <a:bodyPr spcFirstLastPara="1" wrap="square" lIns="91425" tIns="45700" rIns="91425" bIns="45700" anchor="t" anchorCtr="0">
+            <a:noAutofit/>
+          </a:bodyPr>
+          <a:lstStyle>
+            <a:defPPr marR="0" lvl="0" algn="l" rtl="0">
+              <a:lnSpc>
+                <a:spcPct val="100000"/>
+              </a:lnSpc>
+              <a:spcBef>
+                <a:spcPts val="0"/>
+              </a:spcBef>
+              <a:spcAft>
+                <a:spcPts val="0"/>
+              </a:spcAft>
+            </a:defPPr>
+            <a:lvl1pPr marL="457200" marR="0" lvl="0" indent="-406400" algn="l" rtl="0">
+              <a:lnSpc>
+                <a:spcPct val="100000"/>
+              </a:lnSpc>
+              <a:spcBef>
+                <a:spcPts val="560"/>
+              </a:spcBef>
+              <a:spcAft>
+                <a:spcPts val="0"/>
+              </a:spcAft>
+              <a:buClr>
+                <a:schemeClr val="accent2"/>
+              </a:buClr>
+              <a:buSzPts val="2800"/>
+              <a:buFont typeface="Noto Sans Symbols"/>
+              <a:buChar char="❖"/>
+              <a:defRPr sz="2800" b="0" i="0" u="none" strike="noStrike" cap="none">
+                <a:solidFill>
+                  <a:schemeClr val="dk1"/>
+                </a:solidFill>
+                <a:latin typeface="Times New Roman"/>
+                <a:ea typeface="Times New Roman"/>
+                <a:cs typeface="Times New Roman"/>
+                <a:sym typeface="Times New Roman"/>
+              </a:defRPr>
+            </a:lvl1pPr>
+            <a:lvl2pPr marL="914400" marR="0" lvl="1" indent="-381000" algn="l" rtl="0">
+              <a:lnSpc>
+                <a:spcPct val="100000"/>
+              </a:lnSpc>
+              <a:spcBef>
+                <a:spcPts val="480"/>
+              </a:spcBef>
+              <a:spcAft>
+                <a:spcPts val="0"/>
+              </a:spcAft>
+              <a:buClr>
+                <a:srgbClr val="FF5050"/>
+              </a:buClr>
+              <a:buSzPts val="2400"/>
+              <a:buFont typeface="Noto Sans Symbols"/>
+              <a:buChar char="▪"/>
+              <a:defRPr sz="2400" b="0" i="0" u="none" strike="noStrike" cap="none">
+                <a:solidFill>
+                  <a:schemeClr val="dk1"/>
+                </a:solidFill>
+                <a:latin typeface="Times New Roman"/>
+                <a:ea typeface="Times New Roman"/>
+                <a:cs typeface="Times New Roman"/>
+                <a:sym typeface="Times New Roman"/>
+              </a:defRPr>
+            </a:lvl2pPr>
+            <a:lvl3pPr marL="1371600" marR="0" lvl="2" indent="-355600" algn="l" rtl="0">
+              <a:lnSpc>
+                <a:spcPct val="100000"/>
+              </a:lnSpc>
+              <a:spcBef>
+                <a:spcPts val="400"/>
+              </a:spcBef>
+              <a:spcAft>
+                <a:spcPts val="0"/>
+              </a:spcAft>
+              <a:buClr>
+                <a:srgbClr val="6699FF"/>
+              </a:buClr>
+              <a:buSzPts val="2000"/>
+              <a:buFont typeface="Times New Roman"/>
+              <a:buChar char="•"/>
+              <a:defRPr sz="2000" b="0" i="0" u="none" strike="noStrike" cap="none">
+                <a:solidFill>
+                  <a:schemeClr val="dk1"/>
+                </a:solidFill>
+                <a:latin typeface="Times New Roman"/>
+                <a:ea typeface="Times New Roman"/>
+                <a:cs typeface="Times New Roman"/>
+                <a:sym typeface="Times New Roman"/>
+              </a:defRPr>
+            </a:lvl3pPr>
+            <a:lvl4pPr marL="1828800" marR="0" lvl="3" indent="-355600" algn="l" rtl="0">
+              <a:lnSpc>
+                <a:spcPct val="100000"/>
+              </a:lnSpc>
+              <a:spcBef>
+                <a:spcPts val="400"/>
+              </a:spcBef>
+              <a:spcAft>
+                <a:spcPts val="0"/>
+              </a:spcAft>
+              <a:buClr>
+                <a:srgbClr val="FF5050"/>
+              </a:buClr>
+              <a:buSzPts val="2000"/>
+              <a:buFont typeface="Times New Roman"/>
+              <a:buChar char="o"/>
+              <a:defRPr sz="2000" b="0" i="0" u="none" strike="noStrike" cap="none">
+                <a:solidFill>
+                  <a:schemeClr val="dk1"/>
+                </a:solidFill>
+                <a:latin typeface="Times New Roman"/>
+                <a:ea typeface="Times New Roman"/>
+                <a:cs typeface="Times New Roman"/>
+                <a:sym typeface="Times New Roman"/>
+              </a:defRPr>
+            </a:lvl4pPr>
+            <a:lvl5pPr marL="2286000" marR="0" lvl="4" indent="-355600" algn="l" rtl="0">
+              <a:lnSpc>
+                <a:spcPct val="100000"/>
+              </a:lnSpc>
+              <a:spcBef>
+                <a:spcPts val="400"/>
+              </a:spcBef>
+              <a:spcAft>
+                <a:spcPts val="0"/>
+              </a:spcAft>
+              <a:buClr>
+                <a:srgbClr val="FF5050"/>
+              </a:buClr>
+              <a:buSzPts val="2000"/>
+              <a:buFont typeface="Times New Roman"/>
+              <a:buChar char="o"/>
+              <a:defRPr sz="2000" b="0" i="0" u="none" strike="noStrike" cap="none">
+                <a:solidFill>
+                  <a:schemeClr val="dk1"/>
+                </a:solidFill>
+                <a:latin typeface="Times New Roman"/>
+                <a:ea typeface="Times New Roman"/>
+                <a:cs typeface="Times New Roman"/>
+                <a:sym typeface="Times New Roman"/>
+              </a:defRPr>
+            </a:lvl5pPr>
+            <a:lvl6pPr marL="2743200" marR="0" lvl="5" indent="-355600" algn="l" rtl="0">
+              <a:lnSpc>
+                <a:spcPct val="100000"/>
+              </a:lnSpc>
+              <a:spcBef>
+                <a:spcPts val="400"/>
+              </a:spcBef>
+              <a:spcAft>
+                <a:spcPts val="0"/>
+              </a:spcAft>
+              <a:buClr>
+                <a:srgbClr val="FF5050"/>
+              </a:buClr>
+              <a:buSzPts val="2000"/>
+              <a:buFont typeface="Times New Roman"/>
+              <a:buChar char="o"/>
+              <a:defRPr sz="2000" b="0" i="0" u="none" strike="noStrike" cap="none">
+                <a:solidFill>
+                  <a:schemeClr val="dk1"/>
+                </a:solidFill>
+                <a:latin typeface="Times New Roman"/>
+                <a:ea typeface="Times New Roman"/>
+                <a:cs typeface="Times New Roman"/>
+                <a:sym typeface="Times New Roman"/>
+              </a:defRPr>
+            </a:lvl6pPr>
+            <a:lvl7pPr marL="3200400" marR="0" lvl="6" indent="-355600" algn="l" rtl="0">
+              <a:lnSpc>
+                <a:spcPct val="100000"/>
+              </a:lnSpc>
+              <a:spcBef>
+                <a:spcPts val="400"/>
+              </a:spcBef>
+              <a:spcAft>
+                <a:spcPts val="0"/>
+              </a:spcAft>
+              <a:buClr>
+                <a:srgbClr val="FF5050"/>
+              </a:buClr>
+              <a:buSzPts val="2000"/>
+              <a:buFont typeface="Times New Roman"/>
+              <a:buChar char="o"/>
+              <a:defRPr sz="2000" b="0" i="0" u="none" strike="noStrike" cap="none">
+                <a:solidFill>
+                  <a:schemeClr val="dk1"/>
+                </a:solidFill>
+                <a:latin typeface="Times New Roman"/>
+                <a:ea typeface="Times New Roman"/>
+                <a:cs typeface="Times New Roman"/>
+                <a:sym typeface="Times New Roman"/>
+              </a:defRPr>
+            </a:lvl7pPr>
+            <a:lvl8pPr marL="3657600" marR="0" lvl="7" indent="-355600" algn="l" rtl="0">
+              <a:lnSpc>
+                <a:spcPct val="100000"/>
+              </a:lnSpc>
+              <a:spcBef>
+                <a:spcPts val="400"/>
+              </a:spcBef>
+              <a:spcAft>
+                <a:spcPts val="0"/>
+              </a:spcAft>
+              <a:buClr>
+                <a:srgbClr val="FF5050"/>
+              </a:buClr>
+              <a:buSzPts val="2000"/>
+              <a:buFont typeface="Times New Roman"/>
+              <a:buChar char="o"/>
+              <a:defRPr sz="2000" b="0" i="0" u="none" strike="noStrike" cap="none">
+                <a:solidFill>
+                  <a:schemeClr val="dk1"/>
+                </a:solidFill>
+                <a:latin typeface="Times New Roman"/>
+                <a:ea typeface="Times New Roman"/>
+                <a:cs typeface="Times New Roman"/>
+                <a:sym typeface="Times New Roman"/>
+              </a:defRPr>
+            </a:lvl8pPr>
+            <a:lvl9pPr marL="4114800" marR="0" lvl="8" indent="-355600" algn="l" rtl="0">
+              <a:lnSpc>
+                <a:spcPct val="100000"/>
+              </a:lnSpc>
+              <a:spcBef>
+                <a:spcPts val="400"/>
+              </a:spcBef>
+              <a:spcAft>
+                <a:spcPts val="0"/>
+              </a:spcAft>
+              <a:buClr>
+                <a:srgbClr val="FF5050"/>
+              </a:buClr>
+              <a:buSzPts val="2000"/>
+              <a:buFont typeface="Times New Roman"/>
+              <a:buChar char="o"/>
+              <a:defRPr sz="2000" b="0" i="0" u="none" strike="noStrike" cap="none">
+                <a:solidFill>
+                  <a:schemeClr val="dk1"/>
+                </a:solidFill>
+                <a:latin typeface="Times New Roman"/>
+                <a:ea typeface="Times New Roman"/>
+                <a:cs typeface="Times New Roman"/>
+                <a:sym typeface="Times New Roman"/>
+              </a:defRPr>
+            </a:lvl9pPr>
+          </a:lstStyle>
+          <a:p>
+            <a:pPr>
+              <a:lnSpc>
+                <a:spcPts val="3000"/>
+              </a:lnSpc>
+            </a:pPr>
+            <a:r>
+              <a:rPr lang="zh-TW" altLang="en-US" sz="2000" dirty="0">
+                <a:solidFill>
+                  <a:schemeClr val="tx1"/>
+                </a:solidFill>
+                <a:latin typeface="Times New Roman" panose="02020603050405020304" pitchFamily="18" charset="0"/>
+                <a:ea typeface="標楷體" panose="03000509000000000000" pitchFamily="65" charset="-120"/>
+                <a:cs typeface="Times New Roman" panose="02020603050405020304" pitchFamily="18" charset="0"/>
+              </a:rPr>
+              <a:t>定位</a:t>
+            </a:r>
+            <a:endParaRPr lang="en-US" altLang="zh-TW" sz="2000" dirty="0">
+              <a:solidFill>
+                <a:schemeClr val="tx1"/>
+              </a:solidFill>
+              <a:latin typeface="Times New Roman" panose="02020603050405020304" pitchFamily="18" charset="0"/>
+              <a:ea typeface="標楷體" panose="03000509000000000000" pitchFamily="65" charset="-120"/>
+              <a:cs typeface="Times New Roman" panose="02020603050405020304" pitchFamily="18" charset="0"/>
+            </a:endParaRPr>
+          </a:p>
+          <a:p>
+            <a:pPr lvl="1">
+              <a:lnSpc>
+                <a:spcPts val="3000"/>
+              </a:lnSpc>
+            </a:pPr>
+            <a:r>
+              <a:rPr lang="zh-TW" altLang="en-US" sz="1600" dirty="0">
+                <a:solidFill>
+                  <a:schemeClr val="tx1"/>
+                </a:solidFill>
+                <a:latin typeface="Times New Roman" panose="02020603050405020304" pitchFamily="18" charset="0"/>
+                <a:ea typeface="標楷體" panose="03000509000000000000" pitchFamily="65" charset="-120"/>
+                <a:cs typeface="Times New Roman" panose="02020603050405020304" pitchFamily="18" charset="0"/>
+              </a:rPr>
+              <a:t>以 </a:t>
+            </a:r>
+            <a:r>
+              <a:rPr lang="en-US" altLang="zh-TW" sz="1600" dirty="0" err="1">
+                <a:solidFill>
+                  <a:schemeClr val="tx1"/>
+                </a:solidFill>
+                <a:latin typeface="Times New Roman" panose="02020603050405020304" pitchFamily="18" charset="0"/>
+                <a:ea typeface="標楷體" panose="03000509000000000000" pitchFamily="65" charset="-120"/>
+                <a:cs typeface="Times New Roman" panose="02020603050405020304" pitchFamily="18" charset="0"/>
+              </a:rPr>
+              <a:t>LiteX</a:t>
+            </a:r>
+            <a:r>
+              <a:rPr lang="en-US" altLang="zh-TW" sz="1600" dirty="0">
+                <a:solidFill>
+                  <a:schemeClr val="tx1"/>
+                </a:solidFill>
+                <a:latin typeface="Times New Roman" panose="02020603050405020304" pitchFamily="18" charset="0"/>
+                <a:ea typeface="標楷體" panose="03000509000000000000" pitchFamily="65" charset="-120"/>
+                <a:cs typeface="Times New Roman" panose="02020603050405020304" pitchFamily="18" charset="0"/>
+              </a:rPr>
+              <a:t> / </a:t>
+            </a:r>
+            <a:r>
+              <a:rPr lang="en-US" altLang="zh-TW" sz="1600" dirty="0" err="1">
+                <a:solidFill>
+                  <a:schemeClr val="tx1"/>
+                </a:solidFill>
+                <a:latin typeface="Times New Roman" panose="02020603050405020304" pitchFamily="18" charset="0"/>
+                <a:ea typeface="標楷體" panose="03000509000000000000" pitchFamily="65" charset="-120"/>
+                <a:cs typeface="Times New Roman" panose="02020603050405020304" pitchFamily="18" charset="0"/>
+              </a:rPr>
+              <a:t>Migen</a:t>
+            </a:r>
+            <a:r>
+              <a:rPr lang="en-US" altLang="zh-TW" sz="1600" dirty="0">
+                <a:solidFill>
+                  <a:schemeClr val="tx1"/>
+                </a:solidFill>
                 <a:latin typeface="Times New Roman" panose="02020603050405020304" pitchFamily="18" charset="0"/>
                 <a:ea typeface="標楷體" panose="03000509000000000000" pitchFamily="65" charset="-120"/>
                 <a:cs typeface="Times New Roman" panose="02020603050405020304" pitchFamily="18" charset="0"/>
@@ -12548,14 +15236,334 @@
               <a:t> </a:t>
             </a:r>
             <a:r>
-              <a:rPr lang="en-US" altLang="zh-TW" dirty="0">
-                <a:latin typeface="Times New Roman" panose="02020603050405020304" pitchFamily="18" charset="0"/>
-                <a:ea typeface="標楷體" panose="03000509000000000000" pitchFamily="65" charset="-120"/>
-                <a:cs typeface="Times New Roman" panose="02020603050405020304" pitchFamily="18" charset="0"/>
-              </a:rPr>
-              <a:t>chart</a:t>
-            </a:r>
-            <a:endParaRPr lang="zh-TW" altLang="en-US" dirty="0">
+              <a:rPr lang="zh-TW" altLang="en-US" sz="1600" dirty="0">
+                <a:solidFill>
+                  <a:schemeClr val="tx1"/>
+                </a:solidFill>
+                <a:latin typeface="Times New Roman" panose="02020603050405020304" pitchFamily="18" charset="0"/>
+                <a:ea typeface="標楷體" panose="03000509000000000000" pitchFamily="65" charset="-120"/>
+                <a:cs typeface="Times New Roman" panose="02020603050405020304" pitchFamily="18" charset="0"/>
+              </a:rPr>
+              <a:t>建構 </a:t>
+            </a:r>
+            <a:r>
+              <a:rPr lang="en-US" altLang="zh-TW" sz="1600" dirty="0">
+                <a:solidFill>
+                  <a:schemeClr val="tx1"/>
+                </a:solidFill>
+                <a:latin typeface="Times New Roman" panose="02020603050405020304" pitchFamily="18" charset="0"/>
+                <a:ea typeface="標楷體" panose="03000509000000000000" pitchFamily="65" charset="-120"/>
+                <a:cs typeface="Times New Roman" panose="02020603050405020304" pitchFamily="18" charset="0"/>
+              </a:rPr>
+              <a:t>FPGA </a:t>
+            </a:r>
+            <a:r>
+              <a:rPr lang="zh-TW" altLang="en-US" sz="1600" dirty="0">
+                <a:solidFill>
+                  <a:schemeClr val="tx1"/>
+                </a:solidFill>
+                <a:latin typeface="Times New Roman" panose="02020603050405020304" pitchFamily="18" charset="0"/>
+                <a:ea typeface="標楷體" panose="03000509000000000000" pitchFamily="65" charset="-120"/>
+                <a:cs typeface="Times New Roman" panose="02020603050405020304" pitchFamily="18" charset="0"/>
+              </a:rPr>
+              <a:t>硬體系統，實作 </a:t>
+            </a:r>
+            <a:r>
+              <a:rPr lang="en-US" altLang="zh-TW" sz="1600" dirty="0">
+                <a:solidFill>
+                  <a:schemeClr val="tx1"/>
+                </a:solidFill>
+                <a:latin typeface="Times New Roman" panose="02020603050405020304" pitchFamily="18" charset="0"/>
+                <a:ea typeface="標楷體" panose="03000509000000000000" pitchFamily="65" charset="-120"/>
+                <a:cs typeface="Times New Roman" panose="02020603050405020304" pitchFamily="18" charset="0"/>
+              </a:rPr>
+              <a:t>HDMI </a:t>
+            </a:r>
+            <a:r>
+              <a:rPr lang="zh-TW" altLang="en-US" sz="1600" dirty="0">
+                <a:solidFill>
+                  <a:schemeClr val="tx1"/>
+                </a:solidFill>
+                <a:latin typeface="Times New Roman" panose="02020603050405020304" pitchFamily="18" charset="0"/>
+                <a:ea typeface="標楷體" panose="03000509000000000000" pitchFamily="65" charset="-120"/>
+                <a:cs typeface="Times New Roman" panose="02020603050405020304" pitchFamily="18" charset="0"/>
+              </a:rPr>
+              <a:t>影像輸入、</a:t>
+            </a:r>
+            <a:r>
+              <a:rPr lang="en-US" altLang="zh-TW" sz="1600" dirty="0">
+                <a:solidFill>
+                  <a:schemeClr val="tx1"/>
+                </a:solidFill>
+                <a:latin typeface="Times New Roman" panose="02020603050405020304" pitchFamily="18" charset="0"/>
+                <a:ea typeface="標楷體" panose="03000509000000000000" pitchFamily="65" charset="-120"/>
+                <a:cs typeface="Times New Roman" panose="02020603050405020304" pitchFamily="18" charset="0"/>
+              </a:rPr>
+              <a:t>DDR3 </a:t>
+            </a:r>
+            <a:r>
+              <a:rPr lang="zh-TW" altLang="en-US" sz="1600" dirty="0">
+                <a:solidFill>
+                  <a:schemeClr val="tx1"/>
+                </a:solidFill>
+                <a:latin typeface="Times New Roman" panose="02020603050405020304" pitchFamily="18" charset="0"/>
+                <a:ea typeface="標楷體" panose="03000509000000000000" pitchFamily="65" charset="-120"/>
+                <a:cs typeface="Times New Roman" panose="02020603050405020304" pitchFamily="18" charset="0"/>
+              </a:rPr>
+              <a:t>緩衝、影像合成與 </a:t>
+            </a:r>
+            <a:r>
+              <a:rPr lang="en-US" altLang="zh-TW" sz="1600" dirty="0">
+                <a:solidFill>
+                  <a:schemeClr val="tx1"/>
+                </a:solidFill>
+                <a:latin typeface="Times New Roman" panose="02020603050405020304" pitchFamily="18" charset="0"/>
+                <a:ea typeface="標楷體" panose="03000509000000000000" pitchFamily="65" charset="-120"/>
+                <a:cs typeface="Times New Roman" panose="02020603050405020304" pitchFamily="18" charset="0"/>
+              </a:rPr>
+              <a:t>HDMI </a:t>
+            </a:r>
+            <a:r>
+              <a:rPr lang="zh-TW" altLang="en-US" sz="1600" dirty="0">
+                <a:solidFill>
+                  <a:schemeClr val="tx1"/>
+                </a:solidFill>
+                <a:latin typeface="Times New Roman" panose="02020603050405020304" pitchFamily="18" charset="0"/>
+                <a:ea typeface="標楷體" panose="03000509000000000000" pitchFamily="65" charset="-120"/>
+                <a:cs typeface="Times New Roman" panose="02020603050405020304" pitchFamily="18" charset="0"/>
+              </a:rPr>
+              <a:t>輸出</a:t>
+            </a:r>
+            <a:endParaRPr lang="en-US" altLang="zh-TW" sz="1600" dirty="0">
+              <a:solidFill>
+                <a:schemeClr val="tx1"/>
+              </a:solidFill>
+              <a:latin typeface="Times New Roman" panose="02020603050405020304" pitchFamily="18" charset="0"/>
+              <a:ea typeface="標楷體" panose="03000509000000000000" pitchFamily="65" charset="-120"/>
+              <a:cs typeface="Times New Roman" panose="02020603050405020304" pitchFamily="18" charset="0"/>
+            </a:endParaRPr>
+          </a:p>
+          <a:p>
+            <a:pPr>
+              <a:lnSpc>
+                <a:spcPts val="3000"/>
+              </a:lnSpc>
+            </a:pPr>
+            <a:r>
+              <a:rPr lang="zh-TW" altLang="en-US" sz="2000" dirty="0">
+                <a:solidFill>
+                  <a:schemeClr val="tx1"/>
+                </a:solidFill>
+                <a:latin typeface="Times New Roman" panose="02020603050405020304" pitchFamily="18" charset="0"/>
+                <a:ea typeface="標楷體" panose="03000509000000000000" pitchFamily="65" charset="-120"/>
+                <a:cs typeface="Times New Roman" panose="02020603050405020304" pitchFamily="18" charset="0"/>
+              </a:rPr>
+              <a:t>架構</a:t>
+            </a:r>
+            <a:endParaRPr lang="en-US" altLang="zh-TW" sz="2000" dirty="0">
+              <a:solidFill>
+                <a:schemeClr val="tx1"/>
+              </a:solidFill>
+              <a:latin typeface="Times New Roman" panose="02020603050405020304" pitchFamily="18" charset="0"/>
+              <a:ea typeface="標楷體" panose="03000509000000000000" pitchFamily="65" charset="-120"/>
+              <a:cs typeface="Times New Roman" panose="02020603050405020304" pitchFamily="18" charset="0"/>
+            </a:endParaRPr>
+          </a:p>
+          <a:p>
+            <a:pPr>
+              <a:lnSpc>
+                <a:spcPts val="3000"/>
+              </a:lnSpc>
+            </a:pPr>
+            <a:endParaRPr lang="en-US" altLang="zh-TW" sz="2000" dirty="0">
+              <a:solidFill>
+                <a:schemeClr val="tx1"/>
+              </a:solidFill>
+              <a:latin typeface="Times New Roman" panose="02020603050405020304" pitchFamily="18" charset="0"/>
+              <a:ea typeface="標楷體" panose="03000509000000000000" pitchFamily="65" charset="-120"/>
+              <a:cs typeface="Times New Roman" panose="02020603050405020304" pitchFamily="18" charset="0"/>
+            </a:endParaRPr>
+          </a:p>
+          <a:p>
+            <a:pPr>
+              <a:lnSpc>
+                <a:spcPts val="3000"/>
+              </a:lnSpc>
+            </a:pPr>
+            <a:endParaRPr lang="en-US" altLang="zh-TW" sz="2000" dirty="0">
+              <a:solidFill>
+                <a:schemeClr val="tx1"/>
+              </a:solidFill>
+              <a:latin typeface="Times New Roman" panose="02020603050405020304" pitchFamily="18" charset="0"/>
+              <a:ea typeface="標楷體" panose="03000509000000000000" pitchFamily="65" charset="-120"/>
+              <a:cs typeface="Times New Roman" panose="02020603050405020304" pitchFamily="18" charset="0"/>
+            </a:endParaRPr>
+          </a:p>
+          <a:p>
+            <a:pPr>
+              <a:lnSpc>
+                <a:spcPts val="3000"/>
+              </a:lnSpc>
+            </a:pPr>
+            <a:endParaRPr lang="en-US" altLang="zh-TW" sz="2000" dirty="0">
+              <a:solidFill>
+                <a:schemeClr val="tx1"/>
+              </a:solidFill>
+              <a:latin typeface="Times New Roman" panose="02020603050405020304" pitchFamily="18" charset="0"/>
+              <a:ea typeface="標楷體" panose="03000509000000000000" pitchFamily="65" charset="-120"/>
+              <a:cs typeface="Times New Roman" panose="02020603050405020304" pitchFamily="18" charset="0"/>
+            </a:endParaRPr>
+          </a:p>
+          <a:p>
+            <a:pPr>
+              <a:lnSpc>
+                <a:spcPts val="3000"/>
+              </a:lnSpc>
+            </a:pPr>
+            <a:r>
+              <a:rPr lang="zh-TW" altLang="en-US" sz="2000" dirty="0">
+                <a:latin typeface="Times New Roman" panose="02020603050405020304" pitchFamily="18" charset="0"/>
+                <a:ea typeface="標楷體" panose="03000509000000000000" pitchFamily="65" charset="-120"/>
+                <a:cs typeface="Times New Roman" panose="02020603050405020304" pitchFamily="18" charset="0"/>
+              </a:rPr>
+              <a:t>晶片與硬體型號</a:t>
+            </a:r>
+            <a:endParaRPr lang="en-US" altLang="zh-TW" sz="2000" dirty="0">
+              <a:latin typeface="Times New Roman" panose="02020603050405020304" pitchFamily="18" charset="0"/>
+              <a:ea typeface="標楷體" panose="03000509000000000000" pitchFamily="65" charset="-120"/>
+              <a:cs typeface="Times New Roman" panose="02020603050405020304" pitchFamily="18" charset="0"/>
+            </a:endParaRPr>
+          </a:p>
+          <a:p>
+            <a:pPr lvl="1">
+              <a:lnSpc>
+                <a:spcPts val="3000"/>
+              </a:lnSpc>
+            </a:pPr>
+            <a:r>
+              <a:rPr lang="en-US" altLang="zh-TW" sz="1600" dirty="0">
+                <a:latin typeface="Times New Roman" panose="02020603050405020304" pitchFamily="18" charset="0"/>
+                <a:ea typeface="標楷體" panose="03000509000000000000" pitchFamily="65" charset="-120"/>
+                <a:cs typeface="Times New Roman" panose="02020603050405020304" pitchFamily="18" charset="0"/>
+              </a:rPr>
+              <a:t>FPGA </a:t>
+            </a:r>
+            <a:r>
+              <a:rPr lang="zh-TW" altLang="en-US" sz="1600" dirty="0">
+                <a:latin typeface="Times New Roman" panose="02020603050405020304" pitchFamily="18" charset="0"/>
+                <a:ea typeface="標楷體" panose="03000509000000000000" pitchFamily="65" charset="-120"/>
+                <a:cs typeface="Times New Roman" panose="02020603050405020304" pitchFamily="18" charset="0"/>
+              </a:rPr>
+              <a:t>開發版 </a:t>
+            </a:r>
+            <a:r>
+              <a:rPr lang="en-US" altLang="zh-TW" sz="1600" dirty="0">
+                <a:latin typeface="Times New Roman" panose="02020603050405020304" pitchFamily="18" charset="0"/>
+                <a:ea typeface="標楷體" panose="03000509000000000000" pitchFamily="65" charset="-120"/>
+                <a:cs typeface="Times New Roman" panose="02020603050405020304" pitchFamily="18" charset="0"/>
+              </a:rPr>
+              <a:t>/</a:t>
+            </a:r>
+            <a:r>
+              <a:rPr lang="zh-TW" altLang="en-US" sz="1600" dirty="0">
+                <a:latin typeface="Times New Roman" panose="02020603050405020304" pitchFamily="18" charset="0"/>
+                <a:ea typeface="標楷體" panose="03000509000000000000" pitchFamily="65" charset="-120"/>
+                <a:cs typeface="Times New Roman" panose="02020603050405020304" pitchFamily="18" charset="0"/>
+              </a:rPr>
+              <a:t> 晶片：</a:t>
+            </a:r>
+            <a:r>
+              <a:rPr lang="en-US" altLang="zh-TW" sz="1600" dirty="0">
+                <a:latin typeface="Times New Roman" panose="02020603050405020304" pitchFamily="18" charset="0"/>
+                <a:ea typeface="標楷體" panose="03000509000000000000" pitchFamily="65" charset="-120"/>
+                <a:cs typeface="Times New Roman" panose="02020603050405020304" pitchFamily="18" charset="0"/>
+              </a:rPr>
+              <a:t>NeTV2</a:t>
+            </a:r>
+            <a:r>
+              <a:rPr lang="zh-TW" altLang="en-US" sz="1600" dirty="0">
+                <a:latin typeface="Times New Roman" panose="02020603050405020304" pitchFamily="18" charset="0"/>
+                <a:ea typeface="標楷體" panose="03000509000000000000" pitchFamily="65" charset="-120"/>
+                <a:cs typeface="Times New Roman" panose="02020603050405020304" pitchFamily="18" charset="0"/>
+              </a:rPr>
+              <a:t> </a:t>
+            </a:r>
+            <a:r>
+              <a:rPr lang="en-US" altLang="zh-TW" sz="1600" dirty="0">
+                <a:latin typeface="Times New Roman" panose="02020603050405020304" pitchFamily="18" charset="0"/>
+                <a:ea typeface="標楷體" panose="03000509000000000000" pitchFamily="65" charset="-120"/>
+                <a:cs typeface="Times New Roman" panose="02020603050405020304" pitchFamily="18" charset="0"/>
+              </a:rPr>
+              <a:t>/ Xilinx Artix-7</a:t>
+            </a:r>
+          </a:p>
+          <a:p>
+            <a:pPr lvl="1">
+              <a:lnSpc>
+                <a:spcPts val="3000"/>
+              </a:lnSpc>
+            </a:pPr>
+            <a:r>
+              <a:rPr lang="zh-TW" altLang="en-US" sz="1600" dirty="0">
+                <a:latin typeface="Times New Roman" panose="02020603050405020304" pitchFamily="18" charset="0"/>
+                <a:ea typeface="標楷體" panose="03000509000000000000" pitchFamily="65" charset="-120"/>
+                <a:cs typeface="Times New Roman" panose="02020603050405020304" pitchFamily="18" charset="0"/>
+              </a:rPr>
+              <a:t>開發框架：</a:t>
+            </a:r>
+            <a:r>
+              <a:rPr lang="en-US" altLang="zh-TW" sz="1600" dirty="0" err="1">
+                <a:latin typeface="Times New Roman" panose="02020603050405020304" pitchFamily="18" charset="0"/>
+                <a:ea typeface="標楷體" panose="03000509000000000000" pitchFamily="65" charset="-120"/>
+                <a:cs typeface="Times New Roman" panose="02020603050405020304" pitchFamily="18" charset="0"/>
+              </a:rPr>
+              <a:t>LiteX</a:t>
+            </a:r>
+            <a:r>
+              <a:rPr lang="zh-TW" altLang="en-US" sz="1600" dirty="0">
+                <a:latin typeface="Times New Roman" panose="02020603050405020304" pitchFamily="18" charset="0"/>
+                <a:ea typeface="標楷體" panose="03000509000000000000" pitchFamily="65" charset="-120"/>
+                <a:cs typeface="Times New Roman" panose="02020603050405020304" pitchFamily="18" charset="0"/>
+              </a:rPr>
+              <a:t>、</a:t>
+            </a:r>
+            <a:r>
+              <a:rPr lang="en-US" altLang="zh-TW" sz="1600" dirty="0" err="1">
+                <a:latin typeface="Times New Roman" panose="02020603050405020304" pitchFamily="18" charset="0"/>
+                <a:ea typeface="標楷體" panose="03000509000000000000" pitchFamily="65" charset="-120"/>
+                <a:cs typeface="Times New Roman" panose="02020603050405020304" pitchFamily="18" charset="0"/>
+              </a:rPr>
+              <a:t>Migen</a:t>
+            </a:r>
+            <a:endParaRPr lang="en-US" altLang="zh-TW" sz="1600" dirty="0">
+              <a:latin typeface="Times New Roman" panose="02020603050405020304" pitchFamily="18" charset="0"/>
+              <a:ea typeface="標楷體" panose="03000509000000000000" pitchFamily="65" charset="-120"/>
+              <a:cs typeface="Times New Roman" panose="02020603050405020304" pitchFamily="18" charset="0"/>
+            </a:endParaRPr>
+          </a:p>
+          <a:p>
+            <a:pPr lvl="1">
+              <a:lnSpc>
+                <a:spcPts val="3000"/>
+              </a:lnSpc>
+            </a:pPr>
+            <a:r>
+              <a:rPr lang="zh-TW" altLang="en-US" sz="1600" dirty="0">
+                <a:latin typeface="Times New Roman" panose="02020603050405020304" pitchFamily="18" charset="0"/>
+                <a:ea typeface="標楷體" panose="03000509000000000000" pitchFamily="65" charset="-120"/>
+                <a:cs typeface="Times New Roman" panose="02020603050405020304" pitchFamily="18" charset="0"/>
+              </a:rPr>
+              <a:t>軟處理器：</a:t>
+            </a:r>
+            <a:r>
+              <a:rPr lang="en-US" altLang="zh-TW" sz="1600" dirty="0" err="1">
+                <a:latin typeface="Times New Roman" panose="02020603050405020304" pitchFamily="18" charset="0"/>
+                <a:ea typeface="標楷體" panose="03000509000000000000" pitchFamily="65" charset="-120"/>
+                <a:cs typeface="Times New Roman" panose="02020603050405020304" pitchFamily="18" charset="0"/>
+              </a:rPr>
+              <a:t>VexRiscv</a:t>
+            </a:r>
+            <a:endParaRPr lang="en-US" altLang="zh-TW" sz="1600" dirty="0">
               <a:latin typeface="Times New Roman" panose="02020603050405020304" pitchFamily="18" charset="0"/>
               <a:ea typeface="標楷體" panose="03000509000000000000" pitchFamily="65" charset="-120"/>
               <a:cs typeface="Times New Roman" panose="02020603050405020304" pitchFamily="18" charset="0"/>
@@ -12565,10 +15573,10 @@
       </p:sp>
       <p:grpSp>
         <p:nvGrpSpPr>
-          <p:cNvPr id="18" name="群組 17">
+          <p:cNvPr id="8" name="群組 7">
             <a:extLst>
               <a:ext uri="{FF2B5EF4-FFF2-40B4-BE49-F238E27FC236}">
-                <a16:creationId xmlns:a16="http://schemas.microsoft.com/office/drawing/2014/main" id="{8963D8EE-DD26-57BA-202C-5B170EB57C11}"/>
+                <a16:creationId xmlns:a16="http://schemas.microsoft.com/office/drawing/2014/main" id="{32C77ABA-12F8-A5D2-5620-8E0F1595DD0B}"/>
               </a:ext>
             </a:extLst>
           </p:cNvPr>
@@ -12577,18 +15585,48 @@
         </p:nvGrpSpPr>
         <p:grpSpPr>
           <a:xfrm>
-            <a:off x="3000325" y="1519659"/>
-            <a:ext cx="3905350" cy="3818681"/>
-            <a:chOff x="3197933" y="1849582"/>
-            <a:chExt cx="3905350" cy="3818681"/>
+            <a:off x="6588117" y="4448345"/>
+            <a:ext cx="2342521" cy="1935727"/>
+            <a:chOff x="7123226" y="4254922"/>
+            <a:chExt cx="2342521" cy="1935727"/>
           </a:xfrm>
         </p:grpSpPr>
+        <p:pic>
+          <p:nvPicPr>
+            <p:cNvPr id="4" name="圖片 3">
+              <a:extLst>
+                <a:ext uri="{FF2B5EF4-FFF2-40B4-BE49-F238E27FC236}">
+                  <a16:creationId xmlns:a16="http://schemas.microsoft.com/office/drawing/2014/main" id="{DA2311F8-59E5-9BD1-61E4-EFD0C55B1DA8}"/>
+                </a:ext>
+              </a:extLst>
+            </p:cNvPr>
+            <p:cNvPicPr>
+              <a:picLocks noChangeAspect="1"/>
+            </p:cNvPicPr>
+            <p:nvPr/>
+          </p:nvPicPr>
+          <p:blipFill>
+            <a:blip r:embed="rId3"/>
+            <a:stretch>
+              <a:fillRect/>
+            </a:stretch>
+          </p:blipFill>
+          <p:spPr>
+            <a:xfrm>
+              <a:off x="7123226" y="4254922"/>
+              <a:ext cx="2342521" cy="1597173"/>
+            </a:xfrm>
+            <a:prstGeom prst="rect">
+              <a:avLst/>
+            </a:prstGeom>
+          </p:spPr>
+        </p:pic>
         <p:sp>
           <p:nvSpPr>
-            <p:cNvPr id="4" name="流程圖: 程序 3">
+            <p:cNvPr id="7" name="矩形 6">
               <a:extLst>
                 <a:ext uri="{FF2B5EF4-FFF2-40B4-BE49-F238E27FC236}">
-                  <a16:creationId xmlns:a16="http://schemas.microsoft.com/office/drawing/2014/main" id="{3D14C912-A9EC-5388-9A79-00E7A2BE913D}"/>
+                  <a16:creationId xmlns:a16="http://schemas.microsoft.com/office/drawing/2014/main" id="{92B6339F-8DE4-9D14-F9FF-DF0F45E24E3B}"/>
                 </a:ext>
               </a:extLst>
             </p:cNvPr>
@@ -12597,44 +15635,24 @@
           </p:nvSpPr>
           <p:spPr>
             <a:xfrm>
-              <a:off x="3197936" y="2868322"/>
-              <a:ext cx="1562141" cy="762461"/>
+              <a:off x="7758868" y="5852095"/>
+              <a:ext cx="1372492" cy="338554"/>
             </a:xfrm>
-            <a:prstGeom prst="flowChartProcess">
+            <a:prstGeom prst="rect">
               <a:avLst/>
             </a:prstGeom>
-            <a:solidFill>
-              <a:schemeClr val="bg1"/>
-            </a:solidFill>
-            <a:ln>
-              <a:solidFill>
-                <a:schemeClr val="tx1"/>
-              </a:solidFill>
-            </a:ln>
+            <a:noFill/>
           </p:spPr>
-          <p:style>
-            <a:lnRef idx="2">
-              <a:schemeClr val="accent1">
-                <a:shade val="15000"/>
-              </a:schemeClr>
-            </a:lnRef>
-            <a:fillRef idx="1">
-              <a:schemeClr val="accent1"/>
-            </a:fillRef>
-            <a:effectRef idx="0">
-              <a:schemeClr val="accent1"/>
-            </a:effectRef>
-            <a:fontRef idx="minor">
-              <a:schemeClr val="lt1"/>
-            </a:fontRef>
-          </p:style>
           <p:txBody>
-            <a:bodyPr rtlCol="0" anchor="ctr"/>
+            <a:bodyPr wrap="none" lIns="91440" tIns="45720" rIns="91440" bIns="45720">
+              <a:spAutoFit/>
+            </a:bodyPr>
             <a:lstStyle/>
             <a:p>
               <a:pPr algn="ctr"/>
               <a:r>
-                <a:rPr lang="zh-TW" altLang="en-US" sz="1400" dirty="0">
+                <a:rPr lang="en-US" altLang="zh-TW" sz="1600" b="0" cap="none" spc="0" dirty="0">
+                  <a:ln w="0"/>
                   <a:solidFill>
                     <a:schemeClr val="tx1"/>
                   </a:solidFill>
@@ -12642,63 +15660,11 @@
                   <a:ea typeface="標楷體" panose="03000509000000000000" pitchFamily="65" charset="-120"/>
                   <a:cs typeface="Times New Roman" panose="02020603050405020304" pitchFamily="18" charset="0"/>
                 </a:rPr>
-                <a:t>建立校正資料</a:t>
+                <a:t>NeTV2</a:t>
               </a:r>
-            </a:p>
-          </p:txBody>
-        </p:sp>
-        <p:sp>
-          <p:nvSpPr>
-            <p:cNvPr id="7" name="流程圖: 替代程序 6">
-              <a:extLst>
-                <a:ext uri="{FF2B5EF4-FFF2-40B4-BE49-F238E27FC236}">
-                  <a16:creationId xmlns:a16="http://schemas.microsoft.com/office/drawing/2014/main" id="{4C09B7AE-51E2-4D8C-5235-2A9CCD83DB1A}"/>
-                </a:ext>
-              </a:extLst>
-            </p:cNvPr>
-            <p:cNvSpPr/>
-            <p:nvPr/>
-          </p:nvSpPr>
-          <p:spPr>
-            <a:xfrm>
-              <a:off x="3197933" y="1849582"/>
-              <a:ext cx="1562141" cy="762461"/>
-            </a:xfrm>
-            <a:prstGeom prst="flowChartAlternateProcess">
-              <a:avLst/>
-            </a:prstGeom>
-            <a:solidFill>
-              <a:schemeClr val="bg1"/>
-            </a:solidFill>
-            <a:ln>
-              <a:solidFill>
-                <a:schemeClr val="tx1"/>
-              </a:solidFill>
-            </a:ln>
-          </p:spPr>
-          <p:style>
-            <a:lnRef idx="2">
-              <a:schemeClr val="accent1">
-                <a:shade val="15000"/>
-              </a:schemeClr>
-            </a:lnRef>
-            <a:fillRef idx="1">
-              <a:schemeClr val="accent1"/>
-            </a:fillRef>
-            <a:effectRef idx="0">
-              <a:schemeClr val="accent1"/>
-            </a:effectRef>
-            <a:fontRef idx="minor">
-              <a:schemeClr val="lt1"/>
-            </a:fontRef>
-          </p:style>
-          <p:txBody>
-            <a:bodyPr rtlCol="0" anchor="ctr"/>
-            <a:lstStyle/>
-            <a:p>
-              <a:pPr algn="ctr"/>
               <a:r>
-                <a:rPr lang="en-US" altLang="zh-TW" dirty="0">
+                <a:rPr lang="zh-TW" altLang="en-US" sz="1600" dirty="0">
+                  <a:ln w="0"/>
                   <a:solidFill>
                     <a:schemeClr val="tx1"/>
                   </a:solidFill>
@@ -12706,10 +15672,11 @@
                   <a:ea typeface="標楷體" panose="03000509000000000000" pitchFamily="65" charset="-120"/>
                   <a:cs typeface="Times New Roman" panose="02020603050405020304" pitchFamily="18" charset="0"/>
                 </a:rPr>
-                <a:t>Calibration </a:t>
+                <a:t> </a:t>
               </a:r>
               <a:r>
-                <a:rPr lang="zh-TW" altLang="en-US" dirty="0">
+                <a:rPr lang="en-US" altLang="zh-TW" sz="1600" dirty="0">
+                  <a:ln w="0"/>
                   <a:solidFill>
                     <a:schemeClr val="tx1"/>
                   </a:solidFill>
@@ -12717,212 +15684,10 @@
                   <a:ea typeface="標楷體" panose="03000509000000000000" pitchFamily="65" charset="-120"/>
                   <a:cs typeface="Times New Roman" panose="02020603050405020304" pitchFamily="18" charset="0"/>
                 </a:rPr>
-                <a:t>開始</a:t>
+                <a:t>FPGA</a:t>
               </a:r>
-            </a:p>
-          </p:txBody>
-        </p:sp>
-        <p:sp>
-          <p:nvSpPr>
-            <p:cNvPr id="8" name="流程圖: 程序 7">
-              <a:extLst>
-                <a:ext uri="{FF2B5EF4-FFF2-40B4-BE49-F238E27FC236}">
-                  <a16:creationId xmlns:a16="http://schemas.microsoft.com/office/drawing/2014/main" id="{EC44C6F4-0BE1-EAC3-6025-3660580281E8}"/>
-                </a:ext>
-              </a:extLst>
-            </p:cNvPr>
-            <p:cNvSpPr/>
-            <p:nvPr/>
-          </p:nvSpPr>
-          <p:spPr>
-            <a:xfrm>
-              <a:off x="3197935" y="3887062"/>
-              <a:ext cx="1562141" cy="762461"/>
-            </a:xfrm>
-            <a:prstGeom prst="flowChartProcess">
-              <a:avLst/>
-            </a:prstGeom>
-            <a:solidFill>
-              <a:schemeClr val="bg1"/>
-            </a:solidFill>
-            <a:ln>
-              <a:solidFill>
-                <a:schemeClr val="tx1"/>
-              </a:solidFill>
-            </a:ln>
-          </p:spPr>
-          <p:style>
-            <a:lnRef idx="2">
-              <a:schemeClr val="accent1">
-                <a:shade val="15000"/>
-              </a:schemeClr>
-            </a:lnRef>
-            <a:fillRef idx="1">
-              <a:schemeClr val="accent1"/>
-            </a:fillRef>
-            <a:effectRef idx="0">
-              <a:schemeClr val="accent1"/>
-            </a:effectRef>
-            <a:fontRef idx="minor">
-              <a:schemeClr val="lt1"/>
-            </a:fontRef>
-          </p:style>
-          <p:txBody>
-            <a:bodyPr rtlCol="0" anchor="ctr"/>
-            <a:lstStyle/>
-            <a:p>
-              <a:pPr algn="ctr"/>
-              <a:r>
-                <a:rPr lang="zh-TW" altLang="en-US" sz="1400" dirty="0">
-                  <a:solidFill>
-                    <a:schemeClr val="tx1"/>
-                  </a:solidFill>
-                  <a:latin typeface="Times New Roman" panose="02020603050405020304" pitchFamily="18" charset="0"/>
-                  <a:ea typeface="標楷體" panose="03000509000000000000" pitchFamily="65" charset="-120"/>
-                  <a:cs typeface="Times New Roman" panose="02020603050405020304" pitchFamily="18" charset="0"/>
-                </a:rPr>
-                <a:t>量測</a:t>
-              </a:r>
-            </a:p>
-          </p:txBody>
-        </p:sp>
-        <p:sp>
-          <p:nvSpPr>
-            <p:cNvPr id="10" name="流程圖: 程序 9">
-              <a:extLst>
-                <a:ext uri="{FF2B5EF4-FFF2-40B4-BE49-F238E27FC236}">
-                  <a16:creationId xmlns:a16="http://schemas.microsoft.com/office/drawing/2014/main" id="{57B80D49-BF58-AA8D-ADCD-B2A3D58EC713}"/>
-                </a:ext>
-              </a:extLst>
-            </p:cNvPr>
-            <p:cNvSpPr/>
-            <p:nvPr/>
-          </p:nvSpPr>
-          <p:spPr>
-            <a:xfrm>
-              <a:off x="3197934" y="4905802"/>
-              <a:ext cx="1562141" cy="762461"/>
-            </a:xfrm>
-            <a:prstGeom prst="flowChartProcess">
-              <a:avLst/>
-            </a:prstGeom>
-            <a:solidFill>
-              <a:schemeClr val="bg1"/>
-            </a:solidFill>
-            <a:ln>
-              <a:solidFill>
-                <a:schemeClr val="tx1"/>
-              </a:solidFill>
-            </a:ln>
-          </p:spPr>
-          <p:style>
-            <a:lnRef idx="2">
-              <a:schemeClr val="accent1">
-                <a:shade val="15000"/>
-              </a:schemeClr>
-            </a:lnRef>
-            <a:fillRef idx="1">
-              <a:schemeClr val="accent1"/>
-            </a:fillRef>
-            <a:effectRef idx="0">
-              <a:schemeClr val="accent1"/>
-            </a:effectRef>
-            <a:fontRef idx="minor">
-              <a:schemeClr val="lt1"/>
-            </a:fontRef>
-          </p:style>
-          <p:txBody>
-            <a:bodyPr rtlCol="0" anchor="ctr"/>
-            <a:lstStyle/>
-            <a:p>
-              <a:pPr algn="ctr"/>
-              <a:r>
-                <a:rPr lang="zh-TW" altLang="en-US" sz="1400" dirty="0">
-                  <a:solidFill>
-                    <a:schemeClr val="tx1"/>
-                  </a:solidFill>
-                  <a:latin typeface="Times New Roman" panose="02020603050405020304" pitchFamily="18" charset="0"/>
-                  <a:ea typeface="標楷體" panose="03000509000000000000" pitchFamily="65" charset="-120"/>
-                  <a:cs typeface="Times New Roman" panose="02020603050405020304" pitchFamily="18" charset="0"/>
-                </a:rPr>
-                <a:t>迭代與修正</a:t>
-              </a:r>
-            </a:p>
-          </p:txBody>
-        </p:sp>
-        <p:sp>
-          <p:nvSpPr>
-            <p:cNvPr id="12" name="流程圖: 程序 11">
-              <a:extLst>
-                <a:ext uri="{FF2B5EF4-FFF2-40B4-BE49-F238E27FC236}">
-                  <a16:creationId xmlns:a16="http://schemas.microsoft.com/office/drawing/2014/main" id="{F04E6E5E-A79E-E3D7-B8DC-BBC3232E950F}"/>
-                </a:ext>
-              </a:extLst>
-            </p:cNvPr>
-            <p:cNvSpPr/>
-            <p:nvPr/>
-          </p:nvSpPr>
-          <p:spPr>
-            <a:xfrm>
-              <a:off x="5541142" y="2868322"/>
-              <a:ext cx="1562141" cy="762461"/>
-            </a:xfrm>
-            <a:prstGeom prst="flowChartProcess">
-              <a:avLst/>
-            </a:prstGeom>
-            <a:solidFill>
-              <a:schemeClr val="bg1"/>
-            </a:solidFill>
-            <a:ln>
-              <a:solidFill>
-                <a:schemeClr val="tx1"/>
-              </a:solidFill>
-            </a:ln>
-          </p:spPr>
-          <p:style>
-            <a:lnRef idx="2">
-              <a:schemeClr val="accent1">
-                <a:shade val="15000"/>
-              </a:schemeClr>
-            </a:lnRef>
-            <a:fillRef idx="1">
-              <a:schemeClr val="accent1"/>
-            </a:fillRef>
-            <a:effectRef idx="0">
-              <a:schemeClr val="accent1"/>
-            </a:effectRef>
-            <a:fontRef idx="minor">
-              <a:schemeClr val="lt1"/>
-            </a:fontRef>
-          </p:style>
-          <p:txBody>
-            <a:bodyPr rtlCol="0" anchor="ctr"/>
-            <a:lstStyle/>
-            <a:p>
-              <a:pPr algn="ctr"/>
-              <a:r>
-                <a:rPr lang="zh-TW" altLang="en-US" sz="1400" dirty="0">
-                  <a:solidFill>
-                    <a:srgbClr val="333333"/>
-                  </a:solidFill>
-                  <a:latin typeface="Times New Roman" panose="02020603050405020304" pitchFamily="18" charset="0"/>
-                  <a:ea typeface="標楷體" panose="03000509000000000000" pitchFamily="65" charset="-120"/>
-                  <a:cs typeface="Times New Roman" panose="02020603050405020304" pitchFamily="18" charset="0"/>
-                </a:rPr>
-                <a:t>建立校正曲線與生成 </a:t>
-              </a:r>
-              <a:r>
-                <a:rPr lang="en-US" altLang="zh-TW" sz="1400" dirty="0">
-                  <a:solidFill>
-                    <a:srgbClr val="333333"/>
-                  </a:solidFill>
-                  <a:latin typeface="Times New Roman" panose="02020603050405020304" pitchFamily="18" charset="0"/>
-                  <a:ea typeface="標楷體" panose="03000509000000000000" pitchFamily="65" charset="-120"/>
-                  <a:cs typeface="Times New Roman" panose="02020603050405020304" pitchFamily="18" charset="0"/>
-                </a:rPr>
-                <a:t>.CAL</a:t>
-              </a:r>
-              <a:endParaRPr lang="zh-TW" altLang="en-US" sz="1400" dirty="0">
+              <a:endParaRPr lang="zh-TW" altLang="en-US" sz="1600" b="0" cap="none" spc="0" dirty="0">
+                <a:ln w="0"/>
                 <a:solidFill>
                   <a:schemeClr val="tx1"/>
                 </a:solidFill>
@@ -12933,384 +15698,88 @@
             </a:p>
           </p:txBody>
         </p:sp>
-        <p:cxnSp>
-          <p:nvCxnSpPr>
-            <p:cNvPr id="13" name="直線單箭頭接點 12">
-              <a:extLst>
-                <a:ext uri="{FF2B5EF4-FFF2-40B4-BE49-F238E27FC236}">
-                  <a16:creationId xmlns:a16="http://schemas.microsoft.com/office/drawing/2014/main" id="{716894F9-43BA-8E8C-9FC9-9C4DA7D6AFF0}"/>
-                </a:ext>
-              </a:extLst>
-            </p:cNvPr>
-            <p:cNvCxnSpPr>
-              <a:cxnSpLocks/>
-              <a:stCxn id="7" idx="2"/>
-              <a:endCxn id="4" idx="0"/>
-            </p:cNvCxnSpPr>
-            <p:nvPr/>
-          </p:nvCxnSpPr>
-          <p:spPr>
-            <a:xfrm>
-              <a:off x="3979004" y="2612043"/>
-              <a:ext cx="3" cy="256279"/>
-            </a:xfrm>
-            <a:prstGeom prst="straightConnector1">
-              <a:avLst/>
-            </a:prstGeom>
-            <a:ln w="19050" cap="flat" cmpd="sng" algn="ctr">
-              <a:solidFill>
-                <a:schemeClr val="dk1"/>
-              </a:solidFill>
-              <a:prstDash val="solid"/>
-              <a:round/>
-              <a:headEnd type="none" w="med" len="med"/>
-              <a:tailEnd type="arrow" w="med" len="med"/>
-            </a:ln>
-          </p:spPr>
-          <p:style>
-            <a:lnRef idx="0">
-              <a:scrgbClr r="0" g="0" b="0"/>
-            </a:lnRef>
-            <a:fillRef idx="0">
-              <a:scrgbClr r="0" g="0" b="0"/>
-            </a:fillRef>
-            <a:effectRef idx="0">
-              <a:scrgbClr r="0" g="0" b="0"/>
-            </a:effectRef>
-            <a:fontRef idx="minor">
-              <a:schemeClr val="tx1"/>
-            </a:fontRef>
-          </p:style>
-        </p:cxnSp>
-        <p:cxnSp>
-          <p:nvCxnSpPr>
-            <p:cNvPr id="20" name="直線單箭頭接點 19">
-              <a:extLst>
-                <a:ext uri="{FF2B5EF4-FFF2-40B4-BE49-F238E27FC236}">
-                  <a16:creationId xmlns:a16="http://schemas.microsoft.com/office/drawing/2014/main" id="{6EDDC6BE-5453-E5C7-B4B1-E343E107FA04}"/>
-                </a:ext>
-              </a:extLst>
-            </p:cNvPr>
-            <p:cNvCxnSpPr>
-              <a:cxnSpLocks/>
-              <a:stCxn id="4" idx="2"/>
-              <a:endCxn id="8" idx="0"/>
-            </p:cNvCxnSpPr>
-            <p:nvPr/>
-          </p:nvCxnSpPr>
-          <p:spPr>
-            <a:xfrm flipH="1">
-              <a:off x="3979006" y="3630783"/>
-              <a:ext cx="1" cy="256279"/>
-            </a:xfrm>
-            <a:prstGeom prst="straightConnector1">
-              <a:avLst/>
-            </a:prstGeom>
-            <a:ln w="19050" cap="flat" cmpd="sng" algn="ctr">
-              <a:solidFill>
-                <a:schemeClr val="dk1"/>
-              </a:solidFill>
-              <a:prstDash val="solid"/>
-              <a:round/>
-              <a:headEnd type="none" w="med" len="med"/>
-              <a:tailEnd type="arrow" w="med" len="med"/>
-            </a:ln>
-          </p:spPr>
-          <p:style>
-            <a:lnRef idx="0">
-              <a:scrgbClr r="0" g="0" b="0"/>
-            </a:lnRef>
-            <a:fillRef idx="0">
-              <a:scrgbClr r="0" g="0" b="0"/>
-            </a:fillRef>
-            <a:effectRef idx="0">
-              <a:scrgbClr r="0" g="0" b="0"/>
-            </a:effectRef>
-            <a:fontRef idx="minor">
-              <a:schemeClr val="tx1"/>
-            </a:fontRef>
-          </p:style>
-        </p:cxnSp>
-        <p:cxnSp>
-          <p:nvCxnSpPr>
-            <p:cNvPr id="23" name="直線單箭頭接點 22">
-              <a:extLst>
-                <a:ext uri="{FF2B5EF4-FFF2-40B4-BE49-F238E27FC236}">
-                  <a16:creationId xmlns:a16="http://schemas.microsoft.com/office/drawing/2014/main" id="{9709B473-AA11-938C-F09F-BAF1F4059D62}"/>
-                </a:ext>
-              </a:extLst>
-            </p:cNvPr>
-            <p:cNvCxnSpPr>
-              <a:cxnSpLocks/>
-              <a:stCxn id="8" idx="2"/>
-              <a:endCxn id="10" idx="0"/>
-            </p:cNvCxnSpPr>
-            <p:nvPr/>
-          </p:nvCxnSpPr>
-          <p:spPr>
-            <a:xfrm flipH="1">
-              <a:off x="3979005" y="4649523"/>
-              <a:ext cx="1" cy="256279"/>
-            </a:xfrm>
-            <a:prstGeom prst="straightConnector1">
-              <a:avLst/>
-            </a:prstGeom>
-            <a:ln w="19050" cap="flat" cmpd="sng" algn="ctr">
-              <a:solidFill>
-                <a:schemeClr val="dk1"/>
-              </a:solidFill>
-              <a:prstDash val="solid"/>
-              <a:round/>
-              <a:headEnd type="none" w="med" len="med"/>
-              <a:tailEnd type="arrow" w="med" len="med"/>
-            </a:ln>
-          </p:spPr>
-          <p:style>
-            <a:lnRef idx="0">
-              <a:scrgbClr r="0" g="0" b="0"/>
-            </a:lnRef>
-            <a:fillRef idx="0">
-              <a:scrgbClr r="0" g="0" b="0"/>
-            </a:fillRef>
-            <a:effectRef idx="0">
-              <a:scrgbClr r="0" g="0" b="0"/>
-            </a:effectRef>
-            <a:fontRef idx="minor">
-              <a:schemeClr val="tx1"/>
-            </a:fontRef>
-          </p:style>
-        </p:cxnSp>
-        <p:sp>
-          <p:nvSpPr>
-            <p:cNvPr id="31" name="流程圖: 替代程序 30">
-              <a:extLst>
-                <a:ext uri="{FF2B5EF4-FFF2-40B4-BE49-F238E27FC236}">
-                  <a16:creationId xmlns:a16="http://schemas.microsoft.com/office/drawing/2014/main" id="{9A9F37F1-EC99-AC10-D3A6-2F04850B2020}"/>
-                </a:ext>
-              </a:extLst>
-            </p:cNvPr>
-            <p:cNvSpPr/>
-            <p:nvPr/>
-          </p:nvSpPr>
-          <p:spPr>
-            <a:xfrm>
-              <a:off x="5541142" y="3887062"/>
-              <a:ext cx="1562141" cy="762461"/>
-            </a:xfrm>
-            <a:prstGeom prst="flowChartAlternateProcess">
-              <a:avLst/>
-            </a:prstGeom>
-            <a:solidFill>
-              <a:schemeClr val="bg1"/>
-            </a:solidFill>
-            <a:ln>
-              <a:solidFill>
-                <a:schemeClr val="tx1"/>
-              </a:solidFill>
-            </a:ln>
-          </p:spPr>
-          <p:style>
-            <a:lnRef idx="2">
-              <a:schemeClr val="accent1">
-                <a:shade val="15000"/>
-              </a:schemeClr>
-            </a:lnRef>
-            <a:fillRef idx="1">
-              <a:schemeClr val="accent1"/>
-            </a:fillRef>
-            <a:effectRef idx="0">
-              <a:schemeClr val="accent1"/>
-            </a:effectRef>
-            <a:fontRef idx="minor">
-              <a:schemeClr val="lt1"/>
-            </a:fontRef>
-          </p:style>
-          <p:txBody>
-            <a:bodyPr rtlCol="0" anchor="ctr"/>
-            <a:lstStyle/>
-            <a:p>
-              <a:pPr algn="ctr"/>
-              <a:r>
-                <a:rPr lang="en-US" altLang="zh-TW" dirty="0">
-                  <a:solidFill>
-                    <a:schemeClr val="tx1"/>
-                  </a:solidFill>
-                  <a:latin typeface="Times New Roman" panose="02020603050405020304" pitchFamily="18" charset="0"/>
-                  <a:ea typeface="標楷體" panose="03000509000000000000" pitchFamily="65" charset="-120"/>
-                  <a:cs typeface="Times New Roman" panose="02020603050405020304" pitchFamily="18" charset="0"/>
-                </a:rPr>
-                <a:t>Calibration </a:t>
-              </a:r>
-              <a:r>
-                <a:rPr lang="zh-TW" altLang="en-US" dirty="0">
-                  <a:solidFill>
-                    <a:schemeClr val="tx1"/>
-                  </a:solidFill>
-                  <a:latin typeface="Times New Roman" panose="02020603050405020304" pitchFamily="18" charset="0"/>
-                  <a:ea typeface="標楷體" panose="03000509000000000000" pitchFamily="65" charset="-120"/>
-                  <a:cs typeface="Times New Roman" panose="02020603050405020304" pitchFamily="18" charset="0"/>
-                </a:rPr>
-                <a:t>結束</a:t>
-              </a:r>
-            </a:p>
-          </p:txBody>
-        </p:sp>
-        <p:cxnSp>
-          <p:nvCxnSpPr>
-            <p:cNvPr id="32" name="直線單箭頭接點 31">
-              <a:extLst>
-                <a:ext uri="{FF2B5EF4-FFF2-40B4-BE49-F238E27FC236}">
-                  <a16:creationId xmlns:a16="http://schemas.microsoft.com/office/drawing/2014/main" id="{6C56FFD0-593F-2542-008B-3BE697FDAF73}"/>
-                </a:ext>
-              </a:extLst>
-            </p:cNvPr>
-            <p:cNvCxnSpPr>
-              <a:cxnSpLocks/>
-              <a:stCxn id="12" idx="2"/>
-              <a:endCxn id="31" idx="0"/>
-            </p:cNvCxnSpPr>
-            <p:nvPr/>
-          </p:nvCxnSpPr>
-          <p:spPr>
-            <a:xfrm>
-              <a:off x="6322213" y="3630783"/>
-              <a:ext cx="0" cy="256279"/>
-            </a:xfrm>
-            <a:prstGeom prst="straightConnector1">
-              <a:avLst/>
-            </a:prstGeom>
-            <a:ln w="19050" cap="flat" cmpd="sng" algn="ctr">
-              <a:solidFill>
-                <a:schemeClr val="dk1"/>
-              </a:solidFill>
-              <a:prstDash val="solid"/>
-              <a:round/>
-              <a:headEnd type="none" w="med" len="med"/>
-              <a:tailEnd type="arrow" w="med" len="med"/>
-            </a:ln>
-          </p:spPr>
-          <p:style>
-            <a:lnRef idx="0">
-              <a:scrgbClr r="0" g="0" b="0"/>
-            </a:lnRef>
-            <a:fillRef idx="0">
-              <a:scrgbClr r="0" g="0" b="0"/>
-            </a:fillRef>
-            <a:effectRef idx="0">
-              <a:scrgbClr r="0" g="0" b="0"/>
-            </a:effectRef>
-            <a:fontRef idx="minor">
-              <a:schemeClr val="tx1"/>
-            </a:fontRef>
-          </p:style>
-        </p:cxnSp>
-        <p:cxnSp>
-          <p:nvCxnSpPr>
-            <p:cNvPr id="36" name="接點: 肘形 35">
-              <a:extLst>
-                <a:ext uri="{FF2B5EF4-FFF2-40B4-BE49-F238E27FC236}">
-                  <a16:creationId xmlns:a16="http://schemas.microsoft.com/office/drawing/2014/main" id="{57CC14F7-A64E-D557-7E04-39C762496884}"/>
-                </a:ext>
-              </a:extLst>
-            </p:cNvPr>
-            <p:cNvCxnSpPr>
-              <a:cxnSpLocks/>
-            </p:cNvCxnSpPr>
-            <p:nvPr/>
-          </p:nvCxnSpPr>
-          <p:spPr>
-            <a:xfrm rot="10800000" flipH="1">
-              <a:off x="3197933" y="4268293"/>
-              <a:ext cx="1" cy="1018740"/>
-            </a:xfrm>
-            <a:prstGeom prst="bentConnector3">
-              <a:avLst>
-                <a:gd name="adj1" fmla="val -22860000000"/>
-              </a:avLst>
-            </a:prstGeom>
-            <a:ln w="19050" cap="flat" cmpd="sng" algn="ctr">
-              <a:solidFill>
-                <a:schemeClr val="dk1"/>
-              </a:solidFill>
-              <a:prstDash val="solid"/>
-              <a:round/>
-              <a:headEnd type="none" w="med" len="med"/>
-              <a:tailEnd type="arrow" w="med" len="med"/>
-            </a:ln>
-          </p:spPr>
-          <p:style>
-            <a:lnRef idx="0">
-              <a:scrgbClr r="0" g="0" b="0"/>
-            </a:lnRef>
-            <a:fillRef idx="0">
-              <a:scrgbClr r="0" g="0" b="0"/>
-            </a:fillRef>
-            <a:effectRef idx="0">
-              <a:scrgbClr r="0" g="0" b="0"/>
-            </a:effectRef>
-            <a:fontRef idx="minor">
-              <a:schemeClr val="tx1"/>
-            </a:fontRef>
-          </p:style>
-        </p:cxnSp>
-        <p:cxnSp>
-          <p:nvCxnSpPr>
-            <p:cNvPr id="2" name="接點: 肘形 1">
-              <a:extLst>
-                <a:ext uri="{FF2B5EF4-FFF2-40B4-BE49-F238E27FC236}">
-                  <a16:creationId xmlns:a16="http://schemas.microsoft.com/office/drawing/2014/main" id="{4FCDB75D-3F29-3E89-8074-1693A1EA0A5D}"/>
-                </a:ext>
-              </a:extLst>
-            </p:cNvPr>
-            <p:cNvCxnSpPr>
-              <a:cxnSpLocks/>
-              <a:stCxn id="10" idx="2"/>
-              <a:endCxn id="12" idx="0"/>
-            </p:cNvCxnSpPr>
-            <p:nvPr/>
-          </p:nvCxnSpPr>
-          <p:spPr>
-            <a:xfrm rot="5400000" flipH="1" flipV="1">
-              <a:off x="3750638" y="3096689"/>
-              <a:ext cx="2799941" cy="2343208"/>
-            </a:xfrm>
-            <a:prstGeom prst="bentConnector5">
-              <a:avLst>
-                <a:gd name="adj1" fmla="val -8164"/>
-                <a:gd name="adj2" fmla="val 50000"/>
-                <a:gd name="adj3" fmla="val 108164"/>
-              </a:avLst>
-            </a:prstGeom>
-            <a:ln w="19050" cap="flat" cmpd="sng" algn="ctr">
-              <a:solidFill>
-                <a:schemeClr val="dk1"/>
-              </a:solidFill>
-              <a:prstDash val="solid"/>
-              <a:round/>
-              <a:headEnd type="none" w="med" len="med"/>
-              <a:tailEnd type="arrow" w="med" len="med"/>
-            </a:ln>
-          </p:spPr>
-          <p:style>
-            <a:lnRef idx="0">
-              <a:scrgbClr r="0" g="0" b="0"/>
-            </a:lnRef>
-            <a:fillRef idx="0">
-              <a:scrgbClr r="0" g="0" b="0"/>
-            </a:fillRef>
-            <a:effectRef idx="0">
-              <a:scrgbClr r="0" g="0" b="0"/>
-            </a:effectRef>
-            <a:fontRef idx="minor">
-              <a:schemeClr val="tx1"/>
-            </a:fontRef>
-          </p:style>
-        </p:cxnSp>
       </p:grpSp>
+      <p:sp>
+        <p:nvSpPr>
+          <p:cNvPr id="10" name="文字方塊 9">
+            <a:extLst>
+              <a:ext uri="{FF2B5EF4-FFF2-40B4-BE49-F238E27FC236}">
+                <a16:creationId xmlns:a16="http://schemas.microsoft.com/office/drawing/2014/main" id="{3EAFBC87-C885-2332-5B2E-C15A86786327}"/>
+              </a:ext>
+            </a:extLst>
+          </p:cNvPr>
+          <p:cNvSpPr txBox="1"/>
+          <p:nvPr/>
+        </p:nvSpPr>
+        <p:spPr>
+          <a:xfrm>
+            <a:off x="1787236" y="6384072"/>
+            <a:ext cx="5802283" cy="276999"/>
+          </a:xfrm>
+          <a:prstGeom prst="rect">
+            <a:avLst/>
+          </a:prstGeom>
+          <a:noFill/>
+        </p:spPr>
+        <p:txBody>
+          <a:bodyPr wrap="square">
+            <a:spAutoFit/>
+          </a:bodyPr>
+          <a:lstStyle/>
+          <a:p>
+            <a:r>
+              <a:rPr lang="en-US" altLang="zh-TW" sz="1200" dirty="0">
+                <a:latin typeface="Times New Roman" panose="02020603050405020304" pitchFamily="18" charset="0"/>
+                <a:ea typeface="標楷體" panose="03000509000000000000" pitchFamily="65" charset="-120"/>
+                <a:cs typeface="Times New Roman" panose="02020603050405020304" pitchFamily="18" charset="0"/>
+              </a:rPr>
+              <a:t>[1] </a:t>
+            </a:r>
+            <a:r>
+              <a:rPr lang="zh-TW" altLang="en-US" sz="1200" dirty="0">
+                <a:latin typeface="Times New Roman" panose="02020603050405020304" pitchFamily="18" charset="0"/>
+                <a:ea typeface="標楷體" panose="03000509000000000000" pitchFamily="65" charset="-120"/>
+                <a:cs typeface="Times New Roman" panose="02020603050405020304" pitchFamily="18" charset="0"/>
+              </a:rPr>
+              <a:t>https://github.com/AlphamaxMedia/netv2-fpga</a:t>
+            </a:r>
+          </a:p>
+        </p:txBody>
+      </p:sp>
+      <p:pic>
+        <p:nvPicPr>
+          <p:cNvPr id="17" name="圖片 16">
+            <a:extLst>
+              <a:ext uri="{FF2B5EF4-FFF2-40B4-BE49-F238E27FC236}">
+                <a16:creationId xmlns:a16="http://schemas.microsoft.com/office/drawing/2014/main" id="{5B7A07D7-CDAD-33A8-75F3-807976AADEA8}"/>
+              </a:ext>
+            </a:extLst>
+          </p:cNvPr>
+          <p:cNvPicPr>
+            <a:picLocks noChangeAspect="1"/>
+          </p:cNvPicPr>
+          <p:nvPr/>
+        </p:nvPicPr>
+        <p:blipFill>
+          <a:blip r:embed="rId4"/>
+          <a:stretch>
+            <a:fillRect/>
+          </a:stretch>
+        </p:blipFill>
+        <p:spPr>
+          <a:xfrm>
+            <a:off x="1210003" y="2946227"/>
+            <a:ext cx="7485993" cy="957511"/>
+          </a:xfrm>
+          <a:prstGeom prst="rect">
+            <a:avLst/>
+          </a:prstGeom>
+        </p:spPr>
+      </p:pic>
     </p:spTree>
     <p:extLst>
       <p:ext uri="{BB962C8B-B14F-4D97-AF65-F5344CB8AC3E}">
-        <p14:creationId xmlns:p14="http://schemas.microsoft.com/office/powerpoint/2010/main" val="2195863006"/>
+        <p14:creationId xmlns:p14="http://schemas.microsoft.com/office/powerpoint/2010/main" val="1012968958"/>
       </p:ext>
     </p:extLst>
   </p:cSld>
@@ -13389,8 +15858,12 @@
               <a:t>: </a:t>
             </a:r>
             <a:r>
-              <a:rPr lang="en-US" altLang="zh-TW" dirty="0"/>
-              <a:t>Video Capture Card</a:t>
+              <a:rPr lang="en-US" altLang="zh-TW" dirty="0" err="1">
+                <a:latin typeface="Times New Roman" panose="02020603050405020304" pitchFamily="18" charset="0"/>
+                <a:ea typeface="標楷體" panose="03000509000000000000" pitchFamily="65" charset="-120"/>
+                <a:cs typeface="Times New Roman" panose="02020603050405020304" pitchFamily="18" charset="0"/>
+              </a:rPr>
+              <a:t>LitePCIe</a:t>
             </a:r>
             <a:endParaRPr lang="zh-TW" altLang="en-US" dirty="0">
               <a:latin typeface="Times New Roman" panose="02020603050405020304" pitchFamily="18" charset="0"/>
@@ -13405,7 +15878,7 @@
           <p:cNvPr id="2" name="文字版面配置區 6">
             <a:extLst>
               <a:ext uri="{FF2B5EF4-FFF2-40B4-BE49-F238E27FC236}">
-                <a16:creationId xmlns:a16="http://schemas.microsoft.com/office/drawing/2014/main" id="{033F0CBC-B216-A52F-8C2C-837CAED2E514}"/>
+                <a16:creationId xmlns:a16="http://schemas.microsoft.com/office/drawing/2014/main" id="{D929304B-5341-8BBF-E71F-AF5F2FE7268A}"/>
               </a:ext>
             </a:extLst>
           </p:cNvPr>
@@ -13691,7 +16164,7 @@
                 <a:ea typeface="標楷體" panose="03000509000000000000" pitchFamily="65" charset="-120"/>
                 <a:cs typeface="Times New Roman" panose="02020603050405020304" pitchFamily="18" charset="0"/>
               </a:rPr>
-              <a:t>研究目標：</a:t>
+              <a:t>功能</a:t>
             </a:r>
             <a:endParaRPr lang="en-US" altLang="zh-TW" sz="2000" dirty="0">
               <a:solidFill>
@@ -13705,11 +16178,172 @@
           <a:p>
             <a:pPr lvl="1">
               <a:lnSpc>
+                <a:spcPct val="150000"/>
+              </a:lnSpc>
+            </a:pPr>
+            <a:r>
+              <a:rPr lang="zh-TW" altLang="en-US" sz="1600" dirty="0">
+                <a:latin typeface="Times New Roman" panose="02020603050405020304" pitchFamily="18" charset="0"/>
+                <a:ea typeface="標楷體" panose="03000509000000000000" pitchFamily="65" charset="-120"/>
+                <a:cs typeface="Times New Roman" panose="02020603050405020304" pitchFamily="18" charset="0"/>
+              </a:rPr>
+              <a:t>透過 </a:t>
+            </a:r>
+            <a:r>
+              <a:rPr lang="en-US" altLang="zh-TW" sz="1600" dirty="0">
+                <a:latin typeface="Times New Roman" panose="02020603050405020304" pitchFamily="18" charset="0"/>
+                <a:ea typeface="標楷體" panose="03000509000000000000" pitchFamily="65" charset="-120"/>
+                <a:cs typeface="Times New Roman" panose="02020603050405020304" pitchFamily="18" charset="0"/>
+              </a:rPr>
+              <a:t>DMA Writer </a:t>
+            </a:r>
+            <a:r>
+              <a:rPr lang="zh-TW" altLang="en-US" sz="1600" dirty="0">
+                <a:latin typeface="Times New Roman" panose="02020603050405020304" pitchFamily="18" charset="0"/>
+                <a:ea typeface="標楷體" panose="03000509000000000000" pitchFamily="65" charset="-120"/>
+                <a:cs typeface="Times New Roman" panose="02020603050405020304" pitchFamily="18" charset="0"/>
+              </a:rPr>
+              <a:t>將 </a:t>
+            </a:r>
+            <a:r>
+              <a:rPr lang="en-US" altLang="zh-TW" sz="1600" dirty="0">
+                <a:latin typeface="Times New Roman" panose="02020603050405020304" pitchFamily="18" charset="0"/>
+                <a:ea typeface="標楷體" panose="03000509000000000000" pitchFamily="65" charset="-120"/>
+                <a:cs typeface="Times New Roman" panose="02020603050405020304" pitchFamily="18" charset="0"/>
+              </a:rPr>
+              <a:t>FPGA </a:t>
+            </a:r>
+            <a:r>
+              <a:rPr lang="zh-TW" altLang="en-US" sz="1600" dirty="0">
+                <a:latin typeface="Times New Roman" panose="02020603050405020304" pitchFamily="18" charset="0"/>
+                <a:ea typeface="標楷體" panose="03000509000000000000" pitchFamily="65" charset="-120"/>
+                <a:cs typeface="Times New Roman" panose="02020603050405020304" pitchFamily="18" charset="0"/>
+              </a:rPr>
+              <a:t>資料寫入 </a:t>
+            </a:r>
+            <a:r>
+              <a:rPr lang="en-US" altLang="zh-TW" sz="1600" dirty="0">
+                <a:latin typeface="Times New Roman" panose="02020603050405020304" pitchFamily="18" charset="0"/>
+                <a:ea typeface="標楷體" panose="03000509000000000000" pitchFamily="65" charset="-120"/>
+                <a:cs typeface="Times New Roman" panose="02020603050405020304" pitchFamily="18" charset="0"/>
+              </a:rPr>
+              <a:t>PC </a:t>
+            </a:r>
+            <a:r>
+              <a:rPr lang="zh-TW" altLang="en-US" sz="1600" dirty="0">
+                <a:latin typeface="Times New Roman" panose="02020603050405020304" pitchFamily="18" charset="0"/>
+                <a:ea typeface="標楷體" panose="03000509000000000000" pitchFamily="65" charset="-120"/>
+                <a:cs typeface="Times New Roman" panose="02020603050405020304" pitchFamily="18" charset="0"/>
+              </a:rPr>
+              <a:t>主機記憶體</a:t>
+            </a:r>
+          </a:p>
+          <a:p>
+            <a:pPr lvl="1">
+              <a:lnSpc>
+                <a:spcPct val="150000"/>
+              </a:lnSpc>
+            </a:pPr>
+            <a:r>
+              <a:rPr lang="en-US" altLang="zh-TW" sz="1600" dirty="0">
+                <a:latin typeface="Times New Roman" panose="02020603050405020304" pitchFamily="18" charset="0"/>
+                <a:ea typeface="標楷體" panose="03000509000000000000" pitchFamily="65" charset="-120"/>
+                <a:cs typeface="Times New Roman" panose="02020603050405020304" pitchFamily="18" charset="0"/>
+              </a:rPr>
+              <a:t>PCIe Endpoint </a:t>
+            </a:r>
+            <a:r>
+              <a:rPr lang="zh-TW" altLang="en-US" sz="1600" dirty="0">
+                <a:latin typeface="Times New Roman" panose="02020603050405020304" pitchFamily="18" charset="0"/>
+                <a:ea typeface="標楷體" panose="03000509000000000000" pitchFamily="65" charset="-120"/>
+                <a:cs typeface="Times New Roman" panose="02020603050405020304" pitchFamily="18" charset="0"/>
+              </a:rPr>
+              <a:t>與傳輸架構</a:t>
+            </a:r>
+            <a:endParaRPr lang="en-US" altLang="zh-TW" sz="1600" dirty="0">
+              <a:latin typeface="Times New Roman" panose="02020603050405020304" pitchFamily="18" charset="0"/>
+              <a:ea typeface="標楷體" panose="03000509000000000000" pitchFamily="65" charset="-120"/>
+              <a:cs typeface="Times New Roman" panose="02020603050405020304" pitchFamily="18" charset="0"/>
+            </a:endParaRPr>
+          </a:p>
+          <a:p>
+            <a:pPr lvl="1">
+              <a:lnSpc>
                 <a:spcPts val="3000"/>
               </a:lnSpc>
             </a:pPr>
             <a:r>
               <a:rPr lang="zh-TW" altLang="en-US" sz="1600" dirty="0">
+                <a:latin typeface="Times New Roman" panose="02020603050405020304" pitchFamily="18" charset="0"/>
+                <a:ea typeface="標楷體" panose="03000509000000000000" pitchFamily="65" charset="-120"/>
+                <a:cs typeface="Times New Roman" panose="02020603050405020304" pitchFamily="18" charset="0"/>
+              </a:rPr>
+              <a:t>提供 </a:t>
+            </a:r>
+            <a:r>
+              <a:rPr lang="en-US" altLang="zh-TW" sz="1600" dirty="0">
+                <a:latin typeface="Times New Roman" panose="02020603050405020304" pitchFamily="18" charset="0"/>
+                <a:ea typeface="標楷體" panose="03000509000000000000" pitchFamily="65" charset="-120"/>
+                <a:cs typeface="Times New Roman" panose="02020603050405020304" pitchFamily="18" charset="0"/>
+              </a:rPr>
+              <a:t>PC </a:t>
+            </a:r>
+            <a:r>
+              <a:rPr lang="zh-TW" altLang="en-US" sz="1600" dirty="0">
+                <a:latin typeface="Times New Roman" panose="02020603050405020304" pitchFamily="18" charset="0"/>
+                <a:ea typeface="標楷體" panose="03000509000000000000" pitchFamily="65" charset="-120"/>
+                <a:cs typeface="Times New Roman" panose="02020603050405020304" pitchFamily="18" charset="0"/>
+              </a:rPr>
+              <a:t>端 </a:t>
+            </a:r>
+            <a:r>
+              <a:rPr lang="en-US" altLang="zh-TW" sz="1600" dirty="0">
+                <a:latin typeface="Times New Roman" panose="02020603050405020304" pitchFamily="18" charset="0"/>
+                <a:ea typeface="標楷體" panose="03000509000000000000" pitchFamily="65" charset="-120"/>
+                <a:cs typeface="Times New Roman" panose="02020603050405020304" pitchFamily="18" charset="0"/>
+              </a:rPr>
+              <a:t>Linux Driver</a:t>
+            </a:r>
+          </a:p>
+          <a:p>
+            <a:pPr>
+              <a:lnSpc>
+                <a:spcPts val="3000"/>
+              </a:lnSpc>
+            </a:pPr>
+            <a:r>
+              <a:rPr lang="zh-TW" altLang="en-US" sz="2000" dirty="0">
+                <a:latin typeface="Times New Roman" panose="02020603050405020304" pitchFamily="18" charset="0"/>
+                <a:ea typeface="標楷體" panose="03000509000000000000" pitchFamily="65" charset="-120"/>
+                <a:cs typeface="Times New Roman" panose="02020603050405020304" pitchFamily="18" charset="0"/>
+              </a:rPr>
+              <a:t>對 </a:t>
+            </a:r>
+            <a:r>
+              <a:rPr lang="en-US" altLang="zh-TW" sz="2000" dirty="0">
+                <a:latin typeface="Times New Roman" panose="02020603050405020304" pitchFamily="18" charset="0"/>
+                <a:ea typeface="標楷體" panose="03000509000000000000" pitchFamily="65" charset="-120"/>
+                <a:cs typeface="Times New Roman" panose="02020603050405020304" pitchFamily="18" charset="0"/>
+              </a:rPr>
+              <a:t>HDMI </a:t>
+            </a:r>
+            <a:r>
+              <a:rPr lang="zh-TW" altLang="en-US" sz="2000" dirty="0">
+                <a:latin typeface="Times New Roman" panose="02020603050405020304" pitchFamily="18" charset="0"/>
+                <a:ea typeface="標楷體" panose="03000509000000000000" pitchFamily="65" charset="-120"/>
+                <a:cs typeface="Times New Roman" panose="02020603050405020304" pitchFamily="18" charset="0"/>
+              </a:rPr>
+              <a:t>擷取卡的幫助</a:t>
+            </a:r>
+          </a:p>
+          <a:p>
+            <a:pPr lvl="1">
+              <a:lnSpc>
+                <a:spcPts val="3000"/>
+              </a:lnSpc>
+            </a:pPr>
+            <a:r>
+              <a:rPr lang="zh-TW" altLang="en-US" sz="1600" dirty="0">
                 <a:solidFill>
                   <a:schemeClr val="tx1"/>
                 </a:solidFill>
@@ -13717,7 +16351,7 @@
                 <a:ea typeface="標楷體" panose="03000509000000000000" pitchFamily="65" charset="-120"/>
                 <a:cs typeface="Times New Roman" panose="02020603050405020304" pitchFamily="18" charset="0"/>
               </a:rPr>
-              <a:t>在不同 </a:t>
+              <a:t>可將研究重點集中在 </a:t>
             </a:r>
             <a:r>
               <a:rPr lang="en-US" altLang="zh-TW" sz="1600" dirty="0">
@@ -13728,7 +16362,7 @@
                 <a:ea typeface="標楷體" panose="03000509000000000000" pitchFamily="65" charset="-120"/>
                 <a:cs typeface="Times New Roman" panose="02020603050405020304" pitchFamily="18" charset="0"/>
               </a:rPr>
-              <a:t>Gamma</a:t>
+              <a:t>HDMI </a:t>
             </a:r>
             <a:r>
               <a:rPr lang="zh-TW" altLang="en-US" sz="1600" dirty="0">
@@ -13739,7 +16373,7 @@
                 <a:ea typeface="標楷體" panose="03000509000000000000" pitchFamily="65" charset="-120"/>
                 <a:cs typeface="Times New Roman" panose="02020603050405020304" pitchFamily="18" charset="0"/>
               </a:rPr>
-              <a:t> 與色溫下量測 </a:t>
+              <a:t>影像串流與 </a:t>
             </a:r>
             <a:r>
               <a:rPr lang="en-US" altLang="zh-TW" sz="1600" dirty="0">
@@ -13750,7 +16384,7 @@
                 <a:ea typeface="標楷體" panose="03000509000000000000" pitchFamily="65" charset="-120"/>
                 <a:cs typeface="Times New Roman" panose="02020603050405020304" pitchFamily="18" charset="0"/>
               </a:rPr>
-              <a:t>ICC</a:t>
+              <a:t>DMA </a:t>
             </a:r>
             <a:r>
               <a:rPr lang="zh-TW" altLang="en-US" sz="1600" dirty="0">
@@ -13761,7 +16395,25 @@
                 <a:ea typeface="標楷體" panose="03000509000000000000" pitchFamily="65" charset="-120"/>
                 <a:cs typeface="Times New Roman" panose="02020603050405020304" pitchFamily="18" charset="0"/>
               </a:rPr>
-              <a:t> </a:t>
+              <a:t>的整合</a:t>
+            </a:r>
+          </a:p>
+          <a:p>
+            <a:pPr lvl="1">
+              <a:lnSpc>
+                <a:spcPts val="3000"/>
+              </a:lnSpc>
+            </a:pPr>
+            <a:r>
+              <a:rPr lang="zh-TW" altLang="en-US" sz="1600" dirty="0">
+                <a:solidFill>
+                  <a:schemeClr val="tx1"/>
+                </a:solidFill>
+                <a:latin typeface="Times New Roman" panose="02020603050405020304" pitchFamily="18" charset="0"/>
+                <a:ea typeface="標楷體" panose="03000509000000000000" pitchFamily="65" charset="-120"/>
+                <a:cs typeface="Times New Roman" panose="02020603050405020304" pitchFamily="18" charset="0"/>
+              </a:rPr>
+              <a:t>可參考既有 </a:t>
             </a:r>
             <a:r>
               <a:rPr lang="en-US" altLang="zh-TW" sz="1600" dirty="0">
@@ -13772,7 +16424,7 @@
                 <a:ea typeface="標楷體" panose="03000509000000000000" pitchFamily="65" charset="-120"/>
                 <a:cs typeface="Times New Roman" panose="02020603050405020304" pitchFamily="18" charset="0"/>
               </a:rPr>
-              <a:t>Profile </a:t>
+              <a:t>Linux Driver</a:t>
             </a:r>
             <a:r>
               <a:rPr lang="zh-TW" altLang="en-US" sz="1600" dirty="0">
@@ -13783,7 +16435,15 @@
                 <a:ea typeface="標楷體" panose="03000509000000000000" pitchFamily="65" charset="-120"/>
                 <a:cs typeface="Times New Roman" panose="02020603050405020304" pitchFamily="18" charset="0"/>
               </a:rPr>
-              <a:t>校正後的色溫與 </a:t>
+              <a:t>，</a:t>
+            </a:r>
+            <a:r>
+              <a:rPr lang="zh-TW" altLang="en-US" sz="1600" dirty="0">
+                <a:latin typeface="Times New Roman" panose="02020603050405020304" pitchFamily="18" charset="0"/>
+                <a:ea typeface="標楷體" panose="03000509000000000000" pitchFamily="65" charset="-120"/>
+                <a:cs typeface="Times New Roman" panose="02020603050405020304" pitchFamily="18" charset="0"/>
+              </a:rPr>
+              <a:t>有助於降低 </a:t>
             </a:r>
             <a:r>
               <a:rPr lang="en-US" altLang="zh-TW" sz="1600" dirty="0">
@@ -13794,15 +16454,133 @@
                 <a:ea typeface="標楷體" panose="03000509000000000000" pitchFamily="65" charset="-120"/>
                 <a:cs typeface="Times New Roman" panose="02020603050405020304" pitchFamily="18" charset="0"/>
               </a:rPr>
-              <a:t>Gamma</a:t>
-            </a:r>
+              <a:t>PC </a:t>
+            </a:r>
+            <a:r>
+              <a:rPr lang="zh-TW" altLang="en-US" sz="1600" dirty="0">
+                <a:solidFill>
+                  <a:schemeClr val="tx1"/>
+                </a:solidFill>
+                <a:latin typeface="Times New Roman" panose="02020603050405020304" pitchFamily="18" charset="0"/>
+                <a:ea typeface="標楷體" panose="03000509000000000000" pitchFamily="65" charset="-120"/>
+                <a:cs typeface="Times New Roman" panose="02020603050405020304" pitchFamily="18" charset="0"/>
+              </a:rPr>
+              <a:t>端驅動程式的開發負擔</a:t>
+            </a:r>
+            <a:endParaRPr lang="en-US" altLang="zh-TW" sz="1600" dirty="0">
+              <a:solidFill>
+                <a:schemeClr val="tx1"/>
+              </a:solidFill>
+              <a:latin typeface="Times New Roman" panose="02020603050405020304" pitchFamily="18" charset="0"/>
+              <a:ea typeface="標楷體" panose="03000509000000000000" pitchFamily="65" charset="-120"/>
+              <a:cs typeface="Times New Roman" panose="02020603050405020304" pitchFamily="18" charset="0"/>
+            </a:endParaRPr>
+          </a:p>
+          <a:p>
+            <a:pPr>
+              <a:lnSpc>
+                <a:spcPts val="3000"/>
+              </a:lnSpc>
+            </a:pPr>
+            <a:endParaRPr lang="en-US" altLang="zh-TW" sz="2000" dirty="0">
+              <a:latin typeface="Times New Roman" panose="02020603050405020304" pitchFamily="18" charset="0"/>
+              <a:ea typeface="標楷體" panose="03000509000000000000" pitchFamily="65" charset="-120"/>
+              <a:cs typeface="Times New Roman" panose="02020603050405020304" pitchFamily="18" charset="0"/>
+            </a:endParaRPr>
+          </a:p>
+          <a:p>
+            <a:pPr>
+              <a:lnSpc>
+                <a:spcPts val="3000"/>
+              </a:lnSpc>
+            </a:pPr>
+            <a:endParaRPr lang="en-US" altLang="zh-TW" sz="2000" dirty="0">
+              <a:latin typeface="Times New Roman" panose="02020603050405020304" pitchFamily="18" charset="0"/>
+              <a:ea typeface="標楷體" panose="03000509000000000000" pitchFamily="65" charset="-120"/>
+              <a:cs typeface="Times New Roman" panose="02020603050405020304" pitchFamily="18" charset="0"/>
+            </a:endParaRPr>
           </a:p>
         </p:txBody>
       </p:sp>
+      <p:sp>
+        <p:nvSpPr>
+          <p:cNvPr id="13" name="文字方塊 12">
+            <a:extLst>
+              <a:ext uri="{FF2B5EF4-FFF2-40B4-BE49-F238E27FC236}">
+                <a16:creationId xmlns:a16="http://schemas.microsoft.com/office/drawing/2014/main" id="{17EF7B95-B380-F6CA-F173-DA760D763252}"/>
+              </a:ext>
+            </a:extLst>
+          </p:cNvPr>
+          <p:cNvSpPr txBox="1"/>
+          <p:nvPr/>
+        </p:nvSpPr>
+        <p:spPr>
+          <a:xfrm>
+            <a:off x="1787236" y="6384072"/>
+            <a:ext cx="5802283" cy="276999"/>
+          </a:xfrm>
+          <a:prstGeom prst="rect">
+            <a:avLst/>
+          </a:prstGeom>
+          <a:noFill/>
+        </p:spPr>
+        <p:txBody>
+          <a:bodyPr wrap="square">
+            <a:spAutoFit/>
+          </a:bodyPr>
+          <a:lstStyle/>
+          <a:p>
+            <a:r>
+              <a:rPr lang="en-US" altLang="zh-TW" sz="1200" dirty="0">
+                <a:latin typeface="Times New Roman" panose="02020603050405020304" pitchFamily="18" charset="0"/>
+                <a:cs typeface="Times New Roman" panose="02020603050405020304" pitchFamily="18" charset="0"/>
+              </a:rPr>
+              <a:t>[2] </a:t>
+            </a:r>
+            <a:r>
+              <a:rPr lang="zh-TW" altLang="en-US" sz="1200" dirty="0">
+                <a:latin typeface="Times New Roman" panose="02020603050405020304" pitchFamily="18" charset="0"/>
+                <a:cs typeface="Times New Roman" panose="02020603050405020304" pitchFamily="18" charset="0"/>
+              </a:rPr>
+              <a:t>https://github.com/enjoy-digital/litepcie</a:t>
+            </a:r>
+          </a:p>
+        </p:txBody>
+      </p:sp>
+      <p:pic>
+        <p:nvPicPr>
+          <p:cNvPr id="22" name="圖片 21">
+            <a:extLst>
+              <a:ext uri="{FF2B5EF4-FFF2-40B4-BE49-F238E27FC236}">
+                <a16:creationId xmlns:a16="http://schemas.microsoft.com/office/drawing/2014/main" id="{7C9DEB2B-F85F-1C98-F138-BF7DBF812B04}"/>
+              </a:ext>
+            </a:extLst>
+          </p:cNvPr>
+          <p:cNvPicPr>
+            <a:picLocks noChangeAspect="1"/>
+          </p:cNvPicPr>
+          <p:nvPr/>
+        </p:nvPicPr>
+        <p:blipFill>
+          <a:blip r:embed="rId3"/>
+          <a:stretch>
+            <a:fillRect/>
+          </a:stretch>
+        </p:blipFill>
+        <p:spPr>
+          <a:xfrm>
+            <a:off x="609602" y="4410680"/>
+            <a:ext cx="8686796" cy="962180"/>
+          </a:xfrm>
+          <a:prstGeom prst="rect">
+            <a:avLst/>
+          </a:prstGeom>
+        </p:spPr>
+      </p:pic>
     </p:spTree>
     <p:extLst>
       <p:ext uri="{BB962C8B-B14F-4D97-AF65-F5344CB8AC3E}">
-        <p14:creationId xmlns:p14="http://schemas.microsoft.com/office/powerpoint/2010/main" val="1137652450"/>
+        <p14:creationId xmlns:p14="http://schemas.microsoft.com/office/powerpoint/2010/main" val="2696284170"/>
       </p:ext>
     </p:extLst>
   </p:cSld>
@@ -13881,8 +16659,20 @@
               <a:t>: </a:t>
             </a:r>
             <a:r>
-              <a:rPr lang="en-US" altLang="zh-TW" dirty="0"/>
-              <a:t>Video Capture Card</a:t>
+              <a:rPr lang="en-US" altLang="zh-TW" dirty="0" err="1">
+                <a:latin typeface="Times New Roman" panose="02020603050405020304" pitchFamily="18" charset="0"/>
+                <a:ea typeface="標楷體" panose="03000509000000000000" pitchFamily="65" charset="-120"/>
+                <a:cs typeface="Times New Roman" panose="02020603050405020304" pitchFamily="18" charset="0"/>
+              </a:rPr>
+              <a:t>LiteX</a:t>
+            </a:r>
+            <a:r>
+              <a:rPr lang="en-US" altLang="zh-TW" dirty="0">
+                <a:latin typeface="Times New Roman" panose="02020603050405020304" pitchFamily="18" charset="0"/>
+                <a:ea typeface="標楷體" panose="03000509000000000000" pitchFamily="65" charset="-120"/>
+                <a:cs typeface="Times New Roman" panose="02020603050405020304" pitchFamily="18" charset="0"/>
+              </a:rPr>
+              <a:t> </a:t>
             </a:r>
             <a:endParaRPr lang="zh-TW" altLang="en-US" dirty="0">
               <a:latin typeface="Times New Roman" panose="02020603050405020304" pitchFamily="18" charset="0"/>
@@ -13892,10 +16682,630 @@
           </a:p>
         </p:txBody>
       </p:sp>
+      <p:sp>
+        <p:nvSpPr>
+          <p:cNvPr id="2" name="文字版面配置區 6">
+            <a:extLst>
+              <a:ext uri="{FF2B5EF4-FFF2-40B4-BE49-F238E27FC236}">
+                <a16:creationId xmlns:a16="http://schemas.microsoft.com/office/drawing/2014/main" id="{D929304B-5341-8BBF-E71F-AF5F2FE7268A}"/>
+              </a:ext>
+            </a:extLst>
+          </p:cNvPr>
+          <p:cNvSpPr txBox="1"/>
+          <p:nvPr/>
+        </p:nvSpPr>
+        <p:spPr>
+          <a:xfrm>
+            <a:off x="609602" y="935857"/>
+            <a:ext cx="8686796" cy="4700685"/>
+          </a:xfrm>
+          <a:prstGeom prst="rect">
+            <a:avLst/>
+          </a:prstGeom>
+          <a:noFill/>
+          <a:ln>
+            <a:noFill/>
+          </a:ln>
+        </p:spPr>
+        <p:txBody>
+          <a:bodyPr spcFirstLastPara="1" wrap="square" lIns="91425" tIns="45700" rIns="91425" bIns="45700" anchor="t" anchorCtr="0">
+            <a:noAutofit/>
+          </a:bodyPr>
+          <a:lstStyle>
+            <a:defPPr marR="0" lvl="0" algn="l" rtl="0">
+              <a:lnSpc>
+                <a:spcPct val="100000"/>
+              </a:lnSpc>
+              <a:spcBef>
+                <a:spcPts val="0"/>
+              </a:spcBef>
+              <a:spcAft>
+                <a:spcPts val="0"/>
+              </a:spcAft>
+            </a:defPPr>
+            <a:lvl1pPr marL="457200" marR="0" lvl="0" indent="-406400" algn="l" rtl="0">
+              <a:lnSpc>
+                <a:spcPct val="100000"/>
+              </a:lnSpc>
+              <a:spcBef>
+                <a:spcPts val="560"/>
+              </a:spcBef>
+              <a:spcAft>
+                <a:spcPts val="0"/>
+              </a:spcAft>
+              <a:buClr>
+                <a:schemeClr val="accent2"/>
+              </a:buClr>
+              <a:buSzPts val="2800"/>
+              <a:buFont typeface="Noto Sans Symbols"/>
+              <a:buChar char="❖"/>
+              <a:defRPr sz="2800" b="0" i="0" u="none" strike="noStrike" cap="none">
+                <a:solidFill>
+                  <a:schemeClr val="dk1"/>
+                </a:solidFill>
+                <a:latin typeface="Times New Roman"/>
+                <a:ea typeface="Times New Roman"/>
+                <a:cs typeface="Times New Roman"/>
+                <a:sym typeface="Times New Roman"/>
+              </a:defRPr>
+            </a:lvl1pPr>
+            <a:lvl2pPr marL="914400" marR="0" lvl="1" indent="-381000" algn="l" rtl="0">
+              <a:lnSpc>
+                <a:spcPct val="100000"/>
+              </a:lnSpc>
+              <a:spcBef>
+                <a:spcPts val="480"/>
+              </a:spcBef>
+              <a:spcAft>
+                <a:spcPts val="0"/>
+              </a:spcAft>
+              <a:buClr>
+                <a:srgbClr val="FF5050"/>
+              </a:buClr>
+              <a:buSzPts val="2400"/>
+              <a:buFont typeface="Noto Sans Symbols"/>
+              <a:buChar char="▪"/>
+              <a:defRPr sz="2400" b="0" i="0" u="none" strike="noStrike" cap="none">
+                <a:solidFill>
+                  <a:schemeClr val="dk1"/>
+                </a:solidFill>
+                <a:latin typeface="Times New Roman"/>
+                <a:ea typeface="Times New Roman"/>
+                <a:cs typeface="Times New Roman"/>
+                <a:sym typeface="Times New Roman"/>
+              </a:defRPr>
+            </a:lvl2pPr>
+            <a:lvl3pPr marL="1371600" marR="0" lvl="2" indent="-355600" algn="l" rtl="0">
+              <a:lnSpc>
+                <a:spcPct val="100000"/>
+              </a:lnSpc>
+              <a:spcBef>
+                <a:spcPts val="400"/>
+              </a:spcBef>
+              <a:spcAft>
+                <a:spcPts val="0"/>
+              </a:spcAft>
+              <a:buClr>
+                <a:srgbClr val="6699FF"/>
+              </a:buClr>
+              <a:buSzPts val="2000"/>
+              <a:buFont typeface="Times New Roman"/>
+              <a:buChar char="•"/>
+              <a:defRPr sz="2000" b="0" i="0" u="none" strike="noStrike" cap="none">
+                <a:solidFill>
+                  <a:schemeClr val="dk1"/>
+                </a:solidFill>
+                <a:latin typeface="Times New Roman"/>
+                <a:ea typeface="Times New Roman"/>
+                <a:cs typeface="Times New Roman"/>
+                <a:sym typeface="Times New Roman"/>
+              </a:defRPr>
+            </a:lvl3pPr>
+            <a:lvl4pPr marL="1828800" marR="0" lvl="3" indent="-355600" algn="l" rtl="0">
+              <a:lnSpc>
+                <a:spcPct val="100000"/>
+              </a:lnSpc>
+              <a:spcBef>
+                <a:spcPts val="400"/>
+              </a:spcBef>
+              <a:spcAft>
+                <a:spcPts val="0"/>
+              </a:spcAft>
+              <a:buClr>
+                <a:srgbClr val="FF5050"/>
+              </a:buClr>
+              <a:buSzPts val="2000"/>
+              <a:buFont typeface="Times New Roman"/>
+              <a:buChar char="o"/>
+              <a:defRPr sz="2000" b="0" i="0" u="none" strike="noStrike" cap="none">
+                <a:solidFill>
+                  <a:schemeClr val="dk1"/>
+                </a:solidFill>
+                <a:latin typeface="Times New Roman"/>
+                <a:ea typeface="Times New Roman"/>
+                <a:cs typeface="Times New Roman"/>
+                <a:sym typeface="Times New Roman"/>
+              </a:defRPr>
+            </a:lvl4pPr>
+            <a:lvl5pPr marL="2286000" marR="0" lvl="4" indent="-355600" algn="l" rtl="0">
+              <a:lnSpc>
+                <a:spcPct val="100000"/>
+              </a:lnSpc>
+              <a:spcBef>
+                <a:spcPts val="400"/>
+              </a:spcBef>
+              <a:spcAft>
+                <a:spcPts val="0"/>
+              </a:spcAft>
+              <a:buClr>
+                <a:srgbClr val="FF5050"/>
+              </a:buClr>
+              <a:buSzPts val="2000"/>
+              <a:buFont typeface="Times New Roman"/>
+              <a:buChar char="o"/>
+              <a:defRPr sz="2000" b="0" i="0" u="none" strike="noStrike" cap="none">
+                <a:solidFill>
+                  <a:schemeClr val="dk1"/>
+                </a:solidFill>
+                <a:latin typeface="Times New Roman"/>
+                <a:ea typeface="Times New Roman"/>
+                <a:cs typeface="Times New Roman"/>
+                <a:sym typeface="Times New Roman"/>
+              </a:defRPr>
+            </a:lvl5pPr>
+            <a:lvl6pPr marL="2743200" marR="0" lvl="5" indent="-355600" algn="l" rtl="0">
+              <a:lnSpc>
+                <a:spcPct val="100000"/>
+              </a:lnSpc>
+              <a:spcBef>
+                <a:spcPts val="400"/>
+              </a:spcBef>
+              <a:spcAft>
+                <a:spcPts val="0"/>
+              </a:spcAft>
+              <a:buClr>
+                <a:srgbClr val="FF5050"/>
+              </a:buClr>
+              <a:buSzPts val="2000"/>
+              <a:buFont typeface="Times New Roman"/>
+              <a:buChar char="o"/>
+              <a:defRPr sz="2000" b="0" i="0" u="none" strike="noStrike" cap="none">
+                <a:solidFill>
+                  <a:schemeClr val="dk1"/>
+                </a:solidFill>
+                <a:latin typeface="Times New Roman"/>
+                <a:ea typeface="Times New Roman"/>
+                <a:cs typeface="Times New Roman"/>
+                <a:sym typeface="Times New Roman"/>
+              </a:defRPr>
+            </a:lvl6pPr>
+            <a:lvl7pPr marL="3200400" marR="0" lvl="6" indent="-355600" algn="l" rtl="0">
+              <a:lnSpc>
+                <a:spcPct val="100000"/>
+              </a:lnSpc>
+              <a:spcBef>
+                <a:spcPts val="400"/>
+              </a:spcBef>
+              <a:spcAft>
+                <a:spcPts val="0"/>
+              </a:spcAft>
+              <a:buClr>
+                <a:srgbClr val="FF5050"/>
+              </a:buClr>
+              <a:buSzPts val="2000"/>
+              <a:buFont typeface="Times New Roman"/>
+              <a:buChar char="o"/>
+              <a:defRPr sz="2000" b="0" i="0" u="none" strike="noStrike" cap="none">
+                <a:solidFill>
+                  <a:schemeClr val="dk1"/>
+                </a:solidFill>
+                <a:latin typeface="Times New Roman"/>
+                <a:ea typeface="Times New Roman"/>
+                <a:cs typeface="Times New Roman"/>
+                <a:sym typeface="Times New Roman"/>
+              </a:defRPr>
+            </a:lvl7pPr>
+            <a:lvl8pPr marL="3657600" marR="0" lvl="7" indent="-355600" algn="l" rtl="0">
+              <a:lnSpc>
+                <a:spcPct val="100000"/>
+              </a:lnSpc>
+              <a:spcBef>
+                <a:spcPts val="400"/>
+              </a:spcBef>
+              <a:spcAft>
+                <a:spcPts val="0"/>
+              </a:spcAft>
+              <a:buClr>
+                <a:srgbClr val="FF5050"/>
+              </a:buClr>
+              <a:buSzPts val="2000"/>
+              <a:buFont typeface="Times New Roman"/>
+              <a:buChar char="o"/>
+              <a:defRPr sz="2000" b="0" i="0" u="none" strike="noStrike" cap="none">
+                <a:solidFill>
+                  <a:schemeClr val="dk1"/>
+                </a:solidFill>
+                <a:latin typeface="Times New Roman"/>
+                <a:ea typeface="Times New Roman"/>
+                <a:cs typeface="Times New Roman"/>
+                <a:sym typeface="Times New Roman"/>
+              </a:defRPr>
+            </a:lvl8pPr>
+            <a:lvl9pPr marL="4114800" marR="0" lvl="8" indent="-355600" algn="l" rtl="0">
+              <a:lnSpc>
+                <a:spcPct val="100000"/>
+              </a:lnSpc>
+              <a:spcBef>
+                <a:spcPts val="400"/>
+              </a:spcBef>
+              <a:spcAft>
+                <a:spcPts val="0"/>
+              </a:spcAft>
+              <a:buClr>
+                <a:srgbClr val="FF5050"/>
+              </a:buClr>
+              <a:buSzPts val="2000"/>
+              <a:buFont typeface="Times New Roman"/>
+              <a:buChar char="o"/>
+              <a:defRPr sz="2000" b="0" i="0" u="none" strike="noStrike" cap="none">
+                <a:solidFill>
+                  <a:schemeClr val="dk1"/>
+                </a:solidFill>
+                <a:latin typeface="Times New Roman"/>
+                <a:ea typeface="Times New Roman"/>
+                <a:cs typeface="Times New Roman"/>
+                <a:sym typeface="Times New Roman"/>
+              </a:defRPr>
+            </a:lvl9pPr>
+          </a:lstStyle>
+          <a:p>
+            <a:pPr>
+              <a:lnSpc>
+                <a:spcPct val="150000"/>
+              </a:lnSpc>
+            </a:pPr>
+            <a:r>
+              <a:rPr lang="zh-TW" altLang="en-US" sz="2000" dirty="0">
+                <a:solidFill>
+                  <a:schemeClr val="tx1"/>
+                </a:solidFill>
+                <a:latin typeface="Times New Roman" panose="02020603050405020304" pitchFamily="18" charset="0"/>
+                <a:ea typeface="標楷體" panose="03000509000000000000" pitchFamily="65" charset="-120"/>
+                <a:cs typeface="Times New Roman" panose="02020603050405020304" pitchFamily="18" charset="0"/>
+              </a:rPr>
+              <a:t>定位</a:t>
+            </a:r>
+            <a:endParaRPr lang="en-US" altLang="zh-TW" sz="2000" dirty="0">
+              <a:solidFill>
+                <a:schemeClr val="tx1"/>
+              </a:solidFill>
+              <a:latin typeface="Times New Roman" panose="02020603050405020304" pitchFamily="18" charset="0"/>
+              <a:ea typeface="標楷體" panose="03000509000000000000" pitchFamily="65" charset="-120"/>
+              <a:cs typeface="Times New Roman" panose="02020603050405020304" pitchFamily="18" charset="0"/>
+            </a:endParaRPr>
+          </a:p>
+          <a:p>
+            <a:pPr lvl="1">
+              <a:lnSpc>
+                <a:spcPts val="3000"/>
+              </a:lnSpc>
+            </a:pPr>
+            <a:r>
+              <a:rPr lang="zh-TW" altLang="en-US" sz="1600" dirty="0">
+                <a:latin typeface="Times New Roman" panose="02020603050405020304" pitchFamily="18" charset="0"/>
+                <a:ea typeface="標楷體" panose="03000509000000000000" pitchFamily="65" charset="-120"/>
+                <a:cs typeface="Times New Roman" panose="02020603050405020304" pitchFamily="18" charset="0"/>
+              </a:rPr>
+              <a:t>透過 </a:t>
+            </a:r>
+            <a:r>
+              <a:rPr lang="en-US" altLang="zh-TW" sz="1600" dirty="0">
+                <a:latin typeface="Times New Roman" panose="02020603050405020304" pitchFamily="18" charset="0"/>
+                <a:ea typeface="標楷體" panose="03000509000000000000" pitchFamily="65" charset="-120"/>
+                <a:cs typeface="Times New Roman" panose="02020603050405020304" pitchFamily="18" charset="0"/>
+              </a:rPr>
+              <a:t>Python </a:t>
+            </a:r>
+            <a:r>
+              <a:rPr lang="zh-TW" altLang="en-US" sz="1600" dirty="0">
+                <a:latin typeface="Times New Roman" panose="02020603050405020304" pitchFamily="18" charset="0"/>
+                <a:ea typeface="標楷體" panose="03000509000000000000" pitchFamily="65" charset="-120"/>
+                <a:cs typeface="Times New Roman" panose="02020603050405020304" pitchFamily="18" charset="0"/>
+              </a:rPr>
+              <a:t>描述與整合 </a:t>
+            </a:r>
+            <a:r>
+              <a:rPr lang="en-US" altLang="zh-TW" sz="1600" dirty="0">
+                <a:latin typeface="Times New Roman" panose="02020603050405020304" pitchFamily="18" charset="0"/>
+                <a:ea typeface="標楷體" panose="03000509000000000000" pitchFamily="65" charset="-120"/>
+                <a:cs typeface="Times New Roman" panose="02020603050405020304" pitchFamily="18" charset="0"/>
+              </a:rPr>
+              <a:t>FPGA </a:t>
+            </a:r>
+            <a:r>
+              <a:rPr lang="zh-TW" altLang="en-US" sz="1600" dirty="0">
+                <a:latin typeface="Times New Roman" panose="02020603050405020304" pitchFamily="18" charset="0"/>
+                <a:ea typeface="標楷體" panose="03000509000000000000" pitchFamily="65" charset="-120"/>
+                <a:cs typeface="Times New Roman" panose="02020603050405020304" pitchFamily="18" charset="0"/>
+              </a:rPr>
+              <a:t>硬體模組，建立 </a:t>
+            </a:r>
+            <a:r>
+              <a:rPr lang="en-US" altLang="zh-TW" sz="1600" dirty="0">
+                <a:latin typeface="Times New Roman" panose="02020603050405020304" pitchFamily="18" charset="0"/>
+                <a:ea typeface="標楷體" panose="03000509000000000000" pitchFamily="65" charset="-120"/>
+                <a:cs typeface="Times New Roman" panose="02020603050405020304" pitchFamily="18" charset="0"/>
+              </a:rPr>
+              <a:t>SoC</a:t>
+            </a:r>
+            <a:r>
+              <a:rPr lang="zh-TW" altLang="en-US" sz="1600" dirty="0">
+                <a:latin typeface="Times New Roman" panose="02020603050405020304" pitchFamily="18" charset="0"/>
+                <a:ea typeface="標楷體" panose="03000509000000000000" pitchFamily="65" charset="-120"/>
+                <a:cs typeface="Times New Roman" panose="02020603050405020304" pitchFamily="18" charset="0"/>
+              </a:rPr>
+              <a:t> 設計，並支援產生 </a:t>
+            </a:r>
+            <a:r>
+              <a:rPr lang="en-US" altLang="zh-TW" sz="1600" dirty="0">
+                <a:latin typeface="Times New Roman" panose="02020603050405020304" pitchFamily="18" charset="0"/>
+                <a:ea typeface="標楷體" panose="03000509000000000000" pitchFamily="65" charset="-120"/>
+                <a:cs typeface="Times New Roman" panose="02020603050405020304" pitchFamily="18" charset="0"/>
+              </a:rPr>
+              <a:t>HDL </a:t>
+            </a:r>
+            <a:r>
+              <a:rPr lang="zh-TW" altLang="en-US" sz="1600" dirty="0">
+                <a:latin typeface="Times New Roman" panose="02020603050405020304" pitchFamily="18" charset="0"/>
+                <a:ea typeface="標楷體" panose="03000509000000000000" pitchFamily="65" charset="-120"/>
+                <a:cs typeface="Times New Roman" panose="02020603050405020304" pitchFamily="18" charset="0"/>
+              </a:rPr>
+              <a:t>與呼叫 </a:t>
+            </a:r>
+            <a:r>
+              <a:rPr lang="en-US" altLang="zh-TW" sz="1600" dirty="0">
+                <a:latin typeface="Times New Roman" panose="02020603050405020304" pitchFamily="18" charset="0"/>
+                <a:ea typeface="標楷體" panose="03000509000000000000" pitchFamily="65" charset="-120"/>
+                <a:cs typeface="Times New Roman" panose="02020603050405020304" pitchFamily="18" charset="0"/>
+              </a:rPr>
+              <a:t>FPGA </a:t>
+            </a:r>
+            <a:r>
+              <a:rPr lang="zh-TW" altLang="en-US" sz="1600" dirty="0">
+                <a:latin typeface="Times New Roman" panose="02020603050405020304" pitchFamily="18" charset="0"/>
+                <a:ea typeface="標楷體" panose="03000509000000000000" pitchFamily="65" charset="-120"/>
+                <a:cs typeface="Times New Roman" panose="02020603050405020304" pitchFamily="18" charset="0"/>
+              </a:rPr>
+              <a:t>建置工具</a:t>
+            </a:r>
+          </a:p>
+          <a:p>
+            <a:pPr>
+              <a:lnSpc>
+                <a:spcPts val="3000"/>
+              </a:lnSpc>
+            </a:pPr>
+            <a:r>
+              <a:rPr lang="zh-TW" altLang="en-US" sz="2000" dirty="0">
+                <a:latin typeface="Times New Roman" panose="02020603050405020304" pitchFamily="18" charset="0"/>
+                <a:ea typeface="標楷體" panose="03000509000000000000" pitchFamily="65" charset="-120"/>
+                <a:cs typeface="Times New Roman" panose="02020603050405020304" pitchFamily="18" charset="0"/>
+              </a:rPr>
+              <a:t>功能</a:t>
+            </a:r>
+          </a:p>
+          <a:p>
+            <a:pPr lvl="1">
+              <a:lnSpc>
+                <a:spcPts val="3000"/>
+              </a:lnSpc>
+            </a:pPr>
+            <a:r>
+              <a:rPr lang="zh-TW" altLang="en-US" sz="1600" dirty="0">
+                <a:latin typeface="Times New Roman" panose="02020603050405020304" pitchFamily="18" charset="0"/>
+                <a:ea typeface="標楷體" panose="03000509000000000000" pitchFamily="65" charset="-120"/>
+                <a:cs typeface="Times New Roman" panose="02020603050405020304" pitchFamily="18" charset="0"/>
+              </a:rPr>
+              <a:t>組合處理器、記憶體、匯流排及周邊模組</a:t>
+            </a:r>
+          </a:p>
+          <a:p>
+            <a:pPr lvl="1">
+              <a:lnSpc>
+                <a:spcPts val="3000"/>
+              </a:lnSpc>
+            </a:pPr>
+            <a:r>
+              <a:rPr lang="zh-TW" altLang="en-US" sz="1600" dirty="0">
+                <a:latin typeface="Times New Roman" panose="02020603050405020304" pitchFamily="18" charset="0"/>
+                <a:ea typeface="標楷體" panose="03000509000000000000" pitchFamily="65" charset="-120"/>
+                <a:cs typeface="Times New Roman" panose="02020603050405020304" pitchFamily="18" charset="0"/>
+              </a:rPr>
+              <a:t>提供 </a:t>
+            </a:r>
+            <a:r>
+              <a:rPr lang="en-US" altLang="zh-TW" sz="1600" dirty="0">
+                <a:latin typeface="Times New Roman" panose="02020603050405020304" pitchFamily="18" charset="0"/>
+                <a:ea typeface="標楷體" panose="03000509000000000000" pitchFamily="65" charset="-120"/>
+                <a:cs typeface="Times New Roman" panose="02020603050405020304" pitchFamily="18" charset="0"/>
+              </a:rPr>
+              <a:t>Wishbone</a:t>
+            </a:r>
+            <a:r>
+              <a:rPr lang="zh-TW" altLang="en-US" sz="1600" dirty="0">
+                <a:latin typeface="Times New Roman" panose="02020603050405020304" pitchFamily="18" charset="0"/>
+                <a:ea typeface="標楷體" panose="03000509000000000000" pitchFamily="65" charset="-120"/>
+                <a:cs typeface="Times New Roman" panose="02020603050405020304" pitchFamily="18" charset="0"/>
+              </a:rPr>
+              <a:t>、</a:t>
+            </a:r>
+            <a:r>
+              <a:rPr lang="en-US" altLang="zh-TW" sz="1600" dirty="0">
+                <a:latin typeface="Times New Roman" panose="02020603050405020304" pitchFamily="18" charset="0"/>
+                <a:ea typeface="標楷體" panose="03000509000000000000" pitchFamily="65" charset="-120"/>
+                <a:cs typeface="Times New Roman" panose="02020603050405020304" pitchFamily="18" charset="0"/>
+              </a:rPr>
+              <a:t>AXI </a:t>
+            </a:r>
+            <a:r>
+              <a:rPr lang="zh-TW" altLang="en-US" sz="1600" dirty="0">
+                <a:latin typeface="Times New Roman" panose="02020603050405020304" pitchFamily="18" charset="0"/>
+                <a:ea typeface="標楷體" panose="03000509000000000000" pitchFamily="65" charset="-120"/>
+                <a:cs typeface="Times New Roman" panose="02020603050405020304" pitchFamily="18" charset="0"/>
+              </a:rPr>
+              <a:t>等互連機制，以及 </a:t>
+            </a:r>
+            <a:r>
+              <a:rPr lang="en-US" altLang="zh-TW" sz="1600" dirty="0">
+                <a:latin typeface="Times New Roman" panose="02020603050405020304" pitchFamily="18" charset="0"/>
+                <a:ea typeface="標楷體" panose="03000509000000000000" pitchFamily="65" charset="-120"/>
+                <a:cs typeface="Times New Roman" panose="02020603050405020304" pitchFamily="18" charset="0"/>
+              </a:rPr>
+              <a:t>Streams</a:t>
+            </a:r>
+          </a:p>
+          <a:p>
+            <a:pPr lvl="1">
+              <a:lnSpc>
+                <a:spcPts val="3000"/>
+              </a:lnSpc>
+            </a:pPr>
+            <a:r>
+              <a:rPr lang="zh-TW" altLang="en-US" sz="1600" dirty="0">
+                <a:latin typeface="Times New Roman" panose="02020603050405020304" pitchFamily="18" charset="0"/>
+                <a:ea typeface="標楷體" panose="03000509000000000000" pitchFamily="65" charset="-120"/>
+                <a:cs typeface="Times New Roman" panose="02020603050405020304" pitchFamily="18" charset="0"/>
+              </a:rPr>
+              <a:t>可搭配 </a:t>
+            </a:r>
+            <a:r>
+              <a:rPr lang="en-US" altLang="zh-TW" sz="1600" dirty="0" err="1">
+                <a:latin typeface="Times New Roman" panose="02020603050405020304" pitchFamily="18" charset="0"/>
+                <a:ea typeface="標楷體" panose="03000509000000000000" pitchFamily="65" charset="-120"/>
+                <a:cs typeface="Times New Roman" panose="02020603050405020304" pitchFamily="18" charset="0"/>
+              </a:rPr>
+              <a:t>LiteDRAM</a:t>
+            </a:r>
+            <a:r>
+              <a:rPr lang="zh-TW" altLang="en-US" sz="1600" dirty="0">
+                <a:latin typeface="Times New Roman" panose="02020603050405020304" pitchFamily="18" charset="0"/>
+                <a:ea typeface="標楷體" panose="03000509000000000000" pitchFamily="65" charset="-120"/>
+                <a:cs typeface="Times New Roman" panose="02020603050405020304" pitchFamily="18" charset="0"/>
+              </a:rPr>
+              <a:t>、</a:t>
+            </a:r>
+            <a:r>
+              <a:rPr lang="en-US" altLang="zh-TW" sz="1600" dirty="0" err="1">
+                <a:latin typeface="Times New Roman" panose="02020603050405020304" pitchFamily="18" charset="0"/>
+                <a:ea typeface="標楷體" panose="03000509000000000000" pitchFamily="65" charset="-120"/>
+                <a:cs typeface="Times New Roman" panose="02020603050405020304" pitchFamily="18" charset="0"/>
+              </a:rPr>
+              <a:t>LitePCIe</a:t>
+            </a:r>
+            <a:r>
+              <a:rPr lang="zh-TW" altLang="en-US" sz="1600" dirty="0">
+                <a:latin typeface="Times New Roman" panose="02020603050405020304" pitchFamily="18" charset="0"/>
+                <a:ea typeface="標楷體" panose="03000509000000000000" pitchFamily="65" charset="-120"/>
+                <a:cs typeface="Times New Roman" panose="02020603050405020304" pitchFamily="18" charset="0"/>
+              </a:rPr>
+              <a:t>、</a:t>
+            </a:r>
+            <a:r>
+              <a:rPr lang="en-US" altLang="zh-TW" sz="1600" dirty="0" err="1">
+                <a:latin typeface="Times New Roman" panose="02020603050405020304" pitchFamily="18" charset="0"/>
+                <a:ea typeface="標楷體" panose="03000509000000000000" pitchFamily="65" charset="-120"/>
+                <a:cs typeface="Times New Roman" panose="02020603050405020304" pitchFamily="18" charset="0"/>
+              </a:rPr>
+              <a:t>LiteEth</a:t>
+            </a:r>
+            <a:r>
+              <a:rPr lang="en-US" altLang="zh-TW" sz="1600" dirty="0">
+                <a:latin typeface="Times New Roman" panose="02020603050405020304" pitchFamily="18" charset="0"/>
+                <a:ea typeface="標楷體" panose="03000509000000000000" pitchFamily="65" charset="-120"/>
+                <a:cs typeface="Times New Roman" panose="02020603050405020304" pitchFamily="18" charset="0"/>
+              </a:rPr>
+              <a:t> </a:t>
+            </a:r>
+            <a:r>
+              <a:rPr lang="zh-TW" altLang="en-US" sz="1600" dirty="0">
+                <a:latin typeface="Times New Roman" panose="02020603050405020304" pitchFamily="18" charset="0"/>
+                <a:ea typeface="標楷體" panose="03000509000000000000" pitchFamily="65" charset="-120"/>
+                <a:cs typeface="Times New Roman" panose="02020603050405020304" pitchFamily="18" charset="0"/>
+              </a:rPr>
+              <a:t>等生態系模組</a:t>
+            </a:r>
+            <a:endParaRPr lang="en-US" altLang="zh-TW" sz="1600" dirty="0">
+              <a:latin typeface="Times New Roman" panose="02020603050405020304" pitchFamily="18" charset="0"/>
+              <a:ea typeface="標楷體" panose="03000509000000000000" pitchFamily="65" charset="-120"/>
+              <a:cs typeface="Times New Roman" panose="02020603050405020304" pitchFamily="18" charset="0"/>
+            </a:endParaRPr>
+          </a:p>
+          <a:p>
+            <a:pPr>
+              <a:lnSpc>
+                <a:spcPts val="3000"/>
+              </a:lnSpc>
+            </a:pPr>
+            <a:r>
+              <a:rPr lang="zh-TW" altLang="en-US" sz="2000" dirty="0">
+                <a:latin typeface="Times New Roman" panose="02020603050405020304" pitchFamily="18" charset="0"/>
+                <a:ea typeface="標楷體" panose="03000509000000000000" pitchFamily="65" charset="-120"/>
+                <a:cs typeface="Times New Roman" panose="02020603050405020304" pitchFamily="18" charset="0"/>
+              </a:rPr>
+              <a:t>流程</a:t>
+            </a:r>
+          </a:p>
+        </p:txBody>
+      </p:sp>
+      <p:sp>
+        <p:nvSpPr>
+          <p:cNvPr id="5" name="文字方塊 4">
+            <a:extLst>
+              <a:ext uri="{FF2B5EF4-FFF2-40B4-BE49-F238E27FC236}">
+                <a16:creationId xmlns:a16="http://schemas.microsoft.com/office/drawing/2014/main" id="{DB8BF237-AE2C-BCBD-03CB-07C643D7BB9F}"/>
+              </a:ext>
+            </a:extLst>
+          </p:cNvPr>
+          <p:cNvSpPr txBox="1"/>
+          <p:nvPr/>
+        </p:nvSpPr>
+        <p:spPr>
+          <a:xfrm>
+            <a:off x="1787236" y="6384072"/>
+            <a:ext cx="5802283" cy="276999"/>
+          </a:xfrm>
+          <a:prstGeom prst="rect">
+            <a:avLst/>
+          </a:prstGeom>
+          <a:noFill/>
+        </p:spPr>
+        <p:txBody>
+          <a:bodyPr wrap="square">
+            <a:spAutoFit/>
+          </a:bodyPr>
+          <a:lstStyle/>
+          <a:p>
+            <a:r>
+              <a:rPr lang="en-US" altLang="zh-TW" sz="1200" dirty="0">
+                <a:latin typeface="Times New Roman" panose="02020603050405020304" pitchFamily="18" charset="0"/>
+                <a:cs typeface="Times New Roman" panose="02020603050405020304" pitchFamily="18" charset="0"/>
+              </a:rPr>
+              <a:t>[3] </a:t>
+            </a:r>
+            <a:r>
+              <a:rPr lang="zh-TW" altLang="en-US" sz="1200" dirty="0">
+                <a:latin typeface="Times New Roman" panose="02020603050405020304" pitchFamily="18" charset="0"/>
+                <a:cs typeface="Times New Roman" panose="02020603050405020304" pitchFamily="18" charset="0"/>
+              </a:rPr>
+              <a:t>https://github.com/enjoy-digital/litex?utm_source=chatgpt.com</a:t>
+            </a:r>
+          </a:p>
+        </p:txBody>
+      </p:sp>
     </p:spTree>
     <p:extLst>
       <p:ext uri="{BB962C8B-B14F-4D97-AF65-F5344CB8AC3E}">
-        <p14:creationId xmlns:p14="http://schemas.microsoft.com/office/powerpoint/2010/main" val="1012968958"/>
+        <p14:creationId xmlns:p14="http://schemas.microsoft.com/office/powerpoint/2010/main" val="3075961224"/>
       </p:ext>
     </p:extLst>
   </p:cSld>
@@ -13910,7 +17320,13 @@
   <p:cSld>
     <p:spTree>
       <p:nvGrpSpPr>
-        <p:cNvPr id="1" name=""/>
+        <p:cNvPr id="1" name="">
+          <a:extLst>
+            <a:ext uri="{FF2B5EF4-FFF2-40B4-BE49-F238E27FC236}">
+              <a16:creationId xmlns:a16="http://schemas.microsoft.com/office/drawing/2014/main" id="{C25E9AAA-7E36-1E17-83F9-FD3A18A28BE9}"/>
+            </a:ext>
+          </a:extLst>
+        </p:cNvPr>
         <p:cNvGrpSpPr/>
         <p:nvPr/>
       </p:nvGrpSpPr>
@@ -13922,57 +17338,76 @@
           <a:chExt cx="0" cy="0"/>
         </a:xfrm>
       </p:grpSpPr>
-      <p:pic>
-        <p:nvPicPr>
-          <p:cNvPr id="2097164" name="圖片 6"/>
-          <p:cNvPicPr>
-            <a:picLocks noChangeAspect="1"/>
-          </p:cNvPicPr>
+      <p:sp>
+        <p:nvSpPr>
+          <p:cNvPr id="15" name="標題 1">
+            <a:extLst>
+              <a:ext uri="{FF2B5EF4-FFF2-40B4-BE49-F238E27FC236}">
+                <a16:creationId xmlns:a16="http://schemas.microsoft.com/office/drawing/2014/main" id="{142C8726-E890-9988-40FC-8984FDA21FEE}"/>
+              </a:ext>
+            </a:extLst>
+          </p:cNvPr>
+          <p:cNvSpPr>
+            <a:spLocks noGrp="1"/>
+          </p:cNvSpPr>
+          <p:nvPr>
+            <p:ph type="title"/>
+          </p:nvPr>
+        </p:nvSpPr>
+        <p:spPr>
+          <a:xfrm>
+            <a:off x="609602" y="609600"/>
+            <a:ext cx="8077200" cy="533400"/>
+          </a:xfrm>
+          <a:ln>
+            <a:noFill/>
+          </a:ln>
+        </p:spPr>
+        <p:txBody>
+          <a:bodyPr/>
+          <a:lstStyle/>
+          <a:p>
+            <a:pPr algn="l" fontAlgn="t"/>
+            <a:r>
+              <a:rPr lang="zh-TW" altLang="en-US" dirty="0">
+                <a:latin typeface="Times New Roman" panose="02020603050405020304" pitchFamily="18" charset="0"/>
+                <a:ea typeface="標楷體" panose="03000509000000000000" pitchFamily="65" charset="-120"/>
+                <a:cs typeface="Times New Roman" panose="02020603050405020304" pitchFamily="18" charset="0"/>
+              </a:rPr>
+              <a:t>本次進度</a:t>
+            </a:r>
+            <a:r>
+              <a:rPr lang="en-US" altLang="zh-TW" dirty="0">
+                <a:latin typeface="Times New Roman" panose="02020603050405020304" pitchFamily="18" charset="0"/>
+                <a:ea typeface="標楷體" panose="03000509000000000000" pitchFamily="65" charset="-120"/>
+                <a:cs typeface="Times New Roman" panose="02020603050405020304" pitchFamily="18" charset="0"/>
+              </a:rPr>
+              <a:t>: Xilinx-FPGA-PCIe-XDMA-Tutorial</a:t>
+            </a:r>
+            <a:endParaRPr lang="zh-TW" altLang="en-US" dirty="0">
+              <a:latin typeface="Times New Roman" panose="02020603050405020304" pitchFamily="18" charset="0"/>
+              <a:ea typeface="標楷體" panose="03000509000000000000" pitchFamily="65" charset="-120"/>
+              <a:cs typeface="Times New Roman" panose="02020603050405020304" pitchFamily="18" charset="0"/>
+            </a:endParaRPr>
+          </a:p>
+        </p:txBody>
+      </p:sp>
+      <p:sp>
+        <p:nvSpPr>
+          <p:cNvPr id="2" name="文字版面配置區 6">
+            <a:extLst>
+              <a:ext uri="{FF2B5EF4-FFF2-40B4-BE49-F238E27FC236}">
+                <a16:creationId xmlns:a16="http://schemas.microsoft.com/office/drawing/2014/main" id="{D929304B-5341-8BBF-E71F-AF5F2FE7268A}"/>
+              </a:ext>
+            </a:extLst>
+          </p:cNvPr>
+          <p:cNvSpPr txBox="1"/>
           <p:nvPr/>
-        </p:nvPicPr>
-        <p:blipFill>
-          <a:blip r:embed="rId3"/>
-          <a:srcRect/>
-          <a:stretch>
-            <a:fillRect/>
-          </a:stretch>
-        </p:blipFill>
-        <p:spPr bwMode="auto">
+        </p:nvSpPr>
+        <p:spPr>
           <a:xfrm>
-            <a:off x="3357746" y="3004771"/>
-            <a:ext cx="5556738" cy="848458"/>
-          </a:xfrm>
-          <a:prstGeom prst="rect">
-            <a:avLst/>
-          </a:prstGeom>
-          <a:effectLst>
-            <a:outerShdw blurRad="50800" dist="38100" dir="5400000" algn="t" rotWithShape="0">
-              <a:prstClr val="black">
-                <a:alpha val="40000"/>
-              </a:prstClr>
-            </a:outerShdw>
-          </a:effectLst>
-        </p:spPr>
-      </p:pic>
-      <p:pic>
-        <p:nvPicPr>
-          <p:cNvPr id="2097165" name="Picture 2" descr="http://www.secretariat.ntust.edu.tw/ezfiles/20/1020/img/1688/09.png"/>
-          <p:cNvPicPr>
-            <a:picLocks noChangeAspect="1" noChangeArrowheads="1"/>
-          </p:cNvPicPr>
-          <p:nvPr/>
-        </p:nvPicPr>
-        <p:blipFill>
-          <a:blip r:embed="rId4" cstate="print"/>
-          <a:srcRect/>
-          <a:stretch>
-            <a:fillRect/>
-          </a:stretch>
-        </p:blipFill>
-        <p:spPr bwMode="auto">
-          <a:xfrm>
-            <a:off x="964866" y="1628181"/>
-            <a:ext cx="6260123" cy="1186962"/>
+            <a:off x="609602" y="935857"/>
+            <a:ext cx="8686796" cy="4700685"/>
           </a:xfrm>
           <a:prstGeom prst="rect">
             <a:avLst/>
@@ -13981,40 +17416,962 @@
           <a:ln>
             <a:noFill/>
           </a:ln>
-          <a:effectLst>
-            <a:outerShdw blurRad="63500" sx="102000" sy="102000" algn="ctr" rotWithShape="0">
-              <a:prstClr val="black">
-                <a:alpha val="40000"/>
-              </a:prstClr>
-            </a:outerShdw>
-          </a:effectLst>
         </p:spPr>
-      </p:pic>
-      <p:pic>
-        <p:nvPicPr>
-          <p:cNvPr id="2097166" name="圖片 7"/>
-          <p:cNvPicPr>
-            <a:picLocks noChangeAspect="1"/>
-          </p:cNvPicPr>
+        <p:txBody>
+          <a:bodyPr spcFirstLastPara="1" wrap="square" lIns="91425" tIns="45700" rIns="91425" bIns="45700" anchor="t" anchorCtr="0">
+            <a:noAutofit/>
+          </a:bodyPr>
+          <a:lstStyle>
+            <a:defPPr marR="0" lvl="0" algn="l" rtl="0">
+              <a:lnSpc>
+                <a:spcPct val="100000"/>
+              </a:lnSpc>
+              <a:spcBef>
+                <a:spcPts val="0"/>
+              </a:spcBef>
+              <a:spcAft>
+                <a:spcPts val="0"/>
+              </a:spcAft>
+            </a:defPPr>
+            <a:lvl1pPr marL="457200" marR="0" lvl="0" indent="-406400" algn="l" rtl="0">
+              <a:lnSpc>
+                <a:spcPct val="100000"/>
+              </a:lnSpc>
+              <a:spcBef>
+                <a:spcPts val="560"/>
+              </a:spcBef>
+              <a:spcAft>
+                <a:spcPts val="0"/>
+              </a:spcAft>
+              <a:buClr>
+                <a:schemeClr val="accent2"/>
+              </a:buClr>
+              <a:buSzPts val="2800"/>
+              <a:buFont typeface="Noto Sans Symbols"/>
+              <a:buChar char="❖"/>
+              <a:defRPr sz="2800" b="0" i="0" u="none" strike="noStrike" cap="none">
+                <a:solidFill>
+                  <a:schemeClr val="dk1"/>
+                </a:solidFill>
+                <a:latin typeface="Times New Roman"/>
+                <a:ea typeface="Times New Roman"/>
+                <a:cs typeface="Times New Roman"/>
+                <a:sym typeface="Times New Roman"/>
+              </a:defRPr>
+            </a:lvl1pPr>
+            <a:lvl2pPr marL="914400" marR="0" lvl="1" indent="-381000" algn="l" rtl="0">
+              <a:lnSpc>
+                <a:spcPct val="100000"/>
+              </a:lnSpc>
+              <a:spcBef>
+                <a:spcPts val="480"/>
+              </a:spcBef>
+              <a:spcAft>
+                <a:spcPts val="0"/>
+              </a:spcAft>
+              <a:buClr>
+                <a:srgbClr val="FF5050"/>
+              </a:buClr>
+              <a:buSzPts val="2400"/>
+              <a:buFont typeface="Noto Sans Symbols"/>
+              <a:buChar char="▪"/>
+              <a:defRPr sz="2400" b="0" i="0" u="none" strike="noStrike" cap="none">
+                <a:solidFill>
+                  <a:schemeClr val="dk1"/>
+                </a:solidFill>
+                <a:latin typeface="Times New Roman"/>
+                <a:ea typeface="Times New Roman"/>
+                <a:cs typeface="Times New Roman"/>
+                <a:sym typeface="Times New Roman"/>
+              </a:defRPr>
+            </a:lvl2pPr>
+            <a:lvl3pPr marL="1371600" marR="0" lvl="2" indent="-355600" algn="l" rtl="0">
+              <a:lnSpc>
+                <a:spcPct val="100000"/>
+              </a:lnSpc>
+              <a:spcBef>
+                <a:spcPts val="400"/>
+              </a:spcBef>
+              <a:spcAft>
+                <a:spcPts val="0"/>
+              </a:spcAft>
+              <a:buClr>
+                <a:srgbClr val="6699FF"/>
+              </a:buClr>
+              <a:buSzPts val="2000"/>
+              <a:buFont typeface="Times New Roman"/>
+              <a:buChar char="•"/>
+              <a:defRPr sz="2000" b="0" i="0" u="none" strike="noStrike" cap="none">
+                <a:solidFill>
+                  <a:schemeClr val="dk1"/>
+                </a:solidFill>
+                <a:latin typeface="Times New Roman"/>
+                <a:ea typeface="Times New Roman"/>
+                <a:cs typeface="Times New Roman"/>
+                <a:sym typeface="Times New Roman"/>
+              </a:defRPr>
+            </a:lvl3pPr>
+            <a:lvl4pPr marL="1828800" marR="0" lvl="3" indent="-355600" algn="l" rtl="0">
+              <a:lnSpc>
+                <a:spcPct val="100000"/>
+              </a:lnSpc>
+              <a:spcBef>
+                <a:spcPts val="400"/>
+              </a:spcBef>
+              <a:spcAft>
+                <a:spcPts val="0"/>
+              </a:spcAft>
+              <a:buClr>
+                <a:srgbClr val="FF5050"/>
+              </a:buClr>
+              <a:buSzPts val="2000"/>
+              <a:buFont typeface="Times New Roman"/>
+              <a:buChar char="o"/>
+              <a:defRPr sz="2000" b="0" i="0" u="none" strike="noStrike" cap="none">
+                <a:solidFill>
+                  <a:schemeClr val="dk1"/>
+                </a:solidFill>
+                <a:latin typeface="Times New Roman"/>
+                <a:ea typeface="Times New Roman"/>
+                <a:cs typeface="Times New Roman"/>
+                <a:sym typeface="Times New Roman"/>
+              </a:defRPr>
+            </a:lvl4pPr>
+            <a:lvl5pPr marL="2286000" marR="0" lvl="4" indent="-355600" algn="l" rtl="0">
+              <a:lnSpc>
+                <a:spcPct val="100000"/>
+              </a:lnSpc>
+              <a:spcBef>
+                <a:spcPts val="400"/>
+              </a:spcBef>
+              <a:spcAft>
+                <a:spcPts val="0"/>
+              </a:spcAft>
+              <a:buClr>
+                <a:srgbClr val="FF5050"/>
+              </a:buClr>
+              <a:buSzPts val="2000"/>
+              <a:buFont typeface="Times New Roman"/>
+              <a:buChar char="o"/>
+              <a:defRPr sz="2000" b="0" i="0" u="none" strike="noStrike" cap="none">
+                <a:solidFill>
+                  <a:schemeClr val="dk1"/>
+                </a:solidFill>
+                <a:latin typeface="Times New Roman"/>
+                <a:ea typeface="Times New Roman"/>
+                <a:cs typeface="Times New Roman"/>
+                <a:sym typeface="Times New Roman"/>
+              </a:defRPr>
+            </a:lvl5pPr>
+            <a:lvl6pPr marL="2743200" marR="0" lvl="5" indent="-355600" algn="l" rtl="0">
+              <a:lnSpc>
+                <a:spcPct val="100000"/>
+              </a:lnSpc>
+              <a:spcBef>
+                <a:spcPts val="400"/>
+              </a:spcBef>
+              <a:spcAft>
+                <a:spcPts val="0"/>
+              </a:spcAft>
+              <a:buClr>
+                <a:srgbClr val="FF5050"/>
+              </a:buClr>
+              <a:buSzPts val="2000"/>
+              <a:buFont typeface="Times New Roman"/>
+              <a:buChar char="o"/>
+              <a:defRPr sz="2000" b="0" i="0" u="none" strike="noStrike" cap="none">
+                <a:solidFill>
+                  <a:schemeClr val="dk1"/>
+                </a:solidFill>
+                <a:latin typeface="Times New Roman"/>
+                <a:ea typeface="Times New Roman"/>
+                <a:cs typeface="Times New Roman"/>
+                <a:sym typeface="Times New Roman"/>
+              </a:defRPr>
+            </a:lvl6pPr>
+            <a:lvl7pPr marL="3200400" marR="0" lvl="6" indent="-355600" algn="l" rtl="0">
+              <a:lnSpc>
+                <a:spcPct val="100000"/>
+              </a:lnSpc>
+              <a:spcBef>
+                <a:spcPts val="400"/>
+              </a:spcBef>
+              <a:spcAft>
+                <a:spcPts val="0"/>
+              </a:spcAft>
+              <a:buClr>
+                <a:srgbClr val="FF5050"/>
+              </a:buClr>
+              <a:buSzPts val="2000"/>
+              <a:buFont typeface="Times New Roman"/>
+              <a:buChar char="o"/>
+              <a:defRPr sz="2000" b="0" i="0" u="none" strike="noStrike" cap="none">
+                <a:solidFill>
+                  <a:schemeClr val="dk1"/>
+                </a:solidFill>
+                <a:latin typeface="Times New Roman"/>
+                <a:ea typeface="Times New Roman"/>
+                <a:cs typeface="Times New Roman"/>
+                <a:sym typeface="Times New Roman"/>
+              </a:defRPr>
+            </a:lvl7pPr>
+            <a:lvl8pPr marL="3657600" marR="0" lvl="7" indent="-355600" algn="l" rtl="0">
+              <a:lnSpc>
+                <a:spcPct val="100000"/>
+              </a:lnSpc>
+              <a:spcBef>
+                <a:spcPts val="400"/>
+              </a:spcBef>
+              <a:spcAft>
+                <a:spcPts val="0"/>
+              </a:spcAft>
+              <a:buClr>
+                <a:srgbClr val="FF5050"/>
+              </a:buClr>
+              <a:buSzPts val="2000"/>
+              <a:buFont typeface="Times New Roman"/>
+              <a:buChar char="o"/>
+              <a:defRPr sz="2000" b="0" i="0" u="none" strike="noStrike" cap="none">
+                <a:solidFill>
+                  <a:schemeClr val="dk1"/>
+                </a:solidFill>
+                <a:latin typeface="Times New Roman"/>
+                <a:ea typeface="Times New Roman"/>
+                <a:cs typeface="Times New Roman"/>
+                <a:sym typeface="Times New Roman"/>
+              </a:defRPr>
+            </a:lvl8pPr>
+            <a:lvl9pPr marL="4114800" marR="0" lvl="8" indent="-355600" algn="l" rtl="0">
+              <a:lnSpc>
+                <a:spcPct val="100000"/>
+              </a:lnSpc>
+              <a:spcBef>
+                <a:spcPts val="400"/>
+              </a:spcBef>
+              <a:spcAft>
+                <a:spcPts val="0"/>
+              </a:spcAft>
+              <a:buClr>
+                <a:srgbClr val="FF5050"/>
+              </a:buClr>
+              <a:buSzPts val="2000"/>
+              <a:buFont typeface="Times New Roman"/>
+              <a:buChar char="o"/>
+              <a:defRPr sz="2000" b="0" i="0" u="none" strike="noStrike" cap="none">
+                <a:solidFill>
+                  <a:schemeClr val="dk1"/>
+                </a:solidFill>
+                <a:latin typeface="Times New Roman"/>
+                <a:ea typeface="Times New Roman"/>
+                <a:cs typeface="Times New Roman"/>
+                <a:sym typeface="Times New Roman"/>
+              </a:defRPr>
+            </a:lvl9pPr>
+          </a:lstStyle>
+          <a:p>
+            <a:pPr>
+              <a:lnSpc>
+                <a:spcPct val="150000"/>
+              </a:lnSpc>
+            </a:pPr>
+            <a:r>
+              <a:rPr lang="zh-TW" altLang="en-US" sz="2000" dirty="0">
+                <a:solidFill>
+                  <a:schemeClr val="tx1"/>
+                </a:solidFill>
+                <a:latin typeface="Times New Roman" panose="02020603050405020304" pitchFamily="18" charset="0"/>
+                <a:ea typeface="標楷體" panose="03000509000000000000" pitchFamily="65" charset="-120"/>
+                <a:cs typeface="Times New Roman" panose="02020603050405020304" pitchFamily="18" charset="0"/>
+              </a:rPr>
+              <a:t>定位</a:t>
+            </a:r>
+            <a:endParaRPr lang="en-US" altLang="zh-TW" sz="2000" dirty="0">
+              <a:solidFill>
+                <a:schemeClr val="tx1"/>
+              </a:solidFill>
+              <a:latin typeface="Times New Roman" panose="02020603050405020304" pitchFamily="18" charset="0"/>
+              <a:ea typeface="標楷體" panose="03000509000000000000" pitchFamily="65" charset="-120"/>
+              <a:cs typeface="Times New Roman" panose="02020603050405020304" pitchFamily="18" charset="0"/>
+            </a:endParaRPr>
+          </a:p>
+          <a:p>
+            <a:pPr lvl="1">
+              <a:lnSpc>
+                <a:spcPts val="3000"/>
+              </a:lnSpc>
+            </a:pPr>
+            <a:r>
+              <a:rPr lang="zh-TW" altLang="en-US" sz="1600" dirty="0">
+                <a:latin typeface="Times New Roman" panose="02020603050405020304" pitchFamily="18" charset="0"/>
+                <a:ea typeface="標楷體" panose="03000509000000000000" pitchFamily="65" charset="-120"/>
+                <a:cs typeface="Times New Roman" panose="02020603050405020304" pitchFamily="18" charset="0"/>
+              </a:rPr>
+              <a:t>整合 </a:t>
+            </a:r>
+            <a:r>
+              <a:rPr lang="en-US" altLang="zh-TW" sz="1600" dirty="0">
+                <a:latin typeface="Times New Roman" panose="02020603050405020304" pitchFamily="18" charset="0"/>
+                <a:ea typeface="標楷體" panose="03000509000000000000" pitchFamily="65" charset="-120"/>
+                <a:cs typeface="Times New Roman" panose="02020603050405020304" pitchFamily="18" charset="0"/>
+              </a:rPr>
+              <a:t>HDMI </a:t>
+            </a:r>
+            <a:r>
+              <a:rPr lang="zh-TW" altLang="en-US" sz="1600" dirty="0">
+                <a:latin typeface="Times New Roman" panose="02020603050405020304" pitchFamily="18" charset="0"/>
+                <a:ea typeface="標楷體" panose="03000509000000000000" pitchFamily="65" charset="-120"/>
+                <a:cs typeface="Times New Roman" panose="02020603050405020304" pitchFamily="18" charset="0"/>
+              </a:rPr>
+              <a:t>影像處理、</a:t>
+            </a:r>
+            <a:r>
+              <a:rPr lang="en-US" altLang="zh-TW" sz="1600" dirty="0">
+                <a:latin typeface="Times New Roman" panose="02020603050405020304" pitchFamily="18" charset="0"/>
+                <a:ea typeface="標楷體" panose="03000509000000000000" pitchFamily="65" charset="-120"/>
+                <a:cs typeface="Times New Roman" panose="02020603050405020304" pitchFamily="18" charset="0"/>
+              </a:rPr>
+              <a:t>DDR3 </a:t>
+            </a:r>
+            <a:r>
+              <a:rPr lang="zh-TW" altLang="en-US" sz="1600" dirty="0">
+                <a:latin typeface="Times New Roman" panose="02020603050405020304" pitchFamily="18" charset="0"/>
+                <a:ea typeface="標楷體" panose="03000509000000000000" pitchFamily="65" charset="-120"/>
+                <a:cs typeface="Times New Roman" panose="02020603050405020304" pitchFamily="18" charset="0"/>
+              </a:rPr>
+              <a:t>影格緩衝與 </a:t>
+            </a:r>
+            <a:r>
+              <a:rPr lang="en-US" altLang="zh-TW" sz="1600" dirty="0">
+                <a:latin typeface="Times New Roman" panose="02020603050405020304" pitchFamily="18" charset="0"/>
+                <a:ea typeface="標楷體" panose="03000509000000000000" pitchFamily="65" charset="-120"/>
+                <a:cs typeface="Times New Roman" panose="02020603050405020304" pitchFamily="18" charset="0"/>
+              </a:rPr>
+              <a:t>PCIe</a:t>
+            </a:r>
+            <a:r>
+              <a:rPr lang="zh-TW" altLang="en-US" sz="1600" dirty="0">
+                <a:latin typeface="Times New Roman" panose="02020603050405020304" pitchFamily="18" charset="0"/>
+                <a:ea typeface="標楷體" panose="03000509000000000000" pitchFamily="65" charset="-120"/>
+                <a:cs typeface="Times New Roman" panose="02020603050405020304" pitchFamily="18" charset="0"/>
+              </a:rPr>
+              <a:t>，並提供 </a:t>
+            </a:r>
+            <a:r>
+              <a:rPr lang="en-US" altLang="zh-TW" sz="1600" dirty="0">
+                <a:latin typeface="Times New Roman" panose="02020603050405020304" pitchFamily="18" charset="0"/>
+                <a:ea typeface="標楷體" panose="03000509000000000000" pitchFamily="65" charset="-120"/>
+                <a:cs typeface="Times New Roman" panose="02020603050405020304" pitchFamily="18" charset="0"/>
+              </a:rPr>
+              <a:t>Windows </a:t>
+            </a:r>
+            <a:r>
+              <a:rPr lang="zh-TW" altLang="en-US" sz="1600" dirty="0">
+                <a:latin typeface="Times New Roman" panose="02020603050405020304" pitchFamily="18" charset="0"/>
+                <a:ea typeface="標楷體" panose="03000509000000000000" pitchFamily="65" charset="-120"/>
+                <a:cs typeface="Times New Roman" panose="02020603050405020304" pitchFamily="18" charset="0"/>
+              </a:rPr>
+              <a:t>端影格讀取程式</a:t>
+            </a:r>
+          </a:p>
+          <a:p>
+            <a:pPr lvl="1">
+              <a:lnSpc>
+                <a:spcPts val="3000"/>
+              </a:lnSpc>
+            </a:pPr>
+            <a:endParaRPr lang="en-US" altLang="zh-TW" sz="1600" dirty="0">
+              <a:solidFill>
+                <a:schemeClr val="tx1"/>
+              </a:solidFill>
+              <a:latin typeface="Times New Roman" panose="02020603050405020304" pitchFamily="18" charset="0"/>
+              <a:ea typeface="標楷體" panose="03000509000000000000" pitchFamily="65" charset="-120"/>
+              <a:cs typeface="Times New Roman" panose="02020603050405020304" pitchFamily="18" charset="0"/>
+            </a:endParaRPr>
+          </a:p>
+        </p:txBody>
+      </p:sp>
+      <p:sp>
+        <p:nvSpPr>
+          <p:cNvPr id="3" name="文字方塊 2">
+            <a:extLst>
+              <a:ext uri="{FF2B5EF4-FFF2-40B4-BE49-F238E27FC236}">
+                <a16:creationId xmlns:a16="http://schemas.microsoft.com/office/drawing/2014/main" id="{B17A7646-77F3-2568-68C1-545F7C189BE6}"/>
+              </a:ext>
+            </a:extLst>
+          </p:cNvPr>
+          <p:cNvSpPr txBox="1"/>
           <p:nvPr/>
-        </p:nvPicPr>
-        <p:blipFill>
-          <a:blip r:embed="rId5"/>
-          <a:stretch>
-            <a:fillRect/>
-          </a:stretch>
-        </p:blipFill>
+        </p:nvSpPr>
         <p:spPr>
           <a:xfrm>
-            <a:off x="2493650" y="4226628"/>
-            <a:ext cx="4266522" cy="930565"/>
+            <a:off x="1787236" y="6384072"/>
+            <a:ext cx="5802283" cy="276999"/>
           </a:xfrm>
           <a:prstGeom prst="rect">
             <a:avLst/>
           </a:prstGeom>
+          <a:noFill/>
         </p:spPr>
-      </p:pic>
+        <p:txBody>
+          <a:bodyPr wrap="square">
+            <a:spAutoFit/>
+          </a:bodyPr>
+          <a:lstStyle/>
+          <a:p>
+            <a:r>
+              <a:rPr lang="en-US" altLang="zh-TW" sz="1200" dirty="0">
+                <a:latin typeface="Times New Roman" panose="02020603050405020304" pitchFamily="18" charset="0"/>
+                <a:ea typeface="標楷體" panose="03000509000000000000" pitchFamily="65" charset="-120"/>
+                <a:cs typeface="Times New Roman" panose="02020603050405020304" pitchFamily="18" charset="0"/>
+              </a:rPr>
+              <a:t>[4] https://github.com/WangXuan95/Xilinx-FPGA-PCIe-XDMA-Tutorial</a:t>
+            </a:r>
+            <a:endParaRPr lang="zh-TW" altLang="en-US" sz="1200" dirty="0">
+              <a:latin typeface="Times New Roman" panose="02020603050405020304" pitchFamily="18" charset="0"/>
+              <a:ea typeface="標楷體" panose="03000509000000000000" pitchFamily="65" charset="-120"/>
+              <a:cs typeface="Times New Roman" panose="02020603050405020304" pitchFamily="18" charset="0"/>
+            </a:endParaRPr>
+          </a:p>
+        </p:txBody>
+      </p:sp>
     </p:spTree>
+    <p:extLst>
+      <p:ext uri="{BB962C8B-B14F-4D97-AF65-F5344CB8AC3E}">
+        <p14:creationId xmlns:p14="http://schemas.microsoft.com/office/powerpoint/2010/main" val="3015781900"/>
+      </p:ext>
+    </p:extLst>
+  </p:cSld>
+  <p:clrMapOvr>
+    <a:masterClrMapping/>
+  </p:clrMapOvr>
+</p:sld>
+</file>
+
+<file path=ppt/slides/slide9.xml><?xml version="1.0" encoding="utf-8"?>
+<p:sld xmlns:a="http://schemas.openxmlformats.org/drawingml/2006/main" xmlns:r="http://schemas.openxmlformats.org/officeDocument/2006/relationships" xmlns:p="http://schemas.openxmlformats.org/presentationml/2006/main">
+  <p:cSld>
+    <p:spTree>
+      <p:nvGrpSpPr>
+        <p:cNvPr id="1" name="">
+          <a:extLst>
+            <a:ext uri="{FF2B5EF4-FFF2-40B4-BE49-F238E27FC236}">
+              <a16:creationId xmlns:a16="http://schemas.microsoft.com/office/drawing/2014/main" id="{C25E9AAA-7E36-1E17-83F9-FD3A18A28BE9}"/>
+            </a:ext>
+          </a:extLst>
+        </p:cNvPr>
+        <p:cNvGrpSpPr/>
+        <p:nvPr/>
+      </p:nvGrpSpPr>
+      <p:grpSpPr>
+        <a:xfrm>
+          <a:off x="0" y="0"/>
+          <a:ext cx="0" cy="0"/>
+          <a:chOff x="0" y="0"/>
+          <a:chExt cx="0" cy="0"/>
+        </a:xfrm>
+      </p:grpSpPr>
+      <p:sp>
+        <p:nvSpPr>
+          <p:cNvPr id="15" name="標題 1">
+            <a:extLst>
+              <a:ext uri="{FF2B5EF4-FFF2-40B4-BE49-F238E27FC236}">
+                <a16:creationId xmlns:a16="http://schemas.microsoft.com/office/drawing/2014/main" id="{142C8726-E890-9988-40FC-8984FDA21FEE}"/>
+              </a:ext>
+            </a:extLst>
+          </p:cNvPr>
+          <p:cNvSpPr>
+            <a:spLocks noGrp="1"/>
+          </p:cNvSpPr>
+          <p:nvPr>
+            <p:ph type="title"/>
+          </p:nvPr>
+        </p:nvSpPr>
+        <p:spPr>
+          <a:xfrm>
+            <a:off x="609602" y="609600"/>
+            <a:ext cx="8077200" cy="533400"/>
+          </a:xfrm>
+          <a:ln>
+            <a:noFill/>
+          </a:ln>
+        </p:spPr>
+        <p:txBody>
+          <a:bodyPr/>
+          <a:lstStyle/>
+          <a:p>
+            <a:pPr algn="l" fontAlgn="t"/>
+            <a:r>
+              <a:rPr lang="zh-TW" altLang="en-US" dirty="0">
+                <a:latin typeface="Times New Roman" panose="02020603050405020304" pitchFamily="18" charset="0"/>
+                <a:ea typeface="標楷體" panose="03000509000000000000" pitchFamily="65" charset="-120"/>
+                <a:cs typeface="Times New Roman" panose="02020603050405020304" pitchFamily="18" charset="0"/>
+              </a:rPr>
+              <a:t>本次進度</a:t>
+            </a:r>
+            <a:r>
+              <a:rPr lang="en-US" altLang="zh-TW" dirty="0">
+                <a:latin typeface="Times New Roman" panose="02020603050405020304" pitchFamily="18" charset="0"/>
+                <a:ea typeface="標楷體" panose="03000509000000000000" pitchFamily="65" charset="-120"/>
+                <a:cs typeface="Times New Roman" panose="02020603050405020304" pitchFamily="18" charset="0"/>
+              </a:rPr>
+              <a:t>: Artix-7-HDMI-processing</a:t>
+            </a:r>
+            <a:endParaRPr lang="zh-TW" altLang="en-US" dirty="0">
+              <a:latin typeface="Times New Roman" panose="02020603050405020304" pitchFamily="18" charset="0"/>
+              <a:ea typeface="標楷體" panose="03000509000000000000" pitchFamily="65" charset="-120"/>
+              <a:cs typeface="Times New Roman" panose="02020603050405020304" pitchFamily="18" charset="0"/>
+            </a:endParaRPr>
+          </a:p>
+        </p:txBody>
+      </p:sp>
+      <p:sp>
+        <p:nvSpPr>
+          <p:cNvPr id="2" name="文字版面配置區 6">
+            <a:extLst>
+              <a:ext uri="{FF2B5EF4-FFF2-40B4-BE49-F238E27FC236}">
+                <a16:creationId xmlns:a16="http://schemas.microsoft.com/office/drawing/2014/main" id="{D929304B-5341-8BBF-E71F-AF5F2FE7268A}"/>
+              </a:ext>
+            </a:extLst>
+          </p:cNvPr>
+          <p:cNvSpPr txBox="1"/>
+          <p:nvPr/>
+        </p:nvSpPr>
+        <p:spPr>
+          <a:xfrm>
+            <a:off x="609602" y="935857"/>
+            <a:ext cx="8686796" cy="4700685"/>
+          </a:xfrm>
+          <a:prstGeom prst="rect">
+            <a:avLst/>
+          </a:prstGeom>
+          <a:noFill/>
+          <a:ln>
+            <a:noFill/>
+          </a:ln>
+        </p:spPr>
+        <p:txBody>
+          <a:bodyPr spcFirstLastPara="1" wrap="square" lIns="91425" tIns="45700" rIns="91425" bIns="45700" anchor="t" anchorCtr="0">
+            <a:noAutofit/>
+          </a:bodyPr>
+          <a:lstStyle>
+            <a:defPPr marR="0" lvl="0" algn="l" rtl="0">
+              <a:lnSpc>
+                <a:spcPct val="100000"/>
+              </a:lnSpc>
+              <a:spcBef>
+                <a:spcPts val="0"/>
+              </a:spcBef>
+              <a:spcAft>
+                <a:spcPts val="0"/>
+              </a:spcAft>
+            </a:defPPr>
+            <a:lvl1pPr marL="457200" marR="0" lvl="0" indent="-406400" algn="l" rtl="0">
+              <a:lnSpc>
+                <a:spcPct val="100000"/>
+              </a:lnSpc>
+              <a:spcBef>
+                <a:spcPts val="560"/>
+              </a:spcBef>
+              <a:spcAft>
+                <a:spcPts val="0"/>
+              </a:spcAft>
+              <a:buClr>
+                <a:schemeClr val="accent2"/>
+              </a:buClr>
+              <a:buSzPts val="2800"/>
+              <a:buFont typeface="Noto Sans Symbols"/>
+              <a:buChar char="❖"/>
+              <a:defRPr sz="2800" b="0" i="0" u="none" strike="noStrike" cap="none">
+                <a:solidFill>
+                  <a:schemeClr val="dk1"/>
+                </a:solidFill>
+                <a:latin typeface="Times New Roman"/>
+                <a:ea typeface="Times New Roman"/>
+                <a:cs typeface="Times New Roman"/>
+                <a:sym typeface="Times New Roman"/>
+              </a:defRPr>
+            </a:lvl1pPr>
+            <a:lvl2pPr marL="914400" marR="0" lvl="1" indent="-381000" algn="l" rtl="0">
+              <a:lnSpc>
+                <a:spcPct val="100000"/>
+              </a:lnSpc>
+              <a:spcBef>
+                <a:spcPts val="480"/>
+              </a:spcBef>
+              <a:spcAft>
+                <a:spcPts val="0"/>
+              </a:spcAft>
+              <a:buClr>
+                <a:srgbClr val="FF5050"/>
+              </a:buClr>
+              <a:buSzPts val="2400"/>
+              <a:buFont typeface="Noto Sans Symbols"/>
+              <a:buChar char="▪"/>
+              <a:defRPr sz="2400" b="0" i="0" u="none" strike="noStrike" cap="none">
+                <a:solidFill>
+                  <a:schemeClr val="dk1"/>
+                </a:solidFill>
+                <a:latin typeface="Times New Roman"/>
+                <a:ea typeface="Times New Roman"/>
+                <a:cs typeface="Times New Roman"/>
+                <a:sym typeface="Times New Roman"/>
+              </a:defRPr>
+            </a:lvl2pPr>
+            <a:lvl3pPr marL="1371600" marR="0" lvl="2" indent="-355600" algn="l" rtl="0">
+              <a:lnSpc>
+                <a:spcPct val="100000"/>
+              </a:lnSpc>
+              <a:spcBef>
+                <a:spcPts val="400"/>
+              </a:spcBef>
+              <a:spcAft>
+                <a:spcPts val="0"/>
+              </a:spcAft>
+              <a:buClr>
+                <a:srgbClr val="6699FF"/>
+              </a:buClr>
+              <a:buSzPts val="2000"/>
+              <a:buFont typeface="Times New Roman"/>
+              <a:buChar char="•"/>
+              <a:defRPr sz="2000" b="0" i="0" u="none" strike="noStrike" cap="none">
+                <a:solidFill>
+                  <a:schemeClr val="dk1"/>
+                </a:solidFill>
+                <a:latin typeface="Times New Roman"/>
+                <a:ea typeface="Times New Roman"/>
+                <a:cs typeface="Times New Roman"/>
+                <a:sym typeface="Times New Roman"/>
+              </a:defRPr>
+            </a:lvl3pPr>
+            <a:lvl4pPr marL="1828800" marR="0" lvl="3" indent="-355600" algn="l" rtl="0">
+              <a:lnSpc>
+                <a:spcPct val="100000"/>
+              </a:lnSpc>
+              <a:spcBef>
+                <a:spcPts val="400"/>
+              </a:spcBef>
+              <a:spcAft>
+                <a:spcPts val="0"/>
+              </a:spcAft>
+              <a:buClr>
+                <a:srgbClr val="FF5050"/>
+              </a:buClr>
+              <a:buSzPts val="2000"/>
+              <a:buFont typeface="Times New Roman"/>
+              <a:buChar char="o"/>
+              <a:defRPr sz="2000" b="0" i="0" u="none" strike="noStrike" cap="none">
+                <a:solidFill>
+                  <a:schemeClr val="dk1"/>
+                </a:solidFill>
+                <a:latin typeface="Times New Roman"/>
+                <a:ea typeface="Times New Roman"/>
+                <a:cs typeface="Times New Roman"/>
+                <a:sym typeface="Times New Roman"/>
+              </a:defRPr>
+            </a:lvl4pPr>
+            <a:lvl5pPr marL="2286000" marR="0" lvl="4" indent="-355600" algn="l" rtl="0">
+              <a:lnSpc>
+                <a:spcPct val="100000"/>
+              </a:lnSpc>
+              <a:spcBef>
+                <a:spcPts val="400"/>
+              </a:spcBef>
+              <a:spcAft>
+                <a:spcPts val="0"/>
+              </a:spcAft>
+              <a:buClr>
+                <a:srgbClr val="FF5050"/>
+              </a:buClr>
+              <a:buSzPts val="2000"/>
+              <a:buFont typeface="Times New Roman"/>
+              <a:buChar char="o"/>
+              <a:defRPr sz="2000" b="0" i="0" u="none" strike="noStrike" cap="none">
+                <a:solidFill>
+                  <a:schemeClr val="dk1"/>
+                </a:solidFill>
+                <a:latin typeface="Times New Roman"/>
+                <a:ea typeface="Times New Roman"/>
+                <a:cs typeface="Times New Roman"/>
+                <a:sym typeface="Times New Roman"/>
+              </a:defRPr>
+            </a:lvl5pPr>
+            <a:lvl6pPr marL="2743200" marR="0" lvl="5" indent="-355600" algn="l" rtl="0">
+              <a:lnSpc>
+                <a:spcPct val="100000"/>
+              </a:lnSpc>
+              <a:spcBef>
+                <a:spcPts val="400"/>
+              </a:spcBef>
+              <a:spcAft>
+                <a:spcPts val="0"/>
+              </a:spcAft>
+              <a:buClr>
+                <a:srgbClr val="FF5050"/>
+              </a:buClr>
+              <a:buSzPts val="2000"/>
+              <a:buFont typeface="Times New Roman"/>
+              <a:buChar char="o"/>
+              <a:defRPr sz="2000" b="0" i="0" u="none" strike="noStrike" cap="none">
+                <a:solidFill>
+                  <a:schemeClr val="dk1"/>
+                </a:solidFill>
+                <a:latin typeface="Times New Roman"/>
+                <a:ea typeface="Times New Roman"/>
+                <a:cs typeface="Times New Roman"/>
+                <a:sym typeface="Times New Roman"/>
+              </a:defRPr>
+            </a:lvl6pPr>
+            <a:lvl7pPr marL="3200400" marR="0" lvl="6" indent="-355600" algn="l" rtl="0">
+              <a:lnSpc>
+                <a:spcPct val="100000"/>
+              </a:lnSpc>
+              <a:spcBef>
+                <a:spcPts val="400"/>
+              </a:spcBef>
+              <a:spcAft>
+                <a:spcPts val="0"/>
+              </a:spcAft>
+              <a:buClr>
+                <a:srgbClr val="FF5050"/>
+              </a:buClr>
+              <a:buSzPts val="2000"/>
+              <a:buFont typeface="Times New Roman"/>
+              <a:buChar char="o"/>
+              <a:defRPr sz="2000" b="0" i="0" u="none" strike="noStrike" cap="none">
+                <a:solidFill>
+                  <a:schemeClr val="dk1"/>
+                </a:solidFill>
+                <a:latin typeface="Times New Roman"/>
+                <a:ea typeface="Times New Roman"/>
+                <a:cs typeface="Times New Roman"/>
+                <a:sym typeface="Times New Roman"/>
+              </a:defRPr>
+            </a:lvl7pPr>
+            <a:lvl8pPr marL="3657600" marR="0" lvl="7" indent="-355600" algn="l" rtl="0">
+              <a:lnSpc>
+                <a:spcPct val="100000"/>
+              </a:lnSpc>
+              <a:spcBef>
+                <a:spcPts val="400"/>
+              </a:spcBef>
+              <a:spcAft>
+                <a:spcPts val="0"/>
+              </a:spcAft>
+              <a:buClr>
+                <a:srgbClr val="FF5050"/>
+              </a:buClr>
+              <a:buSzPts val="2000"/>
+              <a:buFont typeface="Times New Roman"/>
+              <a:buChar char="o"/>
+              <a:defRPr sz="2000" b="0" i="0" u="none" strike="noStrike" cap="none">
+                <a:solidFill>
+                  <a:schemeClr val="dk1"/>
+                </a:solidFill>
+                <a:latin typeface="Times New Roman"/>
+                <a:ea typeface="Times New Roman"/>
+                <a:cs typeface="Times New Roman"/>
+                <a:sym typeface="Times New Roman"/>
+              </a:defRPr>
+            </a:lvl8pPr>
+            <a:lvl9pPr marL="4114800" marR="0" lvl="8" indent="-355600" algn="l" rtl="0">
+              <a:lnSpc>
+                <a:spcPct val="100000"/>
+              </a:lnSpc>
+              <a:spcBef>
+                <a:spcPts val="400"/>
+              </a:spcBef>
+              <a:spcAft>
+                <a:spcPts val="0"/>
+              </a:spcAft>
+              <a:buClr>
+                <a:srgbClr val="FF5050"/>
+              </a:buClr>
+              <a:buSzPts val="2000"/>
+              <a:buFont typeface="Times New Roman"/>
+              <a:buChar char="o"/>
+              <a:defRPr sz="2000" b="0" i="0" u="none" strike="noStrike" cap="none">
+                <a:solidFill>
+                  <a:schemeClr val="dk1"/>
+                </a:solidFill>
+                <a:latin typeface="Times New Roman"/>
+                <a:ea typeface="Times New Roman"/>
+                <a:cs typeface="Times New Roman"/>
+                <a:sym typeface="Times New Roman"/>
+              </a:defRPr>
+            </a:lvl9pPr>
+          </a:lstStyle>
+          <a:p>
+            <a:pPr>
+              <a:lnSpc>
+                <a:spcPct val="150000"/>
+              </a:lnSpc>
+            </a:pPr>
+            <a:r>
+              <a:rPr lang="zh-TW" altLang="en-US" sz="2000" dirty="0">
+                <a:solidFill>
+                  <a:schemeClr val="tx1"/>
+                </a:solidFill>
+                <a:latin typeface="Times New Roman" panose="02020603050405020304" pitchFamily="18" charset="0"/>
+                <a:ea typeface="標楷體" panose="03000509000000000000" pitchFamily="65" charset="-120"/>
+                <a:cs typeface="Times New Roman" panose="02020603050405020304" pitchFamily="18" charset="0"/>
+              </a:rPr>
+              <a:t>定位</a:t>
+            </a:r>
+            <a:endParaRPr lang="en-US" altLang="zh-TW" sz="2000" dirty="0">
+              <a:solidFill>
+                <a:schemeClr val="tx1"/>
+              </a:solidFill>
+              <a:latin typeface="Times New Roman" panose="02020603050405020304" pitchFamily="18" charset="0"/>
+              <a:ea typeface="標楷體" panose="03000509000000000000" pitchFamily="65" charset="-120"/>
+              <a:cs typeface="Times New Roman" panose="02020603050405020304" pitchFamily="18" charset="0"/>
+            </a:endParaRPr>
+          </a:p>
+          <a:p>
+            <a:pPr lvl="1">
+              <a:lnSpc>
+                <a:spcPts val="3000"/>
+              </a:lnSpc>
+            </a:pPr>
+            <a:r>
+              <a:rPr lang="zh-TW" altLang="en-US" sz="1600" dirty="0">
+                <a:latin typeface="Times New Roman" panose="02020603050405020304" pitchFamily="18" charset="0"/>
+                <a:ea typeface="標楷體" panose="03000509000000000000" pitchFamily="65" charset="-120"/>
+                <a:cs typeface="Times New Roman" panose="02020603050405020304" pitchFamily="18" charset="0"/>
+              </a:rPr>
+              <a:t>整合 </a:t>
+            </a:r>
+            <a:r>
+              <a:rPr lang="en-US" altLang="zh-TW" sz="1600" dirty="0">
+                <a:latin typeface="Times New Roman" panose="02020603050405020304" pitchFamily="18" charset="0"/>
+                <a:ea typeface="標楷體" panose="03000509000000000000" pitchFamily="65" charset="-120"/>
+                <a:cs typeface="Times New Roman" panose="02020603050405020304" pitchFamily="18" charset="0"/>
+              </a:rPr>
+              <a:t>HDMI </a:t>
+            </a:r>
+            <a:r>
+              <a:rPr lang="zh-TW" altLang="en-US" sz="1600" dirty="0">
+                <a:latin typeface="Times New Roman" panose="02020603050405020304" pitchFamily="18" charset="0"/>
+                <a:ea typeface="標楷體" panose="03000509000000000000" pitchFamily="65" charset="-120"/>
+                <a:cs typeface="Times New Roman" panose="02020603050405020304" pitchFamily="18" charset="0"/>
+              </a:rPr>
+              <a:t>影像處理、</a:t>
+            </a:r>
+            <a:r>
+              <a:rPr lang="en-US" altLang="zh-TW" sz="1600" dirty="0">
+                <a:latin typeface="Times New Roman" panose="02020603050405020304" pitchFamily="18" charset="0"/>
+                <a:ea typeface="標楷體" panose="03000509000000000000" pitchFamily="65" charset="-120"/>
+                <a:cs typeface="Times New Roman" panose="02020603050405020304" pitchFamily="18" charset="0"/>
+              </a:rPr>
+              <a:t>DDR3 </a:t>
+            </a:r>
+            <a:r>
+              <a:rPr lang="zh-TW" altLang="en-US" sz="1600" dirty="0">
+                <a:latin typeface="Times New Roman" panose="02020603050405020304" pitchFamily="18" charset="0"/>
+                <a:ea typeface="標楷體" panose="03000509000000000000" pitchFamily="65" charset="-120"/>
+                <a:cs typeface="Times New Roman" panose="02020603050405020304" pitchFamily="18" charset="0"/>
+              </a:rPr>
+              <a:t>影格緩衝與 </a:t>
+            </a:r>
+            <a:r>
+              <a:rPr lang="en-US" altLang="zh-TW" sz="1600" dirty="0">
+                <a:latin typeface="Times New Roman" panose="02020603050405020304" pitchFamily="18" charset="0"/>
+                <a:ea typeface="標楷體" panose="03000509000000000000" pitchFamily="65" charset="-120"/>
+                <a:cs typeface="Times New Roman" panose="02020603050405020304" pitchFamily="18" charset="0"/>
+              </a:rPr>
+              <a:t>PCIe</a:t>
+            </a:r>
+            <a:r>
+              <a:rPr lang="zh-TW" altLang="en-US" sz="1600" dirty="0">
+                <a:latin typeface="Times New Roman" panose="02020603050405020304" pitchFamily="18" charset="0"/>
+                <a:ea typeface="標楷體" panose="03000509000000000000" pitchFamily="65" charset="-120"/>
+                <a:cs typeface="Times New Roman" panose="02020603050405020304" pitchFamily="18" charset="0"/>
+              </a:rPr>
+              <a:t>，並提供 </a:t>
+            </a:r>
+            <a:r>
+              <a:rPr lang="en-US" altLang="zh-TW" sz="1600" dirty="0">
+                <a:latin typeface="Times New Roman" panose="02020603050405020304" pitchFamily="18" charset="0"/>
+                <a:ea typeface="標楷體" panose="03000509000000000000" pitchFamily="65" charset="-120"/>
+                <a:cs typeface="Times New Roman" panose="02020603050405020304" pitchFamily="18" charset="0"/>
+              </a:rPr>
+              <a:t>Windows </a:t>
+            </a:r>
+            <a:r>
+              <a:rPr lang="zh-TW" altLang="en-US" sz="1600" dirty="0">
+                <a:latin typeface="Times New Roman" panose="02020603050405020304" pitchFamily="18" charset="0"/>
+                <a:ea typeface="標楷體" panose="03000509000000000000" pitchFamily="65" charset="-120"/>
+                <a:cs typeface="Times New Roman" panose="02020603050405020304" pitchFamily="18" charset="0"/>
+              </a:rPr>
+              <a:t>端影格讀取程式</a:t>
+            </a:r>
+          </a:p>
+          <a:p>
+            <a:pPr lvl="1">
+              <a:lnSpc>
+                <a:spcPts val="3000"/>
+              </a:lnSpc>
+            </a:pPr>
+            <a:endParaRPr lang="en-US" altLang="zh-TW" sz="1600" dirty="0">
+              <a:solidFill>
+                <a:schemeClr val="tx1"/>
+              </a:solidFill>
+              <a:latin typeface="Times New Roman" panose="02020603050405020304" pitchFamily="18" charset="0"/>
+              <a:ea typeface="標楷體" panose="03000509000000000000" pitchFamily="65" charset="-120"/>
+              <a:cs typeface="Times New Roman" panose="02020603050405020304" pitchFamily="18" charset="0"/>
+            </a:endParaRPr>
+          </a:p>
+        </p:txBody>
+      </p:sp>
+      <p:sp>
+        <p:nvSpPr>
+          <p:cNvPr id="3" name="文字方塊 2">
+            <a:extLst>
+              <a:ext uri="{FF2B5EF4-FFF2-40B4-BE49-F238E27FC236}">
+                <a16:creationId xmlns:a16="http://schemas.microsoft.com/office/drawing/2014/main" id="{B17A7646-77F3-2568-68C1-545F7C189BE6}"/>
+              </a:ext>
+            </a:extLst>
+          </p:cNvPr>
+          <p:cNvSpPr txBox="1"/>
+          <p:nvPr/>
+        </p:nvSpPr>
+        <p:spPr>
+          <a:xfrm>
+            <a:off x="1787236" y="6384072"/>
+            <a:ext cx="5802283" cy="276999"/>
+          </a:xfrm>
+          <a:prstGeom prst="rect">
+            <a:avLst/>
+          </a:prstGeom>
+          <a:noFill/>
+        </p:spPr>
+        <p:txBody>
+          <a:bodyPr wrap="square">
+            <a:spAutoFit/>
+          </a:bodyPr>
+          <a:lstStyle/>
+          <a:p>
+            <a:r>
+              <a:rPr lang="en-US" altLang="zh-TW" sz="1200" dirty="0">
+                <a:latin typeface="Times New Roman" panose="02020603050405020304" pitchFamily="18" charset="0"/>
+                <a:ea typeface="標楷體" panose="03000509000000000000" pitchFamily="65" charset="-120"/>
+                <a:cs typeface="Times New Roman" panose="02020603050405020304" pitchFamily="18" charset="0"/>
+              </a:rPr>
+              <a:t>[5] https://github.com/hamsternz/Artix-7-HDMI-processing</a:t>
+            </a:r>
+            <a:endParaRPr lang="zh-TW" altLang="en-US" sz="1200" dirty="0">
+              <a:latin typeface="Times New Roman" panose="02020603050405020304" pitchFamily="18" charset="0"/>
+              <a:ea typeface="標楷體" panose="03000509000000000000" pitchFamily="65" charset="-120"/>
+              <a:cs typeface="Times New Roman" panose="02020603050405020304" pitchFamily="18" charset="0"/>
+            </a:endParaRPr>
+          </a:p>
+        </p:txBody>
+      </p:sp>
+    </p:spTree>
+    <p:extLst>
+      <p:ext uri="{BB962C8B-B14F-4D97-AF65-F5344CB8AC3E}">
+        <p14:creationId xmlns:p14="http://schemas.microsoft.com/office/powerpoint/2010/main" val="3407462930"/>
+      </p:ext>
+    </p:extLst>
   </p:cSld>
   <p:clrMapOvr>
     <a:masterClrMapping/>

--- a/Onyx_進度報告_1013.pptx
+++ b/Onyx_進度報告_1013.pptx
@@ -16320,12 +16320,12 @@
               <a:t>對 </a:t>
             </a:r>
             <a:r>
-              <a:rPr lang="en-US" altLang="zh-TW" sz="2000" dirty="0">
-                <a:latin typeface="Times New Roman" panose="02020603050405020304" pitchFamily="18" charset="0"/>
-                <a:ea typeface="標楷體" panose="03000509000000000000" pitchFamily="65" charset="-120"/>
-                <a:cs typeface="Times New Roman" panose="02020603050405020304" pitchFamily="18" charset="0"/>
-              </a:rPr>
-              <a:t>HDMI </a:t>
+              <a:rPr lang="en-US" altLang="zh-TW" sz="2000">
+                <a:latin typeface="Times New Roman" panose="02020603050405020304" pitchFamily="18" charset="0"/>
+                <a:ea typeface="標楷體" panose="03000509000000000000" pitchFamily="65" charset="-120"/>
+                <a:cs typeface="Times New Roman" panose="02020603050405020304" pitchFamily="18" charset="0"/>
+              </a:rPr>
+              <a:t>FPGA </a:t>
             </a:r>
             <a:r>
               <a:rPr lang="zh-TW" altLang="en-US" sz="2000" dirty="0">

--- a/Onyx_進度報告_1013.pptx
+++ b/Onyx_進度報告_1013.pptx
@@ -17,9 +17,9 @@
     <p:sldId id="2035" r:id="rId8"/>
     <p:sldId id="2037" r:id="rId9"/>
     <p:sldId id="2038" r:id="rId10"/>
-    <p:sldId id="2039" r:id="rId11"/>
-    <p:sldId id="286" r:id="rId12"/>
-    <p:sldId id="2036" r:id="rId13"/>
+    <p:sldId id="2036" r:id="rId11"/>
+    <p:sldId id="2039" r:id="rId12"/>
+    <p:sldId id="286" r:id="rId13"/>
   </p:sldIdLst>
   <p:sldSz cx="9906000" cy="6858000" type="A4"/>
   <p:notesSz cx="7315200" cy="9601200"/>
@@ -274,13 +274,13 @@
             <p14:sldId id="2035"/>
             <p14:sldId id="2037"/>
             <p14:sldId id="2038"/>
+            <p14:sldId id="2036"/>
             <p14:sldId id="2039"/>
           </p14:sldIdLst>
         </p14:section>
         <p14:section name="End" id="{33EEDC85-A799-4CB3-BF13-F4955B8630BE}">
           <p14:sldIdLst>
             <p14:sldId id="286"/>
-            <p14:sldId id="2036"/>
           </p14:sldIdLst>
         </p14:section>
       </p14:sectionLst>
@@ -1689,66 +1689,139 @@
           <a:bodyPr/>
           <a:lstStyle/>
           <a:p>
-            <a:pPr marL="0" marR="0" lvl="0" indent="0" algn="l" defTabSz="914400" rtl="0" eaLnBrk="1" fontAlgn="auto" latinLnBrk="0" hangingPunct="1">
-              <a:lnSpc>
-                <a:spcPct val="100000"/>
-              </a:lnSpc>
-              <a:spcBef>
-                <a:spcPts val="360"/>
-              </a:spcBef>
-              <a:spcAft>
-                <a:spcPts val="0"/>
-              </a:spcAft>
-              <a:buClr>
-                <a:srgbClr val="000000"/>
-              </a:buClr>
-              <a:buSzPts val="1400"/>
-              <a:buFont typeface="Arial"/>
+            <a:pPr marL="0" indent="0"/>
+            <a:endParaRPr lang="zh-TW" altLang="en-US" dirty="0"/>
+          </a:p>
+        </p:txBody>
+      </p:sp>
+      <p:sp>
+        <p:nvSpPr>
+          <p:cNvPr id="4" name="投影片編號版面配置區 3">
+            <a:extLst>
+              <a:ext uri="{FF2B5EF4-FFF2-40B4-BE49-F238E27FC236}">
+                <a16:creationId xmlns:a16="http://schemas.microsoft.com/office/drawing/2014/main" id="{A81AD260-1FA1-46D2-EEFC-6CE390861C06}"/>
+              </a:ext>
+            </a:extLst>
+          </p:cNvPr>
+          <p:cNvSpPr>
+            <a:spLocks noGrp="1"/>
+          </p:cNvSpPr>
+          <p:nvPr>
+            <p:ph type="sldNum" idx="12"/>
+          </p:nvPr>
+        </p:nvSpPr>
+        <p:spPr/>
+        <p:txBody>
+          <a:bodyPr/>
+          <a:lstStyle/>
+          <a:p>
+            <a:pPr marL="0" marR="0" lvl="0" indent="0" algn="r" rtl="0">
+              <a:spcBef>
+                <a:spcPts val="0"/>
+              </a:spcBef>
+              <a:spcAft>
+                <a:spcPts val="0"/>
+              </a:spcAft>
               <a:buNone/>
-              <a:tabLst/>
-              <a:defRPr/>
             </a:pPr>
-            <a:r>
-              <a:rPr lang="en-US" altLang="zh-TW" dirty="0"/>
-              <a:t>HDMI </a:t>
-            </a:r>
-            <a:r>
-              <a:rPr lang="zh-TW" altLang="en-US" dirty="0"/>
-              <a:t>影格緩衝、</a:t>
-            </a:r>
-            <a:r>
-              <a:rPr lang="en-US" altLang="zh-TW" dirty="0"/>
-              <a:t>DDR3</a:t>
-            </a:r>
-            <a:r>
-              <a:rPr lang="zh-TW" altLang="en-US" dirty="0"/>
-              <a:t>／</a:t>
-            </a:r>
-            <a:r>
-              <a:rPr lang="en-US" altLang="zh-TW" dirty="0"/>
-              <a:t>AXI </a:t>
-            </a:r>
-            <a:r>
-              <a:rPr lang="zh-TW" altLang="en-US" dirty="0"/>
-              <a:t>記憶體整合、廠商 </a:t>
-            </a:r>
-            <a:r>
-              <a:rPr lang="en-US" altLang="zh-TW" dirty="0"/>
-              <a:t>PCIe IP </a:t>
-            </a:r>
-            <a:r>
-              <a:rPr lang="zh-TW" altLang="en-US" dirty="0"/>
-              <a:t>與 </a:t>
-            </a:r>
-            <a:r>
-              <a:rPr lang="en-US" altLang="zh-TW" dirty="0"/>
-              <a:t>PC </a:t>
-            </a:r>
-            <a:r>
-              <a:rPr lang="zh-TW" altLang="en-US" dirty="0"/>
-              <a:t>軟體介面的整體架構。</a:t>
-            </a:r>
+            <a:fld id="{00000000-1234-1234-1234-123412341234}" type="slidenum">
+              <a:rPr lang="en-US" sz="2000" b="0" i="0" u="none" strike="noStrike" cap="none" smtClean="0">
+                <a:solidFill>
+                  <a:schemeClr val="dk1"/>
+                </a:solidFill>
+                <a:latin typeface="Times New Roman"/>
+                <a:ea typeface="Times New Roman"/>
+                <a:cs typeface="Times New Roman"/>
+                <a:sym typeface="Times New Roman"/>
+              </a:rPr>
+              <a:t>10</a:t>
+            </a:fld>
+            <a:endParaRPr lang="en-US" sz="2000" b="0" i="0" u="none" strike="noStrike" cap="none" dirty="0">
+              <a:solidFill>
+                <a:schemeClr val="dk1"/>
+              </a:solidFill>
+              <a:latin typeface="Times New Roman"/>
+              <a:ea typeface="Times New Roman"/>
+              <a:cs typeface="Times New Roman"/>
+              <a:sym typeface="Times New Roman"/>
+            </a:endParaRPr>
           </a:p>
+        </p:txBody>
+      </p:sp>
+    </p:spTree>
+    <p:extLst>
+      <p:ext uri="{BB962C8B-B14F-4D97-AF65-F5344CB8AC3E}">
+        <p14:creationId xmlns:p14="http://schemas.microsoft.com/office/powerpoint/2010/main" val="3764392625"/>
+      </p:ext>
+    </p:extLst>
+  </p:cSld>
+  <p:clrMapOvr>
+    <a:masterClrMapping/>
+  </p:clrMapOvr>
+</p:notes>
+</file>
+
+<file path=ppt/notesSlides/notesSlide11.xml><?xml version="1.0" encoding="utf-8"?>
+<p:notes xmlns:a="http://schemas.openxmlformats.org/drawingml/2006/main" xmlns:r="http://schemas.openxmlformats.org/officeDocument/2006/relationships" xmlns:p="http://schemas.openxmlformats.org/presentationml/2006/main">
+  <p:cSld>
+    <p:spTree>
+      <p:nvGrpSpPr>
+        <p:cNvPr id="1" name="">
+          <a:extLst>
+            <a:ext uri="{FF2B5EF4-FFF2-40B4-BE49-F238E27FC236}">
+              <a16:creationId xmlns:a16="http://schemas.microsoft.com/office/drawing/2014/main" id="{9A851A70-D7FF-B69E-2F1F-5276D7F44C59}"/>
+            </a:ext>
+          </a:extLst>
+        </p:cNvPr>
+        <p:cNvGrpSpPr/>
+        <p:nvPr/>
+      </p:nvGrpSpPr>
+      <p:grpSpPr>
+        <a:xfrm>
+          <a:off x="0" y="0"/>
+          <a:ext cx="0" cy="0"/>
+          <a:chOff x="0" y="0"/>
+          <a:chExt cx="0" cy="0"/>
+        </a:xfrm>
+      </p:grpSpPr>
+      <p:sp>
+        <p:nvSpPr>
+          <p:cNvPr id="2" name="投影片影像版面配置區 1">
+            <a:extLst>
+              <a:ext uri="{FF2B5EF4-FFF2-40B4-BE49-F238E27FC236}">
+                <a16:creationId xmlns:a16="http://schemas.microsoft.com/office/drawing/2014/main" id="{4FB2E1DE-40DE-B1BA-7135-64BFFB1631B9}"/>
+              </a:ext>
+            </a:extLst>
+          </p:cNvPr>
+          <p:cNvSpPr>
+            <a:spLocks noGrp="1" noRot="1" noChangeAspect="1"/>
+          </p:cNvSpPr>
+          <p:nvPr>
+            <p:ph type="sldImg"/>
+          </p:nvPr>
+        </p:nvSpPr>
+        <p:spPr/>
+      </p:sp>
+      <p:sp>
+        <p:nvSpPr>
+          <p:cNvPr id="3" name="備忘稿版面配置區 2">
+            <a:extLst>
+              <a:ext uri="{FF2B5EF4-FFF2-40B4-BE49-F238E27FC236}">
+                <a16:creationId xmlns:a16="http://schemas.microsoft.com/office/drawing/2014/main" id="{C4F8DB8E-F5F1-21EB-D41F-2C635FB715D5}"/>
+              </a:ext>
+            </a:extLst>
+          </p:cNvPr>
+          <p:cNvSpPr>
+            <a:spLocks noGrp="1"/>
+          </p:cNvSpPr>
+          <p:nvPr>
+            <p:ph type="body" idx="1"/>
+          </p:nvPr>
+        </p:nvSpPr>
+        <p:spPr/>
+        <p:txBody>
+          <a:bodyPr/>
+          <a:lstStyle/>
           <a:p>
             <a:pPr marL="0" indent="0"/>
             <a:endParaRPr lang="zh-TW" altLang="en-US" dirty="0"/>
@@ -1795,7 +1868,7 @@
                 <a:cs typeface="Times New Roman"/>
                 <a:sym typeface="Times New Roman"/>
               </a:rPr>
-              <a:t>10</a:t>
+              <a:t>11</a:t>
             </a:fld>
             <a:endParaRPr lang="en-US" sz="2000" b="0" i="0" u="none" strike="noStrike" cap="none" dirty="0">
               <a:solidFill>
@@ -1822,7 +1895,7 @@
 </p:notes>
 </file>
 
-<file path=ppt/notesSlides/notesSlide11.xml><?xml version="1.0" encoding="utf-8"?>
+<file path=ppt/notesSlides/notesSlide12.xml><?xml version="1.0" encoding="utf-8"?>
 <p:notes xmlns:a="http://schemas.openxmlformats.org/drawingml/2006/main" xmlns:r="http://schemas.openxmlformats.org/officeDocument/2006/relationships" xmlns:p="http://schemas.openxmlformats.org/presentationml/2006/main">
   <p:cSld>
     <p:spTree>
@@ -1890,7 +1963,7 @@
           <a:p>
             <a:fld id="{F5753A29-9D77-4C26-8BEC-432FE5D4B0A4}" type="slidenum">
               <a:rPr lang="en-US" altLang="zh-TW" smtClean="0"/>
-              <a:t>11</a:t>
+              <a:t>12</a:t>
             </a:fld>
             <a:endParaRPr lang="en-US" altLang="zh-TW" dirty="0"/>
           </a:p>
@@ -1900,201 +1973,6 @@
     <p:extLst>
       <p:ext uri="{BB962C8B-B14F-4D97-AF65-F5344CB8AC3E}">
         <p14:creationId xmlns:p14="http://schemas.microsoft.com/office/powerpoint/2010/main" val="1154148578"/>
-      </p:ext>
-    </p:extLst>
-  </p:cSld>
-  <p:clrMapOvr>
-    <a:masterClrMapping/>
-  </p:clrMapOvr>
-</p:notes>
-</file>
-
-<file path=ppt/notesSlides/notesSlide12.xml><?xml version="1.0" encoding="utf-8"?>
-<p:notes xmlns:a="http://schemas.openxmlformats.org/drawingml/2006/main" xmlns:r="http://schemas.openxmlformats.org/officeDocument/2006/relationships" xmlns:p="http://schemas.openxmlformats.org/presentationml/2006/main">
-  <p:cSld>
-    <p:spTree>
-      <p:nvGrpSpPr>
-        <p:cNvPr id="1" name="">
-          <a:extLst>
-            <a:ext uri="{FF2B5EF4-FFF2-40B4-BE49-F238E27FC236}">
-              <a16:creationId xmlns:a16="http://schemas.microsoft.com/office/drawing/2014/main" id="{9A851A70-D7FF-B69E-2F1F-5276D7F44C59}"/>
-            </a:ext>
-          </a:extLst>
-        </p:cNvPr>
-        <p:cNvGrpSpPr/>
-        <p:nvPr/>
-      </p:nvGrpSpPr>
-      <p:grpSpPr>
-        <a:xfrm>
-          <a:off x="0" y="0"/>
-          <a:ext cx="0" cy="0"/>
-          <a:chOff x="0" y="0"/>
-          <a:chExt cx="0" cy="0"/>
-        </a:xfrm>
-      </p:grpSpPr>
-      <p:sp>
-        <p:nvSpPr>
-          <p:cNvPr id="2" name="投影片影像版面配置區 1">
-            <a:extLst>
-              <a:ext uri="{FF2B5EF4-FFF2-40B4-BE49-F238E27FC236}">
-                <a16:creationId xmlns:a16="http://schemas.microsoft.com/office/drawing/2014/main" id="{4FB2E1DE-40DE-B1BA-7135-64BFFB1631B9}"/>
-              </a:ext>
-            </a:extLst>
-          </p:cNvPr>
-          <p:cNvSpPr>
-            <a:spLocks noGrp="1" noRot="1" noChangeAspect="1"/>
-          </p:cNvSpPr>
-          <p:nvPr>
-            <p:ph type="sldImg"/>
-          </p:nvPr>
-        </p:nvSpPr>
-        <p:spPr/>
-      </p:sp>
-      <p:sp>
-        <p:nvSpPr>
-          <p:cNvPr id="3" name="備忘稿版面配置區 2">
-            <a:extLst>
-              <a:ext uri="{FF2B5EF4-FFF2-40B4-BE49-F238E27FC236}">
-                <a16:creationId xmlns:a16="http://schemas.microsoft.com/office/drawing/2014/main" id="{C4F8DB8E-F5F1-21EB-D41F-2C635FB715D5}"/>
-              </a:ext>
-            </a:extLst>
-          </p:cNvPr>
-          <p:cNvSpPr>
-            <a:spLocks noGrp="1"/>
-          </p:cNvSpPr>
-          <p:nvPr>
-            <p:ph type="body" idx="1"/>
-          </p:nvPr>
-        </p:nvSpPr>
-        <p:spPr/>
-        <p:txBody>
-          <a:bodyPr/>
-          <a:lstStyle/>
-          <a:p>
-            <a:pPr marL="0" marR="0" lvl="0" indent="0" algn="l" defTabSz="914400" rtl="0" eaLnBrk="1" fontAlgn="auto" latinLnBrk="0" hangingPunct="1">
-              <a:lnSpc>
-                <a:spcPct val="100000"/>
-              </a:lnSpc>
-              <a:spcBef>
-                <a:spcPts val="360"/>
-              </a:spcBef>
-              <a:spcAft>
-                <a:spcPts val="0"/>
-              </a:spcAft>
-              <a:buClr>
-                <a:srgbClr val="000000"/>
-              </a:buClr>
-              <a:buSzPts val="1400"/>
-              <a:buFont typeface="Arial"/>
-              <a:buNone/>
-              <a:tabLst/>
-              <a:defRPr/>
-            </a:pPr>
-            <a:r>
-              <a:rPr lang="en-US" altLang="zh-TW" dirty="0"/>
-              <a:t>HDMI </a:t>
-            </a:r>
-            <a:r>
-              <a:rPr lang="zh-TW" altLang="en-US" dirty="0"/>
-              <a:t>影格緩衝、</a:t>
-            </a:r>
-            <a:r>
-              <a:rPr lang="en-US" altLang="zh-TW" dirty="0"/>
-              <a:t>DDR3</a:t>
-            </a:r>
-            <a:r>
-              <a:rPr lang="zh-TW" altLang="en-US" dirty="0"/>
-              <a:t>／</a:t>
-            </a:r>
-            <a:r>
-              <a:rPr lang="en-US" altLang="zh-TW" dirty="0"/>
-              <a:t>AXI </a:t>
-            </a:r>
-            <a:r>
-              <a:rPr lang="zh-TW" altLang="en-US" dirty="0"/>
-              <a:t>記憶體整合、廠商 </a:t>
-            </a:r>
-            <a:r>
-              <a:rPr lang="en-US" altLang="zh-TW" dirty="0"/>
-              <a:t>PCIe IP </a:t>
-            </a:r>
-            <a:r>
-              <a:rPr lang="zh-TW" altLang="en-US" dirty="0"/>
-              <a:t>與 </a:t>
-            </a:r>
-            <a:r>
-              <a:rPr lang="en-US" altLang="zh-TW" dirty="0"/>
-              <a:t>PC </a:t>
-            </a:r>
-            <a:r>
-              <a:rPr lang="zh-TW" altLang="en-US" dirty="0"/>
-              <a:t>軟體介面的整體架構。</a:t>
-            </a:r>
-          </a:p>
-          <a:p>
-            <a:pPr marL="0" indent="0"/>
-            <a:endParaRPr lang="zh-TW" altLang="en-US" dirty="0"/>
-          </a:p>
-        </p:txBody>
-      </p:sp>
-      <p:sp>
-        <p:nvSpPr>
-          <p:cNvPr id="4" name="投影片編號版面配置區 3">
-            <a:extLst>
-              <a:ext uri="{FF2B5EF4-FFF2-40B4-BE49-F238E27FC236}">
-                <a16:creationId xmlns:a16="http://schemas.microsoft.com/office/drawing/2014/main" id="{A81AD260-1FA1-46D2-EEFC-6CE390861C06}"/>
-              </a:ext>
-            </a:extLst>
-          </p:cNvPr>
-          <p:cNvSpPr>
-            <a:spLocks noGrp="1"/>
-          </p:cNvSpPr>
-          <p:nvPr>
-            <p:ph type="sldNum" idx="12"/>
-          </p:nvPr>
-        </p:nvSpPr>
-        <p:spPr/>
-        <p:txBody>
-          <a:bodyPr/>
-          <a:lstStyle/>
-          <a:p>
-            <a:pPr marL="0" marR="0" lvl="0" indent="0" algn="r" rtl="0">
-              <a:spcBef>
-                <a:spcPts val="0"/>
-              </a:spcBef>
-              <a:spcAft>
-                <a:spcPts val="0"/>
-              </a:spcAft>
-              <a:buNone/>
-            </a:pPr>
-            <a:fld id="{00000000-1234-1234-1234-123412341234}" type="slidenum">
-              <a:rPr lang="en-US" sz="2000" b="0" i="0" u="none" strike="noStrike" cap="none" smtClean="0">
-                <a:solidFill>
-                  <a:schemeClr val="dk1"/>
-                </a:solidFill>
-                <a:latin typeface="Times New Roman"/>
-                <a:ea typeface="Times New Roman"/>
-                <a:cs typeface="Times New Roman"/>
-                <a:sym typeface="Times New Roman"/>
-              </a:rPr>
-              <a:t>12</a:t>
-            </a:fld>
-            <a:endParaRPr lang="en-US" sz="2000" b="0" i="0" u="none" strike="noStrike" cap="none" dirty="0">
-              <a:solidFill>
-                <a:schemeClr val="dk1"/>
-              </a:solidFill>
-              <a:latin typeface="Times New Roman"/>
-              <a:ea typeface="Times New Roman"/>
-              <a:cs typeface="Times New Roman"/>
-              <a:sym typeface="Times New Roman"/>
-            </a:endParaRPr>
-          </a:p>
-        </p:txBody>
-      </p:sp>
-    </p:spTree>
-    <p:extLst>
-      <p:ext uri="{BB962C8B-B14F-4D97-AF65-F5344CB8AC3E}">
-        <p14:creationId xmlns:p14="http://schemas.microsoft.com/office/powerpoint/2010/main" val="3764392625"/>
       </p:ext>
     </p:extLst>
   </p:cSld>
@@ -3086,67 +2964,6 @@
           <a:bodyPr/>
           <a:lstStyle/>
           <a:p>
-            <a:pPr marL="0" marR="0" lvl="0" indent="0" algn="l" defTabSz="914400" rtl="0" eaLnBrk="1" fontAlgn="auto" latinLnBrk="0" hangingPunct="1">
-              <a:lnSpc>
-                <a:spcPct val="100000"/>
-              </a:lnSpc>
-              <a:spcBef>
-                <a:spcPts val="360"/>
-              </a:spcBef>
-              <a:spcAft>
-                <a:spcPts val="0"/>
-              </a:spcAft>
-              <a:buClr>
-                <a:srgbClr val="000000"/>
-              </a:buClr>
-              <a:buSzPts val="1400"/>
-              <a:buFont typeface="Arial"/>
-              <a:buNone/>
-              <a:tabLst/>
-              <a:defRPr/>
-            </a:pPr>
-            <a:r>
-              <a:rPr lang="en-US" altLang="zh-TW" dirty="0"/>
-              <a:t>HDMI </a:t>
-            </a:r>
-            <a:r>
-              <a:rPr lang="zh-TW" altLang="en-US" dirty="0"/>
-              <a:t>影格緩衝、</a:t>
-            </a:r>
-            <a:r>
-              <a:rPr lang="en-US" altLang="zh-TW" dirty="0"/>
-              <a:t>DDR3</a:t>
-            </a:r>
-            <a:r>
-              <a:rPr lang="zh-TW" altLang="en-US" dirty="0"/>
-              <a:t>／</a:t>
-            </a:r>
-            <a:r>
-              <a:rPr lang="en-US" altLang="zh-TW" dirty="0"/>
-              <a:t>AXI </a:t>
-            </a:r>
-            <a:r>
-              <a:rPr lang="zh-TW" altLang="en-US" dirty="0"/>
-              <a:t>記憶體整合、廠商 </a:t>
-            </a:r>
-            <a:r>
-              <a:rPr lang="en-US" altLang="zh-TW" dirty="0"/>
-              <a:t>PCIe IP </a:t>
-            </a:r>
-            <a:r>
-              <a:rPr lang="zh-TW" altLang="en-US" dirty="0"/>
-              <a:t>與 </a:t>
-            </a:r>
-            <a:r>
-              <a:rPr lang="en-US" altLang="zh-TW" dirty="0"/>
-              <a:t>PC </a:t>
-            </a:r>
-            <a:r>
-              <a:rPr lang="zh-TW" altLang="en-US" dirty="0"/>
-              <a:t>軟體介面的整體架構。</a:t>
-            </a:r>
-          </a:p>
-          <a:p>
             <a:pPr marL="0" indent="0"/>
             <a:endParaRPr lang="zh-TW" altLang="en-US" dirty="0"/>
           </a:p>
@@ -3280,67 +3097,6 @@
         <p:txBody>
           <a:bodyPr/>
           <a:lstStyle/>
-          <a:p>
-            <a:pPr marL="0" marR="0" lvl="0" indent="0" algn="l" defTabSz="914400" rtl="0" eaLnBrk="1" fontAlgn="auto" latinLnBrk="0" hangingPunct="1">
-              <a:lnSpc>
-                <a:spcPct val="100000"/>
-              </a:lnSpc>
-              <a:spcBef>
-                <a:spcPts val="360"/>
-              </a:spcBef>
-              <a:spcAft>
-                <a:spcPts val="0"/>
-              </a:spcAft>
-              <a:buClr>
-                <a:srgbClr val="000000"/>
-              </a:buClr>
-              <a:buSzPts val="1400"/>
-              <a:buFont typeface="Arial"/>
-              <a:buNone/>
-              <a:tabLst/>
-              <a:defRPr/>
-            </a:pPr>
-            <a:r>
-              <a:rPr lang="en-US" altLang="zh-TW" dirty="0"/>
-              <a:t>HDMI </a:t>
-            </a:r>
-            <a:r>
-              <a:rPr lang="zh-TW" altLang="en-US" dirty="0"/>
-              <a:t>影格緩衝、</a:t>
-            </a:r>
-            <a:r>
-              <a:rPr lang="en-US" altLang="zh-TW" dirty="0"/>
-              <a:t>DDR3</a:t>
-            </a:r>
-            <a:r>
-              <a:rPr lang="zh-TW" altLang="en-US" dirty="0"/>
-              <a:t>／</a:t>
-            </a:r>
-            <a:r>
-              <a:rPr lang="en-US" altLang="zh-TW" dirty="0"/>
-              <a:t>AXI </a:t>
-            </a:r>
-            <a:r>
-              <a:rPr lang="zh-TW" altLang="en-US" dirty="0"/>
-              <a:t>記憶體整合、廠商 </a:t>
-            </a:r>
-            <a:r>
-              <a:rPr lang="en-US" altLang="zh-TW" dirty="0"/>
-              <a:t>PCIe IP </a:t>
-            </a:r>
-            <a:r>
-              <a:rPr lang="zh-TW" altLang="en-US" dirty="0"/>
-              <a:t>與 </a:t>
-            </a:r>
-            <a:r>
-              <a:rPr lang="en-US" altLang="zh-TW" dirty="0"/>
-              <a:t>PC </a:t>
-            </a:r>
-            <a:r>
-              <a:rPr lang="zh-TW" altLang="en-US" dirty="0"/>
-              <a:t>軟體介面的整體架構。</a:t>
-            </a:r>
-          </a:p>
           <a:p>
             <a:pPr marL="0" indent="0"/>
             <a:endParaRPr lang="zh-TW" altLang="en-US" dirty="0"/>
@@ -8458,7 +8214,39 @@
                 <a:ea typeface="標楷體" panose="03000509000000000000" pitchFamily="65" charset="-120"/>
                 <a:cs typeface="Times New Roman" panose="02020603050405020304" pitchFamily="18" charset="0"/>
               </a:rPr>
-              <a:t>: AX7103 — HDMI to PCIe</a:t>
+              <a:t>:</a:t>
+            </a:r>
+            <a:r>
+              <a:rPr lang="zh-TW" altLang="en-US" dirty="0">
+                <a:latin typeface="Times New Roman" panose="02020603050405020304" pitchFamily="18" charset="0"/>
+                <a:ea typeface="標楷體" panose="03000509000000000000" pitchFamily="65" charset="-120"/>
+                <a:cs typeface="Times New Roman" panose="02020603050405020304" pitchFamily="18" charset="0"/>
+              </a:rPr>
+              <a:t> </a:t>
+            </a:r>
+            <a:r>
+              <a:rPr lang="en-US" altLang="zh-TW" dirty="0">
+                <a:latin typeface="Times New Roman" panose="02020603050405020304" pitchFamily="18" charset="0"/>
+                <a:ea typeface="標楷體" panose="03000509000000000000" pitchFamily="65" charset="-120"/>
+                <a:cs typeface="Times New Roman" panose="02020603050405020304" pitchFamily="18" charset="0"/>
+              </a:rPr>
+              <a:t>HDMI</a:t>
+            </a:r>
+            <a:r>
+              <a:rPr lang="zh-TW" altLang="en-US" dirty="0">
+                <a:latin typeface="Times New Roman" panose="02020603050405020304" pitchFamily="18" charset="0"/>
+                <a:ea typeface="標楷體" panose="03000509000000000000" pitchFamily="65" charset="-120"/>
+                <a:cs typeface="Times New Roman" panose="02020603050405020304" pitchFamily="18" charset="0"/>
+              </a:rPr>
+              <a:t> </a:t>
+            </a:r>
+            <a:r>
+              <a:rPr lang="en-US" altLang="zh-TW" dirty="0">
+                <a:latin typeface="Times New Roman" panose="02020603050405020304" pitchFamily="18" charset="0"/>
+                <a:ea typeface="標楷體" panose="03000509000000000000" pitchFamily="65" charset="-120"/>
+                <a:cs typeface="Times New Roman" panose="02020603050405020304" pitchFamily="18" charset="0"/>
+              </a:rPr>
+              <a:t>to FPGA to PCIE</a:t>
             </a:r>
             <a:endParaRPr lang="zh-TW" altLang="en-US" dirty="0">
               <a:latin typeface="Times New Roman" panose="02020603050405020304" pitchFamily="18" charset="0"/>
@@ -8745,6 +8533,799 @@
             </a:lvl9pPr>
           </a:lstStyle>
           <a:p>
+            <a:r>
+              <a:rPr lang="en-US" altLang="zh-TW" sz="2000" dirty="0">
+                <a:solidFill>
+                  <a:schemeClr val="tx1"/>
+                </a:solidFill>
+                <a:latin typeface="Times New Roman" panose="02020603050405020304" pitchFamily="18" charset="0"/>
+                <a:ea typeface="標楷體" panose="03000509000000000000" pitchFamily="65" charset="-120"/>
+                <a:cs typeface="Times New Roman" panose="02020603050405020304" pitchFamily="18" charset="0"/>
+              </a:rPr>
+              <a:t>FPGA-Video-Capture</a:t>
+            </a:r>
+            <a:r>
+              <a:rPr lang="zh-TW" altLang="en-US" sz="2000" dirty="0">
+                <a:solidFill>
+                  <a:schemeClr val="tx1"/>
+                </a:solidFill>
+                <a:latin typeface="Times New Roman" panose="02020603050405020304" pitchFamily="18" charset="0"/>
+                <a:ea typeface="標楷體" panose="03000509000000000000" pitchFamily="65" charset="-120"/>
+                <a:cs typeface="Times New Roman" panose="02020603050405020304" pitchFamily="18" charset="0"/>
+              </a:rPr>
+              <a:t> </a:t>
+            </a:r>
+            <a:r>
+              <a:rPr lang="en-US" altLang="zh-TW" sz="2000" baseline="-25000" dirty="0">
+                <a:solidFill>
+                  <a:schemeClr val="tx1"/>
+                </a:solidFill>
+                <a:latin typeface="Times New Roman" panose="02020603050405020304" pitchFamily="18" charset="0"/>
+                <a:ea typeface="標楷體" panose="03000509000000000000" pitchFamily="65" charset="-120"/>
+                <a:cs typeface="Times New Roman" panose="02020603050405020304" pitchFamily="18" charset="0"/>
+              </a:rPr>
+              <a:t>[6]</a:t>
+            </a:r>
+            <a:endParaRPr lang="en-US" altLang="zh-TW" sz="2000" dirty="0">
+              <a:solidFill>
+                <a:schemeClr val="tx1"/>
+              </a:solidFill>
+              <a:latin typeface="Times New Roman" panose="02020603050405020304" pitchFamily="18" charset="0"/>
+              <a:ea typeface="標楷體" panose="03000509000000000000" pitchFamily="65" charset="-120"/>
+              <a:cs typeface="Times New Roman" panose="02020603050405020304" pitchFamily="18" charset="0"/>
+            </a:endParaRPr>
+          </a:p>
+          <a:p>
+            <a:pPr lvl="1"/>
+            <a:r>
+              <a:rPr lang="zh-TW" altLang="zh-TW" sz="1600" dirty="0">
+                <a:latin typeface="Times New Roman" panose="02020603050405020304" pitchFamily="18" charset="0"/>
+                <a:ea typeface="標楷體" panose="03000509000000000000" pitchFamily="65" charset="-120"/>
+                <a:cs typeface="Times New Roman" panose="02020603050405020304" pitchFamily="18" charset="0"/>
+              </a:rPr>
+              <a:t>整合 HDMI</a:t>
+            </a:r>
+            <a:r>
+              <a:rPr lang="zh-TW" altLang="en-US" sz="1600" dirty="0">
+                <a:latin typeface="Times New Roman" panose="02020603050405020304" pitchFamily="18" charset="0"/>
+                <a:ea typeface="標楷體" panose="03000509000000000000" pitchFamily="65" charset="-120"/>
+                <a:cs typeface="Times New Roman" panose="02020603050405020304" pitchFamily="18" charset="0"/>
+              </a:rPr>
+              <a:t> </a:t>
+            </a:r>
+            <a:r>
+              <a:rPr lang="zh-TW" altLang="zh-TW" sz="1600" dirty="0">
+                <a:latin typeface="Times New Roman" panose="02020603050405020304" pitchFamily="18" charset="0"/>
+                <a:ea typeface="標楷體" panose="03000509000000000000" pitchFamily="65" charset="-120"/>
+                <a:cs typeface="Times New Roman" panose="02020603050405020304" pitchFamily="18" charset="0"/>
+              </a:rPr>
+              <a:t>影像輸入、DDR3 幀緩存、PCIe DMA 與 Ethernet UDP 傳輸，並搭配 PC 端影像辨識應用</a:t>
+            </a:r>
+            <a:endParaRPr lang="en-US" altLang="zh-TW" sz="2000" dirty="0">
+              <a:latin typeface="Times New Roman" panose="02020603050405020304" pitchFamily="18" charset="0"/>
+              <a:ea typeface="標楷體" panose="03000509000000000000" pitchFamily="65" charset="-120"/>
+              <a:cs typeface="Times New Roman" panose="02020603050405020304" pitchFamily="18" charset="0"/>
+            </a:endParaRPr>
+          </a:p>
+          <a:p>
+            <a:pPr>
+              <a:lnSpc>
+                <a:spcPct val="150000"/>
+              </a:lnSpc>
+            </a:pPr>
+            <a:endParaRPr lang="en-US" altLang="zh-TW" sz="2000" dirty="0">
+              <a:latin typeface="Times New Roman" panose="02020603050405020304" pitchFamily="18" charset="0"/>
+              <a:ea typeface="標楷體" panose="03000509000000000000" pitchFamily="65" charset="-120"/>
+              <a:cs typeface="Times New Roman" panose="02020603050405020304" pitchFamily="18" charset="0"/>
+            </a:endParaRPr>
+          </a:p>
+          <a:p>
+            <a:pPr marL="50800" indent="0">
+              <a:lnSpc>
+                <a:spcPct val="150000"/>
+              </a:lnSpc>
+              <a:buNone/>
+            </a:pPr>
+            <a:endParaRPr lang="en-US" altLang="zh-TW" sz="2000" dirty="0">
+              <a:latin typeface="Times New Roman" panose="02020603050405020304" pitchFamily="18" charset="0"/>
+              <a:ea typeface="標楷體" panose="03000509000000000000" pitchFamily="65" charset="-120"/>
+              <a:cs typeface="Times New Roman" panose="02020603050405020304" pitchFamily="18" charset="0"/>
+            </a:endParaRPr>
+          </a:p>
+          <a:p>
+            <a:pPr marL="50800" indent="0">
+              <a:lnSpc>
+                <a:spcPct val="150000"/>
+              </a:lnSpc>
+              <a:buNone/>
+            </a:pPr>
+            <a:endParaRPr lang="en-US" altLang="zh-TW" sz="2000" dirty="0">
+              <a:latin typeface="Times New Roman" panose="02020603050405020304" pitchFamily="18" charset="0"/>
+              <a:ea typeface="標楷體" panose="03000509000000000000" pitchFamily="65" charset="-120"/>
+              <a:cs typeface="Times New Roman" panose="02020603050405020304" pitchFamily="18" charset="0"/>
+            </a:endParaRPr>
+          </a:p>
+          <a:p>
+            <a:pPr>
+              <a:lnSpc>
+                <a:spcPct val="150000"/>
+              </a:lnSpc>
+            </a:pPr>
+            <a:r>
+              <a:rPr lang="en-US" altLang="zh-TW" sz="2000" dirty="0">
+                <a:latin typeface="Times New Roman" panose="02020603050405020304" pitchFamily="18" charset="0"/>
+                <a:ea typeface="標楷體" panose="03000509000000000000" pitchFamily="65" charset="-120"/>
+                <a:cs typeface="Times New Roman" panose="02020603050405020304" pitchFamily="18" charset="0"/>
+              </a:rPr>
+              <a:t>AX7103 — HDMI to PCIe</a:t>
+            </a:r>
+            <a:r>
+              <a:rPr lang="zh-TW" altLang="en-US" sz="2000" dirty="0">
+                <a:latin typeface="Times New Roman" panose="02020603050405020304" pitchFamily="18" charset="0"/>
+                <a:ea typeface="標楷體" panose="03000509000000000000" pitchFamily="65" charset="-120"/>
+                <a:cs typeface="Times New Roman" panose="02020603050405020304" pitchFamily="18" charset="0"/>
+              </a:rPr>
+              <a:t> </a:t>
+            </a:r>
+            <a:r>
+              <a:rPr lang="en-US" altLang="zh-TW" sz="2000" baseline="-25000" dirty="0">
+                <a:latin typeface="Times New Roman" panose="02020603050405020304" pitchFamily="18" charset="0"/>
+                <a:ea typeface="標楷體" panose="03000509000000000000" pitchFamily="65" charset="-120"/>
+                <a:cs typeface="Times New Roman" panose="02020603050405020304" pitchFamily="18" charset="0"/>
+              </a:rPr>
+              <a:t>[7]</a:t>
+            </a:r>
+            <a:endParaRPr lang="en-US" altLang="zh-TW" sz="2000" dirty="0">
+              <a:solidFill>
+                <a:schemeClr val="tx1"/>
+              </a:solidFill>
+              <a:latin typeface="Times New Roman" panose="02020603050405020304" pitchFamily="18" charset="0"/>
+              <a:ea typeface="標楷體" panose="03000509000000000000" pitchFamily="65" charset="-120"/>
+              <a:cs typeface="Times New Roman" panose="02020603050405020304" pitchFamily="18" charset="0"/>
+            </a:endParaRPr>
+          </a:p>
+          <a:p>
+            <a:pPr lvl="1">
+              <a:lnSpc>
+                <a:spcPts val="3000"/>
+              </a:lnSpc>
+            </a:pPr>
+            <a:r>
+              <a:rPr lang="zh-TW" altLang="en-US" sz="1600" dirty="0">
+                <a:latin typeface="Times New Roman" panose="02020603050405020304" pitchFamily="18" charset="0"/>
+                <a:ea typeface="標楷體" panose="03000509000000000000" pitchFamily="65" charset="-120"/>
+                <a:cs typeface="Times New Roman" panose="02020603050405020304" pitchFamily="18" charset="0"/>
+              </a:rPr>
+              <a:t>整合 </a:t>
+            </a:r>
+            <a:r>
+              <a:rPr lang="en-US" altLang="zh-TW" sz="1600" dirty="0">
+                <a:latin typeface="Times New Roman" panose="02020603050405020304" pitchFamily="18" charset="0"/>
+                <a:ea typeface="標楷體" panose="03000509000000000000" pitchFamily="65" charset="-120"/>
+                <a:cs typeface="Times New Roman" panose="02020603050405020304" pitchFamily="18" charset="0"/>
+              </a:rPr>
+              <a:t>HDMI </a:t>
+            </a:r>
+            <a:r>
+              <a:rPr lang="zh-TW" altLang="en-US" sz="1600" dirty="0">
+                <a:latin typeface="Times New Roman" panose="02020603050405020304" pitchFamily="18" charset="0"/>
+                <a:ea typeface="標楷體" panose="03000509000000000000" pitchFamily="65" charset="-120"/>
+                <a:cs typeface="Times New Roman" panose="02020603050405020304" pitchFamily="18" charset="0"/>
+              </a:rPr>
+              <a:t>影像處理、</a:t>
+            </a:r>
+            <a:r>
+              <a:rPr lang="en-US" altLang="zh-TW" sz="1600" dirty="0">
+                <a:latin typeface="Times New Roman" panose="02020603050405020304" pitchFamily="18" charset="0"/>
+                <a:ea typeface="標楷體" panose="03000509000000000000" pitchFamily="65" charset="-120"/>
+                <a:cs typeface="Times New Roman" panose="02020603050405020304" pitchFamily="18" charset="0"/>
+              </a:rPr>
+              <a:t>DDR3 </a:t>
+            </a:r>
+            <a:r>
+              <a:rPr lang="zh-TW" altLang="en-US" sz="1600" dirty="0">
+                <a:latin typeface="Times New Roman" panose="02020603050405020304" pitchFamily="18" charset="0"/>
+                <a:ea typeface="標楷體" panose="03000509000000000000" pitchFamily="65" charset="-120"/>
+                <a:cs typeface="Times New Roman" panose="02020603050405020304" pitchFamily="18" charset="0"/>
+              </a:rPr>
+              <a:t>影格緩衝與 </a:t>
+            </a:r>
+            <a:r>
+              <a:rPr lang="en-US" altLang="zh-TW" sz="1600" dirty="0">
+                <a:latin typeface="Times New Roman" panose="02020603050405020304" pitchFamily="18" charset="0"/>
+                <a:ea typeface="標楷體" panose="03000509000000000000" pitchFamily="65" charset="-120"/>
+                <a:cs typeface="Times New Roman" panose="02020603050405020304" pitchFamily="18" charset="0"/>
+              </a:rPr>
+              <a:t>PCIe</a:t>
+            </a:r>
+            <a:r>
+              <a:rPr lang="zh-TW" altLang="en-US" sz="1600" dirty="0">
+                <a:latin typeface="Times New Roman" panose="02020603050405020304" pitchFamily="18" charset="0"/>
+                <a:ea typeface="標楷體" panose="03000509000000000000" pitchFamily="65" charset="-120"/>
+                <a:cs typeface="Times New Roman" panose="02020603050405020304" pitchFamily="18" charset="0"/>
+              </a:rPr>
+              <a:t>，並提供 </a:t>
+            </a:r>
+            <a:r>
+              <a:rPr lang="en-US" altLang="zh-TW" sz="1600" dirty="0">
+                <a:latin typeface="Times New Roman" panose="02020603050405020304" pitchFamily="18" charset="0"/>
+                <a:ea typeface="標楷體" panose="03000509000000000000" pitchFamily="65" charset="-120"/>
+                <a:cs typeface="Times New Roman" panose="02020603050405020304" pitchFamily="18" charset="0"/>
+              </a:rPr>
+              <a:t>Windows </a:t>
+            </a:r>
+            <a:r>
+              <a:rPr lang="zh-TW" altLang="en-US" sz="1600" dirty="0">
+                <a:latin typeface="Times New Roman" panose="02020603050405020304" pitchFamily="18" charset="0"/>
+                <a:ea typeface="標楷體" panose="03000509000000000000" pitchFamily="65" charset="-120"/>
+                <a:cs typeface="Times New Roman" panose="02020603050405020304" pitchFamily="18" charset="0"/>
+              </a:rPr>
+              <a:t>端影格讀取程式</a:t>
+            </a:r>
+            <a:endParaRPr lang="en-US" altLang="zh-TW" sz="2000" dirty="0">
+              <a:latin typeface="Times New Roman" panose="02020603050405020304" pitchFamily="18" charset="0"/>
+              <a:ea typeface="標楷體" panose="03000509000000000000" pitchFamily="65" charset="-120"/>
+              <a:cs typeface="Times New Roman" panose="02020603050405020304" pitchFamily="18" charset="0"/>
+            </a:endParaRPr>
+          </a:p>
+          <a:p>
+            <a:pPr>
+              <a:lnSpc>
+                <a:spcPts val="3000"/>
+              </a:lnSpc>
+            </a:pPr>
+            <a:endParaRPr lang="en-US" altLang="zh-TW" sz="2000" dirty="0">
+              <a:latin typeface="Times New Roman" panose="02020603050405020304" pitchFamily="18" charset="0"/>
+              <a:ea typeface="標楷體" panose="03000509000000000000" pitchFamily="65" charset="-120"/>
+              <a:cs typeface="Times New Roman" panose="02020603050405020304" pitchFamily="18" charset="0"/>
+            </a:endParaRPr>
+          </a:p>
+          <a:p>
+            <a:pPr marL="50800" indent="0">
+              <a:lnSpc>
+                <a:spcPts val="3000"/>
+              </a:lnSpc>
+              <a:buNone/>
+            </a:pPr>
+            <a:endParaRPr lang="en-US" altLang="zh-TW" sz="2000" dirty="0">
+              <a:latin typeface="Times New Roman" panose="02020603050405020304" pitchFamily="18" charset="0"/>
+              <a:ea typeface="標楷體" panose="03000509000000000000" pitchFamily="65" charset="-120"/>
+              <a:cs typeface="Times New Roman" panose="02020603050405020304" pitchFamily="18" charset="0"/>
+            </a:endParaRPr>
+          </a:p>
+          <a:p>
+            <a:pPr marL="50800" indent="0">
+              <a:lnSpc>
+                <a:spcPts val="3000"/>
+              </a:lnSpc>
+              <a:buNone/>
+            </a:pPr>
+            <a:endParaRPr lang="en-US" altLang="zh-TW" sz="2000" dirty="0">
+              <a:latin typeface="Times New Roman" panose="02020603050405020304" pitchFamily="18" charset="0"/>
+              <a:ea typeface="標楷體" panose="03000509000000000000" pitchFamily="65" charset="-120"/>
+              <a:cs typeface="Times New Roman" panose="02020603050405020304" pitchFamily="18" charset="0"/>
+            </a:endParaRPr>
+          </a:p>
+          <a:p>
+            <a:pPr marL="50800" indent="0">
+              <a:lnSpc>
+                <a:spcPts val="3000"/>
+              </a:lnSpc>
+              <a:buNone/>
+            </a:pPr>
+            <a:endParaRPr lang="en-US" altLang="zh-TW" sz="2000" dirty="0">
+              <a:latin typeface="Times New Roman" panose="02020603050405020304" pitchFamily="18" charset="0"/>
+              <a:ea typeface="標楷體" panose="03000509000000000000" pitchFamily="65" charset="-120"/>
+              <a:cs typeface="Times New Roman" panose="02020603050405020304" pitchFamily="18" charset="0"/>
+            </a:endParaRPr>
+          </a:p>
+          <a:p>
+            <a:pPr>
+              <a:lnSpc>
+                <a:spcPts val="3000"/>
+              </a:lnSpc>
+            </a:pPr>
+            <a:endParaRPr lang="en-US" altLang="zh-TW" sz="2000" dirty="0">
+              <a:latin typeface="Times New Roman" panose="02020603050405020304" pitchFamily="18" charset="0"/>
+              <a:ea typeface="標楷體" panose="03000509000000000000" pitchFamily="65" charset="-120"/>
+              <a:cs typeface="Times New Roman" panose="02020603050405020304" pitchFamily="18" charset="0"/>
+            </a:endParaRPr>
+          </a:p>
+        </p:txBody>
+      </p:sp>
+      <p:sp>
+        <p:nvSpPr>
+          <p:cNvPr id="3" name="文字方塊 2">
+            <a:extLst>
+              <a:ext uri="{FF2B5EF4-FFF2-40B4-BE49-F238E27FC236}">
+                <a16:creationId xmlns:a16="http://schemas.microsoft.com/office/drawing/2014/main" id="{B17A7646-77F3-2568-68C1-545F7C189BE6}"/>
+              </a:ext>
+            </a:extLst>
+          </p:cNvPr>
+          <p:cNvSpPr txBox="1"/>
+          <p:nvPr/>
+        </p:nvSpPr>
+        <p:spPr>
+          <a:xfrm>
+            <a:off x="1787236" y="6384072"/>
+            <a:ext cx="5802283" cy="461665"/>
+          </a:xfrm>
+          <a:prstGeom prst="rect">
+            <a:avLst/>
+          </a:prstGeom>
+          <a:noFill/>
+        </p:spPr>
+        <p:txBody>
+          <a:bodyPr wrap="square">
+            <a:spAutoFit/>
+          </a:bodyPr>
+          <a:lstStyle/>
+          <a:p>
+            <a:r>
+              <a:rPr lang="en-US" altLang="zh-TW" sz="1200" dirty="0">
+                <a:latin typeface="Times New Roman" panose="02020603050405020304" pitchFamily="18" charset="0"/>
+                <a:ea typeface="標楷體" panose="03000509000000000000" pitchFamily="65" charset="-120"/>
+                <a:cs typeface="Times New Roman" panose="02020603050405020304" pitchFamily="18" charset="0"/>
+              </a:rPr>
+              <a:t>[6] https://github.com/flytt-away/FPGA-Video-Capture</a:t>
+            </a:r>
+          </a:p>
+          <a:p>
+            <a:r>
+              <a:rPr lang="en-US" altLang="zh-TW" sz="1200" dirty="0">
+                <a:latin typeface="Times New Roman" panose="02020603050405020304" pitchFamily="18" charset="0"/>
+                <a:ea typeface="標楷體" panose="03000509000000000000" pitchFamily="65" charset="-120"/>
+                <a:cs typeface="Times New Roman" panose="02020603050405020304" pitchFamily="18" charset="0"/>
+              </a:rPr>
+              <a:t>[7] </a:t>
+            </a:r>
+            <a:r>
+              <a:rPr lang="en-US" altLang="zh-TW" sz="1200" dirty="0">
+                <a:latin typeface="Times New Roman" panose="02020603050405020304" pitchFamily="18" charset="0"/>
+                <a:ea typeface="標楷體" panose="03000509000000000000" pitchFamily="65" charset="-120"/>
+                <a:cs typeface="Times New Roman" panose="02020603050405020304" pitchFamily="18" charset="0"/>
+                <a:hlinkClick r:id="rId3"/>
+              </a:rPr>
+              <a:t>https://github.com/alinxalinx/AX7103</a:t>
+            </a:r>
+            <a:endParaRPr lang="en-US" altLang="zh-TW" sz="1200" dirty="0">
+              <a:latin typeface="Times New Roman" panose="02020603050405020304" pitchFamily="18" charset="0"/>
+              <a:ea typeface="標楷體" panose="03000509000000000000" pitchFamily="65" charset="-120"/>
+              <a:cs typeface="Times New Roman" panose="02020603050405020304" pitchFamily="18" charset="0"/>
+            </a:endParaRPr>
+          </a:p>
+        </p:txBody>
+      </p:sp>
+      <p:pic>
+        <p:nvPicPr>
+          <p:cNvPr id="8" name="圖片 7">
+            <a:extLst>
+              <a:ext uri="{FF2B5EF4-FFF2-40B4-BE49-F238E27FC236}">
+                <a16:creationId xmlns:a16="http://schemas.microsoft.com/office/drawing/2014/main" id="{37496F10-EF4E-A817-4699-3B6A31EA63E8}"/>
+              </a:ext>
+            </a:extLst>
+          </p:cNvPr>
+          <p:cNvPicPr>
+            <a:picLocks noChangeAspect="1"/>
+          </p:cNvPicPr>
+          <p:nvPr/>
+        </p:nvPicPr>
+        <p:blipFill>
+          <a:blip r:embed="rId4"/>
+          <a:stretch>
+            <a:fillRect/>
+          </a:stretch>
+        </p:blipFill>
+        <p:spPr>
+          <a:xfrm>
+            <a:off x="614685" y="4678478"/>
+            <a:ext cx="8681713" cy="958064"/>
+          </a:xfrm>
+          <a:prstGeom prst="rect">
+            <a:avLst/>
+          </a:prstGeom>
+        </p:spPr>
+      </p:pic>
+      <p:pic>
+        <p:nvPicPr>
+          <p:cNvPr id="12" name="圖片 11">
+            <a:extLst>
+              <a:ext uri="{FF2B5EF4-FFF2-40B4-BE49-F238E27FC236}">
+                <a16:creationId xmlns:a16="http://schemas.microsoft.com/office/drawing/2014/main" id="{B12031A4-3488-593A-A784-3F5D3A5E54B2}"/>
+              </a:ext>
+            </a:extLst>
+          </p:cNvPr>
+          <p:cNvPicPr>
+            <a:picLocks noChangeAspect="1"/>
+          </p:cNvPicPr>
+          <p:nvPr/>
+        </p:nvPicPr>
+        <p:blipFill>
+          <a:blip r:embed="rId5"/>
+          <a:stretch>
+            <a:fillRect/>
+          </a:stretch>
+        </p:blipFill>
+        <p:spPr>
+          <a:xfrm>
+            <a:off x="609602" y="2041958"/>
+            <a:ext cx="8681713" cy="1032134"/>
+          </a:xfrm>
+          <a:prstGeom prst="rect">
+            <a:avLst/>
+          </a:prstGeom>
+        </p:spPr>
+      </p:pic>
+    </p:spTree>
+    <p:extLst>
+      <p:ext uri="{BB962C8B-B14F-4D97-AF65-F5344CB8AC3E}">
+        <p14:creationId xmlns:p14="http://schemas.microsoft.com/office/powerpoint/2010/main" val="1861097472"/>
+      </p:ext>
+    </p:extLst>
+  </p:cSld>
+  <p:clrMapOvr>
+    <a:masterClrMapping/>
+  </p:clrMapOvr>
+</p:sld>
+</file>
+
+<file path=ppt/slides/slide11.xml><?xml version="1.0" encoding="utf-8"?>
+<p:sld xmlns:a="http://schemas.openxmlformats.org/drawingml/2006/main" xmlns:r="http://schemas.openxmlformats.org/officeDocument/2006/relationships" xmlns:p="http://schemas.openxmlformats.org/presentationml/2006/main">
+  <p:cSld>
+    <p:spTree>
+      <p:nvGrpSpPr>
+        <p:cNvPr id="1" name="">
+          <a:extLst>
+            <a:ext uri="{FF2B5EF4-FFF2-40B4-BE49-F238E27FC236}">
+              <a16:creationId xmlns:a16="http://schemas.microsoft.com/office/drawing/2014/main" id="{C25E9AAA-7E36-1E17-83F9-FD3A18A28BE9}"/>
+            </a:ext>
+          </a:extLst>
+        </p:cNvPr>
+        <p:cNvGrpSpPr/>
+        <p:nvPr/>
+      </p:nvGrpSpPr>
+      <p:grpSpPr>
+        <a:xfrm>
+          <a:off x="0" y="0"/>
+          <a:ext cx="0" cy="0"/>
+          <a:chOff x="0" y="0"/>
+          <a:chExt cx="0" cy="0"/>
+        </a:xfrm>
+      </p:grpSpPr>
+      <p:sp>
+        <p:nvSpPr>
+          <p:cNvPr id="15" name="標題 1">
+            <a:extLst>
+              <a:ext uri="{FF2B5EF4-FFF2-40B4-BE49-F238E27FC236}">
+                <a16:creationId xmlns:a16="http://schemas.microsoft.com/office/drawing/2014/main" id="{142C8726-E890-9988-40FC-8984FDA21FEE}"/>
+              </a:ext>
+            </a:extLst>
+          </p:cNvPr>
+          <p:cNvSpPr>
+            <a:spLocks noGrp="1"/>
+          </p:cNvSpPr>
+          <p:nvPr>
+            <p:ph type="title"/>
+          </p:nvPr>
+        </p:nvSpPr>
+        <p:spPr>
+          <a:xfrm>
+            <a:off x="609602" y="609600"/>
+            <a:ext cx="8077200" cy="533400"/>
+          </a:xfrm>
+          <a:ln>
+            <a:noFill/>
+          </a:ln>
+        </p:spPr>
+        <p:txBody>
+          <a:bodyPr/>
+          <a:lstStyle/>
+          <a:p>
+            <a:pPr algn="l" fontAlgn="t"/>
+            <a:r>
+              <a:rPr lang="zh-TW" altLang="en-US" dirty="0">
+                <a:latin typeface="Times New Roman" panose="02020603050405020304" pitchFamily="18" charset="0"/>
+                <a:ea typeface="標楷體" panose="03000509000000000000" pitchFamily="65" charset="-120"/>
+                <a:cs typeface="Times New Roman" panose="02020603050405020304" pitchFamily="18" charset="0"/>
+              </a:rPr>
+              <a:t>本次進度</a:t>
+            </a:r>
+            <a:r>
+              <a:rPr lang="en-US" altLang="zh-TW" dirty="0">
+                <a:latin typeface="Times New Roman" panose="02020603050405020304" pitchFamily="18" charset="0"/>
+                <a:ea typeface="標楷體" panose="03000509000000000000" pitchFamily="65" charset="-120"/>
+                <a:cs typeface="Times New Roman" panose="02020603050405020304" pitchFamily="18" charset="0"/>
+              </a:rPr>
+              <a:t>: </a:t>
+            </a:r>
+            <a:r>
+              <a:rPr lang="zh-TW" altLang="en-US" dirty="0">
+                <a:latin typeface="Times New Roman" panose="02020603050405020304" pitchFamily="18" charset="0"/>
+                <a:ea typeface="標楷體" panose="03000509000000000000" pitchFamily="65" charset="-120"/>
+                <a:cs typeface="Times New Roman" panose="02020603050405020304" pitchFamily="18" charset="0"/>
+              </a:rPr>
+              <a:t>整合比較</a:t>
+            </a:r>
+          </a:p>
+        </p:txBody>
+      </p:sp>
+      <p:sp>
+        <p:nvSpPr>
+          <p:cNvPr id="2" name="文字版面配置區 6">
+            <a:extLst>
+              <a:ext uri="{FF2B5EF4-FFF2-40B4-BE49-F238E27FC236}">
+                <a16:creationId xmlns:a16="http://schemas.microsoft.com/office/drawing/2014/main" id="{D929304B-5341-8BBF-E71F-AF5F2FE7268A}"/>
+              </a:ext>
+            </a:extLst>
+          </p:cNvPr>
+          <p:cNvSpPr txBox="1"/>
+          <p:nvPr/>
+        </p:nvSpPr>
+        <p:spPr>
+          <a:xfrm>
+            <a:off x="609602" y="935857"/>
+            <a:ext cx="8686796" cy="4700685"/>
+          </a:xfrm>
+          <a:prstGeom prst="rect">
+            <a:avLst/>
+          </a:prstGeom>
+          <a:noFill/>
+          <a:ln>
+            <a:noFill/>
+          </a:ln>
+        </p:spPr>
+        <p:txBody>
+          <a:bodyPr spcFirstLastPara="1" wrap="square" lIns="91425" tIns="45700" rIns="91425" bIns="45700" anchor="t" anchorCtr="0">
+            <a:noAutofit/>
+          </a:bodyPr>
+          <a:lstStyle>
+            <a:defPPr marR="0" lvl="0" algn="l" rtl="0">
+              <a:lnSpc>
+                <a:spcPct val="100000"/>
+              </a:lnSpc>
+              <a:spcBef>
+                <a:spcPts val="0"/>
+              </a:spcBef>
+              <a:spcAft>
+                <a:spcPts val="0"/>
+              </a:spcAft>
+            </a:defPPr>
+            <a:lvl1pPr marL="457200" marR="0" lvl="0" indent="-406400" algn="l" rtl="0">
+              <a:lnSpc>
+                <a:spcPct val="100000"/>
+              </a:lnSpc>
+              <a:spcBef>
+                <a:spcPts val="560"/>
+              </a:spcBef>
+              <a:spcAft>
+                <a:spcPts val="0"/>
+              </a:spcAft>
+              <a:buClr>
+                <a:schemeClr val="accent2"/>
+              </a:buClr>
+              <a:buSzPts val="2800"/>
+              <a:buFont typeface="Noto Sans Symbols"/>
+              <a:buChar char="❖"/>
+              <a:defRPr sz="2800" b="0" i="0" u="none" strike="noStrike" cap="none">
+                <a:solidFill>
+                  <a:schemeClr val="dk1"/>
+                </a:solidFill>
+                <a:latin typeface="Times New Roman"/>
+                <a:ea typeface="Times New Roman"/>
+                <a:cs typeface="Times New Roman"/>
+                <a:sym typeface="Times New Roman"/>
+              </a:defRPr>
+            </a:lvl1pPr>
+            <a:lvl2pPr marL="914400" marR="0" lvl="1" indent="-381000" algn="l" rtl="0">
+              <a:lnSpc>
+                <a:spcPct val="100000"/>
+              </a:lnSpc>
+              <a:spcBef>
+                <a:spcPts val="480"/>
+              </a:spcBef>
+              <a:spcAft>
+                <a:spcPts val="0"/>
+              </a:spcAft>
+              <a:buClr>
+                <a:srgbClr val="FF5050"/>
+              </a:buClr>
+              <a:buSzPts val="2400"/>
+              <a:buFont typeface="Noto Sans Symbols"/>
+              <a:buChar char="▪"/>
+              <a:defRPr sz="2400" b="0" i="0" u="none" strike="noStrike" cap="none">
+                <a:solidFill>
+                  <a:schemeClr val="dk1"/>
+                </a:solidFill>
+                <a:latin typeface="Times New Roman"/>
+                <a:ea typeface="Times New Roman"/>
+                <a:cs typeface="Times New Roman"/>
+                <a:sym typeface="Times New Roman"/>
+              </a:defRPr>
+            </a:lvl2pPr>
+            <a:lvl3pPr marL="1371600" marR="0" lvl="2" indent="-355600" algn="l" rtl="0">
+              <a:lnSpc>
+                <a:spcPct val="100000"/>
+              </a:lnSpc>
+              <a:spcBef>
+                <a:spcPts val="400"/>
+              </a:spcBef>
+              <a:spcAft>
+                <a:spcPts val="0"/>
+              </a:spcAft>
+              <a:buClr>
+                <a:srgbClr val="6699FF"/>
+              </a:buClr>
+              <a:buSzPts val="2000"/>
+              <a:buFont typeface="Times New Roman"/>
+              <a:buChar char="•"/>
+              <a:defRPr sz="2000" b="0" i="0" u="none" strike="noStrike" cap="none">
+                <a:solidFill>
+                  <a:schemeClr val="dk1"/>
+                </a:solidFill>
+                <a:latin typeface="Times New Roman"/>
+                <a:ea typeface="Times New Roman"/>
+                <a:cs typeface="Times New Roman"/>
+                <a:sym typeface="Times New Roman"/>
+              </a:defRPr>
+            </a:lvl3pPr>
+            <a:lvl4pPr marL="1828800" marR="0" lvl="3" indent="-355600" algn="l" rtl="0">
+              <a:lnSpc>
+                <a:spcPct val="100000"/>
+              </a:lnSpc>
+              <a:spcBef>
+                <a:spcPts val="400"/>
+              </a:spcBef>
+              <a:spcAft>
+                <a:spcPts val="0"/>
+              </a:spcAft>
+              <a:buClr>
+                <a:srgbClr val="FF5050"/>
+              </a:buClr>
+              <a:buSzPts val="2000"/>
+              <a:buFont typeface="Times New Roman"/>
+              <a:buChar char="o"/>
+              <a:defRPr sz="2000" b="0" i="0" u="none" strike="noStrike" cap="none">
+                <a:solidFill>
+                  <a:schemeClr val="dk1"/>
+                </a:solidFill>
+                <a:latin typeface="Times New Roman"/>
+                <a:ea typeface="Times New Roman"/>
+                <a:cs typeface="Times New Roman"/>
+                <a:sym typeface="Times New Roman"/>
+              </a:defRPr>
+            </a:lvl4pPr>
+            <a:lvl5pPr marL="2286000" marR="0" lvl="4" indent="-355600" algn="l" rtl="0">
+              <a:lnSpc>
+                <a:spcPct val="100000"/>
+              </a:lnSpc>
+              <a:spcBef>
+                <a:spcPts val="400"/>
+              </a:spcBef>
+              <a:spcAft>
+                <a:spcPts val="0"/>
+              </a:spcAft>
+              <a:buClr>
+                <a:srgbClr val="FF5050"/>
+              </a:buClr>
+              <a:buSzPts val="2000"/>
+              <a:buFont typeface="Times New Roman"/>
+              <a:buChar char="o"/>
+              <a:defRPr sz="2000" b="0" i="0" u="none" strike="noStrike" cap="none">
+                <a:solidFill>
+                  <a:schemeClr val="dk1"/>
+                </a:solidFill>
+                <a:latin typeface="Times New Roman"/>
+                <a:ea typeface="Times New Roman"/>
+                <a:cs typeface="Times New Roman"/>
+                <a:sym typeface="Times New Roman"/>
+              </a:defRPr>
+            </a:lvl5pPr>
+            <a:lvl6pPr marL="2743200" marR="0" lvl="5" indent="-355600" algn="l" rtl="0">
+              <a:lnSpc>
+                <a:spcPct val="100000"/>
+              </a:lnSpc>
+              <a:spcBef>
+                <a:spcPts val="400"/>
+              </a:spcBef>
+              <a:spcAft>
+                <a:spcPts val="0"/>
+              </a:spcAft>
+              <a:buClr>
+                <a:srgbClr val="FF5050"/>
+              </a:buClr>
+              <a:buSzPts val="2000"/>
+              <a:buFont typeface="Times New Roman"/>
+              <a:buChar char="o"/>
+              <a:defRPr sz="2000" b="0" i="0" u="none" strike="noStrike" cap="none">
+                <a:solidFill>
+                  <a:schemeClr val="dk1"/>
+                </a:solidFill>
+                <a:latin typeface="Times New Roman"/>
+                <a:ea typeface="Times New Roman"/>
+                <a:cs typeface="Times New Roman"/>
+                <a:sym typeface="Times New Roman"/>
+              </a:defRPr>
+            </a:lvl6pPr>
+            <a:lvl7pPr marL="3200400" marR="0" lvl="6" indent="-355600" algn="l" rtl="0">
+              <a:lnSpc>
+                <a:spcPct val="100000"/>
+              </a:lnSpc>
+              <a:spcBef>
+                <a:spcPts val="400"/>
+              </a:spcBef>
+              <a:spcAft>
+                <a:spcPts val="0"/>
+              </a:spcAft>
+              <a:buClr>
+                <a:srgbClr val="FF5050"/>
+              </a:buClr>
+              <a:buSzPts val="2000"/>
+              <a:buFont typeface="Times New Roman"/>
+              <a:buChar char="o"/>
+              <a:defRPr sz="2000" b="0" i="0" u="none" strike="noStrike" cap="none">
+                <a:solidFill>
+                  <a:schemeClr val="dk1"/>
+                </a:solidFill>
+                <a:latin typeface="Times New Roman"/>
+                <a:ea typeface="Times New Roman"/>
+                <a:cs typeface="Times New Roman"/>
+                <a:sym typeface="Times New Roman"/>
+              </a:defRPr>
+            </a:lvl7pPr>
+            <a:lvl8pPr marL="3657600" marR="0" lvl="7" indent="-355600" algn="l" rtl="0">
+              <a:lnSpc>
+                <a:spcPct val="100000"/>
+              </a:lnSpc>
+              <a:spcBef>
+                <a:spcPts val="400"/>
+              </a:spcBef>
+              <a:spcAft>
+                <a:spcPts val="0"/>
+              </a:spcAft>
+              <a:buClr>
+                <a:srgbClr val="FF5050"/>
+              </a:buClr>
+              <a:buSzPts val="2000"/>
+              <a:buFont typeface="Times New Roman"/>
+              <a:buChar char="o"/>
+              <a:defRPr sz="2000" b="0" i="0" u="none" strike="noStrike" cap="none">
+                <a:solidFill>
+                  <a:schemeClr val="dk1"/>
+                </a:solidFill>
+                <a:latin typeface="Times New Roman"/>
+                <a:ea typeface="Times New Roman"/>
+                <a:cs typeface="Times New Roman"/>
+                <a:sym typeface="Times New Roman"/>
+              </a:defRPr>
+            </a:lvl8pPr>
+            <a:lvl9pPr marL="4114800" marR="0" lvl="8" indent="-355600" algn="l" rtl="0">
+              <a:lnSpc>
+                <a:spcPct val="100000"/>
+              </a:lnSpc>
+              <a:spcBef>
+                <a:spcPts val="400"/>
+              </a:spcBef>
+              <a:spcAft>
+                <a:spcPts val="0"/>
+              </a:spcAft>
+              <a:buClr>
+                <a:srgbClr val="FF5050"/>
+              </a:buClr>
+              <a:buSzPts val="2000"/>
+              <a:buFont typeface="Times New Roman"/>
+              <a:buChar char="o"/>
+              <a:defRPr sz="2000" b="0" i="0" u="none" strike="noStrike" cap="none">
+                <a:solidFill>
+                  <a:schemeClr val="dk1"/>
+                </a:solidFill>
+                <a:latin typeface="Times New Roman"/>
+                <a:ea typeface="Times New Roman"/>
+                <a:cs typeface="Times New Roman"/>
+                <a:sym typeface="Times New Roman"/>
+              </a:defRPr>
+            </a:lvl9pPr>
+          </a:lstStyle>
+          <a:p>
             <a:pPr>
               <a:lnSpc>
                 <a:spcPct val="150000"/>
@@ -8879,7 +9460,7 @@
 </p:sld>
 </file>
 
-<file path=ppt/slides/slide11.xml><?xml version="1.0" encoding="utf-8"?>
+<file path=ppt/slides/slide12.xml><?xml version="1.0" encoding="utf-8"?>
 <p:sld xmlns:a="http://schemas.openxmlformats.org/drawingml/2006/main" xmlns:r="http://schemas.openxmlformats.org/officeDocument/2006/relationships" xmlns:p="http://schemas.openxmlformats.org/presentationml/2006/main">
   <p:cSld>
     <p:spTree>
@@ -8989,769 +9570,6 @@
         </p:spPr>
       </p:pic>
     </p:spTree>
-  </p:cSld>
-  <p:clrMapOvr>
-    <a:masterClrMapping/>
-  </p:clrMapOvr>
-</p:sld>
-</file>
-
-<file path=ppt/slides/slide12.xml><?xml version="1.0" encoding="utf-8"?>
-<p:sld xmlns:a="http://schemas.openxmlformats.org/drawingml/2006/main" xmlns:r="http://schemas.openxmlformats.org/officeDocument/2006/relationships" xmlns:p="http://schemas.openxmlformats.org/presentationml/2006/main" show="0">
-  <p:cSld>
-    <p:spTree>
-      <p:nvGrpSpPr>
-        <p:cNvPr id="1" name="">
-          <a:extLst>
-            <a:ext uri="{FF2B5EF4-FFF2-40B4-BE49-F238E27FC236}">
-              <a16:creationId xmlns:a16="http://schemas.microsoft.com/office/drawing/2014/main" id="{C25E9AAA-7E36-1E17-83F9-FD3A18A28BE9}"/>
-            </a:ext>
-          </a:extLst>
-        </p:cNvPr>
-        <p:cNvGrpSpPr/>
-        <p:nvPr/>
-      </p:nvGrpSpPr>
-      <p:grpSpPr>
-        <a:xfrm>
-          <a:off x="0" y="0"/>
-          <a:ext cx="0" cy="0"/>
-          <a:chOff x="0" y="0"/>
-          <a:chExt cx="0" cy="0"/>
-        </a:xfrm>
-      </p:grpSpPr>
-      <p:sp>
-        <p:nvSpPr>
-          <p:cNvPr id="15" name="標題 1">
-            <a:extLst>
-              <a:ext uri="{FF2B5EF4-FFF2-40B4-BE49-F238E27FC236}">
-                <a16:creationId xmlns:a16="http://schemas.microsoft.com/office/drawing/2014/main" id="{142C8726-E890-9988-40FC-8984FDA21FEE}"/>
-              </a:ext>
-            </a:extLst>
-          </p:cNvPr>
-          <p:cNvSpPr>
-            <a:spLocks noGrp="1"/>
-          </p:cNvSpPr>
-          <p:nvPr>
-            <p:ph type="title"/>
-          </p:nvPr>
-        </p:nvSpPr>
-        <p:spPr>
-          <a:xfrm>
-            <a:off x="609602" y="609600"/>
-            <a:ext cx="8077200" cy="533400"/>
-          </a:xfrm>
-          <a:ln>
-            <a:noFill/>
-          </a:ln>
-        </p:spPr>
-        <p:txBody>
-          <a:bodyPr/>
-          <a:lstStyle/>
-          <a:p>
-            <a:pPr algn="l" fontAlgn="t"/>
-            <a:r>
-              <a:rPr lang="zh-TW" altLang="en-US" dirty="0">
-                <a:latin typeface="Times New Roman" panose="02020603050405020304" pitchFamily="18" charset="0"/>
-                <a:ea typeface="標楷體" panose="03000509000000000000" pitchFamily="65" charset="-120"/>
-                <a:cs typeface="Times New Roman" panose="02020603050405020304" pitchFamily="18" charset="0"/>
-              </a:rPr>
-              <a:t>本次進度</a:t>
-            </a:r>
-            <a:r>
-              <a:rPr lang="en-US" altLang="zh-TW" dirty="0">
-                <a:latin typeface="Times New Roman" panose="02020603050405020304" pitchFamily="18" charset="0"/>
-                <a:ea typeface="標楷體" panose="03000509000000000000" pitchFamily="65" charset="-120"/>
-                <a:cs typeface="Times New Roman" panose="02020603050405020304" pitchFamily="18" charset="0"/>
-              </a:rPr>
-              <a:t>: AX7103 — HDMI to PCIe</a:t>
-            </a:r>
-            <a:endParaRPr lang="zh-TW" altLang="en-US" dirty="0">
-              <a:latin typeface="Times New Roman" panose="02020603050405020304" pitchFamily="18" charset="0"/>
-              <a:ea typeface="標楷體" panose="03000509000000000000" pitchFamily="65" charset="-120"/>
-              <a:cs typeface="Times New Roman" panose="02020603050405020304" pitchFamily="18" charset="0"/>
-            </a:endParaRPr>
-          </a:p>
-        </p:txBody>
-      </p:sp>
-      <p:sp>
-        <p:nvSpPr>
-          <p:cNvPr id="2" name="文字版面配置區 6">
-            <a:extLst>
-              <a:ext uri="{FF2B5EF4-FFF2-40B4-BE49-F238E27FC236}">
-                <a16:creationId xmlns:a16="http://schemas.microsoft.com/office/drawing/2014/main" id="{D929304B-5341-8BBF-E71F-AF5F2FE7268A}"/>
-              </a:ext>
-            </a:extLst>
-          </p:cNvPr>
-          <p:cNvSpPr txBox="1"/>
-          <p:nvPr/>
-        </p:nvSpPr>
-        <p:spPr>
-          <a:xfrm>
-            <a:off x="609602" y="935857"/>
-            <a:ext cx="8686796" cy="4700685"/>
-          </a:xfrm>
-          <a:prstGeom prst="rect">
-            <a:avLst/>
-          </a:prstGeom>
-          <a:noFill/>
-          <a:ln>
-            <a:noFill/>
-          </a:ln>
-        </p:spPr>
-        <p:txBody>
-          <a:bodyPr spcFirstLastPara="1" wrap="square" lIns="91425" tIns="45700" rIns="91425" bIns="45700" anchor="t" anchorCtr="0">
-            <a:noAutofit/>
-          </a:bodyPr>
-          <a:lstStyle>
-            <a:defPPr marR="0" lvl="0" algn="l" rtl="0">
-              <a:lnSpc>
-                <a:spcPct val="100000"/>
-              </a:lnSpc>
-              <a:spcBef>
-                <a:spcPts val="0"/>
-              </a:spcBef>
-              <a:spcAft>
-                <a:spcPts val="0"/>
-              </a:spcAft>
-            </a:defPPr>
-            <a:lvl1pPr marL="457200" marR="0" lvl="0" indent="-406400" algn="l" rtl="0">
-              <a:lnSpc>
-                <a:spcPct val="100000"/>
-              </a:lnSpc>
-              <a:spcBef>
-                <a:spcPts val="560"/>
-              </a:spcBef>
-              <a:spcAft>
-                <a:spcPts val="0"/>
-              </a:spcAft>
-              <a:buClr>
-                <a:schemeClr val="accent2"/>
-              </a:buClr>
-              <a:buSzPts val="2800"/>
-              <a:buFont typeface="Noto Sans Symbols"/>
-              <a:buChar char="❖"/>
-              <a:defRPr sz="2800" b="0" i="0" u="none" strike="noStrike" cap="none">
-                <a:solidFill>
-                  <a:schemeClr val="dk1"/>
-                </a:solidFill>
-                <a:latin typeface="Times New Roman"/>
-                <a:ea typeface="Times New Roman"/>
-                <a:cs typeface="Times New Roman"/>
-                <a:sym typeface="Times New Roman"/>
-              </a:defRPr>
-            </a:lvl1pPr>
-            <a:lvl2pPr marL="914400" marR="0" lvl="1" indent="-381000" algn="l" rtl="0">
-              <a:lnSpc>
-                <a:spcPct val="100000"/>
-              </a:lnSpc>
-              <a:spcBef>
-                <a:spcPts val="480"/>
-              </a:spcBef>
-              <a:spcAft>
-                <a:spcPts val="0"/>
-              </a:spcAft>
-              <a:buClr>
-                <a:srgbClr val="FF5050"/>
-              </a:buClr>
-              <a:buSzPts val="2400"/>
-              <a:buFont typeface="Noto Sans Symbols"/>
-              <a:buChar char="▪"/>
-              <a:defRPr sz="2400" b="0" i="0" u="none" strike="noStrike" cap="none">
-                <a:solidFill>
-                  <a:schemeClr val="dk1"/>
-                </a:solidFill>
-                <a:latin typeface="Times New Roman"/>
-                <a:ea typeface="Times New Roman"/>
-                <a:cs typeface="Times New Roman"/>
-                <a:sym typeface="Times New Roman"/>
-              </a:defRPr>
-            </a:lvl2pPr>
-            <a:lvl3pPr marL="1371600" marR="0" lvl="2" indent="-355600" algn="l" rtl="0">
-              <a:lnSpc>
-                <a:spcPct val="100000"/>
-              </a:lnSpc>
-              <a:spcBef>
-                <a:spcPts val="400"/>
-              </a:spcBef>
-              <a:spcAft>
-                <a:spcPts val="0"/>
-              </a:spcAft>
-              <a:buClr>
-                <a:srgbClr val="6699FF"/>
-              </a:buClr>
-              <a:buSzPts val="2000"/>
-              <a:buFont typeface="Times New Roman"/>
-              <a:buChar char="•"/>
-              <a:defRPr sz="2000" b="0" i="0" u="none" strike="noStrike" cap="none">
-                <a:solidFill>
-                  <a:schemeClr val="dk1"/>
-                </a:solidFill>
-                <a:latin typeface="Times New Roman"/>
-                <a:ea typeface="Times New Roman"/>
-                <a:cs typeface="Times New Roman"/>
-                <a:sym typeface="Times New Roman"/>
-              </a:defRPr>
-            </a:lvl3pPr>
-            <a:lvl4pPr marL="1828800" marR="0" lvl="3" indent="-355600" algn="l" rtl="0">
-              <a:lnSpc>
-                <a:spcPct val="100000"/>
-              </a:lnSpc>
-              <a:spcBef>
-                <a:spcPts val="400"/>
-              </a:spcBef>
-              <a:spcAft>
-                <a:spcPts val="0"/>
-              </a:spcAft>
-              <a:buClr>
-                <a:srgbClr val="FF5050"/>
-              </a:buClr>
-              <a:buSzPts val="2000"/>
-              <a:buFont typeface="Times New Roman"/>
-              <a:buChar char="o"/>
-              <a:defRPr sz="2000" b="0" i="0" u="none" strike="noStrike" cap="none">
-                <a:solidFill>
-                  <a:schemeClr val="dk1"/>
-                </a:solidFill>
-                <a:latin typeface="Times New Roman"/>
-                <a:ea typeface="Times New Roman"/>
-                <a:cs typeface="Times New Roman"/>
-                <a:sym typeface="Times New Roman"/>
-              </a:defRPr>
-            </a:lvl4pPr>
-            <a:lvl5pPr marL="2286000" marR="0" lvl="4" indent="-355600" algn="l" rtl="0">
-              <a:lnSpc>
-                <a:spcPct val="100000"/>
-              </a:lnSpc>
-              <a:spcBef>
-                <a:spcPts val="400"/>
-              </a:spcBef>
-              <a:spcAft>
-                <a:spcPts val="0"/>
-              </a:spcAft>
-              <a:buClr>
-                <a:srgbClr val="FF5050"/>
-              </a:buClr>
-              <a:buSzPts val="2000"/>
-              <a:buFont typeface="Times New Roman"/>
-              <a:buChar char="o"/>
-              <a:defRPr sz="2000" b="0" i="0" u="none" strike="noStrike" cap="none">
-                <a:solidFill>
-                  <a:schemeClr val="dk1"/>
-                </a:solidFill>
-                <a:latin typeface="Times New Roman"/>
-                <a:ea typeface="Times New Roman"/>
-                <a:cs typeface="Times New Roman"/>
-                <a:sym typeface="Times New Roman"/>
-              </a:defRPr>
-            </a:lvl5pPr>
-            <a:lvl6pPr marL="2743200" marR="0" lvl="5" indent="-355600" algn="l" rtl="0">
-              <a:lnSpc>
-                <a:spcPct val="100000"/>
-              </a:lnSpc>
-              <a:spcBef>
-                <a:spcPts val="400"/>
-              </a:spcBef>
-              <a:spcAft>
-                <a:spcPts val="0"/>
-              </a:spcAft>
-              <a:buClr>
-                <a:srgbClr val="FF5050"/>
-              </a:buClr>
-              <a:buSzPts val="2000"/>
-              <a:buFont typeface="Times New Roman"/>
-              <a:buChar char="o"/>
-              <a:defRPr sz="2000" b="0" i="0" u="none" strike="noStrike" cap="none">
-                <a:solidFill>
-                  <a:schemeClr val="dk1"/>
-                </a:solidFill>
-                <a:latin typeface="Times New Roman"/>
-                <a:ea typeface="Times New Roman"/>
-                <a:cs typeface="Times New Roman"/>
-                <a:sym typeface="Times New Roman"/>
-              </a:defRPr>
-            </a:lvl6pPr>
-            <a:lvl7pPr marL="3200400" marR="0" lvl="6" indent="-355600" algn="l" rtl="0">
-              <a:lnSpc>
-                <a:spcPct val="100000"/>
-              </a:lnSpc>
-              <a:spcBef>
-                <a:spcPts val="400"/>
-              </a:spcBef>
-              <a:spcAft>
-                <a:spcPts val="0"/>
-              </a:spcAft>
-              <a:buClr>
-                <a:srgbClr val="FF5050"/>
-              </a:buClr>
-              <a:buSzPts val="2000"/>
-              <a:buFont typeface="Times New Roman"/>
-              <a:buChar char="o"/>
-              <a:defRPr sz="2000" b="0" i="0" u="none" strike="noStrike" cap="none">
-                <a:solidFill>
-                  <a:schemeClr val="dk1"/>
-                </a:solidFill>
-                <a:latin typeface="Times New Roman"/>
-                <a:ea typeface="Times New Roman"/>
-                <a:cs typeface="Times New Roman"/>
-                <a:sym typeface="Times New Roman"/>
-              </a:defRPr>
-            </a:lvl7pPr>
-            <a:lvl8pPr marL="3657600" marR="0" lvl="7" indent="-355600" algn="l" rtl="0">
-              <a:lnSpc>
-                <a:spcPct val="100000"/>
-              </a:lnSpc>
-              <a:spcBef>
-                <a:spcPts val="400"/>
-              </a:spcBef>
-              <a:spcAft>
-                <a:spcPts val="0"/>
-              </a:spcAft>
-              <a:buClr>
-                <a:srgbClr val="FF5050"/>
-              </a:buClr>
-              <a:buSzPts val="2000"/>
-              <a:buFont typeface="Times New Roman"/>
-              <a:buChar char="o"/>
-              <a:defRPr sz="2000" b="0" i="0" u="none" strike="noStrike" cap="none">
-                <a:solidFill>
-                  <a:schemeClr val="dk1"/>
-                </a:solidFill>
-                <a:latin typeface="Times New Roman"/>
-                <a:ea typeface="Times New Roman"/>
-                <a:cs typeface="Times New Roman"/>
-                <a:sym typeface="Times New Roman"/>
-              </a:defRPr>
-            </a:lvl8pPr>
-            <a:lvl9pPr marL="4114800" marR="0" lvl="8" indent="-355600" algn="l" rtl="0">
-              <a:lnSpc>
-                <a:spcPct val="100000"/>
-              </a:lnSpc>
-              <a:spcBef>
-                <a:spcPts val="400"/>
-              </a:spcBef>
-              <a:spcAft>
-                <a:spcPts val="0"/>
-              </a:spcAft>
-              <a:buClr>
-                <a:srgbClr val="FF5050"/>
-              </a:buClr>
-              <a:buSzPts val="2000"/>
-              <a:buFont typeface="Times New Roman"/>
-              <a:buChar char="o"/>
-              <a:defRPr sz="2000" b="0" i="0" u="none" strike="noStrike" cap="none">
-                <a:solidFill>
-                  <a:schemeClr val="dk1"/>
-                </a:solidFill>
-                <a:latin typeface="Times New Roman"/>
-                <a:ea typeface="Times New Roman"/>
-                <a:cs typeface="Times New Roman"/>
-                <a:sym typeface="Times New Roman"/>
-              </a:defRPr>
-            </a:lvl9pPr>
-          </a:lstStyle>
-          <a:p>
-            <a:pPr>
-              <a:lnSpc>
-                <a:spcPct val="150000"/>
-              </a:lnSpc>
-            </a:pPr>
-            <a:r>
-              <a:rPr lang="zh-TW" altLang="en-US" sz="2000" dirty="0">
-                <a:solidFill>
-                  <a:schemeClr val="tx1"/>
-                </a:solidFill>
-                <a:latin typeface="Times New Roman" panose="02020603050405020304" pitchFamily="18" charset="0"/>
-                <a:ea typeface="標楷體" panose="03000509000000000000" pitchFamily="65" charset="-120"/>
-                <a:cs typeface="Times New Roman" panose="02020603050405020304" pitchFamily="18" charset="0"/>
-              </a:rPr>
-              <a:t>定位</a:t>
-            </a:r>
-            <a:endParaRPr lang="en-US" altLang="zh-TW" sz="2000" dirty="0">
-              <a:solidFill>
-                <a:schemeClr val="tx1"/>
-              </a:solidFill>
-              <a:latin typeface="Times New Roman" panose="02020603050405020304" pitchFamily="18" charset="0"/>
-              <a:ea typeface="標楷體" panose="03000509000000000000" pitchFamily="65" charset="-120"/>
-              <a:cs typeface="Times New Roman" panose="02020603050405020304" pitchFamily="18" charset="0"/>
-            </a:endParaRPr>
-          </a:p>
-          <a:p>
-            <a:pPr lvl="1">
-              <a:lnSpc>
-                <a:spcPts val="3000"/>
-              </a:lnSpc>
-            </a:pPr>
-            <a:r>
-              <a:rPr lang="zh-TW" altLang="en-US" sz="1600" dirty="0">
-                <a:latin typeface="Times New Roman" panose="02020603050405020304" pitchFamily="18" charset="0"/>
-                <a:ea typeface="標楷體" panose="03000509000000000000" pitchFamily="65" charset="-120"/>
-                <a:cs typeface="Times New Roman" panose="02020603050405020304" pitchFamily="18" charset="0"/>
-              </a:rPr>
-              <a:t>整合 </a:t>
-            </a:r>
-            <a:r>
-              <a:rPr lang="en-US" altLang="zh-TW" sz="1600" dirty="0">
-                <a:latin typeface="Times New Roman" panose="02020603050405020304" pitchFamily="18" charset="0"/>
-                <a:ea typeface="標楷體" panose="03000509000000000000" pitchFamily="65" charset="-120"/>
-                <a:cs typeface="Times New Roman" panose="02020603050405020304" pitchFamily="18" charset="0"/>
-              </a:rPr>
-              <a:t>HDMI </a:t>
-            </a:r>
-            <a:r>
-              <a:rPr lang="zh-TW" altLang="en-US" sz="1600" dirty="0">
-                <a:latin typeface="Times New Roman" panose="02020603050405020304" pitchFamily="18" charset="0"/>
-                <a:ea typeface="標楷體" panose="03000509000000000000" pitchFamily="65" charset="-120"/>
-                <a:cs typeface="Times New Roman" panose="02020603050405020304" pitchFamily="18" charset="0"/>
-              </a:rPr>
-              <a:t>影像處理、</a:t>
-            </a:r>
-            <a:r>
-              <a:rPr lang="en-US" altLang="zh-TW" sz="1600" dirty="0">
-                <a:latin typeface="Times New Roman" panose="02020603050405020304" pitchFamily="18" charset="0"/>
-                <a:ea typeface="標楷體" panose="03000509000000000000" pitchFamily="65" charset="-120"/>
-                <a:cs typeface="Times New Roman" panose="02020603050405020304" pitchFamily="18" charset="0"/>
-              </a:rPr>
-              <a:t>DDR3 </a:t>
-            </a:r>
-            <a:r>
-              <a:rPr lang="zh-TW" altLang="en-US" sz="1600" dirty="0">
-                <a:latin typeface="Times New Roman" panose="02020603050405020304" pitchFamily="18" charset="0"/>
-                <a:ea typeface="標楷體" panose="03000509000000000000" pitchFamily="65" charset="-120"/>
-                <a:cs typeface="Times New Roman" panose="02020603050405020304" pitchFamily="18" charset="0"/>
-              </a:rPr>
-              <a:t>影格緩衝與 </a:t>
-            </a:r>
-            <a:r>
-              <a:rPr lang="en-US" altLang="zh-TW" sz="1600" dirty="0">
-                <a:latin typeface="Times New Roman" panose="02020603050405020304" pitchFamily="18" charset="0"/>
-                <a:ea typeface="標楷體" panose="03000509000000000000" pitchFamily="65" charset="-120"/>
-                <a:cs typeface="Times New Roman" panose="02020603050405020304" pitchFamily="18" charset="0"/>
-              </a:rPr>
-              <a:t>PCIe</a:t>
-            </a:r>
-            <a:r>
-              <a:rPr lang="zh-TW" altLang="en-US" sz="1600" dirty="0">
-                <a:latin typeface="Times New Roman" panose="02020603050405020304" pitchFamily="18" charset="0"/>
-                <a:ea typeface="標楷體" panose="03000509000000000000" pitchFamily="65" charset="-120"/>
-                <a:cs typeface="Times New Roman" panose="02020603050405020304" pitchFamily="18" charset="0"/>
-              </a:rPr>
-              <a:t>，並提供 </a:t>
-            </a:r>
-            <a:r>
-              <a:rPr lang="en-US" altLang="zh-TW" sz="1600" dirty="0">
-                <a:latin typeface="Times New Roman" panose="02020603050405020304" pitchFamily="18" charset="0"/>
-                <a:ea typeface="標楷體" panose="03000509000000000000" pitchFamily="65" charset="-120"/>
-                <a:cs typeface="Times New Roman" panose="02020603050405020304" pitchFamily="18" charset="0"/>
-              </a:rPr>
-              <a:t>Windows </a:t>
-            </a:r>
-            <a:r>
-              <a:rPr lang="zh-TW" altLang="en-US" sz="1600" dirty="0">
-                <a:latin typeface="Times New Roman" panose="02020603050405020304" pitchFamily="18" charset="0"/>
-                <a:ea typeface="標楷體" panose="03000509000000000000" pitchFamily="65" charset="-120"/>
-                <a:cs typeface="Times New Roman" panose="02020603050405020304" pitchFamily="18" charset="0"/>
-              </a:rPr>
-              <a:t>端影格讀取程式</a:t>
-            </a:r>
-          </a:p>
-          <a:p>
-            <a:pPr>
-              <a:lnSpc>
-                <a:spcPts val="3000"/>
-              </a:lnSpc>
-            </a:pPr>
-            <a:r>
-              <a:rPr lang="zh-TW" altLang="en-US" sz="2000" dirty="0">
-                <a:latin typeface="Times New Roman" panose="02020603050405020304" pitchFamily="18" charset="0"/>
-                <a:ea typeface="標楷體" panose="03000509000000000000" pitchFamily="65" charset="-120"/>
-                <a:cs typeface="Times New Roman" panose="02020603050405020304" pitchFamily="18" charset="0"/>
-              </a:rPr>
-              <a:t>架構</a:t>
-            </a:r>
-            <a:endParaRPr lang="en-US" altLang="zh-TW" sz="2000" dirty="0">
-              <a:latin typeface="Times New Roman" panose="02020603050405020304" pitchFamily="18" charset="0"/>
-              <a:ea typeface="標楷體" panose="03000509000000000000" pitchFamily="65" charset="-120"/>
-              <a:cs typeface="Times New Roman" panose="02020603050405020304" pitchFamily="18" charset="0"/>
-            </a:endParaRPr>
-          </a:p>
-          <a:p>
-            <a:pPr>
-              <a:lnSpc>
-                <a:spcPts val="3000"/>
-              </a:lnSpc>
-            </a:pPr>
-            <a:endParaRPr lang="en-US" altLang="zh-TW" sz="2000" dirty="0">
-              <a:latin typeface="Times New Roman" panose="02020603050405020304" pitchFamily="18" charset="0"/>
-              <a:ea typeface="標楷體" panose="03000509000000000000" pitchFamily="65" charset="-120"/>
-              <a:cs typeface="Times New Roman" panose="02020603050405020304" pitchFamily="18" charset="0"/>
-            </a:endParaRPr>
-          </a:p>
-          <a:p>
-            <a:pPr>
-              <a:lnSpc>
-                <a:spcPts val="3000"/>
-              </a:lnSpc>
-            </a:pPr>
-            <a:endParaRPr lang="en-US" altLang="zh-TW" sz="2000" dirty="0">
-              <a:latin typeface="Times New Roman" panose="02020603050405020304" pitchFamily="18" charset="0"/>
-              <a:ea typeface="標楷體" panose="03000509000000000000" pitchFamily="65" charset="-120"/>
-              <a:cs typeface="Times New Roman" panose="02020603050405020304" pitchFamily="18" charset="0"/>
-            </a:endParaRPr>
-          </a:p>
-          <a:p>
-            <a:pPr>
-              <a:lnSpc>
-                <a:spcPts val="3000"/>
-              </a:lnSpc>
-            </a:pPr>
-            <a:endParaRPr lang="en-US" altLang="zh-TW" sz="2000" dirty="0">
-              <a:latin typeface="Times New Roman" panose="02020603050405020304" pitchFamily="18" charset="0"/>
-              <a:ea typeface="標楷體" panose="03000509000000000000" pitchFamily="65" charset="-120"/>
-              <a:cs typeface="Times New Roman" panose="02020603050405020304" pitchFamily="18" charset="0"/>
-            </a:endParaRPr>
-          </a:p>
-          <a:p>
-            <a:pPr>
-              <a:lnSpc>
-                <a:spcPts val="3000"/>
-              </a:lnSpc>
-            </a:pPr>
-            <a:r>
-              <a:rPr lang="zh-TW" altLang="en-US" sz="2000" dirty="0">
-                <a:latin typeface="Times New Roman" panose="02020603050405020304" pitchFamily="18" charset="0"/>
-                <a:ea typeface="標楷體" panose="03000509000000000000" pitchFamily="65" charset="-120"/>
-                <a:cs typeface="Times New Roman" panose="02020603050405020304" pitchFamily="18" charset="0"/>
-              </a:rPr>
-              <a:t>開發環境與硬體</a:t>
-            </a:r>
-          </a:p>
-          <a:p>
-            <a:pPr lvl="1">
-              <a:lnSpc>
-                <a:spcPts val="3000"/>
-              </a:lnSpc>
-            </a:pPr>
-            <a:r>
-              <a:rPr lang="en-US" altLang="zh-TW" sz="1600" dirty="0">
-                <a:latin typeface="Times New Roman" panose="02020603050405020304" pitchFamily="18" charset="0"/>
-                <a:ea typeface="標楷體" panose="03000509000000000000" pitchFamily="65" charset="-120"/>
-                <a:cs typeface="Times New Roman" panose="02020603050405020304" pitchFamily="18" charset="0"/>
-              </a:rPr>
-              <a:t>FPGA</a:t>
-            </a:r>
-            <a:r>
-              <a:rPr lang="zh-TW" altLang="en-US" sz="1600" dirty="0">
-                <a:latin typeface="Times New Roman" panose="02020603050405020304" pitchFamily="18" charset="0"/>
-                <a:ea typeface="標楷體" panose="03000509000000000000" pitchFamily="65" charset="-120"/>
-                <a:cs typeface="Times New Roman" panose="02020603050405020304" pitchFamily="18" charset="0"/>
-              </a:rPr>
-              <a:t>：</a:t>
-            </a:r>
-            <a:r>
-              <a:rPr lang="en-US" altLang="zh-TW" sz="1600" dirty="0">
-                <a:latin typeface="Times New Roman" panose="02020603050405020304" pitchFamily="18" charset="0"/>
-                <a:ea typeface="標楷體" panose="03000509000000000000" pitchFamily="65" charset="-120"/>
-                <a:cs typeface="Times New Roman" panose="02020603050405020304" pitchFamily="18" charset="0"/>
-              </a:rPr>
-              <a:t>Artix-7 XC7A100T-2FGG484</a:t>
-            </a:r>
-          </a:p>
-          <a:p>
-            <a:pPr lvl="1">
-              <a:lnSpc>
-                <a:spcPts val="3000"/>
-              </a:lnSpc>
-            </a:pPr>
-            <a:r>
-              <a:rPr lang="zh-TW" altLang="en-US" sz="1600" dirty="0">
-                <a:latin typeface="Times New Roman" panose="02020603050405020304" pitchFamily="18" charset="0"/>
-                <a:ea typeface="標楷體" panose="03000509000000000000" pitchFamily="65" charset="-120"/>
-                <a:cs typeface="Times New Roman" panose="02020603050405020304" pitchFamily="18" charset="0"/>
-              </a:rPr>
-              <a:t>工具：</a:t>
-            </a:r>
-            <a:r>
-              <a:rPr lang="en-US" altLang="zh-TW" sz="1600" dirty="0" err="1">
-                <a:latin typeface="Times New Roman" panose="02020603050405020304" pitchFamily="18" charset="0"/>
-                <a:ea typeface="標楷體" panose="03000509000000000000" pitchFamily="65" charset="-120"/>
-                <a:cs typeface="Times New Roman" panose="02020603050405020304" pitchFamily="18" charset="0"/>
-              </a:rPr>
-              <a:t>Vivado</a:t>
-            </a:r>
-            <a:r>
-              <a:rPr lang="en-US" altLang="zh-TW" sz="1600" dirty="0">
-                <a:latin typeface="Times New Roman" panose="02020603050405020304" pitchFamily="18" charset="0"/>
-                <a:ea typeface="標楷體" panose="03000509000000000000" pitchFamily="65" charset="-120"/>
-                <a:cs typeface="Times New Roman" panose="02020603050405020304" pitchFamily="18" charset="0"/>
-              </a:rPr>
-              <a:t> 2017.2</a:t>
-            </a:r>
-          </a:p>
-          <a:p>
-            <a:pPr lvl="1">
-              <a:lnSpc>
-                <a:spcPts val="3000"/>
-              </a:lnSpc>
-            </a:pPr>
-            <a:r>
-              <a:rPr lang="en-US" altLang="zh-TW" sz="1600" dirty="0">
-                <a:latin typeface="Times New Roman" panose="02020603050405020304" pitchFamily="18" charset="0"/>
-                <a:ea typeface="標楷體" panose="03000509000000000000" pitchFamily="65" charset="-120"/>
-                <a:cs typeface="Times New Roman" panose="02020603050405020304" pitchFamily="18" charset="0"/>
-              </a:rPr>
-              <a:t>IP</a:t>
-            </a:r>
-            <a:r>
-              <a:rPr lang="zh-TW" altLang="en-US" sz="1600" dirty="0">
-                <a:latin typeface="Times New Roman" panose="02020603050405020304" pitchFamily="18" charset="0"/>
-                <a:ea typeface="標楷體" panose="03000509000000000000" pitchFamily="65" charset="-120"/>
-                <a:cs typeface="Times New Roman" panose="02020603050405020304" pitchFamily="18" charset="0"/>
-              </a:rPr>
-              <a:t>：</a:t>
-            </a:r>
-            <a:r>
-              <a:rPr lang="en-US" altLang="zh-TW" sz="1600" dirty="0">
-                <a:latin typeface="Times New Roman" panose="02020603050405020304" pitchFamily="18" charset="0"/>
-                <a:ea typeface="標楷體" panose="03000509000000000000" pitchFamily="65" charset="-120"/>
-                <a:cs typeface="Times New Roman" panose="02020603050405020304" pitchFamily="18" charset="0"/>
-              </a:rPr>
-              <a:t>Xilinx XDMA</a:t>
-            </a:r>
-            <a:r>
-              <a:rPr lang="zh-TW" altLang="en-US" sz="1600" dirty="0">
-                <a:latin typeface="Times New Roman" panose="02020603050405020304" pitchFamily="18" charset="0"/>
-                <a:ea typeface="標楷體" panose="03000509000000000000" pitchFamily="65" charset="-120"/>
-                <a:cs typeface="Times New Roman" panose="02020603050405020304" pitchFamily="18" charset="0"/>
-              </a:rPr>
-              <a:t>、</a:t>
-            </a:r>
-            <a:r>
-              <a:rPr lang="en-US" altLang="zh-TW" sz="1600" dirty="0">
-                <a:latin typeface="Times New Roman" panose="02020603050405020304" pitchFamily="18" charset="0"/>
-                <a:ea typeface="標楷體" panose="03000509000000000000" pitchFamily="65" charset="-120"/>
-                <a:cs typeface="Times New Roman" panose="02020603050405020304" pitchFamily="18" charset="0"/>
-              </a:rPr>
-              <a:t>7-Series MIG</a:t>
-            </a:r>
-            <a:r>
-              <a:rPr lang="zh-TW" altLang="en-US" sz="1600" dirty="0">
-                <a:latin typeface="Times New Roman" panose="02020603050405020304" pitchFamily="18" charset="0"/>
-                <a:ea typeface="標楷體" panose="03000509000000000000" pitchFamily="65" charset="-120"/>
-                <a:cs typeface="Times New Roman" panose="02020603050405020304" pitchFamily="18" charset="0"/>
-              </a:rPr>
-              <a:t>、</a:t>
-            </a:r>
-            <a:r>
-              <a:rPr lang="en-US" altLang="zh-TW" sz="1600" dirty="0">
-                <a:latin typeface="Times New Roman" panose="02020603050405020304" pitchFamily="18" charset="0"/>
-                <a:ea typeface="標楷體" panose="03000509000000000000" pitchFamily="65" charset="-120"/>
-                <a:cs typeface="Times New Roman" panose="02020603050405020304" pitchFamily="18" charset="0"/>
-              </a:rPr>
-              <a:t>AXI interconnect</a:t>
-            </a:r>
-            <a:endParaRPr lang="zh-TW" altLang="en-US" sz="1600" dirty="0">
-              <a:latin typeface="Times New Roman" panose="02020603050405020304" pitchFamily="18" charset="0"/>
-              <a:ea typeface="標楷體" panose="03000509000000000000" pitchFamily="65" charset="-120"/>
-              <a:cs typeface="Times New Roman" panose="02020603050405020304" pitchFamily="18" charset="0"/>
-            </a:endParaRPr>
-          </a:p>
-          <a:p>
-            <a:pPr lvl="1">
-              <a:lnSpc>
-                <a:spcPts val="3000"/>
-              </a:lnSpc>
-            </a:pPr>
-            <a:endParaRPr lang="en-US" altLang="zh-TW" sz="1600" dirty="0">
-              <a:solidFill>
-                <a:schemeClr val="tx1"/>
-              </a:solidFill>
-              <a:latin typeface="Times New Roman" panose="02020603050405020304" pitchFamily="18" charset="0"/>
-              <a:ea typeface="標楷體" panose="03000509000000000000" pitchFamily="65" charset="-120"/>
-              <a:cs typeface="Times New Roman" panose="02020603050405020304" pitchFamily="18" charset="0"/>
-            </a:endParaRPr>
-          </a:p>
-        </p:txBody>
-      </p:sp>
-      <p:sp>
-        <p:nvSpPr>
-          <p:cNvPr id="3" name="文字方塊 2">
-            <a:extLst>
-              <a:ext uri="{FF2B5EF4-FFF2-40B4-BE49-F238E27FC236}">
-                <a16:creationId xmlns:a16="http://schemas.microsoft.com/office/drawing/2014/main" id="{B17A7646-77F3-2568-68C1-545F7C189BE6}"/>
-              </a:ext>
-            </a:extLst>
-          </p:cNvPr>
-          <p:cNvSpPr txBox="1"/>
-          <p:nvPr/>
-        </p:nvSpPr>
-        <p:spPr>
-          <a:xfrm>
-            <a:off x="1787236" y="6384072"/>
-            <a:ext cx="5802283" cy="276999"/>
-          </a:xfrm>
-          <a:prstGeom prst="rect">
-            <a:avLst/>
-          </a:prstGeom>
-          <a:noFill/>
-        </p:spPr>
-        <p:txBody>
-          <a:bodyPr wrap="square">
-            <a:spAutoFit/>
-          </a:bodyPr>
-          <a:lstStyle/>
-          <a:p>
-            <a:r>
-              <a:rPr lang="en-US" altLang="zh-TW" sz="1200" dirty="0">
-                <a:latin typeface="Times New Roman" panose="02020603050405020304" pitchFamily="18" charset="0"/>
-                <a:ea typeface="標楷體" panose="03000509000000000000" pitchFamily="65" charset="-120"/>
-                <a:cs typeface="Times New Roman" panose="02020603050405020304" pitchFamily="18" charset="0"/>
-              </a:rPr>
-              <a:t>[4] https://github.com/alinxalinx/AX7103</a:t>
-            </a:r>
-            <a:endParaRPr lang="zh-TW" altLang="en-US" sz="1200" dirty="0">
-              <a:latin typeface="Times New Roman" panose="02020603050405020304" pitchFamily="18" charset="0"/>
-              <a:ea typeface="標楷體" panose="03000509000000000000" pitchFamily="65" charset="-120"/>
-              <a:cs typeface="Times New Roman" panose="02020603050405020304" pitchFamily="18" charset="0"/>
-            </a:endParaRPr>
-          </a:p>
-        </p:txBody>
-      </p:sp>
-      <p:pic>
-        <p:nvPicPr>
-          <p:cNvPr id="5" name="圖片 4">
-            <a:extLst>
-              <a:ext uri="{FF2B5EF4-FFF2-40B4-BE49-F238E27FC236}">
-                <a16:creationId xmlns:a16="http://schemas.microsoft.com/office/drawing/2014/main" id="{58EBB8F2-B13C-7F8E-D58E-480C51DE9882}"/>
-              </a:ext>
-            </a:extLst>
-          </p:cNvPr>
-          <p:cNvPicPr>
-            <a:picLocks noChangeAspect="1"/>
-          </p:cNvPicPr>
-          <p:nvPr/>
-        </p:nvPicPr>
-        <p:blipFill>
-          <a:blip r:embed="rId3"/>
-          <a:stretch>
-            <a:fillRect/>
-          </a:stretch>
-        </p:blipFill>
-        <p:spPr>
-          <a:xfrm>
-            <a:off x="730469" y="2584935"/>
-            <a:ext cx="8445062" cy="1030896"/>
-          </a:xfrm>
-          <a:prstGeom prst="rect">
-            <a:avLst/>
-          </a:prstGeom>
-        </p:spPr>
-      </p:pic>
-    </p:spTree>
-    <p:extLst>
-      <p:ext uri="{BB962C8B-B14F-4D97-AF65-F5344CB8AC3E}">
-        <p14:creationId xmlns:p14="http://schemas.microsoft.com/office/powerpoint/2010/main" val="1861097472"/>
-      </p:ext>
-    </p:extLst>
   </p:cSld>
   <p:clrMapOvr>
     <a:masterClrMapping/>
@@ -14661,7 +14479,7 @@
                 <a:ea typeface="標楷體" panose="03000509000000000000" pitchFamily="65" charset="-120"/>
                 <a:cs typeface="Times New Roman" panose="02020603050405020304" pitchFamily="18" charset="0"/>
               </a:rPr>
-              <a:t>、開發板、框架與 </a:t>
+              <a:t>、開發板、架構與 </a:t>
             </a:r>
             <a:r>
               <a:rPr lang="en-US" altLang="zh-TW" sz="1600" dirty="0">
@@ -14690,7 +14508,7 @@
                 <a:ea typeface="標楷體" panose="03000509000000000000" pitchFamily="65" charset="-120"/>
                 <a:cs typeface="Times New Roman" panose="02020603050405020304" pitchFamily="18" charset="0"/>
               </a:rPr>
-              <a:t>比較不同開源生態，作為後續技術選型的依據</a:t>
+              <a:t>比較不同開源專案，作為後續技術選型的依據</a:t>
             </a:r>
             <a:endParaRPr lang="en-US" altLang="zh-TW" sz="1600" dirty="0">
               <a:solidFill>
@@ -15748,10 +15566,10 @@
       </p:sp>
       <p:pic>
         <p:nvPicPr>
-          <p:cNvPr id="17" name="圖片 16">
+          <p:cNvPr id="9" name="圖片 8">
             <a:extLst>
               <a:ext uri="{FF2B5EF4-FFF2-40B4-BE49-F238E27FC236}">
-                <a16:creationId xmlns:a16="http://schemas.microsoft.com/office/drawing/2014/main" id="{5B7A07D7-CDAD-33A8-75F3-807976AADEA8}"/>
+                <a16:creationId xmlns:a16="http://schemas.microsoft.com/office/drawing/2014/main" id="{58A7EEA3-7044-E8E1-71E3-49401B0B6FB9}"/>
               </a:ext>
             </a:extLst>
           </p:cNvPr>
@@ -15768,8 +15586,8 @@
         </p:blipFill>
         <p:spPr>
           <a:xfrm>
-            <a:off x="1210003" y="2946227"/>
-            <a:ext cx="7485993" cy="957511"/>
+            <a:off x="437137" y="2923907"/>
+            <a:ext cx="9153646" cy="1010186"/>
           </a:xfrm>
           <a:prstGeom prst="rect">
             <a:avLst/>
@@ -17240,21 +17058,6 @@
               <a:cs typeface="Times New Roman" panose="02020603050405020304" pitchFamily="18" charset="0"/>
             </a:endParaRPr>
           </a:p>
-          <a:p>
-            <a:pPr>
-              <a:lnSpc>
-                <a:spcPts val="3000"/>
-              </a:lnSpc>
-            </a:pPr>
-            <a:r>
-              <a:rPr lang="zh-TW" altLang="en-US" sz="2000" dirty="0">
-                <a:latin typeface="Times New Roman" panose="02020603050405020304" pitchFamily="18" charset="0"/>
-                <a:ea typeface="標楷體" panose="03000509000000000000" pitchFamily="65" charset="-120"/>
-                <a:cs typeface="Times New Roman" panose="02020603050405020304" pitchFamily="18" charset="0"/>
-              </a:rPr>
-              <a:t>流程</a:t>
-            </a:r>
-          </a:p>
         </p:txBody>
       </p:sp>
       <p:sp>
@@ -17367,7 +17170,7 @@
           <a:bodyPr/>
           <a:lstStyle/>
           <a:p>
-            <a:pPr algn="l" fontAlgn="t"/>
+            <a:pPr fontAlgn="t"/>
             <a:r>
               <a:rPr lang="zh-TW" altLang="en-US" dirty="0">
                 <a:latin typeface="Times New Roman" panose="02020603050405020304" pitchFamily="18" charset="0"/>
@@ -17382,7 +17185,39 @@
                 <a:ea typeface="標楷體" panose="03000509000000000000" pitchFamily="65" charset="-120"/>
                 <a:cs typeface="Times New Roman" panose="02020603050405020304" pitchFamily="18" charset="0"/>
               </a:rPr>
-              <a:t>: Xilinx-FPGA-PCIe-XDMA-Tutorial</a:t>
+              <a:t>: Video</a:t>
+            </a:r>
+            <a:r>
+              <a:rPr lang="zh-TW" altLang="en-US" dirty="0">
+                <a:latin typeface="Times New Roman" panose="02020603050405020304" pitchFamily="18" charset="0"/>
+                <a:ea typeface="標楷體" panose="03000509000000000000" pitchFamily="65" charset="-120"/>
+                <a:cs typeface="Times New Roman" panose="02020603050405020304" pitchFamily="18" charset="0"/>
+              </a:rPr>
+              <a:t> </a:t>
+            </a:r>
+            <a:r>
+              <a:rPr lang="en-US" altLang="zh-TW" dirty="0">
+                <a:latin typeface="Times New Roman" panose="02020603050405020304" pitchFamily="18" charset="0"/>
+                <a:ea typeface="標楷體" panose="03000509000000000000" pitchFamily="65" charset="-120"/>
+                <a:cs typeface="Times New Roman" panose="02020603050405020304" pitchFamily="18" charset="0"/>
+              </a:rPr>
+              <a:t>Example</a:t>
+            </a:r>
+            <a:r>
+              <a:rPr lang="zh-TW" altLang="en-US" dirty="0">
+                <a:latin typeface="Times New Roman" panose="02020603050405020304" pitchFamily="18" charset="0"/>
+                <a:ea typeface="標楷體" panose="03000509000000000000" pitchFamily="65" charset="-120"/>
+                <a:cs typeface="Times New Roman" panose="02020603050405020304" pitchFamily="18" charset="0"/>
+              </a:rPr>
+              <a:t> </a:t>
+            </a:r>
+            <a:r>
+              <a:rPr lang="en-US" altLang="zh-TW" dirty="0">
+                <a:latin typeface="Times New Roman" panose="02020603050405020304" pitchFamily="18" charset="0"/>
+                <a:ea typeface="標楷體" panose="03000509000000000000" pitchFamily="65" charset="-120"/>
+                <a:cs typeface="Times New Roman" panose="02020603050405020304" pitchFamily="18" charset="0"/>
+              </a:rPr>
+              <a:t>Designs</a:t>
             </a:r>
             <a:endParaRPr lang="zh-TW" altLang="en-US" dirty="0">
               <a:latin typeface="Times New Roman" panose="02020603050405020304" pitchFamily="18" charset="0"/>
@@ -17695,83 +17530,46 @@
             </a:endParaRPr>
           </a:p>
           <a:p>
-            <a:pPr lvl="1">
+            <a:pPr lvl="1"/>
+            <a:r>
+              <a:rPr lang="zh-TW" altLang="zh-TW" sz="1600" dirty="0">
+                <a:latin typeface="Times New Roman" panose="02020603050405020304" pitchFamily="18" charset="0"/>
+                <a:ea typeface="標楷體" panose="03000509000000000000" pitchFamily="65" charset="-120"/>
+                <a:cs typeface="Times New Roman" panose="02020603050405020304" pitchFamily="18" charset="0"/>
+              </a:rPr>
+              <a:t>整合 HDMI 接收、FPGA 影像處理、多圖層合成及 HDMI 輸出</a:t>
+            </a:r>
+            <a:endParaRPr lang="en-US" altLang="zh-TW" sz="1600" dirty="0">
+              <a:latin typeface="Times New Roman" panose="02020603050405020304" pitchFamily="18" charset="0"/>
+              <a:ea typeface="標楷體" panose="03000509000000000000" pitchFamily="65" charset="-120"/>
+              <a:cs typeface="Times New Roman" panose="02020603050405020304" pitchFamily="18" charset="0"/>
+            </a:endParaRPr>
+          </a:p>
+          <a:p>
+            <a:pPr>
               <a:lnSpc>
                 <a:spcPts val="3000"/>
               </a:lnSpc>
             </a:pPr>
             <a:r>
-              <a:rPr lang="zh-TW" altLang="en-US" sz="1600" dirty="0">
-                <a:latin typeface="Times New Roman" panose="02020603050405020304" pitchFamily="18" charset="0"/>
-                <a:ea typeface="標楷體" panose="03000509000000000000" pitchFamily="65" charset="-120"/>
-                <a:cs typeface="Times New Roman" panose="02020603050405020304" pitchFamily="18" charset="0"/>
-              </a:rPr>
-              <a:t>整合 </a:t>
-            </a:r>
-            <a:r>
-              <a:rPr lang="en-US" altLang="zh-TW" sz="1600" dirty="0">
-                <a:latin typeface="Times New Roman" panose="02020603050405020304" pitchFamily="18" charset="0"/>
-                <a:ea typeface="標楷體" panose="03000509000000000000" pitchFamily="65" charset="-120"/>
-                <a:cs typeface="Times New Roman" panose="02020603050405020304" pitchFamily="18" charset="0"/>
-              </a:rPr>
-              <a:t>HDMI </a:t>
-            </a:r>
-            <a:r>
-              <a:rPr lang="zh-TW" altLang="en-US" sz="1600" dirty="0">
-                <a:latin typeface="Times New Roman" panose="02020603050405020304" pitchFamily="18" charset="0"/>
-                <a:ea typeface="標楷體" panose="03000509000000000000" pitchFamily="65" charset="-120"/>
-                <a:cs typeface="Times New Roman" panose="02020603050405020304" pitchFamily="18" charset="0"/>
-              </a:rPr>
-              <a:t>影像處理、</a:t>
-            </a:r>
-            <a:r>
-              <a:rPr lang="en-US" altLang="zh-TW" sz="1600" dirty="0">
-                <a:latin typeface="Times New Roman" panose="02020603050405020304" pitchFamily="18" charset="0"/>
-                <a:ea typeface="標楷體" panose="03000509000000000000" pitchFamily="65" charset="-120"/>
-                <a:cs typeface="Times New Roman" panose="02020603050405020304" pitchFamily="18" charset="0"/>
-              </a:rPr>
-              <a:t>DDR3 </a:t>
-            </a:r>
-            <a:r>
-              <a:rPr lang="zh-TW" altLang="en-US" sz="1600" dirty="0">
-                <a:latin typeface="Times New Roman" panose="02020603050405020304" pitchFamily="18" charset="0"/>
-                <a:ea typeface="標楷體" panose="03000509000000000000" pitchFamily="65" charset="-120"/>
-                <a:cs typeface="Times New Roman" panose="02020603050405020304" pitchFamily="18" charset="0"/>
-              </a:rPr>
-              <a:t>影格緩衝與 </a:t>
-            </a:r>
-            <a:r>
-              <a:rPr lang="en-US" altLang="zh-TW" sz="1600" dirty="0">
-                <a:latin typeface="Times New Roman" panose="02020603050405020304" pitchFamily="18" charset="0"/>
-                <a:ea typeface="標楷體" panose="03000509000000000000" pitchFamily="65" charset="-120"/>
-                <a:cs typeface="Times New Roman" panose="02020603050405020304" pitchFamily="18" charset="0"/>
-              </a:rPr>
-              <a:t>PCIe</a:t>
-            </a:r>
-            <a:r>
-              <a:rPr lang="zh-TW" altLang="en-US" sz="1600" dirty="0">
-                <a:latin typeface="Times New Roman" panose="02020603050405020304" pitchFamily="18" charset="0"/>
-                <a:ea typeface="標楷體" panose="03000509000000000000" pitchFamily="65" charset="-120"/>
-                <a:cs typeface="Times New Roman" panose="02020603050405020304" pitchFamily="18" charset="0"/>
-              </a:rPr>
-              <a:t>，並提供 </a:t>
-            </a:r>
-            <a:r>
-              <a:rPr lang="en-US" altLang="zh-TW" sz="1600" dirty="0">
-                <a:latin typeface="Times New Roman" panose="02020603050405020304" pitchFamily="18" charset="0"/>
-                <a:ea typeface="標楷體" panose="03000509000000000000" pitchFamily="65" charset="-120"/>
-                <a:cs typeface="Times New Roman" panose="02020603050405020304" pitchFamily="18" charset="0"/>
-              </a:rPr>
-              <a:t>Windows </a:t>
-            </a:r>
-            <a:r>
-              <a:rPr lang="zh-TW" altLang="en-US" sz="1600" dirty="0">
-                <a:latin typeface="Times New Roman" panose="02020603050405020304" pitchFamily="18" charset="0"/>
-                <a:ea typeface="標楷體" panose="03000509000000000000" pitchFamily="65" charset="-120"/>
-                <a:cs typeface="Times New Roman" panose="02020603050405020304" pitchFamily="18" charset="0"/>
-              </a:rPr>
-              <a:t>端影格讀取程式</a:t>
-            </a:r>
+              <a:rPr lang="zh-TW" altLang="en-US" sz="2000" dirty="0">
+                <a:solidFill>
+                  <a:schemeClr val="tx1"/>
+                </a:solidFill>
+                <a:latin typeface="Times New Roman" panose="02020603050405020304" pitchFamily="18" charset="0"/>
+                <a:ea typeface="標楷體" panose="03000509000000000000" pitchFamily="65" charset="-120"/>
+                <a:cs typeface="Times New Roman" panose="02020603050405020304" pitchFamily="18" charset="0"/>
+              </a:rPr>
+              <a:t>架構</a:t>
+            </a:r>
+            <a:endParaRPr lang="en-US" altLang="zh-TW" sz="2000" dirty="0">
+              <a:solidFill>
+                <a:schemeClr val="tx1"/>
+              </a:solidFill>
+              <a:latin typeface="Times New Roman" panose="02020603050405020304" pitchFamily="18" charset="0"/>
+              <a:ea typeface="標楷體" panose="03000509000000000000" pitchFamily="65" charset="-120"/>
+              <a:cs typeface="Times New Roman" panose="02020603050405020304" pitchFamily="18" charset="0"/>
+            </a:endParaRPr>
           </a:p>
           <a:p>
             <a:pPr lvl="1">
@@ -17780,9 +17578,147 @@
               </a:lnSpc>
             </a:pPr>
             <a:endParaRPr lang="en-US" altLang="zh-TW" sz="1600" dirty="0">
-              <a:solidFill>
-                <a:schemeClr val="tx1"/>
-              </a:solidFill>
+              <a:latin typeface="Times New Roman" panose="02020603050405020304" pitchFamily="18" charset="0"/>
+              <a:ea typeface="標楷體" panose="03000509000000000000" pitchFamily="65" charset="-120"/>
+              <a:cs typeface="Times New Roman" panose="02020603050405020304" pitchFamily="18" charset="0"/>
+            </a:endParaRPr>
+          </a:p>
+          <a:p>
+            <a:pPr lvl="1">
+              <a:lnSpc>
+                <a:spcPts val="3000"/>
+              </a:lnSpc>
+            </a:pPr>
+            <a:endParaRPr lang="en-US" altLang="zh-TW" sz="1600" dirty="0">
+              <a:latin typeface="Times New Roman" panose="02020603050405020304" pitchFamily="18" charset="0"/>
+              <a:ea typeface="標楷體" panose="03000509000000000000" pitchFamily="65" charset="-120"/>
+              <a:cs typeface="Times New Roman" panose="02020603050405020304" pitchFamily="18" charset="0"/>
+            </a:endParaRPr>
+          </a:p>
+          <a:p>
+            <a:endParaRPr lang="en-US" altLang="zh-TW" sz="2000" dirty="0">
+              <a:latin typeface="Times New Roman" panose="02020603050405020304" pitchFamily="18" charset="0"/>
+              <a:ea typeface="標楷體" panose="03000509000000000000" pitchFamily="65" charset="-120"/>
+              <a:cs typeface="Times New Roman" panose="02020603050405020304" pitchFamily="18" charset="0"/>
+            </a:endParaRPr>
+          </a:p>
+          <a:p>
+            <a:endParaRPr lang="en-US" altLang="zh-TW" sz="2000" dirty="0">
+              <a:latin typeface="Times New Roman" panose="02020603050405020304" pitchFamily="18" charset="0"/>
+              <a:ea typeface="標楷體" panose="03000509000000000000" pitchFamily="65" charset="-120"/>
+              <a:cs typeface="Times New Roman" panose="02020603050405020304" pitchFamily="18" charset="0"/>
+            </a:endParaRPr>
+          </a:p>
+          <a:p>
+            <a:r>
+              <a:rPr lang="zh-TW" altLang="zh-TW" sz="2000" dirty="0">
+                <a:latin typeface="Times New Roman" panose="02020603050405020304" pitchFamily="18" charset="0"/>
+                <a:ea typeface="標楷體" panose="03000509000000000000" pitchFamily="65" charset="-120"/>
+                <a:cs typeface="Times New Roman" panose="02020603050405020304" pitchFamily="18" charset="0"/>
+              </a:rPr>
+              <a:t>硬體與開發環境</a:t>
+            </a:r>
+            <a:endParaRPr lang="en-US" altLang="zh-TW" sz="2000" dirty="0">
+              <a:latin typeface="Times New Roman" panose="02020603050405020304" pitchFamily="18" charset="0"/>
+              <a:ea typeface="標楷體" panose="03000509000000000000" pitchFamily="65" charset="-120"/>
+              <a:cs typeface="Times New Roman" panose="02020603050405020304" pitchFamily="18" charset="0"/>
+            </a:endParaRPr>
+          </a:p>
+          <a:p>
+            <a:pPr lvl="1">
+              <a:lnSpc>
+                <a:spcPts val="3000"/>
+              </a:lnSpc>
+            </a:pPr>
+            <a:r>
+              <a:rPr lang="zh-TW" altLang="en-US" sz="1600" dirty="0">
+                <a:latin typeface="Times New Roman" panose="02020603050405020304" pitchFamily="18" charset="0"/>
+                <a:ea typeface="標楷體" panose="03000509000000000000" pitchFamily="65" charset="-120"/>
+                <a:cs typeface="Times New Roman" panose="02020603050405020304" pitchFamily="18" charset="0"/>
+              </a:rPr>
+              <a:t>開發版：</a:t>
+            </a:r>
+            <a:r>
+              <a:rPr lang="zh-TW" altLang="zh-TW" sz="1600" dirty="0">
+                <a:latin typeface="Times New Roman" panose="02020603050405020304" pitchFamily="18" charset="0"/>
+                <a:ea typeface="標楷體" panose="03000509000000000000" pitchFamily="65" charset="-120"/>
+                <a:cs typeface="Times New Roman" panose="02020603050405020304" pitchFamily="18" charset="0"/>
+              </a:rPr>
+              <a:t>AMD Xilinx ZCU106</a:t>
+            </a:r>
+            <a:endParaRPr lang="en-US" altLang="zh-TW" sz="1600" dirty="0">
+              <a:latin typeface="Times New Roman" panose="02020603050405020304" pitchFamily="18" charset="0"/>
+              <a:ea typeface="標楷體" panose="03000509000000000000" pitchFamily="65" charset="-120"/>
+              <a:cs typeface="Times New Roman" panose="02020603050405020304" pitchFamily="18" charset="0"/>
+            </a:endParaRPr>
+          </a:p>
+          <a:p>
+            <a:pPr lvl="1">
+              <a:lnSpc>
+                <a:spcPts val="3000"/>
+              </a:lnSpc>
+            </a:pPr>
+            <a:r>
+              <a:rPr lang="zh-TW" altLang="zh-TW" sz="1600" dirty="0">
+                <a:latin typeface="Times New Roman" panose="02020603050405020304" pitchFamily="18" charset="0"/>
+                <a:ea typeface="標楷體" panose="03000509000000000000" pitchFamily="65" charset="-120"/>
+                <a:cs typeface="Times New Roman" panose="02020603050405020304" pitchFamily="18" charset="0"/>
+              </a:rPr>
+              <a:t>HDMI 擴充板</a:t>
+            </a:r>
+            <a:r>
+              <a:rPr lang="zh-TW" altLang="en-US" sz="1600" dirty="0">
+                <a:latin typeface="Times New Roman" panose="02020603050405020304" pitchFamily="18" charset="0"/>
+                <a:ea typeface="標楷體" panose="03000509000000000000" pitchFamily="65" charset="-120"/>
+                <a:cs typeface="Times New Roman" panose="02020603050405020304" pitchFamily="18" charset="0"/>
+              </a:rPr>
+              <a:t>：</a:t>
+            </a:r>
+            <a:r>
+              <a:rPr lang="zh-TW" altLang="zh-TW" sz="1600" dirty="0">
+                <a:latin typeface="Times New Roman" panose="02020603050405020304" pitchFamily="18" charset="0"/>
+                <a:ea typeface="標楷體" panose="03000509000000000000" pitchFamily="65" charset="-120"/>
+                <a:cs typeface="Times New Roman" panose="02020603050405020304" pitchFamily="18" charset="0"/>
+              </a:rPr>
+              <a:t>TB-FMCH-VFMC-HDMI</a:t>
+            </a:r>
+            <a:endParaRPr lang="en-US" altLang="zh-TW" sz="1600" dirty="0">
+              <a:latin typeface="Times New Roman" panose="02020603050405020304" pitchFamily="18" charset="0"/>
+              <a:ea typeface="標楷體" panose="03000509000000000000" pitchFamily="65" charset="-120"/>
+              <a:cs typeface="Times New Roman" panose="02020603050405020304" pitchFamily="18" charset="0"/>
+            </a:endParaRPr>
+          </a:p>
+          <a:p>
+            <a:pPr lvl="1">
+              <a:lnSpc>
+                <a:spcPts val="3000"/>
+              </a:lnSpc>
+            </a:pPr>
+            <a:r>
+              <a:rPr lang="zh-TW" altLang="zh-TW" sz="1600" dirty="0">
+                <a:latin typeface="Times New Roman" panose="02020603050405020304" pitchFamily="18" charset="0"/>
+                <a:ea typeface="標楷體" panose="03000509000000000000" pitchFamily="65" charset="-120"/>
+                <a:cs typeface="Times New Roman" panose="02020603050405020304" pitchFamily="18" charset="0"/>
+              </a:rPr>
+              <a:t>控制軟體</a:t>
+            </a:r>
+            <a:r>
+              <a:rPr lang="zh-TW" altLang="en-US" sz="1600" dirty="0">
+                <a:latin typeface="Times New Roman" panose="02020603050405020304" pitchFamily="18" charset="0"/>
+                <a:ea typeface="標楷體" panose="03000509000000000000" pitchFamily="65" charset="-120"/>
+                <a:cs typeface="Times New Roman" panose="02020603050405020304" pitchFamily="18" charset="0"/>
+              </a:rPr>
+              <a:t>：</a:t>
+            </a:r>
+            <a:r>
+              <a:rPr lang="zh-TW" altLang="zh-TW" sz="1600" dirty="0">
+                <a:latin typeface="Times New Roman" panose="02020603050405020304" pitchFamily="18" charset="0"/>
+                <a:ea typeface="標楷體" panose="03000509000000000000" pitchFamily="65" charset="-120"/>
+                <a:cs typeface="Times New Roman" panose="02020603050405020304" pitchFamily="18" charset="0"/>
+              </a:rPr>
+              <a:t>Vitis C 程式，使用 ARM A53 處理系統控制 IP</a:t>
+            </a:r>
+            <a:endParaRPr lang="en-US" altLang="zh-TW" sz="1600" dirty="0">
               <a:latin typeface="Times New Roman" panose="02020603050405020304" pitchFamily="18" charset="0"/>
               <a:ea typeface="標楷體" panose="03000509000000000000" pitchFamily="65" charset="-120"/>
               <a:cs typeface="Times New Roman" panose="02020603050405020304" pitchFamily="18" charset="0"/>
@@ -17824,7 +17760,7 @@
                 <a:ea typeface="標楷體" panose="03000509000000000000" pitchFamily="65" charset="-120"/>
                 <a:cs typeface="Times New Roman" panose="02020603050405020304" pitchFamily="18" charset="0"/>
               </a:rPr>
-              <a:t>[4] https://github.com/WangXuan95/Xilinx-FPGA-PCIe-XDMA-Tutorial</a:t>
+              <a:t>[4] https://github.com/Xilinx-Wiki-Projects/Video-Example-Designs</a:t>
             </a:r>
             <a:endParaRPr lang="zh-TW" altLang="en-US" sz="1200" dirty="0">
               <a:latin typeface="Times New Roman" panose="02020603050405020304" pitchFamily="18" charset="0"/>
@@ -17834,6 +17770,132 @@
           </a:p>
         </p:txBody>
       </p:sp>
+      <p:grpSp>
+        <p:nvGrpSpPr>
+          <p:cNvPr id="12" name="群組 11">
+            <a:extLst>
+              <a:ext uri="{FF2B5EF4-FFF2-40B4-BE49-F238E27FC236}">
+                <a16:creationId xmlns:a16="http://schemas.microsoft.com/office/drawing/2014/main" id="{390F4142-C3C7-F585-A6E2-6A7697650EF6}"/>
+              </a:ext>
+            </a:extLst>
+          </p:cNvPr>
+          <p:cNvGrpSpPr/>
+          <p:nvPr/>
+        </p:nvGrpSpPr>
+        <p:grpSpPr>
+          <a:xfrm>
+            <a:off x="7170646" y="4116268"/>
+            <a:ext cx="2125752" cy="1894039"/>
+            <a:chOff x="6986296" y="3782285"/>
+            <a:chExt cx="2310101" cy="2058293"/>
+          </a:xfrm>
+        </p:grpSpPr>
+        <p:pic>
+          <p:nvPicPr>
+            <p:cNvPr id="9" name="圖片 8">
+              <a:extLst>
+                <a:ext uri="{FF2B5EF4-FFF2-40B4-BE49-F238E27FC236}">
+                  <a16:creationId xmlns:a16="http://schemas.microsoft.com/office/drawing/2014/main" id="{8F238F56-B6CF-6D88-8B04-5ED6E671C57A}"/>
+                </a:ext>
+              </a:extLst>
+            </p:cNvPr>
+            <p:cNvPicPr>
+              <a:picLocks noChangeAspect="1"/>
+            </p:cNvPicPr>
+            <p:nvPr/>
+          </p:nvPicPr>
+          <p:blipFill>
+            <a:blip r:embed="rId3"/>
+            <a:stretch>
+              <a:fillRect/>
+            </a:stretch>
+          </p:blipFill>
+          <p:spPr>
+            <a:xfrm>
+              <a:off x="6986296" y="3782285"/>
+              <a:ext cx="2310101" cy="1722787"/>
+            </a:xfrm>
+            <a:prstGeom prst="rect">
+              <a:avLst/>
+            </a:prstGeom>
+          </p:spPr>
+        </p:pic>
+        <p:sp>
+          <p:nvSpPr>
+            <p:cNvPr id="11" name="文字方塊 10">
+              <a:extLst>
+                <a:ext uri="{FF2B5EF4-FFF2-40B4-BE49-F238E27FC236}">
+                  <a16:creationId xmlns:a16="http://schemas.microsoft.com/office/drawing/2014/main" id="{40F7D8C0-1202-F756-2DCE-B5919BFE4893}"/>
+                </a:ext>
+              </a:extLst>
+            </p:cNvPr>
+            <p:cNvSpPr txBox="1"/>
+            <p:nvPr/>
+          </p:nvSpPr>
+          <p:spPr>
+            <a:xfrm>
+              <a:off x="7212168" y="5506110"/>
+              <a:ext cx="1951555" cy="334468"/>
+            </a:xfrm>
+            <a:prstGeom prst="rect">
+              <a:avLst/>
+            </a:prstGeom>
+            <a:noFill/>
+          </p:spPr>
+          <p:txBody>
+            <a:bodyPr wrap="square">
+              <a:spAutoFit/>
+            </a:bodyPr>
+            <a:lstStyle/>
+            <a:p>
+              <a:pPr lvl="1"/>
+              <a:r>
+                <a:rPr lang="zh-TW" altLang="zh-TW" dirty="0">
+                  <a:latin typeface="Times New Roman" panose="02020603050405020304" pitchFamily="18" charset="0"/>
+                  <a:ea typeface="標楷體" panose="03000509000000000000" pitchFamily="65" charset="-120"/>
+                  <a:cs typeface="Times New Roman" panose="02020603050405020304" pitchFamily="18" charset="0"/>
+                </a:rPr>
+                <a:t>AMD Xilinx ZCU106</a:t>
+              </a:r>
+              <a:endParaRPr lang="en-US" altLang="zh-TW" dirty="0">
+                <a:latin typeface="Times New Roman" panose="02020603050405020304" pitchFamily="18" charset="0"/>
+                <a:ea typeface="標楷體" panose="03000509000000000000" pitchFamily="65" charset="-120"/>
+                <a:cs typeface="Times New Roman" panose="02020603050405020304" pitchFamily="18" charset="0"/>
+              </a:endParaRPr>
+            </a:p>
+          </p:txBody>
+        </p:sp>
+      </p:grpSp>
+      <p:pic>
+        <p:nvPicPr>
+          <p:cNvPr id="5" name="圖片 4">
+            <a:extLst>
+              <a:ext uri="{FF2B5EF4-FFF2-40B4-BE49-F238E27FC236}">
+                <a16:creationId xmlns:a16="http://schemas.microsoft.com/office/drawing/2014/main" id="{57736BDE-0E79-19BB-61BE-3993A547929D}"/>
+              </a:ext>
+            </a:extLst>
+          </p:cNvPr>
+          <p:cNvPicPr>
+            <a:picLocks noChangeAspect="1"/>
+          </p:cNvPicPr>
+          <p:nvPr/>
+        </p:nvPicPr>
+        <p:blipFill>
+          <a:blip r:embed="rId4"/>
+          <a:stretch>
+            <a:fillRect/>
+          </a:stretch>
+        </p:blipFill>
+        <p:spPr>
+          <a:xfrm>
+            <a:off x="428263" y="2481680"/>
+            <a:ext cx="9049473" cy="980973"/>
+          </a:xfrm>
+          <a:prstGeom prst="rect">
+            <a:avLst/>
+          </a:prstGeom>
+        </p:spPr>
+      </p:pic>
     </p:spTree>
     <p:extLst>
       <p:ext uri="{BB962C8B-B14F-4D97-AF65-F5344CB8AC3E}">
@@ -17899,7 +17961,7 @@
           <a:bodyPr/>
           <a:lstStyle/>
           <a:p>
-            <a:pPr algn="l" fontAlgn="t"/>
+            <a:pPr fontAlgn="t"/>
             <a:r>
               <a:rPr lang="zh-TW" altLang="en-US" dirty="0">
                 <a:latin typeface="Times New Roman" panose="02020603050405020304" pitchFamily="18" charset="0"/>
@@ -17914,7 +17976,39 @@
                 <a:ea typeface="標楷體" panose="03000509000000000000" pitchFamily="65" charset="-120"/>
                 <a:cs typeface="Times New Roman" panose="02020603050405020304" pitchFamily="18" charset="0"/>
               </a:rPr>
-              <a:t>: Artix-7-HDMI-processing</a:t>
+              <a:t>: DMA</a:t>
+            </a:r>
+            <a:r>
+              <a:rPr lang="zh-TW" altLang="en-US" dirty="0">
+                <a:latin typeface="Times New Roman" panose="02020603050405020304" pitchFamily="18" charset="0"/>
+                <a:ea typeface="標楷體" panose="03000509000000000000" pitchFamily="65" charset="-120"/>
+                <a:cs typeface="Times New Roman" panose="02020603050405020304" pitchFamily="18" charset="0"/>
+              </a:rPr>
+              <a:t> </a:t>
+            </a:r>
+            <a:r>
+              <a:rPr lang="en-US" altLang="zh-TW" dirty="0">
+                <a:latin typeface="Times New Roman" panose="02020603050405020304" pitchFamily="18" charset="0"/>
+                <a:ea typeface="標楷體" panose="03000509000000000000" pitchFamily="65" charset="-120"/>
+                <a:cs typeface="Times New Roman" panose="02020603050405020304" pitchFamily="18" charset="0"/>
+              </a:rPr>
+              <a:t>IP</a:t>
+            </a:r>
+            <a:r>
+              <a:rPr lang="zh-TW" altLang="en-US" dirty="0">
+                <a:latin typeface="Times New Roman" panose="02020603050405020304" pitchFamily="18" charset="0"/>
+                <a:ea typeface="標楷體" panose="03000509000000000000" pitchFamily="65" charset="-120"/>
+                <a:cs typeface="Times New Roman" panose="02020603050405020304" pitchFamily="18" charset="0"/>
+              </a:rPr>
+              <a:t> </a:t>
+            </a:r>
+            <a:r>
+              <a:rPr lang="en-US" altLang="zh-TW" dirty="0">
+                <a:latin typeface="Times New Roman" panose="02020603050405020304" pitchFamily="18" charset="0"/>
+                <a:ea typeface="標楷體" panose="03000509000000000000" pitchFamily="65" charset="-120"/>
+                <a:cs typeface="Times New Roman" panose="02020603050405020304" pitchFamily="18" charset="0"/>
+              </a:rPr>
+              <a:t>Drivers</a:t>
             </a:r>
             <a:endParaRPr lang="zh-TW" altLang="en-US" dirty="0">
               <a:latin typeface="Times New Roman" panose="02020603050405020304" pitchFamily="18" charset="0"/>
@@ -18238,71 +18332,7 @@
                 <a:ea typeface="標楷體" panose="03000509000000000000" pitchFamily="65" charset="-120"/>
                 <a:cs typeface="Times New Roman" panose="02020603050405020304" pitchFamily="18" charset="0"/>
               </a:rPr>
-              <a:t>整合 </a:t>
-            </a:r>
-            <a:r>
-              <a:rPr lang="en-US" altLang="zh-TW" sz="1600" dirty="0">
-                <a:latin typeface="Times New Roman" panose="02020603050405020304" pitchFamily="18" charset="0"/>
-                <a:ea typeface="標楷體" panose="03000509000000000000" pitchFamily="65" charset="-120"/>
-                <a:cs typeface="Times New Roman" panose="02020603050405020304" pitchFamily="18" charset="0"/>
-              </a:rPr>
-              <a:t>HDMI </a:t>
-            </a:r>
-            <a:r>
-              <a:rPr lang="zh-TW" altLang="en-US" sz="1600" dirty="0">
-                <a:latin typeface="Times New Roman" panose="02020603050405020304" pitchFamily="18" charset="0"/>
-                <a:ea typeface="標楷體" panose="03000509000000000000" pitchFamily="65" charset="-120"/>
-                <a:cs typeface="Times New Roman" panose="02020603050405020304" pitchFamily="18" charset="0"/>
-              </a:rPr>
-              <a:t>影像處理、</a:t>
-            </a:r>
-            <a:r>
-              <a:rPr lang="en-US" altLang="zh-TW" sz="1600" dirty="0">
-                <a:latin typeface="Times New Roman" panose="02020603050405020304" pitchFamily="18" charset="0"/>
-                <a:ea typeface="標楷體" panose="03000509000000000000" pitchFamily="65" charset="-120"/>
-                <a:cs typeface="Times New Roman" panose="02020603050405020304" pitchFamily="18" charset="0"/>
-              </a:rPr>
-              <a:t>DDR3 </a:t>
-            </a:r>
-            <a:r>
-              <a:rPr lang="zh-TW" altLang="en-US" sz="1600" dirty="0">
-                <a:latin typeface="Times New Roman" panose="02020603050405020304" pitchFamily="18" charset="0"/>
-                <a:ea typeface="標楷體" panose="03000509000000000000" pitchFamily="65" charset="-120"/>
-                <a:cs typeface="Times New Roman" panose="02020603050405020304" pitchFamily="18" charset="0"/>
-              </a:rPr>
-              <a:t>影格緩衝與 </a:t>
-            </a:r>
-            <a:r>
-              <a:rPr lang="en-US" altLang="zh-TW" sz="1600" dirty="0">
-                <a:latin typeface="Times New Roman" panose="02020603050405020304" pitchFamily="18" charset="0"/>
-                <a:ea typeface="標楷體" panose="03000509000000000000" pitchFamily="65" charset="-120"/>
-                <a:cs typeface="Times New Roman" panose="02020603050405020304" pitchFamily="18" charset="0"/>
-              </a:rPr>
-              <a:t>PCIe</a:t>
-            </a:r>
-            <a:r>
-              <a:rPr lang="zh-TW" altLang="en-US" sz="1600" dirty="0">
-                <a:latin typeface="Times New Roman" panose="02020603050405020304" pitchFamily="18" charset="0"/>
-                <a:ea typeface="標楷體" panose="03000509000000000000" pitchFamily="65" charset="-120"/>
-                <a:cs typeface="Times New Roman" panose="02020603050405020304" pitchFamily="18" charset="0"/>
-              </a:rPr>
-              <a:t>，並提供 </a:t>
-            </a:r>
-            <a:r>
-              <a:rPr lang="en-US" altLang="zh-TW" sz="1600" dirty="0">
-                <a:latin typeface="Times New Roman" panose="02020603050405020304" pitchFamily="18" charset="0"/>
-                <a:ea typeface="標楷體" panose="03000509000000000000" pitchFamily="65" charset="-120"/>
-                <a:cs typeface="Times New Roman" panose="02020603050405020304" pitchFamily="18" charset="0"/>
-              </a:rPr>
-              <a:t>Windows </a:t>
-            </a:r>
-            <a:r>
-              <a:rPr lang="zh-TW" altLang="en-US" sz="1600" dirty="0">
-                <a:latin typeface="Times New Roman" panose="02020603050405020304" pitchFamily="18" charset="0"/>
-                <a:ea typeface="標楷體" panose="03000509000000000000" pitchFamily="65" charset="-120"/>
-                <a:cs typeface="Times New Roman" panose="02020603050405020304" pitchFamily="18" charset="0"/>
-              </a:rPr>
-              <a:t>端影格讀取程式</a:t>
+              <a:t> </a:t>
             </a:r>
           </a:p>
           <a:p>
@@ -18356,7 +18386,7 @@
                 <a:ea typeface="標楷體" panose="03000509000000000000" pitchFamily="65" charset="-120"/>
                 <a:cs typeface="Times New Roman" panose="02020603050405020304" pitchFamily="18" charset="0"/>
               </a:rPr>
-              <a:t>[5] https://github.com/hamsternz/Artix-7-HDMI-processing</a:t>
+              <a:t>[5] https://github.com/Xilinx/dma_ip_drivers</a:t>
             </a:r>
             <a:endParaRPr lang="zh-TW" altLang="en-US" sz="1200" dirty="0">
               <a:latin typeface="Times New Roman" panose="02020603050405020304" pitchFamily="18" charset="0"/>

--- a/Onyx_進度報告_1013.pptx
+++ b/Onyx_進度報告_1013.pptx
@@ -5,21 +5,22 @@
     <p:sldMasterId id="2147483658" r:id="rId1"/>
   </p:sldMasterIdLst>
   <p:notesMasterIdLst>
-    <p:notesMasterId r:id="rId14"/>
+    <p:notesMasterId r:id="rId15"/>
   </p:notesMasterIdLst>
   <p:sldIdLst>
     <p:sldId id="277" r:id="rId2"/>
     <p:sldId id="2022" r:id="rId3"/>
     <p:sldId id="2024" r:id="rId4"/>
     <p:sldId id="2025" r:id="rId5"/>
-    <p:sldId id="2032" r:id="rId6"/>
-    <p:sldId id="2034" r:id="rId7"/>
-    <p:sldId id="2035" r:id="rId8"/>
-    <p:sldId id="2037" r:id="rId9"/>
-    <p:sldId id="2038" r:id="rId10"/>
-    <p:sldId id="2036" r:id="rId11"/>
-    <p:sldId id="2039" r:id="rId12"/>
-    <p:sldId id="286" r:id="rId13"/>
+    <p:sldId id="2035" r:id="rId6"/>
+    <p:sldId id="2032" r:id="rId7"/>
+    <p:sldId id="2040" r:id="rId8"/>
+    <p:sldId id="2042" r:id="rId9"/>
+    <p:sldId id="2037" r:id="rId10"/>
+    <p:sldId id="2041" r:id="rId11"/>
+    <p:sldId id="2043" r:id="rId12"/>
+    <p:sldId id="2036" r:id="rId13"/>
+    <p:sldId id="286" r:id="rId14"/>
   </p:sldIdLst>
   <p:sldSz cx="9906000" cy="6858000" type="A4"/>
   <p:notesSz cx="7315200" cy="9601200"/>
@@ -269,13 +270,14 @@
         <p14:section name="Video Capture Card" id="{FA8538CB-EEBB-42F8-BEE8-82DA04CEC9C1}">
           <p14:sldIdLst>
             <p14:sldId id="2025"/>
+            <p14:sldId id="2035"/>
             <p14:sldId id="2032"/>
-            <p14:sldId id="2034"/>
-            <p14:sldId id="2035"/>
+            <p14:sldId id="2040"/>
+            <p14:sldId id="2042"/>
             <p14:sldId id="2037"/>
-            <p14:sldId id="2038"/>
+            <p14:sldId id="2041"/>
+            <p14:sldId id="2043"/>
             <p14:sldId id="2036"/>
-            <p14:sldId id="2039"/>
           </p14:sldIdLst>
         </p14:section>
         <p14:section name="End" id="{33EEDC85-A799-4CB3-BF13-F4955B8630BE}">
@@ -1751,7 +1753,7 @@
     </p:spTree>
     <p:extLst>
       <p:ext uri="{BB962C8B-B14F-4D97-AF65-F5344CB8AC3E}">
-        <p14:creationId xmlns:p14="http://schemas.microsoft.com/office/powerpoint/2010/main" val="3764392625"/>
+        <p14:creationId xmlns:p14="http://schemas.microsoft.com/office/powerpoint/2010/main" val="131158438"/>
       </p:ext>
     </p:extLst>
   </p:cSld>
@@ -1762,6 +1764,200 @@
 </file>
 
 <file path=ppt/notesSlides/notesSlide11.xml><?xml version="1.0" encoding="utf-8"?>
+<p:notes xmlns:a="http://schemas.openxmlformats.org/drawingml/2006/main" xmlns:r="http://schemas.openxmlformats.org/officeDocument/2006/relationships" xmlns:p="http://schemas.openxmlformats.org/presentationml/2006/main">
+  <p:cSld>
+    <p:spTree>
+      <p:nvGrpSpPr>
+        <p:cNvPr id="1" name="">
+          <a:extLst>
+            <a:ext uri="{FF2B5EF4-FFF2-40B4-BE49-F238E27FC236}">
+              <a16:creationId xmlns:a16="http://schemas.microsoft.com/office/drawing/2014/main" id="{9A851A70-D7FF-B69E-2F1F-5276D7F44C59}"/>
+            </a:ext>
+          </a:extLst>
+        </p:cNvPr>
+        <p:cNvGrpSpPr/>
+        <p:nvPr/>
+      </p:nvGrpSpPr>
+      <p:grpSpPr>
+        <a:xfrm>
+          <a:off x="0" y="0"/>
+          <a:ext cx="0" cy="0"/>
+          <a:chOff x="0" y="0"/>
+          <a:chExt cx="0" cy="0"/>
+        </a:xfrm>
+      </p:grpSpPr>
+      <p:sp>
+        <p:nvSpPr>
+          <p:cNvPr id="2" name="投影片影像版面配置區 1">
+            <a:extLst>
+              <a:ext uri="{FF2B5EF4-FFF2-40B4-BE49-F238E27FC236}">
+                <a16:creationId xmlns:a16="http://schemas.microsoft.com/office/drawing/2014/main" id="{4FB2E1DE-40DE-B1BA-7135-64BFFB1631B9}"/>
+              </a:ext>
+            </a:extLst>
+          </p:cNvPr>
+          <p:cNvSpPr>
+            <a:spLocks noGrp="1" noRot="1" noChangeAspect="1"/>
+          </p:cNvSpPr>
+          <p:nvPr>
+            <p:ph type="sldImg"/>
+          </p:nvPr>
+        </p:nvSpPr>
+        <p:spPr/>
+      </p:sp>
+      <p:sp>
+        <p:nvSpPr>
+          <p:cNvPr id="3" name="備忘稿版面配置區 2">
+            <a:extLst>
+              <a:ext uri="{FF2B5EF4-FFF2-40B4-BE49-F238E27FC236}">
+                <a16:creationId xmlns:a16="http://schemas.microsoft.com/office/drawing/2014/main" id="{C4F8DB8E-F5F1-21EB-D41F-2C635FB715D5}"/>
+              </a:ext>
+            </a:extLst>
+          </p:cNvPr>
+          <p:cNvSpPr>
+            <a:spLocks noGrp="1"/>
+          </p:cNvSpPr>
+          <p:nvPr>
+            <p:ph type="body" idx="1"/>
+          </p:nvPr>
+        </p:nvSpPr>
+        <p:spPr/>
+        <p:txBody>
+          <a:bodyPr/>
+          <a:lstStyle/>
+          <a:p>
+            <a:pPr marL="0" indent="0"/>
+            <a:r>
+              <a:rPr lang="zh-TW" altLang="en-US" dirty="0"/>
+              <a:t>混用：需要先克服工具鏈與建置流程的不同。</a:t>
+            </a:r>
+            <a:r>
+              <a:rPr lang="en-US" altLang="zh-TW" dirty="0" err="1"/>
+              <a:t>LiteX</a:t>
+            </a:r>
+            <a:r>
+              <a:rPr lang="en-US" altLang="zh-TW" dirty="0"/>
+              <a:t> </a:t>
+            </a:r>
+            <a:r>
+              <a:rPr lang="zh-TW" altLang="en-US" dirty="0"/>
+              <a:t>通常透過 </a:t>
+            </a:r>
+            <a:r>
+              <a:rPr lang="en-US" altLang="zh-TW" dirty="0"/>
+              <a:t>Python</a:t>
+            </a:r>
+            <a:r>
+              <a:rPr lang="zh-TW" altLang="en-US" dirty="0"/>
+              <a:t>、</a:t>
+            </a:r>
+            <a:r>
+              <a:rPr lang="en-US" altLang="zh-TW" dirty="0" err="1"/>
+              <a:t>Migen</a:t>
+            </a:r>
+            <a:r>
+              <a:rPr lang="zh-TW" altLang="en-US" dirty="0"/>
+              <a:t>建構硬體；</a:t>
+            </a:r>
+            <a:r>
+              <a:rPr lang="en-US" altLang="zh-TW" dirty="0"/>
+              <a:t>Xilinx </a:t>
+            </a:r>
+            <a:r>
+              <a:rPr lang="zh-TW" altLang="en-US" dirty="0"/>
+              <a:t>通常依賴 </a:t>
+            </a:r>
+            <a:r>
+              <a:rPr lang="en-US" altLang="zh-TW" dirty="0" err="1"/>
+              <a:t>Vivado</a:t>
+            </a:r>
+            <a:r>
+              <a:rPr lang="en-US" altLang="zh-TW" dirty="0"/>
+              <a:t> IP</a:t>
+            </a:r>
+            <a:r>
+              <a:rPr lang="zh-TW" altLang="en-US" dirty="0"/>
+              <a:t>，當然混用的優勢也很明顯可以選擇各生態系最符合需求的模組，不受單一生態系的模組選擇限制</a:t>
+            </a:r>
+            <a:endParaRPr lang="en-US" altLang="zh-TW" dirty="0"/>
+          </a:p>
+          <a:p>
+            <a:pPr marL="0" indent="0"/>
+            <a:endParaRPr lang="en-US" altLang="zh-TW" dirty="0"/>
+          </a:p>
+          <a:p>
+            <a:pPr marL="0" indent="0"/>
+            <a:endParaRPr lang="zh-TW" altLang="en-US" dirty="0"/>
+          </a:p>
+        </p:txBody>
+      </p:sp>
+      <p:sp>
+        <p:nvSpPr>
+          <p:cNvPr id="4" name="投影片編號版面配置區 3">
+            <a:extLst>
+              <a:ext uri="{FF2B5EF4-FFF2-40B4-BE49-F238E27FC236}">
+                <a16:creationId xmlns:a16="http://schemas.microsoft.com/office/drawing/2014/main" id="{A81AD260-1FA1-46D2-EEFC-6CE390861C06}"/>
+              </a:ext>
+            </a:extLst>
+          </p:cNvPr>
+          <p:cNvSpPr>
+            <a:spLocks noGrp="1"/>
+          </p:cNvSpPr>
+          <p:nvPr>
+            <p:ph type="sldNum" idx="12"/>
+          </p:nvPr>
+        </p:nvSpPr>
+        <p:spPr/>
+        <p:txBody>
+          <a:bodyPr/>
+          <a:lstStyle/>
+          <a:p>
+            <a:pPr marL="0" marR="0" lvl="0" indent="0" algn="r" rtl="0">
+              <a:spcBef>
+                <a:spcPts val="0"/>
+              </a:spcBef>
+              <a:spcAft>
+                <a:spcPts val="0"/>
+              </a:spcAft>
+              <a:buNone/>
+            </a:pPr>
+            <a:fld id="{00000000-1234-1234-1234-123412341234}" type="slidenum">
+              <a:rPr lang="en-US" sz="2000" b="0" i="0" u="none" strike="noStrike" cap="none" smtClean="0">
+                <a:solidFill>
+                  <a:schemeClr val="dk1"/>
+                </a:solidFill>
+                <a:latin typeface="Times New Roman"/>
+                <a:ea typeface="Times New Roman"/>
+                <a:cs typeface="Times New Roman"/>
+                <a:sym typeface="Times New Roman"/>
+              </a:rPr>
+              <a:t>11</a:t>
+            </a:fld>
+            <a:endParaRPr lang="en-US" sz="2000" b="0" i="0" u="none" strike="noStrike" cap="none" dirty="0">
+              <a:solidFill>
+                <a:schemeClr val="dk1"/>
+              </a:solidFill>
+              <a:latin typeface="Times New Roman"/>
+              <a:ea typeface="Times New Roman"/>
+              <a:cs typeface="Times New Roman"/>
+              <a:sym typeface="Times New Roman"/>
+            </a:endParaRPr>
+          </a:p>
+        </p:txBody>
+      </p:sp>
+    </p:spTree>
+    <p:extLst>
+      <p:ext uri="{BB962C8B-B14F-4D97-AF65-F5344CB8AC3E}">
+        <p14:creationId xmlns:p14="http://schemas.microsoft.com/office/powerpoint/2010/main" val="222586321"/>
+      </p:ext>
+    </p:extLst>
+  </p:cSld>
+  <p:clrMapOvr>
+    <a:masterClrMapping/>
+  </p:clrMapOvr>
+</p:notes>
+</file>
+
+<file path=ppt/notesSlides/notesSlide12.xml><?xml version="1.0" encoding="utf-8"?>
 <p:notes xmlns:a="http://schemas.openxmlformats.org/drawingml/2006/main" xmlns:r="http://schemas.openxmlformats.org/officeDocument/2006/relationships" xmlns:p="http://schemas.openxmlformats.org/presentationml/2006/main">
   <p:cSld>
     <p:spTree>
@@ -1868,7 +2064,7 @@
                 <a:cs typeface="Times New Roman"/>
                 <a:sym typeface="Times New Roman"/>
               </a:rPr>
-              <a:t>11</a:t>
+              <a:t>12</a:t>
             </a:fld>
             <a:endParaRPr lang="en-US" sz="2000" b="0" i="0" u="none" strike="noStrike" cap="none" dirty="0">
               <a:solidFill>
@@ -1885,7 +2081,7 @@
     </p:spTree>
     <p:extLst>
       <p:ext uri="{BB962C8B-B14F-4D97-AF65-F5344CB8AC3E}">
-        <p14:creationId xmlns:p14="http://schemas.microsoft.com/office/powerpoint/2010/main" val="131158438"/>
+        <p14:creationId xmlns:p14="http://schemas.microsoft.com/office/powerpoint/2010/main" val="3764392625"/>
       </p:ext>
     </p:extLst>
   </p:cSld>
@@ -1895,7 +2091,7 @@
 </p:notes>
 </file>
 
-<file path=ppt/notesSlides/notesSlide12.xml><?xml version="1.0" encoding="utf-8"?>
+<file path=ppt/notesSlides/notesSlide13.xml><?xml version="1.0" encoding="utf-8"?>
 <p:notes xmlns:a="http://schemas.openxmlformats.org/drawingml/2006/main" xmlns:r="http://schemas.openxmlformats.org/officeDocument/2006/relationships" xmlns:p="http://schemas.openxmlformats.org/presentationml/2006/main">
   <p:cSld>
     <p:spTree>
@@ -1963,7 +2159,7 @@
           <a:p>
             <a:fld id="{F5753A29-9D77-4C26-8BEC-432FE5D4B0A4}" type="slidenum">
               <a:rPr lang="en-US" altLang="zh-TW" smtClean="0"/>
-              <a:t>12</a:t>
+              <a:t>13</a:t>
             </a:fld>
             <a:endParaRPr lang="en-US" altLang="zh-TW" dirty="0"/>
           </a:p>
@@ -2536,6 +2732,32 @@
           <a:bodyPr/>
           <a:lstStyle/>
           <a:p>
+            <a:r>
+              <a:rPr lang="en-US" altLang="zh-TW" dirty="0"/>
+              <a:t>FPGA </a:t>
+            </a:r>
+            <a:r>
+              <a:rPr lang="zh-TW" altLang="en-US" dirty="0"/>
+              <a:t>系統 </a:t>
+            </a:r>
+            <a:r>
+              <a:rPr lang="en-US" altLang="zh-TW" dirty="0"/>
+              <a:t>framework</a:t>
+            </a:r>
+          </a:p>
+          <a:p>
+            <a:r>
+              <a:rPr lang="zh-TW" altLang="en-US" dirty="0"/>
+              <a:t>連接模組（系統整合）： 決定哪些模組要連接，以及如何組成完整系統。</a:t>
+            </a:r>
+          </a:p>
+          <a:p>
+            <a:r>
+              <a:rPr lang="zh-TW" altLang="en-US" dirty="0"/>
+              <a:t>連接介面（通訊規則）： 規定模組連接後，如何交換資料、位址、控制訊號，以及如何協調傳輸。</a:t>
+            </a:r>
+          </a:p>
+          <a:p>
             <a:pPr marL="0" indent="0"/>
             <a:endParaRPr lang="zh-TW" altLang="en-US" dirty="0"/>
           </a:p>
@@ -2598,7 +2820,7 @@
     </p:spTree>
     <p:extLst>
       <p:ext uri="{BB962C8B-B14F-4D97-AF65-F5344CB8AC3E}">
-        <p14:creationId xmlns:p14="http://schemas.microsoft.com/office/powerpoint/2010/main" val="3473690080"/>
+        <p14:creationId xmlns:p14="http://schemas.microsoft.com/office/powerpoint/2010/main" val="1673705244"/>
       </p:ext>
     </p:extLst>
   </p:cSld>
@@ -2732,7 +2954,7 @@
     </p:spTree>
     <p:extLst>
       <p:ext uri="{BB962C8B-B14F-4D97-AF65-F5344CB8AC3E}">
-        <p14:creationId xmlns:p14="http://schemas.microsoft.com/office/powerpoint/2010/main" val="3960645603"/>
+        <p14:creationId xmlns:p14="http://schemas.microsoft.com/office/powerpoint/2010/main" val="3473690080"/>
       </p:ext>
     </p:extLst>
   </p:cSld>
@@ -2743,166 +2965,6 @@
 </file>
 
 <file path=ppt/notesSlides/notesSlide7.xml><?xml version="1.0" encoding="utf-8"?>
-<p:notes xmlns:a="http://schemas.openxmlformats.org/drawingml/2006/main" xmlns:r="http://schemas.openxmlformats.org/officeDocument/2006/relationships" xmlns:p="http://schemas.openxmlformats.org/presentationml/2006/main">
-  <p:cSld>
-    <p:spTree>
-      <p:nvGrpSpPr>
-        <p:cNvPr id="1" name="">
-          <a:extLst>
-            <a:ext uri="{FF2B5EF4-FFF2-40B4-BE49-F238E27FC236}">
-              <a16:creationId xmlns:a16="http://schemas.microsoft.com/office/drawing/2014/main" id="{9A851A70-D7FF-B69E-2F1F-5276D7F44C59}"/>
-            </a:ext>
-          </a:extLst>
-        </p:cNvPr>
-        <p:cNvGrpSpPr/>
-        <p:nvPr/>
-      </p:nvGrpSpPr>
-      <p:grpSpPr>
-        <a:xfrm>
-          <a:off x="0" y="0"/>
-          <a:ext cx="0" cy="0"/>
-          <a:chOff x="0" y="0"/>
-          <a:chExt cx="0" cy="0"/>
-        </a:xfrm>
-      </p:grpSpPr>
-      <p:sp>
-        <p:nvSpPr>
-          <p:cNvPr id="2" name="投影片影像版面配置區 1">
-            <a:extLst>
-              <a:ext uri="{FF2B5EF4-FFF2-40B4-BE49-F238E27FC236}">
-                <a16:creationId xmlns:a16="http://schemas.microsoft.com/office/drawing/2014/main" id="{4FB2E1DE-40DE-B1BA-7135-64BFFB1631B9}"/>
-              </a:ext>
-            </a:extLst>
-          </p:cNvPr>
-          <p:cNvSpPr>
-            <a:spLocks noGrp="1" noRot="1" noChangeAspect="1"/>
-          </p:cNvSpPr>
-          <p:nvPr>
-            <p:ph type="sldImg"/>
-          </p:nvPr>
-        </p:nvSpPr>
-        <p:spPr/>
-      </p:sp>
-      <p:sp>
-        <p:nvSpPr>
-          <p:cNvPr id="3" name="備忘稿版面配置區 2">
-            <a:extLst>
-              <a:ext uri="{FF2B5EF4-FFF2-40B4-BE49-F238E27FC236}">
-                <a16:creationId xmlns:a16="http://schemas.microsoft.com/office/drawing/2014/main" id="{C4F8DB8E-F5F1-21EB-D41F-2C635FB715D5}"/>
-              </a:ext>
-            </a:extLst>
-          </p:cNvPr>
-          <p:cNvSpPr>
-            <a:spLocks noGrp="1"/>
-          </p:cNvSpPr>
-          <p:nvPr>
-            <p:ph type="body" idx="1"/>
-          </p:nvPr>
-        </p:nvSpPr>
-        <p:spPr/>
-        <p:txBody>
-          <a:bodyPr/>
-          <a:lstStyle/>
-          <a:p>
-            <a:r>
-              <a:rPr lang="en-US" altLang="zh-TW" dirty="0"/>
-              <a:t>FPGA </a:t>
-            </a:r>
-            <a:r>
-              <a:rPr lang="zh-TW" altLang="en-US" dirty="0"/>
-              <a:t>系統 </a:t>
-            </a:r>
-            <a:r>
-              <a:rPr lang="en-US" altLang="zh-TW" dirty="0"/>
-              <a:t>framework</a:t>
-            </a:r>
-          </a:p>
-          <a:p>
-            <a:r>
-              <a:rPr lang="zh-TW" altLang="en-US" dirty="0"/>
-              <a:t>連接模組（系統整合）： 決定哪些模組要連接，以及如何組成完整系統。</a:t>
-            </a:r>
-          </a:p>
-          <a:p>
-            <a:r>
-              <a:rPr lang="zh-TW" altLang="en-US" dirty="0"/>
-              <a:t>連接介面（通訊規則）： 規定模組連接後，如何交換資料、位址、控制訊號，以及如何協調傳輸。</a:t>
-            </a:r>
-          </a:p>
-          <a:p>
-            <a:pPr marL="0" indent="0"/>
-            <a:endParaRPr lang="zh-TW" altLang="en-US" dirty="0"/>
-          </a:p>
-        </p:txBody>
-      </p:sp>
-      <p:sp>
-        <p:nvSpPr>
-          <p:cNvPr id="4" name="投影片編號版面配置區 3">
-            <a:extLst>
-              <a:ext uri="{FF2B5EF4-FFF2-40B4-BE49-F238E27FC236}">
-                <a16:creationId xmlns:a16="http://schemas.microsoft.com/office/drawing/2014/main" id="{A81AD260-1FA1-46D2-EEFC-6CE390861C06}"/>
-              </a:ext>
-            </a:extLst>
-          </p:cNvPr>
-          <p:cNvSpPr>
-            <a:spLocks noGrp="1"/>
-          </p:cNvSpPr>
-          <p:nvPr>
-            <p:ph type="sldNum" idx="12"/>
-          </p:nvPr>
-        </p:nvSpPr>
-        <p:spPr/>
-        <p:txBody>
-          <a:bodyPr/>
-          <a:lstStyle/>
-          <a:p>
-            <a:pPr marL="0" marR="0" lvl="0" indent="0" algn="r" rtl="0">
-              <a:spcBef>
-                <a:spcPts val="0"/>
-              </a:spcBef>
-              <a:spcAft>
-                <a:spcPts val="0"/>
-              </a:spcAft>
-              <a:buNone/>
-            </a:pPr>
-            <a:fld id="{00000000-1234-1234-1234-123412341234}" type="slidenum">
-              <a:rPr lang="en-US" sz="2000" b="0" i="0" u="none" strike="noStrike" cap="none" smtClean="0">
-                <a:solidFill>
-                  <a:schemeClr val="dk1"/>
-                </a:solidFill>
-                <a:latin typeface="Times New Roman"/>
-                <a:ea typeface="Times New Roman"/>
-                <a:cs typeface="Times New Roman"/>
-                <a:sym typeface="Times New Roman"/>
-              </a:rPr>
-              <a:t>7</a:t>
-            </a:fld>
-            <a:endParaRPr lang="en-US" sz="2000" b="0" i="0" u="none" strike="noStrike" cap="none" dirty="0">
-              <a:solidFill>
-                <a:schemeClr val="dk1"/>
-              </a:solidFill>
-              <a:latin typeface="Times New Roman"/>
-              <a:ea typeface="Times New Roman"/>
-              <a:cs typeface="Times New Roman"/>
-              <a:sym typeface="Times New Roman"/>
-            </a:endParaRPr>
-          </a:p>
-        </p:txBody>
-      </p:sp>
-    </p:spTree>
-    <p:extLst>
-      <p:ext uri="{BB962C8B-B14F-4D97-AF65-F5344CB8AC3E}">
-        <p14:creationId xmlns:p14="http://schemas.microsoft.com/office/powerpoint/2010/main" val="1673705244"/>
-      </p:ext>
-    </p:extLst>
-  </p:cSld>
-  <p:clrMapOvr>
-    <a:masterClrMapping/>
-  </p:clrMapOvr>
-</p:notes>
-</file>
-
-<file path=ppt/notesSlides/notesSlide8.xml><?xml version="1.0" encoding="utf-8"?>
 <p:notes xmlns:a="http://schemas.openxmlformats.org/drawingml/2006/main" xmlns:r="http://schemas.openxmlformats.org/officeDocument/2006/relationships" xmlns:p="http://schemas.openxmlformats.org/presentationml/2006/main">
   <p:cSld>
     <p:spTree>
@@ -3009,6 +3071,155 @@
                 <a:cs typeface="Times New Roman"/>
                 <a:sym typeface="Times New Roman"/>
               </a:rPr>
+              <a:t>7</a:t>
+            </a:fld>
+            <a:endParaRPr lang="en-US" sz="2000" b="0" i="0" u="none" strike="noStrike" cap="none" dirty="0">
+              <a:solidFill>
+                <a:schemeClr val="dk1"/>
+              </a:solidFill>
+              <a:latin typeface="Times New Roman"/>
+              <a:ea typeface="Times New Roman"/>
+              <a:cs typeface="Times New Roman"/>
+              <a:sym typeface="Times New Roman"/>
+            </a:endParaRPr>
+          </a:p>
+        </p:txBody>
+      </p:sp>
+    </p:spTree>
+    <p:extLst>
+      <p:ext uri="{BB962C8B-B14F-4D97-AF65-F5344CB8AC3E}">
+        <p14:creationId xmlns:p14="http://schemas.microsoft.com/office/powerpoint/2010/main" val="3960645603"/>
+      </p:ext>
+    </p:extLst>
+  </p:cSld>
+  <p:clrMapOvr>
+    <a:masterClrMapping/>
+  </p:clrMapOvr>
+</p:notes>
+</file>
+
+<file path=ppt/notesSlides/notesSlide8.xml><?xml version="1.0" encoding="utf-8"?>
+<p:notes xmlns:a="http://schemas.openxmlformats.org/drawingml/2006/main" xmlns:r="http://schemas.openxmlformats.org/officeDocument/2006/relationships" xmlns:p="http://schemas.openxmlformats.org/presentationml/2006/main">
+  <p:cSld>
+    <p:spTree>
+      <p:nvGrpSpPr>
+        <p:cNvPr id="1" name="">
+          <a:extLst>
+            <a:ext uri="{FF2B5EF4-FFF2-40B4-BE49-F238E27FC236}">
+              <a16:creationId xmlns:a16="http://schemas.microsoft.com/office/drawing/2014/main" id="{9A851A70-D7FF-B69E-2F1F-5276D7F44C59}"/>
+            </a:ext>
+          </a:extLst>
+        </p:cNvPr>
+        <p:cNvGrpSpPr/>
+        <p:nvPr/>
+      </p:nvGrpSpPr>
+      <p:grpSpPr>
+        <a:xfrm>
+          <a:off x="0" y="0"/>
+          <a:ext cx="0" cy="0"/>
+          <a:chOff x="0" y="0"/>
+          <a:chExt cx="0" cy="0"/>
+        </a:xfrm>
+      </p:grpSpPr>
+      <p:sp>
+        <p:nvSpPr>
+          <p:cNvPr id="2" name="投影片影像版面配置區 1">
+            <a:extLst>
+              <a:ext uri="{FF2B5EF4-FFF2-40B4-BE49-F238E27FC236}">
+                <a16:creationId xmlns:a16="http://schemas.microsoft.com/office/drawing/2014/main" id="{4FB2E1DE-40DE-B1BA-7135-64BFFB1631B9}"/>
+              </a:ext>
+            </a:extLst>
+          </p:cNvPr>
+          <p:cNvSpPr>
+            <a:spLocks noGrp="1" noRot="1" noChangeAspect="1"/>
+          </p:cNvSpPr>
+          <p:nvPr>
+            <p:ph type="sldImg"/>
+          </p:nvPr>
+        </p:nvSpPr>
+        <p:spPr/>
+      </p:sp>
+      <p:sp>
+        <p:nvSpPr>
+          <p:cNvPr id="3" name="備忘稿版面配置區 2">
+            <a:extLst>
+              <a:ext uri="{FF2B5EF4-FFF2-40B4-BE49-F238E27FC236}">
+                <a16:creationId xmlns:a16="http://schemas.microsoft.com/office/drawing/2014/main" id="{C4F8DB8E-F5F1-21EB-D41F-2C635FB715D5}"/>
+              </a:ext>
+            </a:extLst>
+          </p:cNvPr>
+          <p:cNvSpPr>
+            <a:spLocks noGrp="1"/>
+          </p:cNvSpPr>
+          <p:nvPr>
+            <p:ph type="body" idx="1"/>
+          </p:nvPr>
+        </p:nvSpPr>
+        <p:spPr/>
+        <p:txBody>
+          <a:bodyPr/>
+          <a:lstStyle/>
+          <a:p>
+            <a:pPr marL="0" indent="0"/>
+            <a:r>
+              <a:rPr lang="en-US" altLang="zh-TW" dirty="0" err="1"/>
+              <a:t>LiteX</a:t>
+            </a:r>
+            <a:r>
+              <a:rPr lang="zh-TW" altLang="en-US" dirty="0"/>
+              <a:t>：可利用其提供的互連架構及匯流排機制，整合符合其介面規範的模組。可利用 </a:t>
+            </a:r>
+            <a:r>
+              <a:rPr lang="en-US" altLang="zh-TW" dirty="0"/>
+              <a:t>CSR</a:t>
+            </a:r>
+            <a:r>
+              <a:rPr lang="zh-TW" altLang="en-US" dirty="0"/>
+              <a:t> 等機制建立控制介面，並整合到系統中。</a:t>
+            </a:r>
+          </a:p>
+        </p:txBody>
+      </p:sp>
+      <p:sp>
+        <p:nvSpPr>
+          <p:cNvPr id="4" name="投影片編號版面配置區 3">
+            <a:extLst>
+              <a:ext uri="{FF2B5EF4-FFF2-40B4-BE49-F238E27FC236}">
+                <a16:creationId xmlns:a16="http://schemas.microsoft.com/office/drawing/2014/main" id="{A81AD260-1FA1-46D2-EEFC-6CE390861C06}"/>
+              </a:ext>
+            </a:extLst>
+          </p:cNvPr>
+          <p:cNvSpPr>
+            <a:spLocks noGrp="1"/>
+          </p:cNvSpPr>
+          <p:nvPr>
+            <p:ph type="sldNum" idx="12"/>
+          </p:nvPr>
+        </p:nvSpPr>
+        <p:spPr/>
+        <p:txBody>
+          <a:bodyPr/>
+          <a:lstStyle/>
+          <a:p>
+            <a:pPr marL="0" marR="0" lvl="0" indent="0" algn="r" rtl="0">
+              <a:spcBef>
+                <a:spcPts val="0"/>
+              </a:spcBef>
+              <a:spcAft>
+                <a:spcPts val="0"/>
+              </a:spcAft>
+              <a:buNone/>
+            </a:pPr>
+            <a:fld id="{00000000-1234-1234-1234-123412341234}" type="slidenum">
+              <a:rPr lang="en-US" sz="2000" b="0" i="0" u="none" strike="noStrike" cap="none" smtClean="0">
+                <a:solidFill>
+                  <a:schemeClr val="dk1"/>
+                </a:solidFill>
+                <a:latin typeface="Times New Roman"/>
+                <a:ea typeface="Times New Roman"/>
+                <a:cs typeface="Times New Roman"/>
+                <a:sym typeface="Times New Roman"/>
+              </a:rPr>
               <a:t>8</a:t>
             </a:fld>
             <a:endParaRPr lang="en-US" sz="2000" b="0" i="0" u="none" strike="noStrike" cap="none" dirty="0">
@@ -3026,7 +3237,7 @@
     </p:spTree>
     <p:extLst>
       <p:ext uri="{BB962C8B-B14F-4D97-AF65-F5344CB8AC3E}">
-        <p14:creationId xmlns:p14="http://schemas.microsoft.com/office/powerpoint/2010/main" val="3022149497"/>
+        <p14:creationId xmlns:p14="http://schemas.microsoft.com/office/powerpoint/2010/main" val="2117558636"/>
       </p:ext>
     </p:extLst>
   </p:cSld>
@@ -3099,7 +3310,77 @@
           <a:lstStyle/>
           <a:p>
             <a:pPr marL="0" indent="0"/>
-            <a:endParaRPr lang="zh-TW" altLang="en-US" dirty="0"/>
+            <a:r>
+              <a:rPr lang="zh-TW" altLang="zh-TW" sz="1200" b="0" i="0" u="none" strike="noStrike" cap="none" dirty="0">
+                <a:solidFill>
+                  <a:schemeClr val="dk1"/>
+                </a:solidFill>
+                <a:latin typeface="Times New Roman"/>
+                <a:ea typeface="Times New Roman"/>
+                <a:cs typeface="Times New Roman"/>
+                <a:sym typeface="Times New Roman"/>
+              </a:rPr>
+              <a:t>TB-FMCH-VFMC-HDMI</a:t>
+            </a:r>
+            <a:r>
+              <a:rPr lang="zh-TW" altLang="zh-TW" dirty="0"/>
+              <a:t> 的主要作用是提供 HDMI 實體介面及高速訊號接收</a:t>
+            </a:r>
+            <a:r>
+              <a:rPr lang="zh-TW" altLang="en-US" dirty="0"/>
+              <a:t> </a:t>
+            </a:r>
+            <a:r>
+              <a:rPr lang="en-US" altLang="zh-TW" dirty="0"/>
+              <a:t>(HDMI2.1)</a:t>
+            </a:r>
+            <a:r>
+              <a:rPr lang="zh-TW" altLang="zh-TW" dirty="0"/>
+              <a:t>、傳輸所需的電路</a:t>
+            </a:r>
+            <a:endParaRPr lang="en-US" altLang="zh-TW" dirty="0"/>
+          </a:p>
+          <a:p>
+            <a:pPr marL="0" indent="0"/>
+            <a:r>
+              <a:rPr lang="zh-TW" altLang="en-US" dirty="0"/>
+              <a:t>同時也支援標準的</a:t>
+            </a:r>
+            <a:r>
+              <a:rPr lang="en-US" altLang="zh-TW" dirty="0"/>
+              <a:t>HDMI</a:t>
+            </a:r>
+          </a:p>
+          <a:p>
+            <a:pPr marL="0" indent="0"/>
+            <a:endParaRPr lang="en-US" altLang="zh-TW" dirty="0"/>
+          </a:p>
+          <a:p>
+            <a:pPr marL="0" indent="0"/>
+            <a:r>
+              <a:rPr lang="en-US" altLang="zh-TW" dirty="0"/>
+              <a:t>HDMI</a:t>
+            </a:r>
+            <a:r>
+              <a:rPr lang="zh-TW" altLang="en-US" dirty="0"/>
+              <a:t> </a:t>
+            </a:r>
+            <a:r>
+              <a:rPr lang="en-US" altLang="zh-TW" dirty="0"/>
+              <a:t>RX</a:t>
+            </a:r>
+            <a:r>
+              <a:rPr lang="zh-TW" altLang="en-US" dirty="0"/>
+              <a:t> </a:t>
+            </a:r>
+            <a:r>
+              <a:rPr lang="en-US" altLang="zh-TW" dirty="0"/>
+              <a:t>IP</a:t>
+            </a:r>
+            <a:r>
+              <a:rPr lang="zh-TW" altLang="en-US" dirty="0"/>
+              <a:t>需授權</a:t>
+            </a:r>
           </a:p>
         </p:txBody>
       </p:sp>
@@ -3160,7 +3441,7 @@
     </p:spTree>
     <p:extLst>
       <p:ext uri="{BB962C8B-B14F-4D97-AF65-F5344CB8AC3E}">
-        <p14:creationId xmlns:p14="http://schemas.microsoft.com/office/powerpoint/2010/main" val="530770412"/>
+        <p14:creationId xmlns:p14="http://schemas.microsoft.com/office/powerpoint/2010/main" val="3022149497"/>
       </p:ext>
     </p:extLst>
   </p:cSld>
@@ -8214,6 +8495,1713 @@
                 <a:ea typeface="標楷體" panose="03000509000000000000" pitchFamily="65" charset="-120"/>
                 <a:cs typeface="Times New Roman" panose="02020603050405020304" pitchFamily="18" charset="0"/>
               </a:rPr>
+              <a:t>: Xilinx</a:t>
+            </a:r>
+            <a:r>
+              <a:rPr lang="zh-TW" altLang="en-US" dirty="0">
+                <a:latin typeface="Times New Roman" panose="02020603050405020304" pitchFamily="18" charset="0"/>
+                <a:ea typeface="標楷體" panose="03000509000000000000" pitchFamily="65" charset="-120"/>
+                <a:cs typeface="Times New Roman" panose="02020603050405020304" pitchFamily="18" charset="0"/>
+              </a:rPr>
+              <a:t> </a:t>
+            </a:r>
+            <a:r>
+              <a:rPr lang="en-US" altLang="zh-TW" dirty="0">
+                <a:latin typeface="Times New Roman" panose="02020603050405020304" pitchFamily="18" charset="0"/>
+                <a:ea typeface="標楷體" panose="03000509000000000000" pitchFamily="65" charset="-120"/>
+                <a:cs typeface="Times New Roman" panose="02020603050405020304" pitchFamily="18" charset="0"/>
+              </a:rPr>
+              <a:t>/</a:t>
+            </a:r>
+            <a:r>
+              <a:rPr lang="zh-TW" altLang="en-US" dirty="0">
+                <a:latin typeface="Times New Roman" panose="02020603050405020304" pitchFamily="18" charset="0"/>
+                <a:ea typeface="標楷體" panose="03000509000000000000" pitchFamily="65" charset="-120"/>
+                <a:cs typeface="Times New Roman" panose="02020603050405020304" pitchFamily="18" charset="0"/>
+              </a:rPr>
+              <a:t> </a:t>
+            </a:r>
+            <a:r>
+              <a:rPr lang="en-US" altLang="zh-TW" dirty="0" err="1">
+                <a:latin typeface="Times New Roman" panose="02020603050405020304" pitchFamily="18" charset="0"/>
+                <a:ea typeface="標楷體" panose="03000509000000000000" pitchFamily="65" charset="-120"/>
+                <a:cs typeface="Times New Roman" panose="02020603050405020304" pitchFamily="18" charset="0"/>
+              </a:rPr>
+              <a:t>DMA_IP_Drivers</a:t>
+            </a:r>
+            <a:endParaRPr lang="zh-TW" altLang="en-US" dirty="0">
+              <a:latin typeface="Times New Roman" panose="02020603050405020304" pitchFamily="18" charset="0"/>
+              <a:ea typeface="標楷體" panose="03000509000000000000" pitchFamily="65" charset="-120"/>
+              <a:cs typeface="Times New Roman" panose="02020603050405020304" pitchFamily="18" charset="0"/>
+            </a:endParaRPr>
+          </a:p>
+        </p:txBody>
+      </p:sp>
+      <p:sp>
+        <p:nvSpPr>
+          <p:cNvPr id="2" name="文字版面配置區 6">
+            <a:extLst>
+              <a:ext uri="{FF2B5EF4-FFF2-40B4-BE49-F238E27FC236}">
+                <a16:creationId xmlns:a16="http://schemas.microsoft.com/office/drawing/2014/main" id="{D929304B-5341-8BBF-E71F-AF5F2FE7268A}"/>
+              </a:ext>
+            </a:extLst>
+          </p:cNvPr>
+          <p:cNvSpPr txBox="1"/>
+          <p:nvPr/>
+        </p:nvSpPr>
+        <p:spPr>
+          <a:xfrm>
+            <a:off x="609602" y="935857"/>
+            <a:ext cx="8686796" cy="4700685"/>
+          </a:xfrm>
+          <a:prstGeom prst="rect">
+            <a:avLst/>
+          </a:prstGeom>
+          <a:noFill/>
+          <a:ln>
+            <a:noFill/>
+          </a:ln>
+        </p:spPr>
+        <p:txBody>
+          <a:bodyPr spcFirstLastPara="1" wrap="square" lIns="91425" tIns="45700" rIns="91425" bIns="45700" anchor="t" anchorCtr="0">
+            <a:noAutofit/>
+          </a:bodyPr>
+          <a:lstStyle>
+            <a:defPPr marR="0" lvl="0" algn="l" rtl="0">
+              <a:lnSpc>
+                <a:spcPct val="100000"/>
+              </a:lnSpc>
+              <a:spcBef>
+                <a:spcPts val="0"/>
+              </a:spcBef>
+              <a:spcAft>
+                <a:spcPts val="0"/>
+              </a:spcAft>
+            </a:defPPr>
+            <a:lvl1pPr marL="457200" marR="0" lvl="0" indent="-406400" algn="l" rtl="0">
+              <a:lnSpc>
+                <a:spcPct val="100000"/>
+              </a:lnSpc>
+              <a:spcBef>
+                <a:spcPts val="560"/>
+              </a:spcBef>
+              <a:spcAft>
+                <a:spcPts val="0"/>
+              </a:spcAft>
+              <a:buClr>
+                <a:schemeClr val="accent2"/>
+              </a:buClr>
+              <a:buSzPts val="2800"/>
+              <a:buFont typeface="Noto Sans Symbols"/>
+              <a:buChar char="❖"/>
+              <a:defRPr sz="2800" b="0" i="0" u="none" strike="noStrike" cap="none">
+                <a:solidFill>
+                  <a:schemeClr val="dk1"/>
+                </a:solidFill>
+                <a:latin typeface="Times New Roman"/>
+                <a:ea typeface="Times New Roman"/>
+                <a:cs typeface="Times New Roman"/>
+                <a:sym typeface="Times New Roman"/>
+              </a:defRPr>
+            </a:lvl1pPr>
+            <a:lvl2pPr marL="914400" marR="0" lvl="1" indent="-381000" algn="l" rtl="0">
+              <a:lnSpc>
+                <a:spcPct val="100000"/>
+              </a:lnSpc>
+              <a:spcBef>
+                <a:spcPts val="480"/>
+              </a:spcBef>
+              <a:spcAft>
+                <a:spcPts val="0"/>
+              </a:spcAft>
+              <a:buClr>
+                <a:srgbClr val="FF5050"/>
+              </a:buClr>
+              <a:buSzPts val="2400"/>
+              <a:buFont typeface="Noto Sans Symbols"/>
+              <a:buChar char="▪"/>
+              <a:defRPr sz="2400" b="0" i="0" u="none" strike="noStrike" cap="none">
+                <a:solidFill>
+                  <a:schemeClr val="dk1"/>
+                </a:solidFill>
+                <a:latin typeface="Times New Roman"/>
+                <a:ea typeface="Times New Roman"/>
+                <a:cs typeface="Times New Roman"/>
+                <a:sym typeface="Times New Roman"/>
+              </a:defRPr>
+            </a:lvl2pPr>
+            <a:lvl3pPr marL="1371600" marR="0" lvl="2" indent="-355600" algn="l" rtl="0">
+              <a:lnSpc>
+                <a:spcPct val="100000"/>
+              </a:lnSpc>
+              <a:spcBef>
+                <a:spcPts val="400"/>
+              </a:spcBef>
+              <a:spcAft>
+                <a:spcPts val="0"/>
+              </a:spcAft>
+              <a:buClr>
+                <a:srgbClr val="6699FF"/>
+              </a:buClr>
+              <a:buSzPts val="2000"/>
+              <a:buFont typeface="Times New Roman"/>
+              <a:buChar char="•"/>
+              <a:defRPr sz="2000" b="0" i="0" u="none" strike="noStrike" cap="none">
+                <a:solidFill>
+                  <a:schemeClr val="dk1"/>
+                </a:solidFill>
+                <a:latin typeface="Times New Roman"/>
+                <a:ea typeface="Times New Roman"/>
+                <a:cs typeface="Times New Roman"/>
+                <a:sym typeface="Times New Roman"/>
+              </a:defRPr>
+            </a:lvl3pPr>
+            <a:lvl4pPr marL="1828800" marR="0" lvl="3" indent="-355600" algn="l" rtl="0">
+              <a:lnSpc>
+                <a:spcPct val="100000"/>
+              </a:lnSpc>
+              <a:spcBef>
+                <a:spcPts val="400"/>
+              </a:spcBef>
+              <a:spcAft>
+                <a:spcPts val="0"/>
+              </a:spcAft>
+              <a:buClr>
+                <a:srgbClr val="FF5050"/>
+              </a:buClr>
+              <a:buSzPts val="2000"/>
+              <a:buFont typeface="Times New Roman"/>
+              <a:buChar char="o"/>
+              <a:defRPr sz="2000" b="0" i="0" u="none" strike="noStrike" cap="none">
+                <a:solidFill>
+                  <a:schemeClr val="dk1"/>
+                </a:solidFill>
+                <a:latin typeface="Times New Roman"/>
+                <a:ea typeface="Times New Roman"/>
+                <a:cs typeface="Times New Roman"/>
+                <a:sym typeface="Times New Roman"/>
+              </a:defRPr>
+            </a:lvl4pPr>
+            <a:lvl5pPr marL="2286000" marR="0" lvl="4" indent="-355600" algn="l" rtl="0">
+              <a:lnSpc>
+                <a:spcPct val="100000"/>
+              </a:lnSpc>
+              <a:spcBef>
+                <a:spcPts val="400"/>
+              </a:spcBef>
+              <a:spcAft>
+                <a:spcPts val="0"/>
+              </a:spcAft>
+              <a:buClr>
+                <a:srgbClr val="FF5050"/>
+              </a:buClr>
+              <a:buSzPts val="2000"/>
+              <a:buFont typeface="Times New Roman"/>
+              <a:buChar char="o"/>
+              <a:defRPr sz="2000" b="0" i="0" u="none" strike="noStrike" cap="none">
+                <a:solidFill>
+                  <a:schemeClr val="dk1"/>
+                </a:solidFill>
+                <a:latin typeface="Times New Roman"/>
+                <a:ea typeface="Times New Roman"/>
+                <a:cs typeface="Times New Roman"/>
+                <a:sym typeface="Times New Roman"/>
+              </a:defRPr>
+            </a:lvl5pPr>
+            <a:lvl6pPr marL="2743200" marR="0" lvl="5" indent="-355600" algn="l" rtl="0">
+              <a:lnSpc>
+                <a:spcPct val="100000"/>
+              </a:lnSpc>
+              <a:spcBef>
+                <a:spcPts val="400"/>
+              </a:spcBef>
+              <a:spcAft>
+                <a:spcPts val="0"/>
+              </a:spcAft>
+              <a:buClr>
+                <a:srgbClr val="FF5050"/>
+              </a:buClr>
+              <a:buSzPts val="2000"/>
+              <a:buFont typeface="Times New Roman"/>
+              <a:buChar char="o"/>
+              <a:defRPr sz="2000" b="0" i="0" u="none" strike="noStrike" cap="none">
+                <a:solidFill>
+                  <a:schemeClr val="dk1"/>
+                </a:solidFill>
+                <a:latin typeface="Times New Roman"/>
+                <a:ea typeface="Times New Roman"/>
+                <a:cs typeface="Times New Roman"/>
+                <a:sym typeface="Times New Roman"/>
+              </a:defRPr>
+            </a:lvl6pPr>
+            <a:lvl7pPr marL="3200400" marR="0" lvl="6" indent="-355600" algn="l" rtl="0">
+              <a:lnSpc>
+                <a:spcPct val="100000"/>
+              </a:lnSpc>
+              <a:spcBef>
+                <a:spcPts val="400"/>
+              </a:spcBef>
+              <a:spcAft>
+                <a:spcPts val="0"/>
+              </a:spcAft>
+              <a:buClr>
+                <a:srgbClr val="FF5050"/>
+              </a:buClr>
+              <a:buSzPts val="2000"/>
+              <a:buFont typeface="Times New Roman"/>
+              <a:buChar char="o"/>
+              <a:defRPr sz="2000" b="0" i="0" u="none" strike="noStrike" cap="none">
+                <a:solidFill>
+                  <a:schemeClr val="dk1"/>
+                </a:solidFill>
+                <a:latin typeface="Times New Roman"/>
+                <a:ea typeface="Times New Roman"/>
+                <a:cs typeface="Times New Roman"/>
+                <a:sym typeface="Times New Roman"/>
+              </a:defRPr>
+            </a:lvl7pPr>
+            <a:lvl8pPr marL="3657600" marR="0" lvl="7" indent="-355600" algn="l" rtl="0">
+              <a:lnSpc>
+                <a:spcPct val="100000"/>
+              </a:lnSpc>
+              <a:spcBef>
+                <a:spcPts val="400"/>
+              </a:spcBef>
+              <a:spcAft>
+                <a:spcPts val="0"/>
+              </a:spcAft>
+              <a:buClr>
+                <a:srgbClr val="FF5050"/>
+              </a:buClr>
+              <a:buSzPts val="2000"/>
+              <a:buFont typeface="Times New Roman"/>
+              <a:buChar char="o"/>
+              <a:defRPr sz="2000" b="0" i="0" u="none" strike="noStrike" cap="none">
+                <a:solidFill>
+                  <a:schemeClr val="dk1"/>
+                </a:solidFill>
+                <a:latin typeface="Times New Roman"/>
+                <a:ea typeface="Times New Roman"/>
+                <a:cs typeface="Times New Roman"/>
+                <a:sym typeface="Times New Roman"/>
+              </a:defRPr>
+            </a:lvl8pPr>
+            <a:lvl9pPr marL="4114800" marR="0" lvl="8" indent="-355600" algn="l" rtl="0">
+              <a:lnSpc>
+                <a:spcPct val="100000"/>
+              </a:lnSpc>
+              <a:spcBef>
+                <a:spcPts val="400"/>
+              </a:spcBef>
+              <a:spcAft>
+                <a:spcPts val="0"/>
+              </a:spcAft>
+              <a:buClr>
+                <a:srgbClr val="FF5050"/>
+              </a:buClr>
+              <a:buSzPts val="2000"/>
+              <a:buFont typeface="Times New Roman"/>
+              <a:buChar char="o"/>
+              <a:defRPr sz="2000" b="0" i="0" u="none" strike="noStrike" cap="none">
+                <a:solidFill>
+                  <a:schemeClr val="dk1"/>
+                </a:solidFill>
+                <a:latin typeface="Times New Roman"/>
+                <a:ea typeface="Times New Roman"/>
+                <a:cs typeface="Times New Roman"/>
+                <a:sym typeface="Times New Roman"/>
+              </a:defRPr>
+            </a:lvl9pPr>
+          </a:lstStyle>
+          <a:p>
+            <a:pPr>
+              <a:lnSpc>
+                <a:spcPct val="150000"/>
+              </a:lnSpc>
+            </a:pPr>
+            <a:r>
+              <a:rPr lang="zh-TW" altLang="en-US" sz="2000" dirty="0">
+                <a:solidFill>
+                  <a:schemeClr val="tx1"/>
+                </a:solidFill>
+                <a:latin typeface="Times New Roman" panose="02020603050405020304" pitchFamily="18" charset="0"/>
+                <a:ea typeface="標楷體" panose="03000509000000000000" pitchFamily="65" charset="-120"/>
+                <a:cs typeface="Times New Roman" panose="02020603050405020304" pitchFamily="18" charset="0"/>
+              </a:rPr>
+              <a:t>定位</a:t>
+            </a:r>
+            <a:endParaRPr lang="en-US" altLang="zh-TW" sz="2000" dirty="0">
+              <a:solidFill>
+                <a:schemeClr val="tx1"/>
+              </a:solidFill>
+              <a:latin typeface="Times New Roman" panose="02020603050405020304" pitchFamily="18" charset="0"/>
+              <a:ea typeface="標楷體" panose="03000509000000000000" pitchFamily="65" charset="-120"/>
+              <a:cs typeface="Times New Roman" panose="02020603050405020304" pitchFamily="18" charset="0"/>
+            </a:endParaRPr>
+          </a:p>
+          <a:p>
+            <a:pPr lvl="1">
+              <a:lnSpc>
+                <a:spcPts val="3000"/>
+              </a:lnSpc>
+            </a:pPr>
+            <a:r>
+              <a:rPr lang="zh-TW" altLang="en-US" sz="1600" dirty="0">
+                <a:latin typeface="Times New Roman" panose="02020603050405020304" pitchFamily="18" charset="0"/>
+                <a:ea typeface="標楷體" panose="03000509000000000000" pitchFamily="65" charset="-120"/>
+                <a:cs typeface="Times New Roman" panose="02020603050405020304" pitchFamily="18" charset="0"/>
+              </a:rPr>
+              <a:t>由 </a:t>
+            </a:r>
+            <a:r>
+              <a:rPr lang="en-US" altLang="zh-TW" sz="1600" dirty="0">
+                <a:latin typeface="Times New Roman" panose="02020603050405020304" pitchFamily="18" charset="0"/>
+                <a:ea typeface="標楷體" panose="03000509000000000000" pitchFamily="65" charset="-120"/>
+                <a:cs typeface="Times New Roman" panose="02020603050405020304" pitchFamily="18" charset="0"/>
+              </a:rPr>
+              <a:t>AMD/Xilinx </a:t>
+            </a:r>
+            <a:r>
+              <a:rPr lang="zh-TW" altLang="en-US" sz="1600" dirty="0">
+                <a:latin typeface="Times New Roman" panose="02020603050405020304" pitchFamily="18" charset="0"/>
+                <a:ea typeface="標楷體" panose="03000509000000000000" pitchFamily="65" charset="-120"/>
+                <a:cs typeface="Times New Roman" panose="02020603050405020304" pitchFamily="18" charset="0"/>
+              </a:rPr>
+              <a:t>提供的 </a:t>
+            </a:r>
+            <a:r>
+              <a:rPr lang="en-US" altLang="zh-TW" sz="1600" dirty="0">
+                <a:latin typeface="Times New Roman" panose="02020603050405020304" pitchFamily="18" charset="0"/>
+                <a:ea typeface="標楷體" panose="03000509000000000000" pitchFamily="65" charset="-120"/>
+                <a:cs typeface="Times New Roman" panose="02020603050405020304" pitchFamily="18" charset="0"/>
+              </a:rPr>
+              <a:t>PCIe DMA </a:t>
+            </a:r>
+            <a:r>
+              <a:rPr lang="zh-TW" altLang="en-US" sz="1600" dirty="0">
+                <a:latin typeface="Times New Roman" panose="02020603050405020304" pitchFamily="18" charset="0"/>
+                <a:ea typeface="標楷體" panose="03000509000000000000" pitchFamily="65" charset="-120"/>
+                <a:cs typeface="Times New Roman" panose="02020603050405020304" pitchFamily="18" charset="0"/>
+              </a:rPr>
+              <a:t>驅動程式與軟體工具集合，主要負責 </a:t>
+            </a:r>
+            <a:r>
+              <a:rPr lang="en-US" altLang="zh-TW" sz="1600" dirty="0">
+                <a:latin typeface="Times New Roman" panose="02020603050405020304" pitchFamily="18" charset="0"/>
+                <a:ea typeface="標楷體" panose="03000509000000000000" pitchFamily="65" charset="-120"/>
+                <a:cs typeface="Times New Roman" panose="02020603050405020304" pitchFamily="18" charset="0"/>
+              </a:rPr>
+              <a:t>PC </a:t>
+            </a:r>
+            <a:r>
+              <a:rPr lang="zh-TW" altLang="en-US" sz="1600" dirty="0">
+                <a:latin typeface="Times New Roman" panose="02020603050405020304" pitchFamily="18" charset="0"/>
+                <a:ea typeface="標楷體" panose="03000509000000000000" pitchFamily="65" charset="-120"/>
+                <a:cs typeface="Times New Roman" panose="02020603050405020304" pitchFamily="18" charset="0"/>
+              </a:rPr>
+              <a:t>端與 </a:t>
+            </a:r>
+            <a:r>
+              <a:rPr lang="en-US" altLang="zh-TW" sz="1600" dirty="0">
+                <a:latin typeface="Times New Roman" panose="02020603050405020304" pitchFamily="18" charset="0"/>
+                <a:ea typeface="標楷體" panose="03000509000000000000" pitchFamily="65" charset="-120"/>
+                <a:cs typeface="Times New Roman" panose="02020603050405020304" pitchFamily="18" charset="0"/>
+              </a:rPr>
+              <a:t>FPGA PCIe DMA IP </a:t>
+            </a:r>
+            <a:r>
+              <a:rPr lang="zh-TW" altLang="en-US" sz="1600" dirty="0">
+                <a:latin typeface="Times New Roman" panose="02020603050405020304" pitchFamily="18" charset="0"/>
+                <a:ea typeface="標楷體" panose="03000509000000000000" pitchFamily="65" charset="-120"/>
+                <a:cs typeface="Times New Roman" panose="02020603050405020304" pitchFamily="18" charset="0"/>
+              </a:rPr>
+              <a:t>的溝通，讓主機能操作裝置、管理 </a:t>
+            </a:r>
+            <a:r>
+              <a:rPr lang="en-US" altLang="zh-TW" sz="1600" dirty="0">
+                <a:latin typeface="Times New Roman" panose="02020603050405020304" pitchFamily="18" charset="0"/>
+                <a:ea typeface="標楷體" panose="03000509000000000000" pitchFamily="65" charset="-120"/>
+                <a:cs typeface="Times New Roman" panose="02020603050405020304" pitchFamily="18" charset="0"/>
+              </a:rPr>
+              <a:t>DMA </a:t>
+            </a:r>
+            <a:r>
+              <a:rPr lang="zh-TW" altLang="en-US" sz="1600" dirty="0">
+                <a:latin typeface="Times New Roman" panose="02020603050405020304" pitchFamily="18" charset="0"/>
+                <a:ea typeface="標楷體" panose="03000509000000000000" pitchFamily="65" charset="-120"/>
+                <a:cs typeface="Times New Roman" panose="02020603050405020304" pitchFamily="18" charset="0"/>
+              </a:rPr>
+              <a:t>傳輸並測試資料收發</a:t>
+            </a:r>
+            <a:endParaRPr lang="en-US" altLang="zh-TW" sz="1600" dirty="0">
+              <a:latin typeface="Times New Roman" panose="02020603050405020304" pitchFamily="18" charset="0"/>
+              <a:ea typeface="標楷體" panose="03000509000000000000" pitchFamily="65" charset="-120"/>
+              <a:cs typeface="Times New Roman" panose="02020603050405020304" pitchFamily="18" charset="0"/>
+            </a:endParaRPr>
+          </a:p>
+          <a:p>
+            <a:pPr>
+              <a:lnSpc>
+                <a:spcPct val="150000"/>
+              </a:lnSpc>
+            </a:pPr>
+            <a:r>
+              <a:rPr lang="zh-TW" altLang="en-US" sz="2000" dirty="0">
+                <a:solidFill>
+                  <a:schemeClr val="tx1"/>
+                </a:solidFill>
+                <a:latin typeface="Times New Roman" panose="02020603050405020304" pitchFamily="18" charset="0"/>
+                <a:ea typeface="標楷體" panose="03000509000000000000" pitchFamily="65" charset="-120"/>
+                <a:cs typeface="Times New Roman" panose="02020603050405020304" pitchFamily="18" charset="0"/>
+              </a:rPr>
+              <a:t>功能</a:t>
+            </a:r>
+            <a:endParaRPr lang="en-US" altLang="zh-TW" sz="2000" dirty="0">
+              <a:solidFill>
+                <a:schemeClr val="tx1"/>
+              </a:solidFill>
+              <a:latin typeface="Times New Roman" panose="02020603050405020304" pitchFamily="18" charset="0"/>
+              <a:ea typeface="標楷體" panose="03000509000000000000" pitchFamily="65" charset="-120"/>
+              <a:cs typeface="Times New Roman" panose="02020603050405020304" pitchFamily="18" charset="0"/>
+            </a:endParaRPr>
+          </a:p>
+          <a:p>
+            <a:pPr lvl="1">
+              <a:lnSpc>
+                <a:spcPts val="3000"/>
+              </a:lnSpc>
+            </a:pPr>
+            <a:r>
+              <a:rPr lang="zh-TW" altLang="en-US" sz="1600" dirty="0">
+                <a:latin typeface="Times New Roman" panose="02020603050405020304" pitchFamily="18" charset="0"/>
+                <a:ea typeface="標楷體" panose="03000509000000000000" pitchFamily="65" charset="-120"/>
+                <a:cs typeface="Times New Roman" panose="02020603050405020304" pitchFamily="18" charset="0"/>
+              </a:rPr>
+              <a:t>提供多種的 </a:t>
+            </a:r>
+            <a:r>
+              <a:rPr lang="en-US" altLang="zh-TW" sz="1600" dirty="0">
+                <a:latin typeface="Times New Roman" panose="02020603050405020304" pitchFamily="18" charset="0"/>
+                <a:ea typeface="標楷體" panose="03000509000000000000" pitchFamily="65" charset="-120"/>
+                <a:cs typeface="Times New Roman" panose="02020603050405020304" pitchFamily="18" charset="0"/>
+              </a:rPr>
+              <a:t>PC </a:t>
+            </a:r>
+            <a:r>
+              <a:rPr lang="zh-TW" altLang="en-US" sz="1600" dirty="0">
+                <a:latin typeface="Times New Roman" panose="02020603050405020304" pitchFamily="18" charset="0"/>
+                <a:ea typeface="標楷體" panose="03000509000000000000" pitchFamily="65" charset="-120"/>
+                <a:cs typeface="Times New Roman" panose="02020603050405020304" pitchFamily="18" charset="0"/>
+              </a:rPr>
+              <a:t>驅動程式，使電腦能與相容的 </a:t>
+            </a:r>
+            <a:r>
+              <a:rPr lang="en-US" altLang="zh-TW" sz="1600" dirty="0">
+                <a:latin typeface="Times New Roman" panose="02020603050405020304" pitchFamily="18" charset="0"/>
+                <a:ea typeface="標楷體" panose="03000509000000000000" pitchFamily="65" charset="-120"/>
+                <a:cs typeface="Times New Roman" panose="02020603050405020304" pitchFamily="18" charset="0"/>
+              </a:rPr>
+              <a:t>FPGA DMA IP </a:t>
+            </a:r>
+            <a:r>
+              <a:rPr lang="zh-TW" altLang="en-US" sz="1600" dirty="0">
+                <a:latin typeface="Times New Roman" panose="02020603050405020304" pitchFamily="18" charset="0"/>
+                <a:ea typeface="標楷體" panose="03000509000000000000" pitchFamily="65" charset="-120"/>
+                <a:cs typeface="Times New Roman" panose="02020603050405020304" pitchFamily="18" charset="0"/>
+              </a:rPr>
+              <a:t>溝通</a:t>
+            </a:r>
+            <a:endParaRPr lang="en-US" altLang="zh-TW" sz="1600" dirty="0">
+              <a:latin typeface="Times New Roman" panose="02020603050405020304" pitchFamily="18" charset="0"/>
+              <a:ea typeface="標楷體" panose="03000509000000000000" pitchFamily="65" charset="-120"/>
+              <a:cs typeface="Times New Roman" panose="02020603050405020304" pitchFamily="18" charset="0"/>
+            </a:endParaRPr>
+          </a:p>
+          <a:p>
+            <a:pPr lvl="1">
+              <a:lnSpc>
+                <a:spcPts val="3000"/>
+              </a:lnSpc>
+            </a:pPr>
+            <a:r>
+              <a:rPr lang="zh-TW" altLang="en-US" sz="1600" dirty="0">
+                <a:latin typeface="Times New Roman" panose="02020603050405020304" pitchFamily="18" charset="0"/>
+                <a:ea typeface="標楷體" panose="03000509000000000000" pitchFamily="65" charset="-120"/>
+                <a:cs typeface="Times New Roman" panose="02020603050405020304" pitchFamily="18" charset="0"/>
+              </a:rPr>
+              <a:t>提供相關工具，協助執行資料傳輸、裝置資源存取與 </a:t>
+            </a:r>
+            <a:r>
+              <a:rPr lang="en-US" altLang="zh-TW" sz="1600" dirty="0">
+                <a:latin typeface="Times New Roman" panose="02020603050405020304" pitchFamily="18" charset="0"/>
+                <a:ea typeface="標楷體" panose="03000509000000000000" pitchFamily="65" charset="-120"/>
+                <a:cs typeface="Times New Roman" panose="02020603050405020304" pitchFamily="18" charset="0"/>
+              </a:rPr>
+              <a:t>DMA </a:t>
+            </a:r>
+            <a:r>
+              <a:rPr lang="zh-TW" altLang="en-US" sz="1600" dirty="0">
+                <a:latin typeface="Times New Roman" panose="02020603050405020304" pitchFamily="18" charset="0"/>
+                <a:ea typeface="標楷體" panose="03000509000000000000" pitchFamily="65" charset="-120"/>
+                <a:cs typeface="Times New Roman" panose="02020603050405020304" pitchFamily="18" charset="0"/>
+              </a:rPr>
+              <a:t>功能測試</a:t>
+            </a:r>
+            <a:endParaRPr lang="en-US" altLang="zh-TW" sz="1600" dirty="0">
+              <a:latin typeface="Times New Roman" panose="02020603050405020304" pitchFamily="18" charset="0"/>
+              <a:ea typeface="標楷體" panose="03000509000000000000" pitchFamily="65" charset="-120"/>
+              <a:cs typeface="Times New Roman" panose="02020603050405020304" pitchFamily="18" charset="0"/>
+            </a:endParaRPr>
+          </a:p>
+          <a:p>
+            <a:pPr>
+              <a:lnSpc>
+                <a:spcPts val="3000"/>
+              </a:lnSpc>
+            </a:pPr>
+            <a:r>
+              <a:rPr lang="zh-TW" altLang="en-US" sz="2000" dirty="0">
+                <a:latin typeface="Times New Roman" panose="02020603050405020304" pitchFamily="18" charset="0"/>
+                <a:ea typeface="標楷體" panose="03000509000000000000" pitchFamily="65" charset="-120"/>
+                <a:cs typeface="Times New Roman" panose="02020603050405020304" pitchFamily="18" charset="0"/>
+              </a:rPr>
+              <a:t>對 </a:t>
+            </a:r>
+            <a:r>
+              <a:rPr lang="en-US" altLang="zh-TW" sz="2000" dirty="0">
+                <a:latin typeface="Times New Roman" panose="02020603050405020304" pitchFamily="18" charset="0"/>
+                <a:ea typeface="標楷體" panose="03000509000000000000" pitchFamily="65" charset="-120"/>
+                <a:cs typeface="Times New Roman" panose="02020603050405020304" pitchFamily="18" charset="0"/>
+              </a:rPr>
+              <a:t>FPGA </a:t>
+            </a:r>
+            <a:r>
+              <a:rPr lang="zh-TW" altLang="en-US" sz="2000" dirty="0">
+                <a:latin typeface="Times New Roman" panose="02020603050405020304" pitchFamily="18" charset="0"/>
+                <a:ea typeface="標楷體" panose="03000509000000000000" pitchFamily="65" charset="-120"/>
+                <a:cs typeface="Times New Roman" panose="02020603050405020304" pitchFamily="18" charset="0"/>
+              </a:rPr>
+              <a:t>擷取卡的幫助</a:t>
+            </a:r>
+          </a:p>
+          <a:p>
+            <a:pPr lvl="1">
+              <a:lnSpc>
+                <a:spcPts val="3000"/>
+              </a:lnSpc>
+            </a:pPr>
+            <a:r>
+              <a:rPr lang="zh-TW" altLang="en-US" sz="1600" dirty="0">
+                <a:latin typeface="Times New Roman" panose="02020603050405020304" pitchFamily="18" charset="0"/>
+                <a:ea typeface="標楷體" panose="03000509000000000000" pitchFamily="65" charset="-120"/>
+                <a:cs typeface="Times New Roman" panose="02020603050405020304" pitchFamily="18" charset="0"/>
+              </a:rPr>
+              <a:t>可作為擷取卡的 </a:t>
+            </a:r>
+            <a:r>
+              <a:rPr lang="en-US" altLang="zh-TW" sz="1600" dirty="0">
+                <a:latin typeface="Times New Roman" panose="02020603050405020304" pitchFamily="18" charset="0"/>
+                <a:ea typeface="標楷體" panose="03000509000000000000" pitchFamily="65" charset="-120"/>
+                <a:cs typeface="Times New Roman" panose="02020603050405020304" pitchFamily="18" charset="0"/>
+              </a:rPr>
+              <a:t>PC </a:t>
+            </a:r>
+            <a:r>
+              <a:rPr lang="zh-TW" altLang="en-US" sz="1600" dirty="0">
+                <a:latin typeface="Times New Roman" panose="02020603050405020304" pitchFamily="18" charset="0"/>
+                <a:ea typeface="標楷體" panose="03000509000000000000" pitchFamily="65" charset="-120"/>
+                <a:cs typeface="Times New Roman" panose="02020603050405020304" pitchFamily="18" charset="0"/>
+              </a:rPr>
+              <a:t>端驅動程式基礎，協助 </a:t>
+            </a:r>
+            <a:r>
+              <a:rPr lang="en-US" altLang="zh-TW" sz="1600" dirty="0">
+                <a:latin typeface="Times New Roman" panose="02020603050405020304" pitchFamily="18" charset="0"/>
+                <a:ea typeface="標楷體" panose="03000509000000000000" pitchFamily="65" charset="-120"/>
+                <a:cs typeface="Times New Roman" panose="02020603050405020304" pitchFamily="18" charset="0"/>
+              </a:rPr>
+              <a:t>FPGA </a:t>
+            </a:r>
+            <a:r>
+              <a:rPr lang="zh-TW" altLang="en-US" sz="1600" dirty="0">
+                <a:latin typeface="Times New Roman" panose="02020603050405020304" pitchFamily="18" charset="0"/>
+                <a:ea typeface="標楷體" panose="03000509000000000000" pitchFamily="65" charset="-120"/>
+                <a:cs typeface="Times New Roman" panose="02020603050405020304" pitchFamily="18" charset="0"/>
+              </a:rPr>
+              <a:t>將影像資料透過 </a:t>
+            </a:r>
+            <a:r>
+              <a:rPr lang="en-US" altLang="zh-TW" sz="1600" dirty="0">
+                <a:latin typeface="Times New Roman" panose="02020603050405020304" pitchFamily="18" charset="0"/>
+                <a:ea typeface="標楷體" panose="03000509000000000000" pitchFamily="65" charset="-120"/>
+                <a:cs typeface="Times New Roman" panose="02020603050405020304" pitchFamily="18" charset="0"/>
+              </a:rPr>
+              <a:t>PCIe DMA </a:t>
+            </a:r>
+            <a:r>
+              <a:rPr lang="zh-TW" altLang="en-US" sz="1600" dirty="0">
+                <a:latin typeface="Times New Roman" panose="02020603050405020304" pitchFamily="18" charset="0"/>
+                <a:ea typeface="標楷體" panose="03000509000000000000" pitchFamily="65" charset="-120"/>
+                <a:cs typeface="Times New Roman" panose="02020603050405020304" pitchFamily="18" charset="0"/>
+              </a:rPr>
+              <a:t>傳送至 </a:t>
+            </a:r>
+            <a:r>
+              <a:rPr lang="en-US" altLang="zh-TW" sz="1600" dirty="0">
+                <a:latin typeface="Times New Roman" panose="02020603050405020304" pitchFamily="18" charset="0"/>
+                <a:ea typeface="標楷體" panose="03000509000000000000" pitchFamily="65" charset="-120"/>
+                <a:cs typeface="Times New Roman" panose="02020603050405020304" pitchFamily="18" charset="0"/>
+              </a:rPr>
+              <a:t>PC </a:t>
+            </a:r>
+            <a:r>
+              <a:rPr lang="zh-TW" altLang="en-US" sz="1600" dirty="0">
+                <a:latin typeface="Times New Roman" panose="02020603050405020304" pitchFamily="18" charset="0"/>
+                <a:ea typeface="標楷體" panose="03000509000000000000" pitchFamily="65" charset="-120"/>
+                <a:cs typeface="Times New Roman" panose="02020603050405020304" pitchFamily="18" charset="0"/>
+              </a:rPr>
+              <a:t>記憶體</a:t>
+            </a:r>
+            <a:endParaRPr lang="en-US" altLang="zh-TW" sz="1600" dirty="0">
+              <a:solidFill>
+                <a:schemeClr val="tx1"/>
+              </a:solidFill>
+              <a:latin typeface="Times New Roman" panose="02020603050405020304" pitchFamily="18" charset="0"/>
+              <a:ea typeface="標楷體" panose="03000509000000000000" pitchFamily="65" charset="-120"/>
+              <a:cs typeface="Times New Roman" panose="02020603050405020304" pitchFamily="18" charset="0"/>
+            </a:endParaRPr>
+          </a:p>
+          <a:p>
+            <a:pPr lvl="1">
+              <a:lnSpc>
+                <a:spcPts val="3000"/>
+              </a:lnSpc>
+            </a:pPr>
+            <a:endParaRPr lang="zh-TW" altLang="en-US" sz="1600" dirty="0">
+              <a:latin typeface="Times New Roman" panose="02020603050405020304" pitchFamily="18" charset="0"/>
+              <a:ea typeface="標楷體" panose="03000509000000000000" pitchFamily="65" charset="-120"/>
+              <a:cs typeface="Times New Roman" panose="02020603050405020304" pitchFamily="18" charset="0"/>
+            </a:endParaRPr>
+          </a:p>
+          <a:p>
+            <a:pPr lvl="1">
+              <a:lnSpc>
+                <a:spcPts val="3000"/>
+              </a:lnSpc>
+            </a:pPr>
+            <a:endParaRPr lang="en-US" altLang="zh-TW" sz="1600" dirty="0">
+              <a:solidFill>
+                <a:schemeClr val="tx1"/>
+              </a:solidFill>
+              <a:latin typeface="Times New Roman" panose="02020603050405020304" pitchFamily="18" charset="0"/>
+              <a:ea typeface="標楷體" panose="03000509000000000000" pitchFamily="65" charset="-120"/>
+              <a:cs typeface="Times New Roman" panose="02020603050405020304" pitchFamily="18" charset="0"/>
+            </a:endParaRPr>
+          </a:p>
+        </p:txBody>
+      </p:sp>
+      <p:pic>
+        <p:nvPicPr>
+          <p:cNvPr id="6" name="圖片 5">
+            <a:extLst>
+              <a:ext uri="{FF2B5EF4-FFF2-40B4-BE49-F238E27FC236}">
+                <a16:creationId xmlns:a16="http://schemas.microsoft.com/office/drawing/2014/main" id="{F6AE91BC-F373-E0EA-784E-FE965295B26D}"/>
+              </a:ext>
+            </a:extLst>
+          </p:cNvPr>
+          <p:cNvPicPr>
+            <a:picLocks noChangeAspect="1"/>
+          </p:cNvPicPr>
+          <p:nvPr/>
+        </p:nvPicPr>
+        <p:blipFill>
+          <a:blip r:embed="rId3"/>
+          <a:stretch>
+            <a:fillRect/>
+          </a:stretch>
+        </p:blipFill>
+        <p:spPr>
+          <a:xfrm>
+            <a:off x="432707" y="5153297"/>
+            <a:ext cx="9040586" cy="966490"/>
+          </a:xfrm>
+          <a:prstGeom prst="rect">
+            <a:avLst/>
+          </a:prstGeom>
+        </p:spPr>
+      </p:pic>
+      <p:sp>
+        <p:nvSpPr>
+          <p:cNvPr id="7" name="文字方塊 6">
+            <a:extLst>
+              <a:ext uri="{FF2B5EF4-FFF2-40B4-BE49-F238E27FC236}">
+                <a16:creationId xmlns:a16="http://schemas.microsoft.com/office/drawing/2014/main" id="{3B045C83-0B0C-2CBF-81C8-166EB12F11E6}"/>
+              </a:ext>
+            </a:extLst>
+          </p:cNvPr>
+          <p:cNvSpPr txBox="1"/>
+          <p:nvPr/>
+        </p:nvSpPr>
+        <p:spPr>
+          <a:xfrm>
+            <a:off x="1787236" y="6384072"/>
+            <a:ext cx="5802283" cy="276999"/>
+          </a:xfrm>
+          <a:prstGeom prst="rect">
+            <a:avLst/>
+          </a:prstGeom>
+          <a:noFill/>
+        </p:spPr>
+        <p:txBody>
+          <a:bodyPr wrap="square">
+            <a:spAutoFit/>
+          </a:bodyPr>
+          <a:lstStyle/>
+          <a:p>
+            <a:r>
+              <a:rPr lang="en-US" altLang="zh-TW" sz="1200" dirty="0">
+                <a:latin typeface="Times New Roman" panose="02020603050405020304" pitchFamily="18" charset="0"/>
+                <a:cs typeface="Times New Roman" panose="02020603050405020304" pitchFamily="18" charset="0"/>
+              </a:rPr>
+              <a:t>[5] https://github.com/Xilinx/dma_ip_drivers</a:t>
+            </a:r>
+            <a:endParaRPr lang="zh-TW" altLang="en-US" sz="1200" dirty="0">
+              <a:latin typeface="Times New Roman" panose="02020603050405020304" pitchFamily="18" charset="0"/>
+              <a:cs typeface="Times New Roman" panose="02020603050405020304" pitchFamily="18" charset="0"/>
+            </a:endParaRPr>
+          </a:p>
+        </p:txBody>
+      </p:sp>
+    </p:spTree>
+    <p:extLst>
+      <p:ext uri="{BB962C8B-B14F-4D97-AF65-F5344CB8AC3E}">
+        <p14:creationId xmlns:p14="http://schemas.microsoft.com/office/powerpoint/2010/main" val="2802577685"/>
+      </p:ext>
+    </p:extLst>
+  </p:cSld>
+  <p:clrMapOvr>
+    <a:masterClrMapping/>
+  </p:clrMapOvr>
+</p:sld>
+</file>
+
+<file path=ppt/slides/slide11.xml><?xml version="1.0" encoding="utf-8"?>
+<p:sld xmlns:a="http://schemas.openxmlformats.org/drawingml/2006/main" xmlns:r="http://schemas.openxmlformats.org/officeDocument/2006/relationships" xmlns:p="http://schemas.openxmlformats.org/presentationml/2006/main">
+  <p:cSld>
+    <p:spTree>
+      <p:nvGrpSpPr>
+        <p:cNvPr id="1" name="">
+          <a:extLst>
+            <a:ext uri="{FF2B5EF4-FFF2-40B4-BE49-F238E27FC236}">
+              <a16:creationId xmlns:a16="http://schemas.microsoft.com/office/drawing/2014/main" id="{C25E9AAA-7E36-1E17-83F9-FD3A18A28BE9}"/>
+            </a:ext>
+          </a:extLst>
+        </p:cNvPr>
+        <p:cNvGrpSpPr/>
+        <p:nvPr/>
+      </p:nvGrpSpPr>
+      <p:grpSpPr>
+        <a:xfrm>
+          <a:off x="0" y="0"/>
+          <a:ext cx="0" cy="0"/>
+          <a:chOff x="0" y="0"/>
+          <a:chExt cx="0" cy="0"/>
+        </a:xfrm>
+      </p:grpSpPr>
+      <p:sp>
+        <p:nvSpPr>
+          <p:cNvPr id="15" name="標題 1">
+            <a:extLst>
+              <a:ext uri="{FF2B5EF4-FFF2-40B4-BE49-F238E27FC236}">
+                <a16:creationId xmlns:a16="http://schemas.microsoft.com/office/drawing/2014/main" id="{142C8726-E890-9988-40FC-8984FDA21FEE}"/>
+              </a:ext>
+            </a:extLst>
+          </p:cNvPr>
+          <p:cNvSpPr>
+            <a:spLocks noGrp="1"/>
+          </p:cNvSpPr>
+          <p:nvPr>
+            <p:ph type="title"/>
+          </p:nvPr>
+        </p:nvSpPr>
+        <p:spPr>
+          <a:xfrm>
+            <a:off x="609602" y="609600"/>
+            <a:ext cx="8077200" cy="533400"/>
+          </a:xfrm>
+          <a:ln>
+            <a:noFill/>
+          </a:ln>
+        </p:spPr>
+        <p:txBody>
+          <a:bodyPr/>
+          <a:lstStyle/>
+          <a:p>
+            <a:pPr algn="l" fontAlgn="t"/>
+            <a:r>
+              <a:rPr lang="zh-TW" altLang="en-US" dirty="0">
+                <a:latin typeface="Times New Roman" panose="02020603050405020304" pitchFamily="18" charset="0"/>
+                <a:ea typeface="標楷體" panose="03000509000000000000" pitchFamily="65" charset="-120"/>
+                <a:cs typeface="Times New Roman" panose="02020603050405020304" pitchFamily="18" charset="0"/>
+              </a:rPr>
+              <a:t>本次進度</a:t>
+            </a:r>
+            <a:r>
+              <a:rPr lang="en-US" altLang="zh-TW" dirty="0">
+                <a:latin typeface="Times New Roman" panose="02020603050405020304" pitchFamily="18" charset="0"/>
+                <a:ea typeface="標楷體" panose="03000509000000000000" pitchFamily="65" charset="-120"/>
+                <a:cs typeface="Times New Roman" panose="02020603050405020304" pitchFamily="18" charset="0"/>
+              </a:rPr>
+              <a:t>: Xilinx </a:t>
+            </a:r>
+            <a:r>
+              <a:rPr lang="zh-TW" altLang="en-US" dirty="0">
+                <a:latin typeface="Times New Roman" panose="02020603050405020304" pitchFamily="18" charset="0"/>
+                <a:ea typeface="標楷體" panose="03000509000000000000" pitchFamily="65" charset="-120"/>
+                <a:cs typeface="Times New Roman" panose="02020603050405020304" pitchFamily="18" charset="0"/>
+              </a:rPr>
+              <a:t>生態</a:t>
+            </a:r>
+          </a:p>
+        </p:txBody>
+      </p:sp>
+      <p:sp>
+        <p:nvSpPr>
+          <p:cNvPr id="8" name="文字版面配置區 6">
+            <a:extLst>
+              <a:ext uri="{FF2B5EF4-FFF2-40B4-BE49-F238E27FC236}">
+                <a16:creationId xmlns:a16="http://schemas.microsoft.com/office/drawing/2014/main" id="{521FBAA4-6E6B-1B82-9C1F-77D9FAD35C41}"/>
+              </a:ext>
+            </a:extLst>
+          </p:cNvPr>
+          <p:cNvSpPr txBox="1"/>
+          <p:nvPr/>
+        </p:nvSpPr>
+        <p:spPr>
+          <a:xfrm>
+            <a:off x="609602" y="935857"/>
+            <a:ext cx="8686796" cy="5312543"/>
+          </a:xfrm>
+          <a:prstGeom prst="rect">
+            <a:avLst/>
+          </a:prstGeom>
+          <a:noFill/>
+          <a:ln>
+            <a:noFill/>
+          </a:ln>
+        </p:spPr>
+        <p:txBody>
+          <a:bodyPr spcFirstLastPara="1" wrap="square" lIns="91425" tIns="45700" rIns="91425" bIns="45700" anchor="t" anchorCtr="0">
+            <a:noAutofit/>
+          </a:bodyPr>
+          <a:lstStyle>
+            <a:defPPr marR="0" lvl="0" algn="l" rtl="0">
+              <a:lnSpc>
+                <a:spcPct val="100000"/>
+              </a:lnSpc>
+              <a:spcBef>
+                <a:spcPts val="0"/>
+              </a:spcBef>
+              <a:spcAft>
+                <a:spcPts val="0"/>
+              </a:spcAft>
+            </a:defPPr>
+            <a:lvl1pPr marL="457200" marR="0" lvl="0" indent="-406400" algn="l" rtl="0">
+              <a:lnSpc>
+                <a:spcPct val="100000"/>
+              </a:lnSpc>
+              <a:spcBef>
+                <a:spcPts val="560"/>
+              </a:spcBef>
+              <a:spcAft>
+                <a:spcPts val="0"/>
+              </a:spcAft>
+              <a:buClr>
+                <a:schemeClr val="accent2"/>
+              </a:buClr>
+              <a:buSzPts val="2800"/>
+              <a:buFont typeface="Noto Sans Symbols"/>
+              <a:buChar char="❖"/>
+              <a:defRPr sz="2800" b="0" i="0" u="none" strike="noStrike" cap="none">
+                <a:solidFill>
+                  <a:schemeClr val="dk1"/>
+                </a:solidFill>
+                <a:latin typeface="Times New Roman"/>
+                <a:ea typeface="Times New Roman"/>
+                <a:cs typeface="Times New Roman"/>
+                <a:sym typeface="Times New Roman"/>
+              </a:defRPr>
+            </a:lvl1pPr>
+            <a:lvl2pPr marL="914400" marR="0" lvl="1" indent="-381000" algn="l" rtl="0">
+              <a:lnSpc>
+                <a:spcPct val="100000"/>
+              </a:lnSpc>
+              <a:spcBef>
+                <a:spcPts val="480"/>
+              </a:spcBef>
+              <a:spcAft>
+                <a:spcPts val="0"/>
+              </a:spcAft>
+              <a:buClr>
+                <a:srgbClr val="FF5050"/>
+              </a:buClr>
+              <a:buSzPts val="2400"/>
+              <a:buFont typeface="Noto Sans Symbols"/>
+              <a:buChar char="▪"/>
+              <a:defRPr sz="2400" b="0" i="0" u="none" strike="noStrike" cap="none">
+                <a:solidFill>
+                  <a:schemeClr val="dk1"/>
+                </a:solidFill>
+                <a:latin typeface="Times New Roman"/>
+                <a:ea typeface="Times New Roman"/>
+                <a:cs typeface="Times New Roman"/>
+                <a:sym typeface="Times New Roman"/>
+              </a:defRPr>
+            </a:lvl2pPr>
+            <a:lvl3pPr marL="1371600" marR="0" lvl="2" indent="-355600" algn="l" rtl="0">
+              <a:lnSpc>
+                <a:spcPct val="100000"/>
+              </a:lnSpc>
+              <a:spcBef>
+                <a:spcPts val="400"/>
+              </a:spcBef>
+              <a:spcAft>
+                <a:spcPts val="0"/>
+              </a:spcAft>
+              <a:buClr>
+                <a:srgbClr val="6699FF"/>
+              </a:buClr>
+              <a:buSzPts val="2000"/>
+              <a:buFont typeface="Times New Roman"/>
+              <a:buChar char="•"/>
+              <a:defRPr sz="2000" b="0" i="0" u="none" strike="noStrike" cap="none">
+                <a:solidFill>
+                  <a:schemeClr val="dk1"/>
+                </a:solidFill>
+                <a:latin typeface="Times New Roman"/>
+                <a:ea typeface="Times New Roman"/>
+                <a:cs typeface="Times New Roman"/>
+                <a:sym typeface="Times New Roman"/>
+              </a:defRPr>
+            </a:lvl3pPr>
+            <a:lvl4pPr marL="1828800" marR="0" lvl="3" indent="-355600" algn="l" rtl="0">
+              <a:lnSpc>
+                <a:spcPct val="100000"/>
+              </a:lnSpc>
+              <a:spcBef>
+                <a:spcPts val="400"/>
+              </a:spcBef>
+              <a:spcAft>
+                <a:spcPts val="0"/>
+              </a:spcAft>
+              <a:buClr>
+                <a:srgbClr val="FF5050"/>
+              </a:buClr>
+              <a:buSzPts val="2000"/>
+              <a:buFont typeface="Times New Roman"/>
+              <a:buChar char="o"/>
+              <a:defRPr sz="2000" b="0" i="0" u="none" strike="noStrike" cap="none">
+                <a:solidFill>
+                  <a:schemeClr val="dk1"/>
+                </a:solidFill>
+                <a:latin typeface="Times New Roman"/>
+                <a:ea typeface="Times New Roman"/>
+                <a:cs typeface="Times New Roman"/>
+                <a:sym typeface="Times New Roman"/>
+              </a:defRPr>
+            </a:lvl4pPr>
+            <a:lvl5pPr marL="2286000" marR="0" lvl="4" indent="-355600" algn="l" rtl="0">
+              <a:lnSpc>
+                <a:spcPct val="100000"/>
+              </a:lnSpc>
+              <a:spcBef>
+                <a:spcPts val="400"/>
+              </a:spcBef>
+              <a:spcAft>
+                <a:spcPts val="0"/>
+              </a:spcAft>
+              <a:buClr>
+                <a:srgbClr val="FF5050"/>
+              </a:buClr>
+              <a:buSzPts val="2000"/>
+              <a:buFont typeface="Times New Roman"/>
+              <a:buChar char="o"/>
+              <a:defRPr sz="2000" b="0" i="0" u="none" strike="noStrike" cap="none">
+                <a:solidFill>
+                  <a:schemeClr val="dk1"/>
+                </a:solidFill>
+                <a:latin typeface="Times New Roman"/>
+                <a:ea typeface="Times New Roman"/>
+                <a:cs typeface="Times New Roman"/>
+                <a:sym typeface="Times New Roman"/>
+              </a:defRPr>
+            </a:lvl5pPr>
+            <a:lvl6pPr marL="2743200" marR="0" lvl="5" indent="-355600" algn="l" rtl="0">
+              <a:lnSpc>
+                <a:spcPct val="100000"/>
+              </a:lnSpc>
+              <a:spcBef>
+                <a:spcPts val="400"/>
+              </a:spcBef>
+              <a:spcAft>
+                <a:spcPts val="0"/>
+              </a:spcAft>
+              <a:buClr>
+                <a:srgbClr val="FF5050"/>
+              </a:buClr>
+              <a:buSzPts val="2000"/>
+              <a:buFont typeface="Times New Roman"/>
+              <a:buChar char="o"/>
+              <a:defRPr sz="2000" b="0" i="0" u="none" strike="noStrike" cap="none">
+                <a:solidFill>
+                  <a:schemeClr val="dk1"/>
+                </a:solidFill>
+                <a:latin typeface="Times New Roman"/>
+                <a:ea typeface="Times New Roman"/>
+                <a:cs typeface="Times New Roman"/>
+                <a:sym typeface="Times New Roman"/>
+              </a:defRPr>
+            </a:lvl6pPr>
+            <a:lvl7pPr marL="3200400" marR="0" lvl="6" indent="-355600" algn="l" rtl="0">
+              <a:lnSpc>
+                <a:spcPct val="100000"/>
+              </a:lnSpc>
+              <a:spcBef>
+                <a:spcPts val="400"/>
+              </a:spcBef>
+              <a:spcAft>
+                <a:spcPts val="0"/>
+              </a:spcAft>
+              <a:buClr>
+                <a:srgbClr val="FF5050"/>
+              </a:buClr>
+              <a:buSzPts val="2000"/>
+              <a:buFont typeface="Times New Roman"/>
+              <a:buChar char="o"/>
+              <a:defRPr sz="2000" b="0" i="0" u="none" strike="noStrike" cap="none">
+                <a:solidFill>
+                  <a:schemeClr val="dk1"/>
+                </a:solidFill>
+                <a:latin typeface="Times New Roman"/>
+                <a:ea typeface="Times New Roman"/>
+                <a:cs typeface="Times New Roman"/>
+                <a:sym typeface="Times New Roman"/>
+              </a:defRPr>
+            </a:lvl7pPr>
+            <a:lvl8pPr marL="3657600" marR="0" lvl="7" indent="-355600" algn="l" rtl="0">
+              <a:lnSpc>
+                <a:spcPct val="100000"/>
+              </a:lnSpc>
+              <a:spcBef>
+                <a:spcPts val="400"/>
+              </a:spcBef>
+              <a:spcAft>
+                <a:spcPts val="0"/>
+              </a:spcAft>
+              <a:buClr>
+                <a:srgbClr val="FF5050"/>
+              </a:buClr>
+              <a:buSzPts val="2000"/>
+              <a:buFont typeface="Times New Roman"/>
+              <a:buChar char="o"/>
+              <a:defRPr sz="2000" b="0" i="0" u="none" strike="noStrike" cap="none">
+                <a:solidFill>
+                  <a:schemeClr val="dk1"/>
+                </a:solidFill>
+                <a:latin typeface="Times New Roman"/>
+                <a:ea typeface="Times New Roman"/>
+                <a:cs typeface="Times New Roman"/>
+                <a:sym typeface="Times New Roman"/>
+              </a:defRPr>
+            </a:lvl8pPr>
+            <a:lvl9pPr marL="4114800" marR="0" lvl="8" indent="-355600" algn="l" rtl="0">
+              <a:lnSpc>
+                <a:spcPct val="100000"/>
+              </a:lnSpc>
+              <a:spcBef>
+                <a:spcPts val="400"/>
+              </a:spcBef>
+              <a:spcAft>
+                <a:spcPts val="0"/>
+              </a:spcAft>
+              <a:buClr>
+                <a:srgbClr val="FF5050"/>
+              </a:buClr>
+              <a:buSzPts val="2000"/>
+              <a:buFont typeface="Times New Roman"/>
+              <a:buChar char="o"/>
+              <a:defRPr sz="2000" b="0" i="0" u="none" strike="noStrike" cap="none">
+                <a:solidFill>
+                  <a:schemeClr val="dk1"/>
+                </a:solidFill>
+                <a:latin typeface="Times New Roman"/>
+                <a:ea typeface="Times New Roman"/>
+                <a:cs typeface="Times New Roman"/>
+                <a:sym typeface="Times New Roman"/>
+              </a:defRPr>
+            </a:lvl9pPr>
+          </a:lstStyle>
+          <a:p>
+            <a:pPr>
+              <a:lnSpc>
+                <a:spcPct val="150000"/>
+              </a:lnSpc>
+            </a:pPr>
+            <a:r>
+              <a:rPr lang="zh-TW" altLang="en-US" sz="2000" dirty="0">
+                <a:solidFill>
+                  <a:schemeClr val="tx1"/>
+                </a:solidFill>
+                <a:latin typeface="Times New Roman" panose="02020603050405020304" pitchFamily="18" charset="0"/>
+                <a:ea typeface="標楷體" panose="03000509000000000000" pitchFamily="65" charset="-120"/>
+                <a:cs typeface="Times New Roman" panose="02020603050405020304" pitchFamily="18" charset="0"/>
+              </a:rPr>
+              <a:t>架構</a:t>
+            </a:r>
+            <a:endParaRPr lang="en-US" altLang="zh-TW" sz="2000" dirty="0">
+              <a:solidFill>
+                <a:schemeClr val="tx1"/>
+              </a:solidFill>
+              <a:latin typeface="Times New Roman" panose="02020603050405020304" pitchFamily="18" charset="0"/>
+              <a:ea typeface="標楷體" panose="03000509000000000000" pitchFamily="65" charset="-120"/>
+              <a:cs typeface="Times New Roman" panose="02020603050405020304" pitchFamily="18" charset="0"/>
+            </a:endParaRPr>
+          </a:p>
+          <a:p>
+            <a:pPr>
+              <a:lnSpc>
+                <a:spcPct val="150000"/>
+              </a:lnSpc>
+            </a:pPr>
+            <a:endParaRPr lang="en-US" altLang="zh-TW" sz="2000" dirty="0">
+              <a:solidFill>
+                <a:schemeClr val="tx1"/>
+              </a:solidFill>
+              <a:latin typeface="Times New Roman" panose="02020603050405020304" pitchFamily="18" charset="0"/>
+              <a:ea typeface="標楷體" panose="03000509000000000000" pitchFamily="65" charset="-120"/>
+              <a:cs typeface="Times New Roman" panose="02020603050405020304" pitchFamily="18" charset="0"/>
+            </a:endParaRPr>
+          </a:p>
+          <a:p>
+            <a:pPr>
+              <a:lnSpc>
+                <a:spcPct val="150000"/>
+              </a:lnSpc>
+            </a:pPr>
+            <a:endParaRPr lang="en-US" altLang="zh-TW" sz="2000" dirty="0">
+              <a:solidFill>
+                <a:schemeClr val="tx1"/>
+              </a:solidFill>
+              <a:latin typeface="Times New Roman" panose="02020603050405020304" pitchFamily="18" charset="0"/>
+              <a:ea typeface="標楷體" panose="03000509000000000000" pitchFamily="65" charset="-120"/>
+              <a:cs typeface="Times New Roman" panose="02020603050405020304" pitchFamily="18" charset="0"/>
+            </a:endParaRPr>
+          </a:p>
+          <a:p>
+            <a:pPr>
+              <a:lnSpc>
+                <a:spcPct val="150000"/>
+              </a:lnSpc>
+            </a:pPr>
+            <a:endParaRPr lang="en-US" altLang="zh-TW" sz="2000" dirty="0">
+              <a:solidFill>
+                <a:schemeClr val="tx1"/>
+              </a:solidFill>
+              <a:latin typeface="Times New Roman" panose="02020603050405020304" pitchFamily="18" charset="0"/>
+              <a:ea typeface="標楷體" panose="03000509000000000000" pitchFamily="65" charset="-120"/>
+              <a:cs typeface="Times New Roman" panose="02020603050405020304" pitchFamily="18" charset="0"/>
+            </a:endParaRPr>
+          </a:p>
+          <a:p>
+            <a:pPr>
+              <a:lnSpc>
+                <a:spcPct val="150000"/>
+              </a:lnSpc>
+            </a:pPr>
+            <a:r>
+              <a:rPr lang="zh-TW" altLang="en-US" sz="2000" dirty="0">
+                <a:solidFill>
+                  <a:schemeClr val="tx1"/>
+                </a:solidFill>
+                <a:latin typeface="Times New Roman" panose="02020603050405020304" pitchFamily="18" charset="0"/>
+                <a:ea typeface="標楷體" panose="03000509000000000000" pitchFamily="65" charset="-120"/>
+                <a:cs typeface="Times New Roman" panose="02020603050405020304" pitchFamily="18" charset="0"/>
+              </a:rPr>
+              <a:t>優勢</a:t>
+            </a:r>
+            <a:endParaRPr lang="en-US" altLang="zh-TW" sz="2000" dirty="0">
+              <a:solidFill>
+                <a:schemeClr val="tx1"/>
+              </a:solidFill>
+              <a:latin typeface="Times New Roman" panose="02020603050405020304" pitchFamily="18" charset="0"/>
+              <a:ea typeface="標楷體" panose="03000509000000000000" pitchFamily="65" charset="-120"/>
+              <a:cs typeface="Times New Roman" panose="02020603050405020304" pitchFamily="18" charset="0"/>
+            </a:endParaRPr>
+          </a:p>
+          <a:p>
+            <a:pPr lvl="1">
+              <a:lnSpc>
+                <a:spcPts val="3000"/>
+              </a:lnSpc>
+            </a:pPr>
+            <a:r>
+              <a:rPr lang="zh-TW" altLang="en-US" sz="1600" dirty="0">
+                <a:latin typeface="Times New Roman" panose="02020603050405020304" pitchFamily="18" charset="0"/>
+                <a:ea typeface="標楷體" panose="03000509000000000000" pitchFamily="65" charset="-120"/>
+                <a:cs typeface="Times New Roman" panose="02020603050405020304" pitchFamily="18" charset="0"/>
+              </a:rPr>
+              <a:t>重用既有 </a:t>
+            </a:r>
+            <a:r>
+              <a:rPr lang="en-US" altLang="zh-TW" sz="1600" dirty="0">
+                <a:latin typeface="Times New Roman" panose="02020603050405020304" pitchFamily="18" charset="0"/>
+                <a:ea typeface="標楷體" panose="03000509000000000000" pitchFamily="65" charset="-120"/>
+                <a:cs typeface="Times New Roman" panose="02020603050405020304" pitchFamily="18" charset="0"/>
+              </a:rPr>
+              <a:t>HDMI </a:t>
+            </a:r>
+            <a:r>
+              <a:rPr lang="zh-TW" altLang="en-US" sz="1600" dirty="0">
+                <a:latin typeface="Times New Roman" panose="02020603050405020304" pitchFamily="18" charset="0"/>
+                <a:ea typeface="標楷體" panose="03000509000000000000" pitchFamily="65" charset="-120"/>
+                <a:cs typeface="Times New Roman" panose="02020603050405020304" pitchFamily="18" charset="0"/>
+              </a:rPr>
+              <a:t>接收與影像處理 </a:t>
+            </a:r>
+            <a:r>
+              <a:rPr lang="en-US" altLang="zh-TW" sz="1600" dirty="0">
+                <a:latin typeface="Times New Roman" panose="02020603050405020304" pitchFamily="18" charset="0"/>
+                <a:ea typeface="標楷體" panose="03000509000000000000" pitchFamily="65" charset="-120"/>
+                <a:cs typeface="Times New Roman" panose="02020603050405020304" pitchFamily="18" charset="0"/>
+              </a:rPr>
+              <a:t>IP </a:t>
+            </a:r>
+            <a:r>
+              <a:rPr lang="zh-TW" altLang="en-US" sz="1600" dirty="0">
+                <a:latin typeface="Times New Roman" panose="02020603050405020304" pitchFamily="18" charset="0"/>
+                <a:ea typeface="標楷體" panose="03000509000000000000" pitchFamily="65" charset="-120"/>
+                <a:cs typeface="Times New Roman" panose="02020603050405020304" pitchFamily="18" charset="0"/>
+              </a:rPr>
+              <a:t>整合範例</a:t>
+            </a:r>
+            <a:endParaRPr lang="en-US" altLang="zh-TW" sz="1600" dirty="0">
+              <a:latin typeface="Times New Roman" panose="02020603050405020304" pitchFamily="18" charset="0"/>
+              <a:ea typeface="標楷體" panose="03000509000000000000" pitchFamily="65" charset="-120"/>
+              <a:cs typeface="Times New Roman" panose="02020603050405020304" pitchFamily="18" charset="0"/>
+            </a:endParaRPr>
+          </a:p>
+          <a:p>
+            <a:pPr lvl="1">
+              <a:lnSpc>
+                <a:spcPts val="3000"/>
+              </a:lnSpc>
+            </a:pPr>
+            <a:r>
+              <a:rPr lang="zh-TW" altLang="en-US" sz="1600" dirty="0">
+                <a:latin typeface="Times New Roman" panose="02020603050405020304" pitchFamily="18" charset="0"/>
+                <a:ea typeface="標楷體" panose="03000509000000000000" pitchFamily="65" charset="-120"/>
+                <a:cs typeface="Times New Roman" panose="02020603050405020304" pitchFamily="18" charset="0"/>
+              </a:rPr>
+              <a:t>使用 </a:t>
+            </a:r>
+            <a:r>
+              <a:rPr lang="en-US" altLang="zh-TW" sz="1600" dirty="0">
+                <a:latin typeface="Times New Roman" panose="02020603050405020304" pitchFamily="18" charset="0"/>
+                <a:ea typeface="標楷體" panose="03000509000000000000" pitchFamily="65" charset="-120"/>
+                <a:cs typeface="Times New Roman" panose="02020603050405020304" pitchFamily="18" charset="0"/>
+              </a:rPr>
+              <a:t>Xilinx DMA IP </a:t>
+            </a:r>
+            <a:r>
+              <a:rPr lang="zh-TW" altLang="en-US" sz="1600" dirty="0">
+                <a:latin typeface="Times New Roman" panose="02020603050405020304" pitchFamily="18" charset="0"/>
+                <a:ea typeface="標楷體" panose="03000509000000000000" pitchFamily="65" charset="-120"/>
+                <a:cs typeface="Times New Roman" panose="02020603050405020304" pitchFamily="18" charset="0"/>
+              </a:rPr>
+              <a:t>與配套驅動程式，減少 </a:t>
+            </a:r>
+            <a:r>
+              <a:rPr lang="en-US" altLang="zh-TW" sz="1600" dirty="0">
+                <a:latin typeface="Times New Roman" panose="02020603050405020304" pitchFamily="18" charset="0"/>
+                <a:ea typeface="標楷體" panose="03000509000000000000" pitchFamily="65" charset="-120"/>
+                <a:cs typeface="Times New Roman" panose="02020603050405020304" pitchFamily="18" charset="0"/>
+              </a:rPr>
+              <a:t>PCIe DMA </a:t>
+            </a:r>
+            <a:r>
+              <a:rPr lang="zh-TW" altLang="en-US" sz="1600" dirty="0">
+                <a:latin typeface="Times New Roman" panose="02020603050405020304" pitchFamily="18" charset="0"/>
+                <a:ea typeface="標楷體" panose="03000509000000000000" pitchFamily="65" charset="-120"/>
+                <a:cs typeface="Times New Roman" panose="02020603050405020304" pitchFamily="18" charset="0"/>
+              </a:rPr>
+              <a:t>控制及 </a:t>
+            </a:r>
+            <a:r>
+              <a:rPr lang="en-US" altLang="zh-TW" sz="1600" dirty="0">
+                <a:latin typeface="Times New Roman" panose="02020603050405020304" pitchFamily="18" charset="0"/>
+                <a:ea typeface="標楷體" panose="03000509000000000000" pitchFamily="65" charset="-120"/>
+                <a:cs typeface="Times New Roman" panose="02020603050405020304" pitchFamily="18" charset="0"/>
+              </a:rPr>
+              <a:t>PC Driver </a:t>
+            </a:r>
+            <a:r>
+              <a:rPr lang="zh-TW" altLang="en-US" sz="1600" dirty="0">
+                <a:latin typeface="Times New Roman" panose="02020603050405020304" pitchFamily="18" charset="0"/>
+                <a:ea typeface="標楷體" panose="03000509000000000000" pitchFamily="65" charset="-120"/>
+                <a:cs typeface="Times New Roman" panose="02020603050405020304" pitchFamily="18" charset="0"/>
+              </a:rPr>
+              <a:t>開發</a:t>
+            </a:r>
+            <a:endParaRPr lang="en-US" altLang="zh-TW" sz="1600" dirty="0">
+              <a:latin typeface="Times New Roman" panose="02020603050405020304" pitchFamily="18" charset="0"/>
+              <a:ea typeface="標楷體" panose="03000509000000000000" pitchFamily="65" charset="-120"/>
+              <a:cs typeface="Times New Roman" panose="02020603050405020304" pitchFamily="18" charset="0"/>
+            </a:endParaRPr>
+          </a:p>
+          <a:p>
+            <a:pPr>
+              <a:lnSpc>
+                <a:spcPts val="3000"/>
+              </a:lnSpc>
+            </a:pPr>
+            <a:r>
+              <a:rPr lang="zh-TW" altLang="en-US" sz="2000" dirty="0">
+                <a:latin typeface="Times New Roman" panose="02020603050405020304" pitchFamily="18" charset="0"/>
+                <a:ea typeface="標楷體" panose="03000509000000000000" pitchFamily="65" charset="-120"/>
+                <a:cs typeface="Times New Roman" panose="02020603050405020304" pitchFamily="18" charset="0"/>
+              </a:rPr>
+              <a:t>風險與待評估事項</a:t>
+            </a:r>
+          </a:p>
+          <a:p>
+            <a:pPr lvl="1">
+              <a:lnSpc>
+                <a:spcPts val="3000"/>
+              </a:lnSpc>
+            </a:pPr>
+            <a:r>
+              <a:rPr lang="zh-TW" altLang="en-US" sz="1600" dirty="0">
+                <a:latin typeface="Times New Roman" panose="02020603050405020304" pitchFamily="18" charset="0"/>
+                <a:ea typeface="標楷體" panose="03000509000000000000" pitchFamily="65" charset="-120"/>
+                <a:cs typeface="Times New Roman" panose="02020603050405020304" pitchFamily="18" charset="0"/>
+              </a:rPr>
+              <a:t>硬體相容性與工具鏈相容性 </a:t>
+            </a:r>
+            <a:r>
+              <a:rPr lang="en-US" altLang="zh-TW" sz="1600" dirty="0">
+                <a:latin typeface="Times New Roman" panose="02020603050405020304" pitchFamily="18" charset="0"/>
+                <a:ea typeface="標楷體" panose="03000509000000000000" pitchFamily="65" charset="-120"/>
+                <a:cs typeface="Times New Roman" panose="02020603050405020304" pitchFamily="18" charset="0"/>
+              </a:rPr>
+              <a:t>(</a:t>
+            </a:r>
+            <a:r>
+              <a:rPr lang="en-US" altLang="zh-TW" sz="1600" dirty="0" err="1">
+                <a:latin typeface="Times New Roman" panose="02020603050405020304" pitchFamily="18" charset="0"/>
+                <a:ea typeface="標楷體" panose="03000509000000000000" pitchFamily="65" charset="-120"/>
+                <a:cs typeface="Times New Roman" panose="02020603050405020304" pitchFamily="18" charset="0"/>
+              </a:rPr>
+              <a:t>Vivado</a:t>
+            </a:r>
+            <a:r>
+              <a:rPr lang="en-US" altLang="zh-TW" sz="1600" dirty="0">
+                <a:latin typeface="Times New Roman" panose="02020603050405020304" pitchFamily="18" charset="0"/>
+                <a:ea typeface="標楷體" panose="03000509000000000000" pitchFamily="65" charset="-120"/>
+                <a:cs typeface="Times New Roman" panose="02020603050405020304" pitchFamily="18" charset="0"/>
+              </a:rPr>
+              <a:t> / Vitis </a:t>
+            </a:r>
+            <a:r>
+              <a:rPr lang="zh-TW" altLang="en-US" sz="1600" dirty="0">
+                <a:latin typeface="Times New Roman" panose="02020603050405020304" pitchFamily="18" charset="0"/>
+                <a:ea typeface="標楷體" panose="03000509000000000000" pitchFamily="65" charset="-120"/>
+                <a:cs typeface="Times New Roman" panose="02020603050405020304" pitchFamily="18" charset="0"/>
+              </a:rPr>
+              <a:t>版本、</a:t>
+            </a:r>
+            <a:r>
+              <a:rPr lang="en-US" altLang="zh-TW" sz="1600" dirty="0">
+                <a:latin typeface="Times New Roman" panose="02020603050405020304" pitchFamily="18" charset="0"/>
+                <a:ea typeface="標楷體" panose="03000509000000000000" pitchFamily="65" charset="-120"/>
+                <a:cs typeface="Times New Roman" panose="02020603050405020304" pitchFamily="18" charset="0"/>
+              </a:rPr>
+              <a:t>IP </a:t>
+            </a:r>
+            <a:r>
+              <a:rPr lang="zh-TW" altLang="en-US" sz="1600" dirty="0">
+                <a:latin typeface="Times New Roman" panose="02020603050405020304" pitchFamily="18" charset="0"/>
+                <a:ea typeface="標楷體" panose="03000509000000000000" pitchFamily="65" charset="-120"/>
+                <a:cs typeface="Times New Roman" panose="02020603050405020304" pitchFamily="18" charset="0"/>
+              </a:rPr>
+              <a:t>授權</a:t>
+            </a:r>
+            <a:r>
+              <a:rPr lang="en-US" altLang="zh-TW" sz="1600" dirty="0">
+                <a:latin typeface="Times New Roman" panose="02020603050405020304" pitchFamily="18" charset="0"/>
+                <a:ea typeface="標楷體" panose="03000509000000000000" pitchFamily="65" charset="-120"/>
+                <a:cs typeface="Times New Roman" panose="02020603050405020304" pitchFamily="18" charset="0"/>
+              </a:rPr>
+              <a:t>)</a:t>
+            </a:r>
+          </a:p>
+          <a:p>
+            <a:pPr lvl="1">
+              <a:lnSpc>
+                <a:spcPts val="3000"/>
+              </a:lnSpc>
+            </a:pPr>
+            <a:r>
+              <a:rPr lang="zh-TW" altLang="en-US" sz="1600" dirty="0">
+                <a:latin typeface="Times New Roman" panose="02020603050405020304" pitchFamily="18" charset="0"/>
+                <a:ea typeface="標楷體" panose="03000509000000000000" pitchFamily="65" charset="-120"/>
+                <a:cs typeface="Times New Roman" panose="02020603050405020304" pitchFamily="18" charset="0"/>
+              </a:rPr>
+              <a:t>確認選定 </a:t>
+            </a:r>
+            <a:r>
+              <a:rPr lang="en-US" altLang="zh-TW" sz="1600" dirty="0">
+                <a:latin typeface="Times New Roman" panose="02020603050405020304" pitchFamily="18" charset="0"/>
+                <a:ea typeface="標楷體" panose="03000509000000000000" pitchFamily="65" charset="-120"/>
+                <a:cs typeface="Times New Roman" panose="02020603050405020304" pitchFamily="18" charset="0"/>
+              </a:rPr>
+              <a:t>XDMA </a:t>
+            </a:r>
+            <a:r>
+              <a:rPr lang="zh-TW" altLang="en-US" sz="1600" dirty="0">
+                <a:latin typeface="Times New Roman" panose="02020603050405020304" pitchFamily="18" charset="0"/>
+                <a:ea typeface="標楷體" panose="03000509000000000000" pitchFamily="65" charset="-120"/>
+                <a:cs typeface="Times New Roman" panose="02020603050405020304" pitchFamily="18" charset="0"/>
+              </a:rPr>
+              <a:t>或 </a:t>
+            </a:r>
+            <a:r>
+              <a:rPr lang="en-US" altLang="zh-TW" sz="1600" dirty="0">
+                <a:latin typeface="Times New Roman" panose="02020603050405020304" pitchFamily="18" charset="0"/>
+                <a:ea typeface="標楷體" panose="03000509000000000000" pitchFamily="65" charset="-120"/>
+                <a:cs typeface="Times New Roman" panose="02020603050405020304" pitchFamily="18" charset="0"/>
+              </a:rPr>
+              <a:t>QDMA </a:t>
+            </a:r>
+            <a:r>
+              <a:rPr lang="zh-TW" altLang="en-US" sz="1600" dirty="0">
+                <a:latin typeface="Times New Roman" panose="02020603050405020304" pitchFamily="18" charset="0"/>
+                <a:ea typeface="標楷體" panose="03000509000000000000" pitchFamily="65" charset="-120"/>
+                <a:cs typeface="Times New Roman" panose="02020603050405020304" pitchFamily="18" charset="0"/>
+              </a:rPr>
+              <a:t>後，驅動程式與 </a:t>
+            </a:r>
+            <a:r>
+              <a:rPr lang="en-US" altLang="zh-TW" sz="1600" dirty="0">
+                <a:latin typeface="Times New Roman" panose="02020603050405020304" pitchFamily="18" charset="0"/>
+                <a:ea typeface="標楷體" panose="03000509000000000000" pitchFamily="65" charset="-120"/>
+                <a:cs typeface="Times New Roman" panose="02020603050405020304" pitchFamily="18" charset="0"/>
+              </a:rPr>
+              <a:t>FPGA </a:t>
+            </a:r>
+            <a:r>
+              <a:rPr lang="zh-TW" altLang="en-US" sz="1600" dirty="0">
+                <a:latin typeface="Times New Roman" panose="02020603050405020304" pitchFamily="18" charset="0"/>
+                <a:ea typeface="標楷體" panose="03000509000000000000" pitchFamily="65" charset="-120"/>
+                <a:cs typeface="Times New Roman" panose="02020603050405020304" pitchFamily="18" charset="0"/>
+              </a:rPr>
+              <a:t>硬體設定相符</a:t>
+            </a:r>
+            <a:endParaRPr lang="en-US" altLang="zh-TW" sz="1600" dirty="0">
+              <a:latin typeface="Times New Roman" panose="02020603050405020304" pitchFamily="18" charset="0"/>
+              <a:ea typeface="標楷體" panose="03000509000000000000" pitchFamily="65" charset="-120"/>
+              <a:cs typeface="Times New Roman" panose="02020603050405020304" pitchFamily="18" charset="0"/>
+            </a:endParaRPr>
+          </a:p>
+          <a:p>
+            <a:pPr lvl="1">
+              <a:lnSpc>
+                <a:spcPts val="3000"/>
+              </a:lnSpc>
+            </a:pPr>
+            <a:endParaRPr lang="zh-TW" altLang="en-US" sz="1200" dirty="0">
+              <a:latin typeface="Times New Roman" panose="02020603050405020304" pitchFamily="18" charset="0"/>
+              <a:ea typeface="標楷體" panose="03000509000000000000" pitchFamily="65" charset="-120"/>
+              <a:cs typeface="Times New Roman" panose="02020603050405020304" pitchFamily="18" charset="0"/>
+            </a:endParaRPr>
+          </a:p>
+          <a:p>
+            <a:pPr lvl="1">
+              <a:lnSpc>
+                <a:spcPts val="3000"/>
+              </a:lnSpc>
+            </a:pPr>
+            <a:endParaRPr lang="en-US" altLang="zh-TW" sz="1600" dirty="0">
+              <a:latin typeface="Times New Roman" panose="02020603050405020304" pitchFamily="18" charset="0"/>
+              <a:ea typeface="標楷體" panose="03000509000000000000" pitchFamily="65" charset="-120"/>
+              <a:cs typeface="Times New Roman" panose="02020603050405020304" pitchFamily="18" charset="0"/>
+            </a:endParaRPr>
+          </a:p>
+          <a:p>
+            <a:pPr lvl="1">
+              <a:lnSpc>
+                <a:spcPts val="3000"/>
+              </a:lnSpc>
+            </a:pPr>
+            <a:endParaRPr lang="zh-TW" altLang="en-US" sz="1600" dirty="0">
+              <a:latin typeface="Times New Roman" panose="02020603050405020304" pitchFamily="18" charset="0"/>
+              <a:ea typeface="標楷體" panose="03000509000000000000" pitchFamily="65" charset="-120"/>
+              <a:cs typeface="Times New Roman" panose="02020603050405020304" pitchFamily="18" charset="0"/>
+            </a:endParaRPr>
+          </a:p>
+          <a:p>
+            <a:pPr lvl="1">
+              <a:lnSpc>
+                <a:spcPts val="3000"/>
+              </a:lnSpc>
+            </a:pPr>
+            <a:endParaRPr lang="en-US" altLang="zh-TW" sz="1600" dirty="0">
+              <a:solidFill>
+                <a:schemeClr val="tx1"/>
+              </a:solidFill>
+              <a:latin typeface="Times New Roman" panose="02020603050405020304" pitchFamily="18" charset="0"/>
+              <a:ea typeface="標楷體" panose="03000509000000000000" pitchFamily="65" charset="-120"/>
+              <a:cs typeface="Times New Roman" panose="02020603050405020304" pitchFamily="18" charset="0"/>
+            </a:endParaRPr>
+          </a:p>
+          <a:p>
+            <a:pPr lvl="1">
+              <a:lnSpc>
+                <a:spcPts val="3000"/>
+              </a:lnSpc>
+            </a:pPr>
+            <a:endParaRPr lang="zh-TW" altLang="en-US" sz="1600" dirty="0">
+              <a:latin typeface="Times New Roman" panose="02020603050405020304" pitchFamily="18" charset="0"/>
+              <a:ea typeface="標楷體" panose="03000509000000000000" pitchFamily="65" charset="-120"/>
+              <a:cs typeface="Times New Roman" panose="02020603050405020304" pitchFamily="18" charset="0"/>
+            </a:endParaRPr>
+          </a:p>
+          <a:p>
+            <a:pPr lvl="1">
+              <a:lnSpc>
+                <a:spcPts val="3000"/>
+              </a:lnSpc>
+            </a:pPr>
+            <a:endParaRPr lang="en-US" altLang="zh-TW" sz="1600" dirty="0">
+              <a:solidFill>
+                <a:schemeClr val="tx1"/>
+              </a:solidFill>
+              <a:latin typeface="Times New Roman" panose="02020603050405020304" pitchFamily="18" charset="0"/>
+              <a:ea typeface="標楷體" panose="03000509000000000000" pitchFamily="65" charset="-120"/>
+              <a:cs typeface="Times New Roman" panose="02020603050405020304" pitchFamily="18" charset="0"/>
+            </a:endParaRPr>
+          </a:p>
+        </p:txBody>
+      </p:sp>
+      <p:pic>
+        <p:nvPicPr>
+          <p:cNvPr id="3" name="圖片 2">
+            <a:extLst>
+              <a:ext uri="{FF2B5EF4-FFF2-40B4-BE49-F238E27FC236}">
+                <a16:creationId xmlns:a16="http://schemas.microsoft.com/office/drawing/2014/main" id="{0C861312-6738-1E5A-CE4A-7188C92ACA03}"/>
+              </a:ext>
+            </a:extLst>
+          </p:cNvPr>
+          <p:cNvPicPr>
+            <a:picLocks noChangeAspect="1"/>
+          </p:cNvPicPr>
+          <p:nvPr/>
+        </p:nvPicPr>
+        <p:blipFill>
+          <a:blip r:embed="rId3"/>
+          <a:stretch>
+            <a:fillRect/>
+          </a:stretch>
+        </p:blipFill>
+        <p:spPr>
+          <a:xfrm>
+            <a:off x="341292" y="1632857"/>
+            <a:ext cx="9223415" cy="1538207"/>
+          </a:xfrm>
+          <a:prstGeom prst="rect">
+            <a:avLst/>
+          </a:prstGeom>
+        </p:spPr>
+      </p:pic>
+    </p:spTree>
+    <p:extLst>
+      <p:ext uri="{BB962C8B-B14F-4D97-AF65-F5344CB8AC3E}">
+        <p14:creationId xmlns:p14="http://schemas.microsoft.com/office/powerpoint/2010/main" val="1808778153"/>
+      </p:ext>
+    </p:extLst>
+  </p:cSld>
+  <p:clrMapOvr>
+    <a:masterClrMapping/>
+  </p:clrMapOvr>
+</p:sld>
+</file>
+
+<file path=ppt/slides/slide12.xml><?xml version="1.0" encoding="utf-8"?>
+<p:sld xmlns:a="http://schemas.openxmlformats.org/drawingml/2006/main" xmlns:r="http://schemas.openxmlformats.org/officeDocument/2006/relationships" xmlns:p="http://schemas.openxmlformats.org/presentationml/2006/main">
+  <p:cSld>
+    <p:spTree>
+      <p:nvGrpSpPr>
+        <p:cNvPr id="1" name="">
+          <a:extLst>
+            <a:ext uri="{FF2B5EF4-FFF2-40B4-BE49-F238E27FC236}">
+              <a16:creationId xmlns:a16="http://schemas.microsoft.com/office/drawing/2014/main" id="{C25E9AAA-7E36-1E17-83F9-FD3A18A28BE9}"/>
+            </a:ext>
+          </a:extLst>
+        </p:cNvPr>
+        <p:cNvGrpSpPr/>
+        <p:nvPr/>
+      </p:nvGrpSpPr>
+      <p:grpSpPr>
+        <a:xfrm>
+          <a:off x="0" y="0"/>
+          <a:ext cx="0" cy="0"/>
+          <a:chOff x="0" y="0"/>
+          <a:chExt cx="0" cy="0"/>
+        </a:xfrm>
+      </p:grpSpPr>
+      <p:sp>
+        <p:nvSpPr>
+          <p:cNvPr id="15" name="標題 1">
+            <a:extLst>
+              <a:ext uri="{FF2B5EF4-FFF2-40B4-BE49-F238E27FC236}">
+                <a16:creationId xmlns:a16="http://schemas.microsoft.com/office/drawing/2014/main" id="{142C8726-E890-9988-40FC-8984FDA21FEE}"/>
+              </a:ext>
+            </a:extLst>
+          </p:cNvPr>
+          <p:cNvSpPr>
+            <a:spLocks noGrp="1"/>
+          </p:cNvSpPr>
+          <p:nvPr>
+            <p:ph type="title"/>
+          </p:nvPr>
+        </p:nvSpPr>
+        <p:spPr>
+          <a:xfrm>
+            <a:off x="609602" y="609600"/>
+            <a:ext cx="8077200" cy="533400"/>
+          </a:xfrm>
+          <a:ln>
+            <a:noFill/>
+          </a:ln>
+        </p:spPr>
+        <p:txBody>
+          <a:bodyPr/>
+          <a:lstStyle/>
+          <a:p>
+            <a:pPr algn="l" fontAlgn="t"/>
+            <a:r>
+              <a:rPr lang="zh-TW" altLang="en-US" dirty="0">
+                <a:latin typeface="Times New Roman" panose="02020603050405020304" pitchFamily="18" charset="0"/>
+                <a:ea typeface="標楷體" panose="03000509000000000000" pitchFamily="65" charset="-120"/>
+                <a:cs typeface="Times New Roman" panose="02020603050405020304" pitchFamily="18" charset="0"/>
+              </a:rPr>
+              <a:t>本次進度</a:t>
+            </a:r>
+            <a:r>
+              <a:rPr lang="en-US" altLang="zh-TW" dirty="0">
+                <a:latin typeface="Times New Roman" panose="02020603050405020304" pitchFamily="18" charset="0"/>
+                <a:ea typeface="標楷體" panose="03000509000000000000" pitchFamily="65" charset="-120"/>
+                <a:cs typeface="Times New Roman" panose="02020603050405020304" pitchFamily="18" charset="0"/>
+              </a:rPr>
               <a:t>:</a:t>
             </a:r>
             <a:r>
@@ -8928,10 +10916,10 @@
       </p:pic>
       <p:pic>
         <p:nvPicPr>
-          <p:cNvPr id="12" name="圖片 11">
+          <p:cNvPr id="5" name="圖片 4">
             <a:extLst>
               <a:ext uri="{FF2B5EF4-FFF2-40B4-BE49-F238E27FC236}">
-                <a16:creationId xmlns:a16="http://schemas.microsoft.com/office/drawing/2014/main" id="{B12031A4-3488-593A-A784-3F5D3A5E54B2}"/>
+                <a16:creationId xmlns:a16="http://schemas.microsoft.com/office/drawing/2014/main" id="{DADE3805-E2BE-FBFA-F60A-35EEBFC5C44F}"/>
               </a:ext>
             </a:extLst>
           </p:cNvPr>
@@ -8948,8 +10936,8 @@
         </p:blipFill>
         <p:spPr>
           <a:xfrm>
-            <a:off x="609602" y="2041958"/>
-            <a:ext cx="8681713" cy="1032134"/>
+            <a:off x="614685" y="2022759"/>
+            <a:ext cx="8681713" cy="911341"/>
           </a:xfrm>
           <a:prstGeom prst="rect">
             <a:avLst/>
@@ -8969,498 +10957,7 @@
 </p:sld>
 </file>
 
-<file path=ppt/slides/slide11.xml><?xml version="1.0" encoding="utf-8"?>
-<p:sld xmlns:a="http://schemas.openxmlformats.org/drawingml/2006/main" xmlns:r="http://schemas.openxmlformats.org/officeDocument/2006/relationships" xmlns:p="http://schemas.openxmlformats.org/presentationml/2006/main">
-  <p:cSld>
-    <p:spTree>
-      <p:nvGrpSpPr>
-        <p:cNvPr id="1" name="">
-          <a:extLst>
-            <a:ext uri="{FF2B5EF4-FFF2-40B4-BE49-F238E27FC236}">
-              <a16:creationId xmlns:a16="http://schemas.microsoft.com/office/drawing/2014/main" id="{C25E9AAA-7E36-1E17-83F9-FD3A18A28BE9}"/>
-            </a:ext>
-          </a:extLst>
-        </p:cNvPr>
-        <p:cNvGrpSpPr/>
-        <p:nvPr/>
-      </p:nvGrpSpPr>
-      <p:grpSpPr>
-        <a:xfrm>
-          <a:off x="0" y="0"/>
-          <a:ext cx="0" cy="0"/>
-          <a:chOff x="0" y="0"/>
-          <a:chExt cx="0" cy="0"/>
-        </a:xfrm>
-      </p:grpSpPr>
-      <p:sp>
-        <p:nvSpPr>
-          <p:cNvPr id="15" name="標題 1">
-            <a:extLst>
-              <a:ext uri="{FF2B5EF4-FFF2-40B4-BE49-F238E27FC236}">
-                <a16:creationId xmlns:a16="http://schemas.microsoft.com/office/drawing/2014/main" id="{142C8726-E890-9988-40FC-8984FDA21FEE}"/>
-              </a:ext>
-            </a:extLst>
-          </p:cNvPr>
-          <p:cNvSpPr>
-            <a:spLocks noGrp="1"/>
-          </p:cNvSpPr>
-          <p:nvPr>
-            <p:ph type="title"/>
-          </p:nvPr>
-        </p:nvSpPr>
-        <p:spPr>
-          <a:xfrm>
-            <a:off x="609602" y="609600"/>
-            <a:ext cx="8077200" cy="533400"/>
-          </a:xfrm>
-          <a:ln>
-            <a:noFill/>
-          </a:ln>
-        </p:spPr>
-        <p:txBody>
-          <a:bodyPr/>
-          <a:lstStyle/>
-          <a:p>
-            <a:pPr algn="l" fontAlgn="t"/>
-            <a:r>
-              <a:rPr lang="zh-TW" altLang="en-US" dirty="0">
-                <a:latin typeface="Times New Roman" panose="02020603050405020304" pitchFamily="18" charset="0"/>
-                <a:ea typeface="標楷體" panose="03000509000000000000" pitchFamily="65" charset="-120"/>
-                <a:cs typeface="Times New Roman" panose="02020603050405020304" pitchFamily="18" charset="0"/>
-              </a:rPr>
-              <a:t>本次進度</a:t>
-            </a:r>
-            <a:r>
-              <a:rPr lang="en-US" altLang="zh-TW" dirty="0">
-                <a:latin typeface="Times New Roman" panose="02020603050405020304" pitchFamily="18" charset="0"/>
-                <a:ea typeface="標楷體" panose="03000509000000000000" pitchFamily="65" charset="-120"/>
-                <a:cs typeface="Times New Roman" panose="02020603050405020304" pitchFamily="18" charset="0"/>
-              </a:rPr>
-              <a:t>: </a:t>
-            </a:r>
-            <a:r>
-              <a:rPr lang="zh-TW" altLang="en-US" dirty="0">
-                <a:latin typeface="Times New Roman" panose="02020603050405020304" pitchFamily="18" charset="0"/>
-                <a:ea typeface="標楷體" panose="03000509000000000000" pitchFamily="65" charset="-120"/>
-                <a:cs typeface="Times New Roman" panose="02020603050405020304" pitchFamily="18" charset="0"/>
-              </a:rPr>
-              <a:t>整合比較</a:t>
-            </a:r>
-          </a:p>
-        </p:txBody>
-      </p:sp>
-      <p:sp>
-        <p:nvSpPr>
-          <p:cNvPr id="2" name="文字版面配置區 6">
-            <a:extLst>
-              <a:ext uri="{FF2B5EF4-FFF2-40B4-BE49-F238E27FC236}">
-                <a16:creationId xmlns:a16="http://schemas.microsoft.com/office/drawing/2014/main" id="{D929304B-5341-8BBF-E71F-AF5F2FE7268A}"/>
-              </a:ext>
-            </a:extLst>
-          </p:cNvPr>
-          <p:cNvSpPr txBox="1"/>
-          <p:nvPr/>
-        </p:nvSpPr>
-        <p:spPr>
-          <a:xfrm>
-            <a:off x="609602" y="935857"/>
-            <a:ext cx="8686796" cy="4700685"/>
-          </a:xfrm>
-          <a:prstGeom prst="rect">
-            <a:avLst/>
-          </a:prstGeom>
-          <a:noFill/>
-          <a:ln>
-            <a:noFill/>
-          </a:ln>
-        </p:spPr>
-        <p:txBody>
-          <a:bodyPr spcFirstLastPara="1" wrap="square" lIns="91425" tIns="45700" rIns="91425" bIns="45700" anchor="t" anchorCtr="0">
-            <a:noAutofit/>
-          </a:bodyPr>
-          <a:lstStyle>
-            <a:defPPr marR="0" lvl="0" algn="l" rtl="0">
-              <a:lnSpc>
-                <a:spcPct val="100000"/>
-              </a:lnSpc>
-              <a:spcBef>
-                <a:spcPts val="0"/>
-              </a:spcBef>
-              <a:spcAft>
-                <a:spcPts val="0"/>
-              </a:spcAft>
-            </a:defPPr>
-            <a:lvl1pPr marL="457200" marR="0" lvl="0" indent="-406400" algn="l" rtl="0">
-              <a:lnSpc>
-                <a:spcPct val="100000"/>
-              </a:lnSpc>
-              <a:spcBef>
-                <a:spcPts val="560"/>
-              </a:spcBef>
-              <a:spcAft>
-                <a:spcPts val="0"/>
-              </a:spcAft>
-              <a:buClr>
-                <a:schemeClr val="accent2"/>
-              </a:buClr>
-              <a:buSzPts val="2800"/>
-              <a:buFont typeface="Noto Sans Symbols"/>
-              <a:buChar char="❖"/>
-              <a:defRPr sz="2800" b="0" i="0" u="none" strike="noStrike" cap="none">
-                <a:solidFill>
-                  <a:schemeClr val="dk1"/>
-                </a:solidFill>
-                <a:latin typeface="Times New Roman"/>
-                <a:ea typeface="Times New Roman"/>
-                <a:cs typeface="Times New Roman"/>
-                <a:sym typeface="Times New Roman"/>
-              </a:defRPr>
-            </a:lvl1pPr>
-            <a:lvl2pPr marL="914400" marR="0" lvl="1" indent="-381000" algn="l" rtl="0">
-              <a:lnSpc>
-                <a:spcPct val="100000"/>
-              </a:lnSpc>
-              <a:spcBef>
-                <a:spcPts val="480"/>
-              </a:spcBef>
-              <a:spcAft>
-                <a:spcPts val="0"/>
-              </a:spcAft>
-              <a:buClr>
-                <a:srgbClr val="FF5050"/>
-              </a:buClr>
-              <a:buSzPts val="2400"/>
-              <a:buFont typeface="Noto Sans Symbols"/>
-              <a:buChar char="▪"/>
-              <a:defRPr sz="2400" b="0" i="0" u="none" strike="noStrike" cap="none">
-                <a:solidFill>
-                  <a:schemeClr val="dk1"/>
-                </a:solidFill>
-                <a:latin typeface="Times New Roman"/>
-                <a:ea typeface="Times New Roman"/>
-                <a:cs typeface="Times New Roman"/>
-                <a:sym typeface="Times New Roman"/>
-              </a:defRPr>
-            </a:lvl2pPr>
-            <a:lvl3pPr marL="1371600" marR="0" lvl="2" indent="-355600" algn="l" rtl="0">
-              <a:lnSpc>
-                <a:spcPct val="100000"/>
-              </a:lnSpc>
-              <a:spcBef>
-                <a:spcPts val="400"/>
-              </a:spcBef>
-              <a:spcAft>
-                <a:spcPts val="0"/>
-              </a:spcAft>
-              <a:buClr>
-                <a:srgbClr val="6699FF"/>
-              </a:buClr>
-              <a:buSzPts val="2000"/>
-              <a:buFont typeface="Times New Roman"/>
-              <a:buChar char="•"/>
-              <a:defRPr sz="2000" b="0" i="0" u="none" strike="noStrike" cap="none">
-                <a:solidFill>
-                  <a:schemeClr val="dk1"/>
-                </a:solidFill>
-                <a:latin typeface="Times New Roman"/>
-                <a:ea typeface="Times New Roman"/>
-                <a:cs typeface="Times New Roman"/>
-                <a:sym typeface="Times New Roman"/>
-              </a:defRPr>
-            </a:lvl3pPr>
-            <a:lvl4pPr marL="1828800" marR="0" lvl="3" indent="-355600" algn="l" rtl="0">
-              <a:lnSpc>
-                <a:spcPct val="100000"/>
-              </a:lnSpc>
-              <a:spcBef>
-                <a:spcPts val="400"/>
-              </a:spcBef>
-              <a:spcAft>
-                <a:spcPts val="0"/>
-              </a:spcAft>
-              <a:buClr>
-                <a:srgbClr val="FF5050"/>
-              </a:buClr>
-              <a:buSzPts val="2000"/>
-              <a:buFont typeface="Times New Roman"/>
-              <a:buChar char="o"/>
-              <a:defRPr sz="2000" b="0" i="0" u="none" strike="noStrike" cap="none">
-                <a:solidFill>
-                  <a:schemeClr val="dk1"/>
-                </a:solidFill>
-                <a:latin typeface="Times New Roman"/>
-                <a:ea typeface="Times New Roman"/>
-                <a:cs typeface="Times New Roman"/>
-                <a:sym typeface="Times New Roman"/>
-              </a:defRPr>
-            </a:lvl4pPr>
-            <a:lvl5pPr marL="2286000" marR="0" lvl="4" indent="-355600" algn="l" rtl="0">
-              <a:lnSpc>
-                <a:spcPct val="100000"/>
-              </a:lnSpc>
-              <a:spcBef>
-                <a:spcPts val="400"/>
-              </a:spcBef>
-              <a:spcAft>
-                <a:spcPts val="0"/>
-              </a:spcAft>
-              <a:buClr>
-                <a:srgbClr val="FF5050"/>
-              </a:buClr>
-              <a:buSzPts val="2000"/>
-              <a:buFont typeface="Times New Roman"/>
-              <a:buChar char="o"/>
-              <a:defRPr sz="2000" b="0" i="0" u="none" strike="noStrike" cap="none">
-                <a:solidFill>
-                  <a:schemeClr val="dk1"/>
-                </a:solidFill>
-                <a:latin typeface="Times New Roman"/>
-                <a:ea typeface="Times New Roman"/>
-                <a:cs typeface="Times New Roman"/>
-                <a:sym typeface="Times New Roman"/>
-              </a:defRPr>
-            </a:lvl5pPr>
-            <a:lvl6pPr marL="2743200" marR="0" lvl="5" indent="-355600" algn="l" rtl="0">
-              <a:lnSpc>
-                <a:spcPct val="100000"/>
-              </a:lnSpc>
-              <a:spcBef>
-                <a:spcPts val="400"/>
-              </a:spcBef>
-              <a:spcAft>
-                <a:spcPts val="0"/>
-              </a:spcAft>
-              <a:buClr>
-                <a:srgbClr val="FF5050"/>
-              </a:buClr>
-              <a:buSzPts val="2000"/>
-              <a:buFont typeface="Times New Roman"/>
-              <a:buChar char="o"/>
-              <a:defRPr sz="2000" b="0" i="0" u="none" strike="noStrike" cap="none">
-                <a:solidFill>
-                  <a:schemeClr val="dk1"/>
-                </a:solidFill>
-                <a:latin typeface="Times New Roman"/>
-                <a:ea typeface="Times New Roman"/>
-                <a:cs typeface="Times New Roman"/>
-                <a:sym typeface="Times New Roman"/>
-              </a:defRPr>
-            </a:lvl6pPr>
-            <a:lvl7pPr marL="3200400" marR="0" lvl="6" indent="-355600" algn="l" rtl="0">
-              <a:lnSpc>
-                <a:spcPct val="100000"/>
-              </a:lnSpc>
-              <a:spcBef>
-                <a:spcPts val="400"/>
-              </a:spcBef>
-              <a:spcAft>
-                <a:spcPts val="0"/>
-              </a:spcAft>
-              <a:buClr>
-                <a:srgbClr val="FF5050"/>
-              </a:buClr>
-              <a:buSzPts val="2000"/>
-              <a:buFont typeface="Times New Roman"/>
-              <a:buChar char="o"/>
-              <a:defRPr sz="2000" b="0" i="0" u="none" strike="noStrike" cap="none">
-                <a:solidFill>
-                  <a:schemeClr val="dk1"/>
-                </a:solidFill>
-                <a:latin typeface="Times New Roman"/>
-                <a:ea typeface="Times New Roman"/>
-                <a:cs typeface="Times New Roman"/>
-                <a:sym typeface="Times New Roman"/>
-              </a:defRPr>
-            </a:lvl7pPr>
-            <a:lvl8pPr marL="3657600" marR="0" lvl="7" indent="-355600" algn="l" rtl="0">
-              <a:lnSpc>
-                <a:spcPct val="100000"/>
-              </a:lnSpc>
-              <a:spcBef>
-                <a:spcPts val="400"/>
-              </a:spcBef>
-              <a:spcAft>
-                <a:spcPts val="0"/>
-              </a:spcAft>
-              <a:buClr>
-                <a:srgbClr val="FF5050"/>
-              </a:buClr>
-              <a:buSzPts val="2000"/>
-              <a:buFont typeface="Times New Roman"/>
-              <a:buChar char="o"/>
-              <a:defRPr sz="2000" b="0" i="0" u="none" strike="noStrike" cap="none">
-                <a:solidFill>
-                  <a:schemeClr val="dk1"/>
-                </a:solidFill>
-                <a:latin typeface="Times New Roman"/>
-                <a:ea typeface="Times New Roman"/>
-                <a:cs typeface="Times New Roman"/>
-                <a:sym typeface="Times New Roman"/>
-              </a:defRPr>
-            </a:lvl8pPr>
-            <a:lvl9pPr marL="4114800" marR="0" lvl="8" indent="-355600" algn="l" rtl="0">
-              <a:lnSpc>
-                <a:spcPct val="100000"/>
-              </a:lnSpc>
-              <a:spcBef>
-                <a:spcPts val="400"/>
-              </a:spcBef>
-              <a:spcAft>
-                <a:spcPts val="0"/>
-              </a:spcAft>
-              <a:buClr>
-                <a:srgbClr val="FF5050"/>
-              </a:buClr>
-              <a:buSzPts val="2000"/>
-              <a:buFont typeface="Times New Roman"/>
-              <a:buChar char="o"/>
-              <a:defRPr sz="2000" b="0" i="0" u="none" strike="noStrike" cap="none">
-                <a:solidFill>
-                  <a:schemeClr val="dk1"/>
-                </a:solidFill>
-                <a:latin typeface="Times New Roman"/>
-                <a:ea typeface="Times New Roman"/>
-                <a:cs typeface="Times New Roman"/>
-                <a:sym typeface="Times New Roman"/>
-              </a:defRPr>
-            </a:lvl9pPr>
-          </a:lstStyle>
-          <a:p>
-            <a:pPr>
-              <a:lnSpc>
-                <a:spcPct val="150000"/>
-              </a:lnSpc>
-            </a:pPr>
-            <a:r>
-              <a:rPr lang="zh-TW" altLang="en-US" sz="2000" dirty="0">
-                <a:solidFill>
-                  <a:schemeClr val="tx1"/>
-                </a:solidFill>
-                <a:latin typeface="Times New Roman" panose="02020603050405020304" pitchFamily="18" charset="0"/>
-                <a:ea typeface="標楷體" panose="03000509000000000000" pitchFamily="65" charset="-120"/>
-                <a:cs typeface="Times New Roman" panose="02020603050405020304" pitchFamily="18" charset="0"/>
-              </a:rPr>
-              <a:t>定位</a:t>
-            </a:r>
-            <a:endParaRPr lang="en-US" altLang="zh-TW" sz="2000" dirty="0">
-              <a:solidFill>
-                <a:schemeClr val="tx1"/>
-              </a:solidFill>
-              <a:latin typeface="Times New Roman" panose="02020603050405020304" pitchFamily="18" charset="0"/>
-              <a:ea typeface="標楷體" panose="03000509000000000000" pitchFamily="65" charset="-120"/>
-              <a:cs typeface="Times New Roman" panose="02020603050405020304" pitchFamily="18" charset="0"/>
-            </a:endParaRPr>
-          </a:p>
-          <a:p>
-            <a:pPr lvl="1">
-              <a:lnSpc>
-                <a:spcPts val="3000"/>
-              </a:lnSpc>
-            </a:pPr>
-            <a:r>
-              <a:rPr lang="zh-TW" altLang="en-US" sz="1600" dirty="0">
-                <a:latin typeface="Times New Roman" panose="02020603050405020304" pitchFamily="18" charset="0"/>
-                <a:ea typeface="標楷體" panose="03000509000000000000" pitchFamily="65" charset="-120"/>
-                <a:cs typeface="Times New Roman" panose="02020603050405020304" pitchFamily="18" charset="0"/>
-              </a:rPr>
-              <a:t>整合 </a:t>
-            </a:r>
-            <a:r>
-              <a:rPr lang="en-US" altLang="zh-TW" sz="1600" dirty="0">
-                <a:latin typeface="Times New Roman" panose="02020603050405020304" pitchFamily="18" charset="0"/>
-                <a:ea typeface="標楷體" panose="03000509000000000000" pitchFamily="65" charset="-120"/>
-                <a:cs typeface="Times New Roman" panose="02020603050405020304" pitchFamily="18" charset="0"/>
-              </a:rPr>
-              <a:t>HDMI </a:t>
-            </a:r>
-            <a:r>
-              <a:rPr lang="zh-TW" altLang="en-US" sz="1600" dirty="0">
-                <a:latin typeface="Times New Roman" panose="02020603050405020304" pitchFamily="18" charset="0"/>
-                <a:ea typeface="標楷體" panose="03000509000000000000" pitchFamily="65" charset="-120"/>
-                <a:cs typeface="Times New Roman" panose="02020603050405020304" pitchFamily="18" charset="0"/>
-              </a:rPr>
-              <a:t>影像處理、</a:t>
-            </a:r>
-            <a:r>
-              <a:rPr lang="en-US" altLang="zh-TW" sz="1600" dirty="0">
-                <a:latin typeface="Times New Roman" panose="02020603050405020304" pitchFamily="18" charset="0"/>
-                <a:ea typeface="標楷體" panose="03000509000000000000" pitchFamily="65" charset="-120"/>
-                <a:cs typeface="Times New Roman" panose="02020603050405020304" pitchFamily="18" charset="0"/>
-              </a:rPr>
-              <a:t>DDR3 </a:t>
-            </a:r>
-            <a:r>
-              <a:rPr lang="zh-TW" altLang="en-US" sz="1600" dirty="0">
-                <a:latin typeface="Times New Roman" panose="02020603050405020304" pitchFamily="18" charset="0"/>
-                <a:ea typeface="標楷體" panose="03000509000000000000" pitchFamily="65" charset="-120"/>
-                <a:cs typeface="Times New Roman" panose="02020603050405020304" pitchFamily="18" charset="0"/>
-              </a:rPr>
-              <a:t>影格緩衝與 </a:t>
-            </a:r>
-            <a:r>
-              <a:rPr lang="en-US" altLang="zh-TW" sz="1600" dirty="0">
-                <a:latin typeface="Times New Roman" panose="02020603050405020304" pitchFamily="18" charset="0"/>
-                <a:ea typeface="標楷體" panose="03000509000000000000" pitchFamily="65" charset="-120"/>
-                <a:cs typeface="Times New Roman" panose="02020603050405020304" pitchFamily="18" charset="0"/>
-              </a:rPr>
-              <a:t>PCIe</a:t>
-            </a:r>
-            <a:r>
-              <a:rPr lang="zh-TW" altLang="en-US" sz="1600" dirty="0">
-                <a:latin typeface="Times New Roman" panose="02020603050405020304" pitchFamily="18" charset="0"/>
-                <a:ea typeface="標楷體" panose="03000509000000000000" pitchFamily="65" charset="-120"/>
-                <a:cs typeface="Times New Roman" panose="02020603050405020304" pitchFamily="18" charset="0"/>
-              </a:rPr>
-              <a:t>，並提供 </a:t>
-            </a:r>
-            <a:r>
-              <a:rPr lang="en-US" altLang="zh-TW" sz="1600" dirty="0">
-                <a:latin typeface="Times New Roman" panose="02020603050405020304" pitchFamily="18" charset="0"/>
-                <a:ea typeface="標楷體" panose="03000509000000000000" pitchFamily="65" charset="-120"/>
-                <a:cs typeface="Times New Roman" panose="02020603050405020304" pitchFamily="18" charset="0"/>
-              </a:rPr>
-              <a:t>Windows </a:t>
-            </a:r>
-            <a:r>
-              <a:rPr lang="zh-TW" altLang="en-US" sz="1600" dirty="0">
-                <a:latin typeface="Times New Roman" panose="02020603050405020304" pitchFamily="18" charset="0"/>
-                <a:ea typeface="標楷體" panose="03000509000000000000" pitchFamily="65" charset="-120"/>
-                <a:cs typeface="Times New Roman" panose="02020603050405020304" pitchFamily="18" charset="0"/>
-              </a:rPr>
-              <a:t>端影格讀取程式</a:t>
-            </a:r>
-          </a:p>
-          <a:p>
-            <a:pPr lvl="1">
-              <a:lnSpc>
-                <a:spcPts val="3000"/>
-              </a:lnSpc>
-            </a:pPr>
-            <a:endParaRPr lang="en-US" altLang="zh-TW" sz="1600" dirty="0">
-              <a:solidFill>
-                <a:schemeClr val="tx1"/>
-              </a:solidFill>
-              <a:latin typeface="Times New Roman" panose="02020603050405020304" pitchFamily="18" charset="0"/>
-              <a:ea typeface="標楷體" panose="03000509000000000000" pitchFamily="65" charset="-120"/>
-              <a:cs typeface="Times New Roman" panose="02020603050405020304" pitchFamily="18" charset="0"/>
-            </a:endParaRPr>
-          </a:p>
-        </p:txBody>
-      </p:sp>
-    </p:spTree>
-    <p:extLst>
-      <p:ext uri="{BB962C8B-B14F-4D97-AF65-F5344CB8AC3E}">
-        <p14:creationId xmlns:p14="http://schemas.microsoft.com/office/powerpoint/2010/main" val="2172022747"/>
-      </p:ext>
-    </p:extLst>
-  </p:cSld>
-  <p:clrMapOvr>
-    <a:masterClrMapping/>
-  </p:clrMapOvr>
-</p:sld>
-</file>
-
-<file path=ppt/slides/slide12.xml><?xml version="1.0" encoding="utf-8"?>
+<file path=ppt/slides/slide13.xml><?xml version="1.0" encoding="utf-8"?>
 <p:sld xmlns:a="http://schemas.openxmlformats.org/drawingml/2006/main" xmlns:r="http://schemas.openxmlformats.org/officeDocument/2006/relationships" xmlns:p="http://schemas.openxmlformats.org/presentationml/2006/main">
   <p:cSld>
     <p:spTree>
@@ -14479,7 +15976,7 @@
                 <a:ea typeface="標楷體" panose="03000509000000000000" pitchFamily="65" charset="-120"/>
                 <a:cs typeface="Times New Roman" panose="02020603050405020304" pitchFamily="18" charset="0"/>
               </a:rPr>
-              <a:t>、開發板、架構與 </a:t>
+              <a:t>、開發板、框架與 </a:t>
             </a:r>
             <a:r>
               <a:rPr lang="en-US" altLang="zh-TW" sz="1600" dirty="0">
@@ -14508,7 +16005,7 @@
                 <a:ea typeface="標楷體" panose="03000509000000000000" pitchFamily="65" charset="-120"/>
                 <a:cs typeface="Times New Roman" panose="02020603050405020304" pitchFamily="18" charset="0"/>
               </a:rPr>
-              <a:t>比較不同開源專案，作為後續技術選型的依據</a:t>
+              <a:t>比較不同開源生態，作為後續技術選型的依據</a:t>
             </a:r>
             <a:endParaRPr lang="en-US" altLang="zh-TW" sz="1600" dirty="0">
               <a:solidFill>
@@ -14549,10 +16046,10 @@
       </p:sp>
       <p:pic>
         <p:nvPicPr>
-          <p:cNvPr id="14" name="圖片 13">
+          <p:cNvPr id="4" name="圖片 3">
             <a:extLst>
               <a:ext uri="{FF2B5EF4-FFF2-40B4-BE49-F238E27FC236}">
-                <a16:creationId xmlns:a16="http://schemas.microsoft.com/office/drawing/2014/main" id="{803CDD84-5AF2-EE5D-D012-4A7CEED12A1C}"/>
+                <a16:creationId xmlns:a16="http://schemas.microsoft.com/office/drawing/2014/main" id="{711D2EBC-D008-B0EE-7DBE-BC7E1A01383F}"/>
               </a:ext>
             </a:extLst>
           </p:cNvPr>
@@ -14569,8 +16066,8 @@
         </p:blipFill>
         <p:spPr>
           <a:xfrm>
-            <a:off x="429610" y="3692363"/>
-            <a:ext cx="9046779" cy="985795"/>
+            <a:off x="440871" y="3509911"/>
+            <a:ext cx="9024257" cy="942654"/>
           </a:xfrm>
           <a:prstGeom prst="rect">
             <a:avLst/>
@@ -14591,6 +16088,716 @@
 </file>
 
 <file path=ppt/slides/slide5.xml><?xml version="1.0" encoding="utf-8"?>
+<p:sld xmlns:a="http://schemas.openxmlformats.org/drawingml/2006/main" xmlns:r="http://schemas.openxmlformats.org/officeDocument/2006/relationships" xmlns:p="http://schemas.openxmlformats.org/presentationml/2006/main">
+  <p:cSld>
+    <p:spTree>
+      <p:nvGrpSpPr>
+        <p:cNvPr id="1" name="">
+          <a:extLst>
+            <a:ext uri="{FF2B5EF4-FFF2-40B4-BE49-F238E27FC236}">
+              <a16:creationId xmlns:a16="http://schemas.microsoft.com/office/drawing/2014/main" id="{C25E9AAA-7E36-1E17-83F9-FD3A18A28BE9}"/>
+            </a:ext>
+          </a:extLst>
+        </p:cNvPr>
+        <p:cNvGrpSpPr/>
+        <p:nvPr/>
+      </p:nvGrpSpPr>
+      <p:grpSpPr>
+        <a:xfrm>
+          <a:off x="0" y="0"/>
+          <a:ext cx="0" cy="0"/>
+          <a:chOff x="0" y="0"/>
+          <a:chExt cx="0" cy="0"/>
+        </a:xfrm>
+      </p:grpSpPr>
+      <p:sp>
+        <p:nvSpPr>
+          <p:cNvPr id="15" name="標題 1">
+            <a:extLst>
+              <a:ext uri="{FF2B5EF4-FFF2-40B4-BE49-F238E27FC236}">
+                <a16:creationId xmlns:a16="http://schemas.microsoft.com/office/drawing/2014/main" id="{142C8726-E890-9988-40FC-8984FDA21FEE}"/>
+              </a:ext>
+            </a:extLst>
+          </p:cNvPr>
+          <p:cNvSpPr>
+            <a:spLocks noGrp="1"/>
+          </p:cNvSpPr>
+          <p:nvPr>
+            <p:ph type="title"/>
+          </p:nvPr>
+        </p:nvSpPr>
+        <p:spPr>
+          <a:xfrm>
+            <a:off x="609602" y="609600"/>
+            <a:ext cx="8077200" cy="533400"/>
+          </a:xfrm>
+          <a:ln>
+            <a:noFill/>
+          </a:ln>
+        </p:spPr>
+        <p:txBody>
+          <a:bodyPr/>
+          <a:lstStyle/>
+          <a:p>
+            <a:r>
+              <a:rPr lang="zh-TW" altLang="en-US" dirty="0">
+                <a:latin typeface="Times New Roman" panose="02020603050405020304" pitchFamily="18" charset="0"/>
+                <a:ea typeface="標楷體" panose="03000509000000000000" pitchFamily="65" charset="-120"/>
+                <a:cs typeface="Times New Roman" panose="02020603050405020304" pitchFamily="18" charset="0"/>
+              </a:rPr>
+              <a:t>本次進度</a:t>
+            </a:r>
+            <a:r>
+              <a:rPr lang="en-US" altLang="zh-TW" dirty="0">
+                <a:latin typeface="Times New Roman" panose="02020603050405020304" pitchFamily="18" charset="0"/>
+                <a:ea typeface="標楷體" panose="03000509000000000000" pitchFamily="65" charset="-120"/>
+                <a:cs typeface="Times New Roman" panose="02020603050405020304" pitchFamily="18" charset="0"/>
+              </a:rPr>
+              <a:t>: </a:t>
+            </a:r>
+            <a:r>
+              <a:rPr lang="en-US" altLang="zh-TW" dirty="0" err="1">
+                <a:latin typeface="Times New Roman" panose="02020603050405020304" pitchFamily="18" charset="0"/>
+                <a:ea typeface="標楷體" panose="03000509000000000000" pitchFamily="65" charset="-120"/>
+                <a:cs typeface="Times New Roman" panose="02020603050405020304" pitchFamily="18" charset="0"/>
+              </a:rPr>
+              <a:t>LiteX</a:t>
+            </a:r>
+            <a:r>
+              <a:rPr lang="en-US" altLang="zh-TW" dirty="0">
+                <a:latin typeface="Times New Roman" panose="02020603050405020304" pitchFamily="18" charset="0"/>
+                <a:ea typeface="標楷體" panose="03000509000000000000" pitchFamily="65" charset="-120"/>
+                <a:cs typeface="Times New Roman" panose="02020603050405020304" pitchFamily="18" charset="0"/>
+              </a:rPr>
+              <a:t> </a:t>
+            </a:r>
+            <a:endParaRPr lang="zh-TW" altLang="en-US" dirty="0">
+              <a:latin typeface="Times New Roman" panose="02020603050405020304" pitchFamily="18" charset="0"/>
+              <a:ea typeface="標楷體" panose="03000509000000000000" pitchFamily="65" charset="-120"/>
+              <a:cs typeface="Times New Roman" panose="02020603050405020304" pitchFamily="18" charset="0"/>
+            </a:endParaRPr>
+          </a:p>
+        </p:txBody>
+      </p:sp>
+      <p:sp>
+        <p:nvSpPr>
+          <p:cNvPr id="2" name="文字版面配置區 6">
+            <a:extLst>
+              <a:ext uri="{FF2B5EF4-FFF2-40B4-BE49-F238E27FC236}">
+                <a16:creationId xmlns:a16="http://schemas.microsoft.com/office/drawing/2014/main" id="{D929304B-5341-8BBF-E71F-AF5F2FE7268A}"/>
+              </a:ext>
+            </a:extLst>
+          </p:cNvPr>
+          <p:cNvSpPr txBox="1"/>
+          <p:nvPr/>
+        </p:nvSpPr>
+        <p:spPr>
+          <a:xfrm>
+            <a:off x="609602" y="935857"/>
+            <a:ext cx="8686796" cy="4700685"/>
+          </a:xfrm>
+          <a:prstGeom prst="rect">
+            <a:avLst/>
+          </a:prstGeom>
+          <a:noFill/>
+          <a:ln>
+            <a:noFill/>
+          </a:ln>
+        </p:spPr>
+        <p:txBody>
+          <a:bodyPr spcFirstLastPara="1" wrap="square" lIns="91425" tIns="45700" rIns="91425" bIns="45700" anchor="t" anchorCtr="0">
+            <a:noAutofit/>
+          </a:bodyPr>
+          <a:lstStyle>
+            <a:defPPr marR="0" lvl="0" algn="l" rtl="0">
+              <a:lnSpc>
+                <a:spcPct val="100000"/>
+              </a:lnSpc>
+              <a:spcBef>
+                <a:spcPts val="0"/>
+              </a:spcBef>
+              <a:spcAft>
+                <a:spcPts val="0"/>
+              </a:spcAft>
+            </a:defPPr>
+            <a:lvl1pPr marL="457200" marR="0" lvl="0" indent="-406400" algn="l" rtl="0">
+              <a:lnSpc>
+                <a:spcPct val="100000"/>
+              </a:lnSpc>
+              <a:spcBef>
+                <a:spcPts val="560"/>
+              </a:spcBef>
+              <a:spcAft>
+                <a:spcPts val="0"/>
+              </a:spcAft>
+              <a:buClr>
+                <a:schemeClr val="accent2"/>
+              </a:buClr>
+              <a:buSzPts val="2800"/>
+              <a:buFont typeface="Noto Sans Symbols"/>
+              <a:buChar char="❖"/>
+              <a:defRPr sz="2800" b="0" i="0" u="none" strike="noStrike" cap="none">
+                <a:solidFill>
+                  <a:schemeClr val="dk1"/>
+                </a:solidFill>
+                <a:latin typeface="Times New Roman"/>
+                <a:ea typeface="Times New Roman"/>
+                <a:cs typeface="Times New Roman"/>
+                <a:sym typeface="Times New Roman"/>
+              </a:defRPr>
+            </a:lvl1pPr>
+            <a:lvl2pPr marL="914400" marR="0" lvl="1" indent="-381000" algn="l" rtl="0">
+              <a:lnSpc>
+                <a:spcPct val="100000"/>
+              </a:lnSpc>
+              <a:spcBef>
+                <a:spcPts val="480"/>
+              </a:spcBef>
+              <a:spcAft>
+                <a:spcPts val="0"/>
+              </a:spcAft>
+              <a:buClr>
+                <a:srgbClr val="FF5050"/>
+              </a:buClr>
+              <a:buSzPts val="2400"/>
+              <a:buFont typeface="Noto Sans Symbols"/>
+              <a:buChar char="▪"/>
+              <a:defRPr sz="2400" b="0" i="0" u="none" strike="noStrike" cap="none">
+                <a:solidFill>
+                  <a:schemeClr val="dk1"/>
+                </a:solidFill>
+                <a:latin typeface="Times New Roman"/>
+                <a:ea typeface="Times New Roman"/>
+                <a:cs typeface="Times New Roman"/>
+                <a:sym typeface="Times New Roman"/>
+              </a:defRPr>
+            </a:lvl2pPr>
+            <a:lvl3pPr marL="1371600" marR="0" lvl="2" indent="-355600" algn="l" rtl="0">
+              <a:lnSpc>
+                <a:spcPct val="100000"/>
+              </a:lnSpc>
+              <a:spcBef>
+                <a:spcPts val="400"/>
+              </a:spcBef>
+              <a:spcAft>
+                <a:spcPts val="0"/>
+              </a:spcAft>
+              <a:buClr>
+                <a:srgbClr val="6699FF"/>
+              </a:buClr>
+              <a:buSzPts val="2000"/>
+              <a:buFont typeface="Times New Roman"/>
+              <a:buChar char="•"/>
+              <a:defRPr sz="2000" b="0" i="0" u="none" strike="noStrike" cap="none">
+                <a:solidFill>
+                  <a:schemeClr val="dk1"/>
+                </a:solidFill>
+                <a:latin typeface="Times New Roman"/>
+                <a:ea typeface="Times New Roman"/>
+                <a:cs typeface="Times New Roman"/>
+                <a:sym typeface="Times New Roman"/>
+              </a:defRPr>
+            </a:lvl3pPr>
+            <a:lvl4pPr marL="1828800" marR="0" lvl="3" indent="-355600" algn="l" rtl="0">
+              <a:lnSpc>
+                <a:spcPct val="100000"/>
+              </a:lnSpc>
+              <a:spcBef>
+                <a:spcPts val="400"/>
+              </a:spcBef>
+              <a:spcAft>
+                <a:spcPts val="0"/>
+              </a:spcAft>
+              <a:buClr>
+                <a:srgbClr val="FF5050"/>
+              </a:buClr>
+              <a:buSzPts val="2000"/>
+              <a:buFont typeface="Times New Roman"/>
+              <a:buChar char="o"/>
+              <a:defRPr sz="2000" b="0" i="0" u="none" strike="noStrike" cap="none">
+                <a:solidFill>
+                  <a:schemeClr val="dk1"/>
+                </a:solidFill>
+                <a:latin typeface="Times New Roman"/>
+                <a:ea typeface="Times New Roman"/>
+                <a:cs typeface="Times New Roman"/>
+                <a:sym typeface="Times New Roman"/>
+              </a:defRPr>
+            </a:lvl4pPr>
+            <a:lvl5pPr marL="2286000" marR="0" lvl="4" indent="-355600" algn="l" rtl="0">
+              <a:lnSpc>
+                <a:spcPct val="100000"/>
+              </a:lnSpc>
+              <a:spcBef>
+                <a:spcPts val="400"/>
+              </a:spcBef>
+              <a:spcAft>
+                <a:spcPts val="0"/>
+              </a:spcAft>
+              <a:buClr>
+                <a:srgbClr val="FF5050"/>
+              </a:buClr>
+              <a:buSzPts val="2000"/>
+              <a:buFont typeface="Times New Roman"/>
+              <a:buChar char="o"/>
+              <a:defRPr sz="2000" b="0" i="0" u="none" strike="noStrike" cap="none">
+                <a:solidFill>
+                  <a:schemeClr val="dk1"/>
+                </a:solidFill>
+                <a:latin typeface="Times New Roman"/>
+                <a:ea typeface="Times New Roman"/>
+                <a:cs typeface="Times New Roman"/>
+                <a:sym typeface="Times New Roman"/>
+              </a:defRPr>
+            </a:lvl5pPr>
+            <a:lvl6pPr marL="2743200" marR="0" lvl="5" indent="-355600" algn="l" rtl="0">
+              <a:lnSpc>
+                <a:spcPct val="100000"/>
+              </a:lnSpc>
+              <a:spcBef>
+                <a:spcPts val="400"/>
+              </a:spcBef>
+              <a:spcAft>
+                <a:spcPts val="0"/>
+              </a:spcAft>
+              <a:buClr>
+                <a:srgbClr val="FF5050"/>
+              </a:buClr>
+              <a:buSzPts val="2000"/>
+              <a:buFont typeface="Times New Roman"/>
+              <a:buChar char="o"/>
+              <a:defRPr sz="2000" b="0" i="0" u="none" strike="noStrike" cap="none">
+                <a:solidFill>
+                  <a:schemeClr val="dk1"/>
+                </a:solidFill>
+                <a:latin typeface="Times New Roman"/>
+                <a:ea typeface="Times New Roman"/>
+                <a:cs typeface="Times New Roman"/>
+                <a:sym typeface="Times New Roman"/>
+              </a:defRPr>
+            </a:lvl6pPr>
+            <a:lvl7pPr marL="3200400" marR="0" lvl="6" indent="-355600" algn="l" rtl="0">
+              <a:lnSpc>
+                <a:spcPct val="100000"/>
+              </a:lnSpc>
+              <a:spcBef>
+                <a:spcPts val="400"/>
+              </a:spcBef>
+              <a:spcAft>
+                <a:spcPts val="0"/>
+              </a:spcAft>
+              <a:buClr>
+                <a:srgbClr val="FF5050"/>
+              </a:buClr>
+              <a:buSzPts val="2000"/>
+              <a:buFont typeface="Times New Roman"/>
+              <a:buChar char="o"/>
+              <a:defRPr sz="2000" b="0" i="0" u="none" strike="noStrike" cap="none">
+                <a:solidFill>
+                  <a:schemeClr val="dk1"/>
+                </a:solidFill>
+                <a:latin typeface="Times New Roman"/>
+                <a:ea typeface="Times New Roman"/>
+                <a:cs typeface="Times New Roman"/>
+                <a:sym typeface="Times New Roman"/>
+              </a:defRPr>
+            </a:lvl7pPr>
+            <a:lvl8pPr marL="3657600" marR="0" lvl="7" indent="-355600" algn="l" rtl="0">
+              <a:lnSpc>
+                <a:spcPct val="100000"/>
+              </a:lnSpc>
+              <a:spcBef>
+                <a:spcPts val="400"/>
+              </a:spcBef>
+              <a:spcAft>
+                <a:spcPts val="0"/>
+              </a:spcAft>
+              <a:buClr>
+                <a:srgbClr val="FF5050"/>
+              </a:buClr>
+              <a:buSzPts val="2000"/>
+              <a:buFont typeface="Times New Roman"/>
+              <a:buChar char="o"/>
+              <a:defRPr sz="2000" b="0" i="0" u="none" strike="noStrike" cap="none">
+                <a:solidFill>
+                  <a:schemeClr val="dk1"/>
+                </a:solidFill>
+                <a:latin typeface="Times New Roman"/>
+                <a:ea typeface="Times New Roman"/>
+                <a:cs typeface="Times New Roman"/>
+                <a:sym typeface="Times New Roman"/>
+              </a:defRPr>
+            </a:lvl8pPr>
+            <a:lvl9pPr marL="4114800" marR="0" lvl="8" indent="-355600" algn="l" rtl="0">
+              <a:lnSpc>
+                <a:spcPct val="100000"/>
+              </a:lnSpc>
+              <a:spcBef>
+                <a:spcPts val="400"/>
+              </a:spcBef>
+              <a:spcAft>
+                <a:spcPts val="0"/>
+              </a:spcAft>
+              <a:buClr>
+                <a:srgbClr val="FF5050"/>
+              </a:buClr>
+              <a:buSzPts val="2000"/>
+              <a:buFont typeface="Times New Roman"/>
+              <a:buChar char="o"/>
+              <a:defRPr sz="2000" b="0" i="0" u="none" strike="noStrike" cap="none">
+                <a:solidFill>
+                  <a:schemeClr val="dk1"/>
+                </a:solidFill>
+                <a:latin typeface="Times New Roman"/>
+                <a:ea typeface="Times New Roman"/>
+                <a:cs typeface="Times New Roman"/>
+                <a:sym typeface="Times New Roman"/>
+              </a:defRPr>
+            </a:lvl9pPr>
+          </a:lstStyle>
+          <a:p>
+            <a:pPr>
+              <a:lnSpc>
+                <a:spcPct val="150000"/>
+              </a:lnSpc>
+            </a:pPr>
+            <a:r>
+              <a:rPr lang="zh-TW" altLang="en-US" sz="2000" dirty="0">
+                <a:solidFill>
+                  <a:schemeClr val="tx1"/>
+                </a:solidFill>
+                <a:latin typeface="Times New Roman" panose="02020603050405020304" pitchFamily="18" charset="0"/>
+                <a:ea typeface="標楷體" panose="03000509000000000000" pitchFamily="65" charset="-120"/>
+                <a:cs typeface="Times New Roman" panose="02020603050405020304" pitchFamily="18" charset="0"/>
+              </a:rPr>
+              <a:t>定位</a:t>
+            </a:r>
+            <a:endParaRPr lang="en-US" altLang="zh-TW" sz="2000" dirty="0">
+              <a:solidFill>
+                <a:schemeClr val="tx1"/>
+              </a:solidFill>
+              <a:latin typeface="Times New Roman" panose="02020603050405020304" pitchFamily="18" charset="0"/>
+              <a:ea typeface="標楷體" panose="03000509000000000000" pitchFamily="65" charset="-120"/>
+              <a:cs typeface="Times New Roman" panose="02020603050405020304" pitchFamily="18" charset="0"/>
+            </a:endParaRPr>
+          </a:p>
+          <a:p>
+            <a:pPr lvl="1">
+              <a:lnSpc>
+                <a:spcPts val="3000"/>
+              </a:lnSpc>
+            </a:pPr>
+            <a:r>
+              <a:rPr lang="zh-TW" altLang="en-US" sz="1600" dirty="0">
+                <a:latin typeface="Times New Roman" panose="02020603050405020304" pitchFamily="18" charset="0"/>
+                <a:ea typeface="標楷體" panose="03000509000000000000" pitchFamily="65" charset="-120"/>
+                <a:cs typeface="Times New Roman" panose="02020603050405020304" pitchFamily="18" charset="0"/>
+              </a:rPr>
+              <a:t>透過 </a:t>
+            </a:r>
+            <a:r>
+              <a:rPr lang="en-US" altLang="zh-TW" sz="1600" dirty="0">
+                <a:latin typeface="Times New Roman" panose="02020603050405020304" pitchFamily="18" charset="0"/>
+                <a:ea typeface="標楷體" panose="03000509000000000000" pitchFamily="65" charset="-120"/>
+                <a:cs typeface="Times New Roman" panose="02020603050405020304" pitchFamily="18" charset="0"/>
+              </a:rPr>
+              <a:t>Python </a:t>
+            </a:r>
+            <a:r>
+              <a:rPr lang="zh-TW" altLang="en-US" sz="1600" dirty="0">
+                <a:latin typeface="Times New Roman" panose="02020603050405020304" pitchFamily="18" charset="0"/>
+                <a:ea typeface="標楷體" panose="03000509000000000000" pitchFamily="65" charset="-120"/>
+                <a:cs typeface="Times New Roman" panose="02020603050405020304" pitchFamily="18" charset="0"/>
+              </a:rPr>
+              <a:t>描述與整合 </a:t>
+            </a:r>
+            <a:r>
+              <a:rPr lang="en-US" altLang="zh-TW" sz="1600" dirty="0">
+                <a:latin typeface="Times New Roman" panose="02020603050405020304" pitchFamily="18" charset="0"/>
+                <a:ea typeface="標楷體" panose="03000509000000000000" pitchFamily="65" charset="-120"/>
+                <a:cs typeface="Times New Roman" panose="02020603050405020304" pitchFamily="18" charset="0"/>
+              </a:rPr>
+              <a:t>FPGA </a:t>
+            </a:r>
+            <a:r>
+              <a:rPr lang="zh-TW" altLang="en-US" sz="1600" dirty="0">
+                <a:latin typeface="Times New Roman" panose="02020603050405020304" pitchFamily="18" charset="0"/>
+                <a:ea typeface="標楷體" panose="03000509000000000000" pitchFamily="65" charset="-120"/>
+                <a:cs typeface="Times New Roman" panose="02020603050405020304" pitchFamily="18" charset="0"/>
+              </a:rPr>
+              <a:t>硬體模組，建立 </a:t>
+            </a:r>
+            <a:r>
+              <a:rPr lang="en-US" altLang="zh-TW" sz="1600" dirty="0">
+                <a:latin typeface="Times New Roman" panose="02020603050405020304" pitchFamily="18" charset="0"/>
+                <a:ea typeface="標楷體" panose="03000509000000000000" pitchFamily="65" charset="-120"/>
+                <a:cs typeface="Times New Roman" panose="02020603050405020304" pitchFamily="18" charset="0"/>
+              </a:rPr>
+              <a:t>SoC</a:t>
+            </a:r>
+            <a:r>
+              <a:rPr lang="zh-TW" altLang="en-US" sz="1600" dirty="0">
+                <a:latin typeface="Times New Roman" panose="02020603050405020304" pitchFamily="18" charset="0"/>
+                <a:ea typeface="標楷體" panose="03000509000000000000" pitchFamily="65" charset="-120"/>
+                <a:cs typeface="Times New Roman" panose="02020603050405020304" pitchFamily="18" charset="0"/>
+              </a:rPr>
+              <a:t> 設計，並支援產生 </a:t>
+            </a:r>
+            <a:r>
+              <a:rPr lang="en-US" altLang="zh-TW" sz="1600" dirty="0">
+                <a:latin typeface="Times New Roman" panose="02020603050405020304" pitchFamily="18" charset="0"/>
+                <a:ea typeface="標楷體" panose="03000509000000000000" pitchFamily="65" charset="-120"/>
+                <a:cs typeface="Times New Roman" panose="02020603050405020304" pitchFamily="18" charset="0"/>
+              </a:rPr>
+              <a:t>HDL </a:t>
+            </a:r>
+            <a:r>
+              <a:rPr lang="zh-TW" altLang="en-US" sz="1600" dirty="0">
+                <a:latin typeface="Times New Roman" panose="02020603050405020304" pitchFamily="18" charset="0"/>
+                <a:ea typeface="標楷體" panose="03000509000000000000" pitchFamily="65" charset="-120"/>
+                <a:cs typeface="Times New Roman" panose="02020603050405020304" pitchFamily="18" charset="0"/>
+              </a:rPr>
+              <a:t>與呼叫 </a:t>
+            </a:r>
+            <a:r>
+              <a:rPr lang="en-US" altLang="zh-TW" sz="1600" dirty="0">
+                <a:latin typeface="Times New Roman" panose="02020603050405020304" pitchFamily="18" charset="0"/>
+                <a:ea typeface="標楷體" panose="03000509000000000000" pitchFamily="65" charset="-120"/>
+                <a:cs typeface="Times New Roman" panose="02020603050405020304" pitchFamily="18" charset="0"/>
+              </a:rPr>
+              <a:t>FPGA </a:t>
+            </a:r>
+            <a:r>
+              <a:rPr lang="zh-TW" altLang="en-US" sz="1600" dirty="0">
+                <a:latin typeface="Times New Roman" panose="02020603050405020304" pitchFamily="18" charset="0"/>
+                <a:ea typeface="標楷體" panose="03000509000000000000" pitchFamily="65" charset="-120"/>
+                <a:cs typeface="Times New Roman" panose="02020603050405020304" pitchFamily="18" charset="0"/>
+              </a:rPr>
+              <a:t>建置工具</a:t>
+            </a:r>
+          </a:p>
+          <a:p>
+            <a:pPr>
+              <a:lnSpc>
+                <a:spcPts val="3000"/>
+              </a:lnSpc>
+            </a:pPr>
+            <a:r>
+              <a:rPr lang="zh-TW" altLang="en-US" sz="2000" dirty="0">
+                <a:latin typeface="Times New Roman" panose="02020603050405020304" pitchFamily="18" charset="0"/>
+                <a:ea typeface="標楷體" panose="03000509000000000000" pitchFamily="65" charset="-120"/>
+                <a:cs typeface="Times New Roman" panose="02020603050405020304" pitchFamily="18" charset="0"/>
+              </a:rPr>
+              <a:t>功能</a:t>
+            </a:r>
+          </a:p>
+          <a:p>
+            <a:pPr lvl="1">
+              <a:lnSpc>
+                <a:spcPts val="3000"/>
+              </a:lnSpc>
+            </a:pPr>
+            <a:r>
+              <a:rPr lang="zh-TW" altLang="en-US" sz="1600" dirty="0">
+                <a:latin typeface="Times New Roman" panose="02020603050405020304" pitchFamily="18" charset="0"/>
+                <a:ea typeface="標楷體" panose="03000509000000000000" pitchFamily="65" charset="-120"/>
+                <a:cs typeface="Times New Roman" panose="02020603050405020304" pitchFamily="18" charset="0"/>
+              </a:rPr>
+              <a:t>組合處理器、記憶體、匯流排及周邊模組</a:t>
+            </a:r>
+          </a:p>
+          <a:p>
+            <a:pPr lvl="1">
+              <a:lnSpc>
+                <a:spcPts val="3000"/>
+              </a:lnSpc>
+            </a:pPr>
+            <a:r>
+              <a:rPr lang="zh-TW" altLang="en-US" sz="1600" dirty="0">
+                <a:latin typeface="Times New Roman" panose="02020603050405020304" pitchFamily="18" charset="0"/>
+                <a:ea typeface="標楷體" panose="03000509000000000000" pitchFamily="65" charset="-120"/>
+                <a:cs typeface="Times New Roman" panose="02020603050405020304" pitchFamily="18" charset="0"/>
+              </a:rPr>
+              <a:t>提供 </a:t>
+            </a:r>
+            <a:r>
+              <a:rPr lang="en-US" altLang="zh-TW" sz="1600" dirty="0">
+                <a:latin typeface="Times New Roman" panose="02020603050405020304" pitchFamily="18" charset="0"/>
+                <a:ea typeface="標楷體" panose="03000509000000000000" pitchFamily="65" charset="-120"/>
+                <a:cs typeface="Times New Roman" panose="02020603050405020304" pitchFamily="18" charset="0"/>
+              </a:rPr>
+              <a:t>Wishbone</a:t>
+            </a:r>
+            <a:r>
+              <a:rPr lang="zh-TW" altLang="en-US" sz="1600" dirty="0">
+                <a:latin typeface="Times New Roman" panose="02020603050405020304" pitchFamily="18" charset="0"/>
+                <a:ea typeface="標楷體" panose="03000509000000000000" pitchFamily="65" charset="-120"/>
+                <a:cs typeface="Times New Roman" panose="02020603050405020304" pitchFamily="18" charset="0"/>
+              </a:rPr>
+              <a:t>、</a:t>
+            </a:r>
+            <a:r>
+              <a:rPr lang="en-US" altLang="zh-TW" sz="1600" dirty="0">
+                <a:latin typeface="Times New Roman" panose="02020603050405020304" pitchFamily="18" charset="0"/>
+                <a:ea typeface="標楷體" panose="03000509000000000000" pitchFamily="65" charset="-120"/>
+                <a:cs typeface="Times New Roman" panose="02020603050405020304" pitchFamily="18" charset="0"/>
+              </a:rPr>
+              <a:t>AXI </a:t>
+            </a:r>
+            <a:r>
+              <a:rPr lang="zh-TW" altLang="en-US" sz="1600" dirty="0">
+                <a:latin typeface="Times New Roman" panose="02020603050405020304" pitchFamily="18" charset="0"/>
+                <a:ea typeface="標楷體" panose="03000509000000000000" pitchFamily="65" charset="-120"/>
+                <a:cs typeface="Times New Roman" panose="02020603050405020304" pitchFamily="18" charset="0"/>
+              </a:rPr>
+              <a:t>等互連機制，以及 </a:t>
+            </a:r>
+            <a:r>
+              <a:rPr lang="en-US" altLang="zh-TW" sz="1600" dirty="0">
+                <a:latin typeface="Times New Roman" panose="02020603050405020304" pitchFamily="18" charset="0"/>
+                <a:ea typeface="標楷體" panose="03000509000000000000" pitchFamily="65" charset="-120"/>
+                <a:cs typeface="Times New Roman" panose="02020603050405020304" pitchFamily="18" charset="0"/>
+              </a:rPr>
+              <a:t>Streams</a:t>
+            </a:r>
+          </a:p>
+          <a:p>
+            <a:pPr lvl="1">
+              <a:lnSpc>
+                <a:spcPts val="3000"/>
+              </a:lnSpc>
+            </a:pPr>
+            <a:r>
+              <a:rPr lang="zh-TW" altLang="en-US" sz="1600" dirty="0">
+                <a:latin typeface="Times New Roman" panose="02020603050405020304" pitchFamily="18" charset="0"/>
+                <a:ea typeface="標楷體" panose="03000509000000000000" pitchFamily="65" charset="-120"/>
+                <a:cs typeface="Times New Roman" panose="02020603050405020304" pitchFamily="18" charset="0"/>
+              </a:rPr>
+              <a:t>可搭配 </a:t>
+            </a:r>
+            <a:r>
+              <a:rPr lang="en-US" altLang="zh-TW" sz="1600" dirty="0" err="1">
+                <a:latin typeface="Times New Roman" panose="02020603050405020304" pitchFamily="18" charset="0"/>
+                <a:ea typeface="標楷體" panose="03000509000000000000" pitchFamily="65" charset="-120"/>
+                <a:cs typeface="Times New Roman" panose="02020603050405020304" pitchFamily="18" charset="0"/>
+              </a:rPr>
+              <a:t>LiteDRAM</a:t>
+            </a:r>
+            <a:r>
+              <a:rPr lang="zh-TW" altLang="en-US" sz="1600" dirty="0">
+                <a:latin typeface="Times New Roman" panose="02020603050405020304" pitchFamily="18" charset="0"/>
+                <a:ea typeface="標楷體" panose="03000509000000000000" pitchFamily="65" charset="-120"/>
+                <a:cs typeface="Times New Roman" panose="02020603050405020304" pitchFamily="18" charset="0"/>
+              </a:rPr>
+              <a:t>、</a:t>
+            </a:r>
+            <a:r>
+              <a:rPr lang="en-US" altLang="zh-TW" sz="1600" dirty="0" err="1">
+                <a:latin typeface="Times New Roman" panose="02020603050405020304" pitchFamily="18" charset="0"/>
+                <a:ea typeface="標楷體" panose="03000509000000000000" pitchFamily="65" charset="-120"/>
+                <a:cs typeface="Times New Roman" panose="02020603050405020304" pitchFamily="18" charset="0"/>
+              </a:rPr>
+              <a:t>LitePCIe</a:t>
+            </a:r>
+            <a:r>
+              <a:rPr lang="zh-TW" altLang="en-US" sz="1600" dirty="0">
+                <a:latin typeface="Times New Roman" panose="02020603050405020304" pitchFamily="18" charset="0"/>
+                <a:ea typeface="標楷體" panose="03000509000000000000" pitchFamily="65" charset="-120"/>
+                <a:cs typeface="Times New Roman" panose="02020603050405020304" pitchFamily="18" charset="0"/>
+              </a:rPr>
+              <a:t>、</a:t>
+            </a:r>
+            <a:r>
+              <a:rPr lang="en-US" altLang="zh-TW" sz="1600" dirty="0" err="1">
+                <a:latin typeface="Times New Roman" panose="02020603050405020304" pitchFamily="18" charset="0"/>
+                <a:ea typeface="標楷體" panose="03000509000000000000" pitchFamily="65" charset="-120"/>
+                <a:cs typeface="Times New Roman" panose="02020603050405020304" pitchFamily="18" charset="0"/>
+              </a:rPr>
+              <a:t>LiteEth</a:t>
+            </a:r>
+            <a:r>
+              <a:rPr lang="en-US" altLang="zh-TW" sz="1600" dirty="0">
+                <a:latin typeface="Times New Roman" panose="02020603050405020304" pitchFamily="18" charset="0"/>
+                <a:ea typeface="標楷體" panose="03000509000000000000" pitchFamily="65" charset="-120"/>
+                <a:cs typeface="Times New Roman" panose="02020603050405020304" pitchFamily="18" charset="0"/>
+              </a:rPr>
+              <a:t> </a:t>
+            </a:r>
+            <a:r>
+              <a:rPr lang="zh-TW" altLang="en-US" sz="1600" dirty="0">
+                <a:latin typeface="Times New Roman" panose="02020603050405020304" pitchFamily="18" charset="0"/>
+                <a:ea typeface="標楷體" panose="03000509000000000000" pitchFamily="65" charset="-120"/>
+                <a:cs typeface="Times New Roman" panose="02020603050405020304" pitchFamily="18" charset="0"/>
+              </a:rPr>
+              <a:t>等生態系模組</a:t>
+            </a:r>
+            <a:endParaRPr lang="en-US" altLang="zh-TW" sz="1600" dirty="0">
+              <a:latin typeface="Times New Roman" panose="02020603050405020304" pitchFamily="18" charset="0"/>
+              <a:ea typeface="標楷體" panose="03000509000000000000" pitchFamily="65" charset="-120"/>
+              <a:cs typeface="Times New Roman" panose="02020603050405020304" pitchFamily="18" charset="0"/>
+            </a:endParaRPr>
+          </a:p>
+        </p:txBody>
+      </p:sp>
+      <p:sp>
+        <p:nvSpPr>
+          <p:cNvPr id="5" name="文字方塊 4">
+            <a:extLst>
+              <a:ext uri="{FF2B5EF4-FFF2-40B4-BE49-F238E27FC236}">
+                <a16:creationId xmlns:a16="http://schemas.microsoft.com/office/drawing/2014/main" id="{DB8BF237-AE2C-BCBD-03CB-07C643D7BB9F}"/>
+              </a:ext>
+            </a:extLst>
+          </p:cNvPr>
+          <p:cNvSpPr txBox="1"/>
+          <p:nvPr/>
+        </p:nvSpPr>
+        <p:spPr>
+          <a:xfrm>
+            <a:off x="1787236" y="6384072"/>
+            <a:ext cx="5802283" cy="276999"/>
+          </a:xfrm>
+          <a:prstGeom prst="rect">
+            <a:avLst/>
+          </a:prstGeom>
+          <a:noFill/>
+        </p:spPr>
+        <p:txBody>
+          <a:bodyPr wrap="square">
+            <a:spAutoFit/>
+          </a:bodyPr>
+          <a:lstStyle/>
+          <a:p>
+            <a:r>
+              <a:rPr lang="en-US" altLang="zh-TW" sz="1200" dirty="0">
+                <a:latin typeface="Times New Roman" panose="02020603050405020304" pitchFamily="18" charset="0"/>
+                <a:cs typeface="Times New Roman" panose="02020603050405020304" pitchFamily="18" charset="0"/>
+              </a:rPr>
+              <a:t>[1] </a:t>
+            </a:r>
+            <a:r>
+              <a:rPr lang="zh-TW" altLang="en-US" sz="1200" dirty="0">
+                <a:latin typeface="Times New Roman" panose="02020603050405020304" pitchFamily="18" charset="0"/>
+                <a:cs typeface="Times New Roman" panose="02020603050405020304" pitchFamily="18" charset="0"/>
+              </a:rPr>
+              <a:t>https://github.com/enjoy-digital/litex?utm_source=chatgpt.com</a:t>
+            </a:r>
+          </a:p>
+        </p:txBody>
+      </p:sp>
+    </p:spTree>
+    <p:extLst>
+      <p:ext uri="{BB962C8B-B14F-4D97-AF65-F5344CB8AC3E}">
+        <p14:creationId xmlns:p14="http://schemas.microsoft.com/office/powerpoint/2010/main" val="3075961224"/>
+      </p:ext>
+    </p:extLst>
+  </p:cSld>
+  <p:clrMapOvr>
+    <a:masterClrMapping/>
+  </p:clrMapOvr>
+</p:sld>
+</file>
+
+<file path=ppt/slides/slide6.xml><?xml version="1.0" encoding="utf-8"?>
 <p:sld xmlns:a="http://schemas.openxmlformats.org/drawingml/2006/main" xmlns:r="http://schemas.openxmlformats.org/officeDocument/2006/relationships" xmlns:p="http://schemas.openxmlformats.org/presentationml/2006/main">
   <p:cSld>
     <p:spTree>
@@ -15551,7 +17758,7 @@
                 <a:ea typeface="標楷體" panose="03000509000000000000" pitchFamily="65" charset="-120"/>
                 <a:cs typeface="Times New Roman" panose="02020603050405020304" pitchFamily="18" charset="0"/>
               </a:rPr>
-              <a:t>[1] </a:t>
+              <a:t>[2] </a:t>
             </a:r>
             <a:r>
               <a:rPr lang="zh-TW" altLang="en-US" sz="1200" dirty="0">
@@ -15607,7 +17814,7 @@
 </p:sld>
 </file>
 
-<file path=ppt/slides/slide6.xml><?xml version="1.0" encoding="utf-8"?>
+<file path=ppt/slides/slide7.xml><?xml version="1.0" encoding="utf-8"?>
 <p:sld xmlns:a="http://schemas.openxmlformats.org/drawingml/2006/main" xmlns:r="http://schemas.openxmlformats.org/officeDocument/2006/relationships" xmlns:p="http://schemas.openxmlformats.org/presentationml/2006/main">
   <p:cSld>
     <p:spTree>
@@ -16143,7 +18350,7 @@
                 <a:ea typeface="標楷體" panose="03000509000000000000" pitchFamily="65" charset="-120"/>
                 <a:cs typeface="Times New Roman" panose="02020603050405020304" pitchFamily="18" charset="0"/>
               </a:rPr>
-              <a:t>HDMI </a:t>
+              <a:t>FPGA </a:t>
             </a:r>
             <a:r>
               <a:rPr lang="zh-TW" altLang="en-US" sz="2000" dirty="0">
@@ -16353,7 +18560,7 @@
                 <a:latin typeface="Times New Roman" panose="02020603050405020304" pitchFamily="18" charset="0"/>
                 <a:cs typeface="Times New Roman" panose="02020603050405020304" pitchFamily="18" charset="0"/>
               </a:rPr>
-              <a:t>[2] </a:t>
+              <a:t>[3] </a:t>
             </a:r>
             <a:r>
               <a:rPr lang="zh-TW" altLang="en-US" sz="1200" dirty="0">
@@ -16398,717 +18605,7 @@
     </p:spTree>
     <p:extLst>
       <p:ext uri="{BB962C8B-B14F-4D97-AF65-F5344CB8AC3E}">
-        <p14:creationId xmlns:p14="http://schemas.microsoft.com/office/powerpoint/2010/main" val="2696284170"/>
-      </p:ext>
-    </p:extLst>
-  </p:cSld>
-  <p:clrMapOvr>
-    <a:masterClrMapping/>
-  </p:clrMapOvr>
-</p:sld>
-</file>
-
-<file path=ppt/slides/slide7.xml><?xml version="1.0" encoding="utf-8"?>
-<p:sld xmlns:a="http://schemas.openxmlformats.org/drawingml/2006/main" xmlns:r="http://schemas.openxmlformats.org/officeDocument/2006/relationships" xmlns:p="http://schemas.openxmlformats.org/presentationml/2006/main">
-  <p:cSld>
-    <p:spTree>
-      <p:nvGrpSpPr>
-        <p:cNvPr id="1" name="">
-          <a:extLst>
-            <a:ext uri="{FF2B5EF4-FFF2-40B4-BE49-F238E27FC236}">
-              <a16:creationId xmlns:a16="http://schemas.microsoft.com/office/drawing/2014/main" id="{C25E9AAA-7E36-1E17-83F9-FD3A18A28BE9}"/>
-            </a:ext>
-          </a:extLst>
-        </p:cNvPr>
-        <p:cNvGrpSpPr/>
-        <p:nvPr/>
-      </p:nvGrpSpPr>
-      <p:grpSpPr>
-        <a:xfrm>
-          <a:off x="0" y="0"/>
-          <a:ext cx="0" cy="0"/>
-          <a:chOff x="0" y="0"/>
-          <a:chExt cx="0" cy="0"/>
-        </a:xfrm>
-      </p:grpSpPr>
-      <p:sp>
-        <p:nvSpPr>
-          <p:cNvPr id="15" name="標題 1">
-            <a:extLst>
-              <a:ext uri="{FF2B5EF4-FFF2-40B4-BE49-F238E27FC236}">
-                <a16:creationId xmlns:a16="http://schemas.microsoft.com/office/drawing/2014/main" id="{142C8726-E890-9988-40FC-8984FDA21FEE}"/>
-              </a:ext>
-            </a:extLst>
-          </p:cNvPr>
-          <p:cNvSpPr>
-            <a:spLocks noGrp="1"/>
-          </p:cNvSpPr>
-          <p:nvPr>
-            <p:ph type="title"/>
-          </p:nvPr>
-        </p:nvSpPr>
-        <p:spPr>
-          <a:xfrm>
-            <a:off x="609602" y="609600"/>
-            <a:ext cx="8077200" cy="533400"/>
-          </a:xfrm>
-          <a:ln>
-            <a:noFill/>
-          </a:ln>
-        </p:spPr>
-        <p:txBody>
-          <a:bodyPr/>
-          <a:lstStyle/>
-          <a:p>
-            <a:r>
-              <a:rPr lang="zh-TW" altLang="en-US" dirty="0">
-                <a:latin typeface="Times New Roman" panose="02020603050405020304" pitchFamily="18" charset="0"/>
-                <a:ea typeface="標楷體" panose="03000509000000000000" pitchFamily="65" charset="-120"/>
-                <a:cs typeface="Times New Roman" panose="02020603050405020304" pitchFamily="18" charset="0"/>
-              </a:rPr>
-              <a:t>本次進度</a:t>
-            </a:r>
-            <a:r>
-              <a:rPr lang="en-US" altLang="zh-TW" dirty="0">
-                <a:latin typeface="Times New Roman" panose="02020603050405020304" pitchFamily="18" charset="0"/>
-                <a:ea typeface="標楷體" panose="03000509000000000000" pitchFamily="65" charset="-120"/>
-                <a:cs typeface="Times New Roman" panose="02020603050405020304" pitchFamily="18" charset="0"/>
-              </a:rPr>
-              <a:t>: </a:t>
-            </a:r>
-            <a:r>
-              <a:rPr lang="en-US" altLang="zh-TW" dirty="0" err="1">
-                <a:latin typeface="Times New Roman" panose="02020603050405020304" pitchFamily="18" charset="0"/>
-                <a:ea typeface="標楷體" panose="03000509000000000000" pitchFamily="65" charset="-120"/>
-                <a:cs typeface="Times New Roman" panose="02020603050405020304" pitchFamily="18" charset="0"/>
-              </a:rPr>
-              <a:t>LiteX</a:t>
-            </a:r>
-            <a:r>
-              <a:rPr lang="en-US" altLang="zh-TW" dirty="0">
-                <a:latin typeface="Times New Roman" panose="02020603050405020304" pitchFamily="18" charset="0"/>
-                <a:ea typeface="標楷體" panose="03000509000000000000" pitchFamily="65" charset="-120"/>
-                <a:cs typeface="Times New Roman" panose="02020603050405020304" pitchFamily="18" charset="0"/>
-              </a:rPr>
-              <a:t> </a:t>
-            </a:r>
-            <a:endParaRPr lang="zh-TW" altLang="en-US" dirty="0">
-              <a:latin typeface="Times New Roman" panose="02020603050405020304" pitchFamily="18" charset="0"/>
-              <a:ea typeface="標楷體" panose="03000509000000000000" pitchFamily="65" charset="-120"/>
-              <a:cs typeface="Times New Roman" panose="02020603050405020304" pitchFamily="18" charset="0"/>
-            </a:endParaRPr>
-          </a:p>
-        </p:txBody>
-      </p:sp>
-      <p:sp>
-        <p:nvSpPr>
-          <p:cNvPr id="2" name="文字版面配置區 6">
-            <a:extLst>
-              <a:ext uri="{FF2B5EF4-FFF2-40B4-BE49-F238E27FC236}">
-                <a16:creationId xmlns:a16="http://schemas.microsoft.com/office/drawing/2014/main" id="{D929304B-5341-8BBF-E71F-AF5F2FE7268A}"/>
-              </a:ext>
-            </a:extLst>
-          </p:cNvPr>
-          <p:cNvSpPr txBox="1"/>
-          <p:nvPr/>
-        </p:nvSpPr>
-        <p:spPr>
-          <a:xfrm>
-            <a:off x="609602" y="935857"/>
-            <a:ext cx="8686796" cy="4700685"/>
-          </a:xfrm>
-          <a:prstGeom prst="rect">
-            <a:avLst/>
-          </a:prstGeom>
-          <a:noFill/>
-          <a:ln>
-            <a:noFill/>
-          </a:ln>
-        </p:spPr>
-        <p:txBody>
-          <a:bodyPr spcFirstLastPara="1" wrap="square" lIns="91425" tIns="45700" rIns="91425" bIns="45700" anchor="t" anchorCtr="0">
-            <a:noAutofit/>
-          </a:bodyPr>
-          <a:lstStyle>
-            <a:defPPr marR="0" lvl="0" algn="l" rtl="0">
-              <a:lnSpc>
-                <a:spcPct val="100000"/>
-              </a:lnSpc>
-              <a:spcBef>
-                <a:spcPts val="0"/>
-              </a:spcBef>
-              <a:spcAft>
-                <a:spcPts val="0"/>
-              </a:spcAft>
-            </a:defPPr>
-            <a:lvl1pPr marL="457200" marR="0" lvl="0" indent="-406400" algn="l" rtl="0">
-              <a:lnSpc>
-                <a:spcPct val="100000"/>
-              </a:lnSpc>
-              <a:spcBef>
-                <a:spcPts val="560"/>
-              </a:spcBef>
-              <a:spcAft>
-                <a:spcPts val="0"/>
-              </a:spcAft>
-              <a:buClr>
-                <a:schemeClr val="accent2"/>
-              </a:buClr>
-              <a:buSzPts val="2800"/>
-              <a:buFont typeface="Noto Sans Symbols"/>
-              <a:buChar char="❖"/>
-              <a:defRPr sz="2800" b="0" i="0" u="none" strike="noStrike" cap="none">
-                <a:solidFill>
-                  <a:schemeClr val="dk1"/>
-                </a:solidFill>
-                <a:latin typeface="Times New Roman"/>
-                <a:ea typeface="Times New Roman"/>
-                <a:cs typeface="Times New Roman"/>
-                <a:sym typeface="Times New Roman"/>
-              </a:defRPr>
-            </a:lvl1pPr>
-            <a:lvl2pPr marL="914400" marR="0" lvl="1" indent="-381000" algn="l" rtl="0">
-              <a:lnSpc>
-                <a:spcPct val="100000"/>
-              </a:lnSpc>
-              <a:spcBef>
-                <a:spcPts val="480"/>
-              </a:spcBef>
-              <a:spcAft>
-                <a:spcPts val="0"/>
-              </a:spcAft>
-              <a:buClr>
-                <a:srgbClr val="FF5050"/>
-              </a:buClr>
-              <a:buSzPts val="2400"/>
-              <a:buFont typeface="Noto Sans Symbols"/>
-              <a:buChar char="▪"/>
-              <a:defRPr sz="2400" b="0" i="0" u="none" strike="noStrike" cap="none">
-                <a:solidFill>
-                  <a:schemeClr val="dk1"/>
-                </a:solidFill>
-                <a:latin typeface="Times New Roman"/>
-                <a:ea typeface="Times New Roman"/>
-                <a:cs typeface="Times New Roman"/>
-                <a:sym typeface="Times New Roman"/>
-              </a:defRPr>
-            </a:lvl2pPr>
-            <a:lvl3pPr marL="1371600" marR="0" lvl="2" indent="-355600" algn="l" rtl="0">
-              <a:lnSpc>
-                <a:spcPct val="100000"/>
-              </a:lnSpc>
-              <a:spcBef>
-                <a:spcPts val="400"/>
-              </a:spcBef>
-              <a:spcAft>
-                <a:spcPts val="0"/>
-              </a:spcAft>
-              <a:buClr>
-                <a:srgbClr val="6699FF"/>
-              </a:buClr>
-              <a:buSzPts val="2000"/>
-              <a:buFont typeface="Times New Roman"/>
-              <a:buChar char="•"/>
-              <a:defRPr sz="2000" b="0" i="0" u="none" strike="noStrike" cap="none">
-                <a:solidFill>
-                  <a:schemeClr val="dk1"/>
-                </a:solidFill>
-                <a:latin typeface="Times New Roman"/>
-                <a:ea typeface="Times New Roman"/>
-                <a:cs typeface="Times New Roman"/>
-                <a:sym typeface="Times New Roman"/>
-              </a:defRPr>
-            </a:lvl3pPr>
-            <a:lvl4pPr marL="1828800" marR="0" lvl="3" indent="-355600" algn="l" rtl="0">
-              <a:lnSpc>
-                <a:spcPct val="100000"/>
-              </a:lnSpc>
-              <a:spcBef>
-                <a:spcPts val="400"/>
-              </a:spcBef>
-              <a:spcAft>
-                <a:spcPts val="0"/>
-              </a:spcAft>
-              <a:buClr>
-                <a:srgbClr val="FF5050"/>
-              </a:buClr>
-              <a:buSzPts val="2000"/>
-              <a:buFont typeface="Times New Roman"/>
-              <a:buChar char="o"/>
-              <a:defRPr sz="2000" b="0" i="0" u="none" strike="noStrike" cap="none">
-                <a:solidFill>
-                  <a:schemeClr val="dk1"/>
-                </a:solidFill>
-                <a:latin typeface="Times New Roman"/>
-                <a:ea typeface="Times New Roman"/>
-                <a:cs typeface="Times New Roman"/>
-                <a:sym typeface="Times New Roman"/>
-              </a:defRPr>
-            </a:lvl4pPr>
-            <a:lvl5pPr marL="2286000" marR="0" lvl="4" indent="-355600" algn="l" rtl="0">
-              <a:lnSpc>
-                <a:spcPct val="100000"/>
-              </a:lnSpc>
-              <a:spcBef>
-                <a:spcPts val="400"/>
-              </a:spcBef>
-              <a:spcAft>
-                <a:spcPts val="0"/>
-              </a:spcAft>
-              <a:buClr>
-                <a:srgbClr val="FF5050"/>
-              </a:buClr>
-              <a:buSzPts val="2000"/>
-              <a:buFont typeface="Times New Roman"/>
-              <a:buChar char="o"/>
-              <a:defRPr sz="2000" b="0" i="0" u="none" strike="noStrike" cap="none">
-                <a:solidFill>
-                  <a:schemeClr val="dk1"/>
-                </a:solidFill>
-                <a:latin typeface="Times New Roman"/>
-                <a:ea typeface="Times New Roman"/>
-                <a:cs typeface="Times New Roman"/>
-                <a:sym typeface="Times New Roman"/>
-              </a:defRPr>
-            </a:lvl5pPr>
-            <a:lvl6pPr marL="2743200" marR="0" lvl="5" indent="-355600" algn="l" rtl="0">
-              <a:lnSpc>
-                <a:spcPct val="100000"/>
-              </a:lnSpc>
-              <a:spcBef>
-                <a:spcPts val="400"/>
-              </a:spcBef>
-              <a:spcAft>
-                <a:spcPts val="0"/>
-              </a:spcAft>
-              <a:buClr>
-                <a:srgbClr val="FF5050"/>
-              </a:buClr>
-              <a:buSzPts val="2000"/>
-              <a:buFont typeface="Times New Roman"/>
-              <a:buChar char="o"/>
-              <a:defRPr sz="2000" b="0" i="0" u="none" strike="noStrike" cap="none">
-                <a:solidFill>
-                  <a:schemeClr val="dk1"/>
-                </a:solidFill>
-                <a:latin typeface="Times New Roman"/>
-                <a:ea typeface="Times New Roman"/>
-                <a:cs typeface="Times New Roman"/>
-                <a:sym typeface="Times New Roman"/>
-              </a:defRPr>
-            </a:lvl6pPr>
-            <a:lvl7pPr marL="3200400" marR="0" lvl="6" indent="-355600" algn="l" rtl="0">
-              <a:lnSpc>
-                <a:spcPct val="100000"/>
-              </a:lnSpc>
-              <a:spcBef>
-                <a:spcPts val="400"/>
-              </a:spcBef>
-              <a:spcAft>
-                <a:spcPts val="0"/>
-              </a:spcAft>
-              <a:buClr>
-                <a:srgbClr val="FF5050"/>
-              </a:buClr>
-              <a:buSzPts val="2000"/>
-              <a:buFont typeface="Times New Roman"/>
-              <a:buChar char="o"/>
-              <a:defRPr sz="2000" b="0" i="0" u="none" strike="noStrike" cap="none">
-                <a:solidFill>
-                  <a:schemeClr val="dk1"/>
-                </a:solidFill>
-                <a:latin typeface="Times New Roman"/>
-                <a:ea typeface="Times New Roman"/>
-                <a:cs typeface="Times New Roman"/>
-                <a:sym typeface="Times New Roman"/>
-              </a:defRPr>
-            </a:lvl7pPr>
-            <a:lvl8pPr marL="3657600" marR="0" lvl="7" indent="-355600" algn="l" rtl="0">
-              <a:lnSpc>
-                <a:spcPct val="100000"/>
-              </a:lnSpc>
-              <a:spcBef>
-                <a:spcPts val="400"/>
-              </a:spcBef>
-              <a:spcAft>
-                <a:spcPts val="0"/>
-              </a:spcAft>
-              <a:buClr>
-                <a:srgbClr val="FF5050"/>
-              </a:buClr>
-              <a:buSzPts val="2000"/>
-              <a:buFont typeface="Times New Roman"/>
-              <a:buChar char="o"/>
-              <a:defRPr sz="2000" b="0" i="0" u="none" strike="noStrike" cap="none">
-                <a:solidFill>
-                  <a:schemeClr val="dk1"/>
-                </a:solidFill>
-                <a:latin typeface="Times New Roman"/>
-                <a:ea typeface="Times New Roman"/>
-                <a:cs typeface="Times New Roman"/>
-                <a:sym typeface="Times New Roman"/>
-              </a:defRPr>
-            </a:lvl8pPr>
-            <a:lvl9pPr marL="4114800" marR="0" lvl="8" indent="-355600" algn="l" rtl="0">
-              <a:lnSpc>
-                <a:spcPct val="100000"/>
-              </a:lnSpc>
-              <a:spcBef>
-                <a:spcPts val="400"/>
-              </a:spcBef>
-              <a:spcAft>
-                <a:spcPts val="0"/>
-              </a:spcAft>
-              <a:buClr>
-                <a:srgbClr val="FF5050"/>
-              </a:buClr>
-              <a:buSzPts val="2000"/>
-              <a:buFont typeface="Times New Roman"/>
-              <a:buChar char="o"/>
-              <a:defRPr sz="2000" b="0" i="0" u="none" strike="noStrike" cap="none">
-                <a:solidFill>
-                  <a:schemeClr val="dk1"/>
-                </a:solidFill>
-                <a:latin typeface="Times New Roman"/>
-                <a:ea typeface="Times New Roman"/>
-                <a:cs typeface="Times New Roman"/>
-                <a:sym typeface="Times New Roman"/>
-              </a:defRPr>
-            </a:lvl9pPr>
-          </a:lstStyle>
-          <a:p>
-            <a:pPr>
-              <a:lnSpc>
-                <a:spcPct val="150000"/>
-              </a:lnSpc>
-            </a:pPr>
-            <a:r>
-              <a:rPr lang="zh-TW" altLang="en-US" sz="2000" dirty="0">
-                <a:solidFill>
-                  <a:schemeClr val="tx1"/>
-                </a:solidFill>
-                <a:latin typeface="Times New Roman" panose="02020603050405020304" pitchFamily="18" charset="0"/>
-                <a:ea typeface="標楷體" panose="03000509000000000000" pitchFamily="65" charset="-120"/>
-                <a:cs typeface="Times New Roman" panose="02020603050405020304" pitchFamily="18" charset="0"/>
-              </a:rPr>
-              <a:t>定位</a:t>
-            </a:r>
-            <a:endParaRPr lang="en-US" altLang="zh-TW" sz="2000" dirty="0">
-              <a:solidFill>
-                <a:schemeClr val="tx1"/>
-              </a:solidFill>
-              <a:latin typeface="Times New Roman" panose="02020603050405020304" pitchFamily="18" charset="0"/>
-              <a:ea typeface="標楷體" panose="03000509000000000000" pitchFamily="65" charset="-120"/>
-              <a:cs typeface="Times New Roman" panose="02020603050405020304" pitchFamily="18" charset="0"/>
-            </a:endParaRPr>
-          </a:p>
-          <a:p>
-            <a:pPr lvl="1">
-              <a:lnSpc>
-                <a:spcPts val="3000"/>
-              </a:lnSpc>
-            </a:pPr>
-            <a:r>
-              <a:rPr lang="zh-TW" altLang="en-US" sz="1600" dirty="0">
-                <a:latin typeface="Times New Roman" panose="02020603050405020304" pitchFamily="18" charset="0"/>
-                <a:ea typeface="標楷體" panose="03000509000000000000" pitchFamily="65" charset="-120"/>
-                <a:cs typeface="Times New Roman" panose="02020603050405020304" pitchFamily="18" charset="0"/>
-              </a:rPr>
-              <a:t>透過 </a:t>
-            </a:r>
-            <a:r>
-              <a:rPr lang="en-US" altLang="zh-TW" sz="1600" dirty="0">
-                <a:latin typeface="Times New Roman" panose="02020603050405020304" pitchFamily="18" charset="0"/>
-                <a:ea typeface="標楷體" panose="03000509000000000000" pitchFamily="65" charset="-120"/>
-                <a:cs typeface="Times New Roman" panose="02020603050405020304" pitchFamily="18" charset="0"/>
-              </a:rPr>
-              <a:t>Python </a:t>
-            </a:r>
-            <a:r>
-              <a:rPr lang="zh-TW" altLang="en-US" sz="1600" dirty="0">
-                <a:latin typeface="Times New Roman" panose="02020603050405020304" pitchFamily="18" charset="0"/>
-                <a:ea typeface="標楷體" panose="03000509000000000000" pitchFamily="65" charset="-120"/>
-                <a:cs typeface="Times New Roman" panose="02020603050405020304" pitchFamily="18" charset="0"/>
-              </a:rPr>
-              <a:t>描述與整合 </a:t>
-            </a:r>
-            <a:r>
-              <a:rPr lang="en-US" altLang="zh-TW" sz="1600" dirty="0">
-                <a:latin typeface="Times New Roman" panose="02020603050405020304" pitchFamily="18" charset="0"/>
-                <a:ea typeface="標楷體" panose="03000509000000000000" pitchFamily="65" charset="-120"/>
-                <a:cs typeface="Times New Roman" panose="02020603050405020304" pitchFamily="18" charset="0"/>
-              </a:rPr>
-              <a:t>FPGA </a:t>
-            </a:r>
-            <a:r>
-              <a:rPr lang="zh-TW" altLang="en-US" sz="1600" dirty="0">
-                <a:latin typeface="Times New Roman" panose="02020603050405020304" pitchFamily="18" charset="0"/>
-                <a:ea typeface="標楷體" panose="03000509000000000000" pitchFamily="65" charset="-120"/>
-                <a:cs typeface="Times New Roman" panose="02020603050405020304" pitchFamily="18" charset="0"/>
-              </a:rPr>
-              <a:t>硬體模組，建立 </a:t>
-            </a:r>
-            <a:r>
-              <a:rPr lang="en-US" altLang="zh-TW" sz="1600" dirty="0">
-                <a:latin typeface="Times New Roman" panose="02020603050405020304" pitchFamily="18" charset="0"/>
-                <a:ea typeface="標楷體" panose="03000509000000000000" pitchFamily="65" charset="-120"/>
-                <a:cs typeface="Times New Roman" panose="02020603050405020304" pitchFamily="18" charset="0"/>
-              </a:rPr>
-              <a:t>SoC</a:t>
-            </a:r>
-            <a:r>
-              <a:rPr lang="zh-TW" altLang="en-US" sz="1600" dirty="0">
-                <a:latin typeface="Times New Roman" panose="02020603050405020304" pitchFamily="18" charset="0"/>
-                <a:ea typeface="標楷體" panose="03000509000000000000" pitchFamily="65" charset="-120"/>
-                <a:cs typeface="Times New Roman" panose="02020603050405020304" pitchFamily="18" charset="0"/>
-              </a:rPr>
-              <a:t> 設計，並支援產生 </a:t>
-            </a:r>
-            <a:r>
-              <a:rPr lang="en-US" altLang="zh-TW" sz="1600" dirty="0">
-                <a:latin typeface="Times New Roman" panose="02020603050405020304" pitchFamily="18" charset="0"/>
-                <a:ea typeface="標楷體" panose="03000509000000000000" pitchFamily="65" charset="-120"/>
-                <a:cs typeface="Times New Roman" panose="02020603050405020304" pitchFamily="18" charset="0"/>
-              </a:rPr>
-              <a:t>HDL </a:t>
-            </a:r>
-            <a:r>
-              <a:rPr lang="zh-TW" altLang="en-US" sz="1600" dirty="0">
-                <a:latin typeface="Times New Roman" panose="02020603050405020304" pitchFamily="18" charset="0"/>
-                <a:ea typeface="標楷體" panose="03000509000000000000" pitchFamily="65" charset="-120"/>
-                <a:cs typeface="Times New Roman" panose="02020603050405020304" pitchFamily="18" charset="0"/>
-              </a:rPr>
-              <a:t>與呼叫 </a:t>
-            </a:r>
-            <a:r>
-              <a:rPr lang="en-US" altLang="zh-TW" sz="1600" dirty="0">
-                <a:latin typeface="Times New Roman" panose="02020603050405020304" pitchFamily="18" charset="0"/>
-                <a:ea typeface="標楷體" panose="03000509000000000000" pitchFamily="65" charset="-120"/>
-                <a:cs typeface="Times New Roman" panose="02020603050405020304" pitchFamily="18" charset="0"/>
-              </a:rPr>
-              <a:t>FPGA </a:t>
-            </a:r>
-            <a:r>
-              <a:rPr lang="zh-TW" altLang="en-US" sz="1600" dirty="0">
-                <a:latin typeface="Times New Roman" panose="02020603050405020304" pitchFamily="18" charset="0"/>
-                <a:ea typeface="標楷體" panose="03000509000000000000" pitchFamily="65" charset="-120"/>
-                <a:cs typeface="Times New Roman" panose="02020603050405020304" pitchFamily="18" charset="0"/>
-              </a:rPr>
-              <a:t>建置工具</a:t>
-            </a:r>
-          </a:p>
-          <a:p>
-            <a:pPr>
-              <a:lnSpc>
-                <a:spcPts val="3000"/>
-              </a:lnSpc>
-            </a:pPr>
-            <a:r>
-              <a:rPr lang="zh-TW" altLang="en-US" sz="2000" dirty="0">
-                <a:latin typeface="Times New Roman" panose="02020603050405020304" pitchFamily="18" charset="0"/>
-                <a:ea typeface="標楷體" panose="03000509000000000000" pitchFamily="65" charset="-120"/>
-                <a:cs typeface="Times New Roman" panose="02020603050405020304" pitchFamily="18" charset="0"/>
-              </a:rPr>
-              <a:t>功能</a:t>
-            </a:r>
-          </a:p>
-          <a:p>
-            <a:pPr lvl="1">
-              <a:lnSpc>
-                <a:spcPts val="3000"/>
-              </a:lnSpc>
-            </a:pPr>
-            <a:r>
-              <a:rPr lang="zh-TW" altLang="en-US" sz="1600" dirty="0">
-                <a:latin typeface="Times New Roman" panose="02020603050405020304" pitchFamily="18" charset="0"/>
-                <a:ea typeface="標楷體" panose="03000509000000000000" pitchFamily="65" charset="-120"/>
-                <a:cs typeface="Times New Roman" panose="02020603050405020304" pitchFamily="18" charset="0"/>
-              </a:rPr>
-              <a:t>組合處理器、記憶體、匯流排及周邊模組</a:t>
-            </a:r>
-          </a:p>
-          <a:p>
-            <a:pPr lvl="1">
-              <a:lnSpc>
-                <a:spcPts val="3000"/>
-              </a:lnSpc>
-            </a:pPr>
-            <a:r>
-              <a:rPr lang="zh-TW" altLang="en-US" sz="1600" dirty="0">
-                <a:latin typeface="Times New Roman" panose="02020603050405020304" pitchFamily="18" charset="0"/>
-                <a:ea typeface="標楷體" panose="03000509000000000000" pitchFamily="65" charset="-120"/>
-                <a:cs typeface="Times New Roman" panose="02020603050405020304" pitchFamily="18" charset="0"/>
-              </a:rPr>
-              <a:t>提供 </a:t>
-            </a:r>
-            <a:r>
-              <a:rPr lang="en-US" altLang="zh-TW" sz="1600" dirty="0">
-                <a:latin typeface="Times New Roman" panose="02020603050405020304" pitchFamily="18" charset="0"/>
-                <a:ea typeface="標楷體" panose="03000509000000000000" pitchFamily="65" charset="-120"/>
-                <a:cs typeface="Times New Roman" panose="02020603050405020304" pitchFamily="18" charset="0"/>
-              </a:rPr>
-              <a:t>Wishbone</a:t>
-            </a:r>
-            <a:r>
-              <a:rPr lang="zh-TW" altLang="en-US" sz="1600" dirty="0">
-                <a:latin typeface="Times New Roman" panose="02020603050405020304" pitchFamily="18" charset="0"/>
-                <a:ea typeface="標楷體" panose="03000509000000000000" pitchFamily="65" charset="-120"/>
-                <a:cs typeface="Times New Roman" panose="02020603050405020304" pitchFamily="18" charset="0"/>
-              </a:rPr>
-              <a:t>、</a:t>
-            </a:r>
-            <a:r>
-              <a:rPr lang="en-US" altLang="zh-TW" sz="1600" dirty="0">
-                <a:latin typeface="Times New Roman" panose="02020603050405020304" pitchFamily="18" charset="0"/>
-                <a:ea typeface="標楷體" panose="03000509000000000000" pitchFamily="65" charset="-120"/>
-                <a:cs typeface="Times New Roman" panose="02020603050405020304" pitchFamily="18" charset="0"/>
-              </a:rPr>
-              <a:t>AXI </a:t>
-            </a:r>
-            <a:r>
-              <a:rPr lang="zh-TW" altLang="en-US" sz="1600" dirty="0">
-                <a:latin typeface="Times New Roman" panose="02020603050405020304" pitchFamily="18" charset="0"/>
-                <a:ea typeface="標楷體" panose="03000509000000000000" pitchFamily="65" charset="-120"/>
-                <a:cs typeface="Times New Roman" panose="02020603050405020304" pitchFamily="18" charset="0"/>
-              </a:rPr>
-              <a:t>等互連機制，以及 </a:t>
-            </a:r>
-            <a:r>
-              <a:rPr lang="en-US" altLang="zh-TW" sz="1600" dirty="0">
-                <a:latin typeface="Times New Roman" panose="02020603050405020304" pitchFamily="18" charset="0"/>
-                <a:ea typeface="標楷體" panose="03000509000000000000" pitchFamily="65" charset="-120"/>
-                <a:cs typeface="Times New Roman" panose="02020603050405020304" pitchFamily="18" charset="0"/>
-              </a:rPr>
-              <a:t>Streams</a:t>
-            </a:r>
-          </a:p>
-          <a:p>
-            <a:pPr lvl="1">
-              <a:lnSpc>
-                <a:spcPts val="3000"/>
-              </a:lnSpc>
-            </a:pPr>
-            <a:r>
-              <a:rPr lang="zh-TW" altLang="en-US" sz="1600" dirty="0">
-                <a:latin typeface="Times New Roman" panose="02020603050405020304" pitchFamily="18" charset="0"/>
-                <a:ea typeface="標楷體" panose="03000509000000000000" pitchFamily="65" charset="-120"/>
-                <a:cs typeface="Times New Roman" panose="02020603050405020304" pitchFamily="18" charset="0"/>
-              </a:rPr>
-              <a:t>可搭配 </a:t>
-            </a:r>
-            <a:r>
-              <a:rPr lang="en-US" altLang="zh-TW" sz="1600" dirty="0" err="1">
-                <a:latin typeface="Times New Roman" panose="02020603050405020304" pitchFamily="18" charset="0"/>
-                <a:ea typeface="標楷體" panose="03000509000000000000" pitchFamily="65" charset="-120"/>
-                <a:cs typeface="Times New Roman" panose="02020603050405020304" pitchFamily="18" charset="0"/>
-              </a:rPr>
-              <a:t>LiteDRAM</a:t>
-            </a:r>
-            <a:r>
-              <a:rPr lang="zh-TW" altLang="en-US" sz="1600" dirty="0">
-                <a:latin typeface="Times New Roman" panose="02020603050405020304" pitchFamily="18" charset="0"/>
-                <a:ea typeface="標楷體" panose="03000509000000000000" pitchFamily="65" charset="-120"/>
-                <a:cs typeface="Times New Roman" panose="02020603050405020304" pitchFamily="18" charset="0"/>
-              </a:rPr>
-              <a:t>、</a:t>
-            </a:r>
-            <a:r>
-              <a:rPr lang="en-US" altLang="zh-TW" sz="1600" dirty="0" err="1">
-                <a:latin typeface="Times New Roman" panose="02020603050405020304" pitchFamily="18" charset="0"/>
-                <a:ea typeface="標楷體" panose="03000509000000000000" pitchFamily="65" charset="-120"/>
-                <a:cs typeface="Times New Roman" panose="02020603050405020304" pitchFamily="18" charset="0"/>
-              </a:rPr>
-              <a:t>LitePCIe</a:t>
-            </a:r>
-            <a:r>
-              <a:rPr lang="zh-TW" altLang="en-US" sz="1600" dirty="0">
-                <a:latin typeface="Times New Roman" panose="02020603050405020304" pitchFamily="18" charset="0"/>
-                <a:ea typeface="標楷體" panose="03000509000000000000" pitchFamily="65" charset="-120"/>
-                <a:cs typeface="Times New Roman" panose="02020603050405020304" pitchFamily="18" charset="0"/>
-              </a:rPr>
-              <a:t>、</a:t>
-            </a:r>
-            <a:r>
-              <a:rPr lang="en-US" altLang="zh-TW" sz="1600" dirty="0" err="1">
-                <a:latin typeface="Times New Roman" panose="02020603050405020304" pitchFamily="18" charset="0"/>
-                <a:ea typeface="標楷體" panose="03000509000000000000" pitchFamily="65" charset="-120"/>
-                <a:cs typeface="Times New Roman" panose="02020603050405020304" pitchFamily="18" charset="0"/>
-              </a:rPr>
-              <a:t>LiteEth</a:t>
-            </a:r>
-            <a:r>
-              <a:rPr lang="en-US" altLang="zh-TW" sz="1600" dirty="0">
-                <a:latin typeface="Times New Roman" panose="02020603050405020304" pitchFamily="18" charset="0"/>
-                <a:ea typeface="標楷體" panose="03000509000000000000" pitchFamily="65" charset="-120"/>
-                <a:cs typeface="Times New Roman" panose="02020603050405020304" pitchFamily="18" charset="0"/>
-              </a:rPr>
-              <a:t> </a:t>
-            </a:r>
-            <a:r>
-              <a:rPr lang="zh-TW" altLang="en-US" sz="1600" dirty="0">
-                <a:latin typeface="Times New Roman" panose="02020603050405020304" pitchFamily="18" charset="0"/>
-                <a:ea typeface="標楷體" panose="03000509000000000000" pitchFamily="65" charset="-120"/>
-                <a:cs typeface="Times New Roman" panose="02020603050405020304" pitchFamily="18" charset="0"/>
-              </a:rPr>
-              <a:t>等生態系模組</a:t>
-            </a:r>
-            <a:endParaRPr lang="en-US" altLang="zh-TW" sz="1600" dirty="0">
-              <a:latin typeface="Times New Roman" panose="02020603050405020304" pitchFamily="18" charset="0"/>
-              <a:ea typeface="標楷體" panose="03000509000000000000" pitchFamily="65" charset="-120"/>
-              <a:cs typeface="Times New Roman" panose="02020603050405020304" pitchFamily="18" charset="0"/>
-            </a:endParaRPr>
-          </a:p>
-        </p:txBody>
-      </p:sp>
-      <p:sp>
-        <p:nvSpPr>
-          <p:cNvPr id="5" name="文字方塊 4">
-            <a:extLst>
-              <a:ext uri="{FF2B5EF4-FFF2-40B4-BE49-F238E27FC236}">
-                <a16:creationId xmlns:a16="http://schemas.microsoft.com/office/drawing/2014/main" id="{DB8BF237-AE2C-BCBD-03CB-07C643D7BB9F}"/>
-              </a:ext>
-            </a:extLst>
-          </p:cNvPr>
-          <p:cNvSpPr txBox="1"/>
-          <p:nvPr/>
-        </p:nvSpPr>
-        <p:spPr>
-          <a:xfrm>
-            <a:off x="1787236" y="6384072"/>
-            <a:ext cx="5802283" cy="276999"/>
-          </a:xfrm>
-          <a:prstGeom prst="rect">
-            <a:avLst/>
-          </a:prstGeom>
-          <a:noFill/>
-        </p:spPr>
-        <p:txBody>
-          <a:bodyPr wrap="square">
-            <a:spAutoFit/>
-          </a:bodyPr>
-          <a:lstStyle/>
-          <a:p>
-            <a:r>
-              <a:rPr lang="en-US" altLang="zh-TW" sz="1200" dirty="0">
-                <a:latin typeface="Times New Roman" panose="02020603050405020304" pitchFamily="18" charset="0"/>
-                <a:cs typeface="Times New Roman" panose="02020603050405020304" pitchFamily="18" charset="0"/>
-              </a:rPr>
-              <a:t>[3] </a:t>
-            </a:r>
-            <a:r>
-              <a:rPr lang="zh-TW" altLang="en-US" sz="1200" dirty="0">
-                <a:latin typeface="Times New Roman" panose="02020603050405020304" pitchFamily="18" charset="0"/>
-                <a:cs typeface="Times New Roman" panose="02020603050405020304" pitchFamily="18" charset="0"/>
-              </a:rPr>
-              <a:t>https://github.com/enjoy-digital/litex?utm_source=chatgpt.com</a:t>
-            </a:r>
-          </a:p>
-        </p:txBody>
-      </p:sp>
-    </p:spTree>
-    <p:extLst>
-      <p:ext uri="{BB962C8B-B14F-4D97-AF65-F5344CB8AC3E}">
-        <p14:creationId xmlns:p14="http://schemas.microsoft.com/office/powerpoint/2010/main" val="3075961224"/>
+        <p14:creationId xmlns:p14="http://schemas.microsoft.com/office/powerpoint/2010/main" val="2612186385"/>
       </p:ext>
     </p:extLst>
   </p:cSld>
@@ -17170,6 +18667,833 @@
           <a:bodyPr/>
           <a:lstStyle/>
           <a:p>
+            <a:pPr algn="l" fontAlgn="t"/>
+            <a:r>
+              <a:rPr lang="zh-TW" altLang="en-US" dirty="0">
+                <a:latin typeface="Times New Roman" panose="02020603050405020304" pitchFamily="18" charset="0"/>
+                <a:ea typeface="標楷體" panose="03000509000000000000" pitchFamily="65" charset="-120"/>
+                <a:cs typeface="Times New Roman" panose="02020603050405020304" pitchFamily="18" charset="0"/>
+              </a:rPr>
+              <a:t>本次進度</a:t>
+            </a:r>
+            <a:r>
+              <a:rPr lang="en-US" altLang="zh-TW" dirty="0">
+                <a:latin typeface="Times New Roman" panose="02020603050405020304" pitchFamily="18" charset="0"/>
+                <a:ea typeface="標楷體" panose="03000509000000000000" pitchFamily="65" charset="-120"/>
+                <a:cs typeface="Times New Roman" panose="02020603050405020304" pitchFamily="18" charset="0"/>
+              </a:rPr>
+              <a:t>: </a:t>
+            </a:r>
+            <a:r>
+              <a:rPr lang="en-US" altLang="zh-TW" dirty="0" err="1">
+                <a:latin typeface="Times New Roman" panose="02020603050405020304" pitchFamily="18" charset="0"/>
+                <a:ea typeface="標楷體" panose="03000509000000000000" pitchFamily="65" charset="-120"/>
+                <a:cs typeface="Times New Roman" panose="02020603050405020304" pitchFamily="18" charset="0"/>
+              </a:rPr>
+              <a:t>LiteX</a:t>
+            </a:r>
+            <a:r>
+              <a:rPr lang="en-US" altLang="zh-TW" dirty="0">
+                <a:latin typeface="Times New Roman" panose="02020603050405020304" pitchFamily="18" charset="0"/>
+                <a:ea typeface="標楷體" panose="03000509000000000000" pitchFamily="65" charset="-120"/>
+                <a:cs typeface="Times New Roman" panose="02020603050405020304" pitchFamily="18" charset="0"/>
+              </a:rPr>
+              <a:t> </a:t>
+            </a:r>
+            <a:r>
+              <a:rPr lang="zh-TW" altLang="en-US" dirty="0">
+                <a:latin typeface="Times New Roman" panose="02020603050405020304" pitchFamily="18" charset="0"/>
+                <a:ea typeface="標楷體" panose="03000509000000000000" pitchFamily="65" charset="-120"/>
+                <a:cs typeface="Times New Roman" panose="02020603050405020304" pitchFamily="18" charset="0"/>
+              </a:rPr>
+              <a:t>生態</a:t>
+            </a:r>
+          </a:p>
+        </p:txBody>
+      </p:sp>
+      <p:sp>
+        <p:nvSpPr>
+          <p:cNvPr id="8" name="文字版面配置區 6">
+            <a:extLst>
+              <a:ext uri="{FF2B5EF4-FFF2-40B4-BE49-F238E27FC236}">
+                <a16:creationId xmlns:a16="http://schemas.microsoft.com/office/drawing/2014/main" id="{521FBAA4-6E6B-1B82-9C1F-77D9FAD35C41}"/>
+              </a:ext>
+            </a:extLst>
+          </p:cNvPr>
+          <p:cNvSpPr txBox="1"/>
+          <p:nvPr/>
+        </p:nvSpPr>
+        <p:spPr>
+          <a:xfrm>
+            <a:off x="609602" y="935857"/>
+            <a:ext cx="8686796" cy="4700685"/>
+          </a:xfrm>
+          <a:prstGeom prst="rect">
+            <a:avLst/>
+          </a:prstGeom>
+          <a:noFill/>
+          <a:ln>
+            <a:noFill/>
+          </a:ln>
+        </p:spPr>
+        <p:txBody>
+          <a:bodyPr spcFirstLastPara="1" wrap="square" lIns="91425" tIns="45700" rIns="91425" bIns="45700" anchor="t" anchorCtr="0">
+            <a:noAutofit/>
+          </a:bodyPr>
+          <a:lstStyle>
+            <a:defPPr marR="0" lvl="0" algn="l" rtl="0">
+              <a:lnSpc>
+                <a:spcPct val="100000"/>
+              </a:lnSpc>
+              <a:spcBef>
+                <a:spcPts val="0"/>
+              </a:spcBef>
+              <a:spcAft>
+                <a:spcPts val="0"/>
+              </a:spcAft>
+            </a:defPPr>
+            <a:lvl1pPr marL="457200" marR="0" lvl="0" indent="-406400" algn="l" rtl="0">
+              <a:lnSpc>
+                <a:spcPct val="100000"/>
+              </a:lnSpc>
+              <a:spcBef>
+                <a:spcPts val="560"/>
+              </a:spcBef>
+              <a:spcAft>
+                <a:spcPts val="0"/>
+              </a:spcAft>
+              <a:buClr>
+                <a:schemeClr val="accent2"/>
+              </a:buClr>
+              <a:buSzPts val="2800"/>
+              <a:buFont typeface="Noto Sans Symbols"/>
+              <a:buChar char="❖"/>
+              <a:defRPr sz="2800" b="0" i="0" u="none" strike="noStrike" cap="none">
+                <a:solidFill>
+                  <a:schemeClr val="dk1"/>
+                </a:solidFill>
+                <a:latin typeface="Times New Roman"/>
+                <a:ea typeface="Times New Roman"/>
+                <a:cs typeface="Times New Roman"/>
+                <a:sym typeface="Times New Roman"/>
+              </a:defRPr>
+            </a:lvl1pPr>
+            <a:lvl2pPr marL="914400" marR="0" lvl="1" indent="-381000" algn="l" rtl="0">
+              <a:lnSpc>
+                <a:spcPct val="100000"/>
+              </a:lnSpc>
+              <a:spcBef>
+                <a:spcPts val="480"/>
+              </a:spcBef>
+              <a:spcAft>
+                <a:spcPts val="0"/>
+              </a:spcAft>
+              <a:buClr>
+                <a:srgbClr val="FF5050"/>
+              </a:buClr>
+              <a:buSzPts val="2400"/>
+              <a:buFont typeface="Noto Sans Symbols"/>
+              <a:buChar char="▪"/>
+              <a:defRPr sz="2400" b="0" i="0" u="none" strike="noStrike" cap="none">
+                <a:solidFill>
+                  <a:schemeClr val="dk1"/>
+                </a:solidFill>
+                <a:latin typeface="Times New Roman"/>
+                <a:ea typeface="Times New Roman"/>
+                <a:cs typeface="Times New Roman"/>
+                <a:sym typeface="Times New Roman"/>
+              </a:defRPr>
+            </a:lvl2pPr>
+            <a:lvl3pPr marL="1371600" marR="0" lvl="2" indent="-355600" algn="l" rtl="0">
+              <a:lnSpc>
+                <a:spcPct val="100000"/>
+              </a:lnSpc>
+              <a:spcBef>
+                <a:spcPts val="400"/>
+              </a:spcBef>
+              <a:spcAft>
+                <a:spcPts val="0"/>
+              </a:spcAft>
+              <a:buClr>
+                <a:srgbClr val="6699FF"/>
+              </a:buClr>
+              <a:buSzPts val="2000"/>
+              <a:buFont typeface="Times New Roman"/>
+              <a:buChar char="•"/>
+              <a:defRPr sz="2000" b="0" i="0" u="none" strike="noStrike" cap="none">
+                <a:solidFill>
+                  <a:schemeClr val="dk1"/>
+                </a:solidFill>
+                <a:latin typeface="Times New Roman"/>
+                <a:ea typeface="Times New Roman"/>
+                <a:cs typeface="Times New Roman"/>
+                <a:sym typeface="Times New Roman"/>
+              </a:defRPr>
+            </a:lvl3pPr>
+            <a:lvl4pPr marL="1828800" marR="0" lvl="3" indent="-355600" algn="l" rtl="0">
+              <a:lnSpc>
+                <a:spcPct val="100000"/>
+              </a:lnSpc>
+              <a:spcBef>
+                <a:spcPts val="400"/>
+              </a:spcBef>
+              <a:spcAft>
+                <a:spcPts val="0"/>
+              </a:spcAft>
+              <a:buClr>
+                <a:srgbClr val="FF5050"/>
+              </a:buClr>
+              <a:buSzPts val="2000"/>
+              <a:buFont typeface="Times New Roman"/>
+              <a:buChar char="o"/>
+              <a:defRPr sz="2000" b="0" i="0" u="none" strike="noStrike" cap="none">
+                <a:solidFill>
+                  <a:schemeClr val="dk1"/>
+                </a:solidFill>
+                <a:latin typeface="Times New Roman"/>
+                <a:ea typeface="Times New Roman"/>
+                <a:cs typeface="Times New Roman"/>
+                <a:sym typeface="Times New Roman"/>
+              </a:defRPr>
+            </a:lvl4pPr>
+            <a:lvl5pPr marL="2286000" marR="0" lvl="4" indent="-355600" algn="l" rtl="0">
+              <a:lnSpc>
+                <a:spcPct val="100000"/>
+              </a:lnSpc>
+              <a:spcBef>
+                <a:spcPts val="400"/>
+              </a:spcBef>
+              <a:spcAft>
+                <a:spcPts val="0"/>
+              </a:spcAft>
+              <a:buClr>
+                <a:srgbClr val="FF5050"/>
+              </a:buClr>
+              <a:buSzPts val="2000"/>
+              <a:buFont typeface="Times New Roman"/>
+              <a:buChar char="o"/>
+              <a:defRPr sz="2000" b="0" i="0" u="none" strike="noStrike" cap="none">
+                <a:solidFill>
+                  <a:schemeClr val="dk1"/>
+                </a:solidFill>
+                <a:latin typeface="Times New Roman"/>
+                <a:ea typeface="Times New Roman"/>
+                <a:cs typeface="Times New Roman"/>
+                <a:sym typeface="Times New Roman"/>
+              </a:defRPr>
+            </a:lvl5pPr>
+            <a:lvl6pPr marL="2743200" marR="0" lvl="5" indent="-355600" algn="l" rtl="0">
+              <a:lnSpc>
+                <a:spcPct val="100000"/>
+              </a:lnSpc>
+              <a:spcBef>
+                <a:spcPts val="400"/>
+              </a:spcBef>
+              <a:spcAft>
+                <a:spcPts val="0"/>
+              </a:spcAft>
+              <a:buClr>
+                <a:srgbClr val="FF5050"/>
+              </a:buClr>
+              <a:buSzPts val="2000"/>
+              <a:buFont typeface="Times New Roman"/>
+              <a:buChar char="o"/>
+              <a:defRPr sz="2000" b="0" i="0" u="none" strike="noStrike" cap="none">
+                <a:solidFill>
+                  <a:schemeClr val="dk1"/>
+                </a:solidFill>
+                <a:latin typeface="Times New Roman"/>
+                <a:ea typeface="Times New Roman"/>
+                <a:cs typeface="Times New Roman"/>
+                <a:sym typeface="Times New Roman"/>
+              </a:defRPr>
+            </a:lvl6pPr>
+            <a:lvl7pPr marL="3200400" marR="0" lvl="6" indent="-355600" algn="l" rtl="0">
+              <a:lnSpc>
+                <a:spcPct val="100000"/>
+              </a:lnSpc>
+              <a:spcBef>
+                <a:spcPts val="400"/>
+              </a:spcBef>
+              <a:spcAft>
+                <a:spcPts val="0"/>
+              </a:spcAft>
+              <a:buClr>
+                <a:srgbClr val="FF5050"/>
+              </a:buClr>
+              <a:buSzPts val="2000"/>
+              <a:buFont typeface="Times New Roman"/>
+              <a:buChar char="o"/>
+              <a:defRPr sz="2000" b="0" i="0" u="none" strike="noStrike" cap="none">
+                <a:solidFill>
+                  <a:schemeClr val="dk1"/>
+                </a:solidFill>
+                <a:latin typeface="Times New Roman"/>
+                <a:ea typeface="Times New Roman"/>
+                <a:cs typeface="Times New Roman"/>
+                <a:sym typeface="Times New Roman"/>
+              </a:defRPr>
+            </a:lvl7pPr>
+            <a:lvl8pPr marL="3657600" marR="0" lvl="7" indent="-355600" algn="l" rtl="0">
+              <a:lnSpc>
+                <a:spcPct val="100000"/>
+              </a:lnSpc>
+              <a:spcBef>
+                <a:spcPts val="400"/>
+              </a:spcBef>
+              <a:spcAft>
+                <a:spcPts val="0"/>
+              </a:spcAft>
+              <a:buClr>
+                <a:srgbClr val="FF5050"/>
+              </a:buClr>
+              <a:buSzPts val="2000"/>
+              <a:buFont typeface="Times New Roman"/>
+              <a:buChar char="o"/>
+              <a:defRPr sz="2000" b="0" i="0" u="none" strike="noStrike" cap="none">
+                <a:solidFill>
+                  <a:schemeClr val="dk1"/>
+                </a:solidFill>
+                <a:latin typeface="Times New Roman"/>
+                <a:ea typeface="Times New Roman"/>
+                <a:cs typeface="Times New Roman"/>
+                <a:sym typeface="Times New Roman"/>
+              </a:defRPr>
+            </a:lvl8pPr>
+            <a:lvl9pPr marL="4114800" marR="0" lvl="8" indent="-355600" algn="l" rtl="0">
+              <a:lnSpc>
+                <a:spcPct val="100000"/>
+              </a:lnSpc>
+              <a:spcBef>
+                <a:spcPts val="400"/>
+              </a:spcBef>
+              <a:spcAft>
+                <a:spcPts val="0"/>
+              </a:spcAft>
+              <a:buClr>
+                <a:srgbClr val="FF5050"/>
+              </a:buClr>
+              <a:buSzPts val="2000"/>
+              <a:buFont typeface="Times New Roman"/>
+              <a:buChar char="o"/>
+              <a:defRPr sz="2000" b="0" i="0" u="none" strike="noStrike" cap="none">
+                <a:solidFill>
+                  <a:schemeClr val="dk1"/>
+                </a:solidFill>
+                <a:latin typeface="Times New Roman"/>
+                <a:ea typeface="Times New Roman"/>
+                <a:cs typeface="Times New Roman"/>
+                <a:sym typeface="Times New Roman"/>
+              </a:defRPr>
+            </a:lvl9pPr>
+          </a:lstStyle>
+          <a:p>
+            <a:pPr>
+              <a:lnSpc>
+                <a:spcPct val="150000"/>
+              </a:lnSpc>
+            </a:pPr>
+            <a:r>
+              <a:rPr lang="zh-TW" altLang="en-US" sz="2000" dirty="0">
+                <a:solidFill>
+                  <a:schemeClr val="tx1"/>
+                </a:solidFill>
+                <a:latin typeface="Times New Roman" panose="02020603050405020304" pitchFamily="18" charset="0"/>
+                <a:ea typeface="標楷體" panose="03000509000000000000" pitchFamily="65" charset="-120"/>
+                <a:cs typeface="Times New Roman" panose="02020603050405020304" pitchFamily="18" charset="0"/>
+              </a:rPr>
+              <a:t>架構</a:t>
+            </a:r>
+            <a:endParaRPr lang="en-US" altLang="zh-TW" sz="2000" dirty="0">
+              <a:solidFill>
+                <a:schemeClr val="tx1"/>
+              </a:solidFill>
+              <a:latin typeface="Times New Roman" panose="02020603050405020304" pitchFamily="18" charset="0"/>
+              <a:ea typeface="標楷體" panose="03000509000000000000" pitchFamily="65" charset="-120"/>
+              <a:cs typeface="Times New Roman" panose="02020603050405020304" pitchFamily="18" charset="0"/>
+            </a:endParaRPr>
+          </a:p>
+          <a:p>
+            <a:pPr>
+              <a:lnSpc>
+                <a:spcPct val="150000"/>
+              </a:lnSpc>
+            </a:pPr>
+            <a:endParaRPr lang="en-US" altLang="zh-TW" sz="2000" dirty="0">
+              <a:solidFill>
+                <a:schemeClr val="tx1"/>
+              </a:solidFill>
+              <a:latin typeface="Times New Roman" panose="02020603050405020304" pitchFamily="18" charset="0"/>
+              <a:ea typeface="標楷體" panose="03000509000000000000" pitchFamily="65" charset="-120"/>
+              <a:cs typeface="Times New Roman" panose="02020603050405020304" pitchFamily="18" charset="0"/>
+            </a:endParaRPr>
+          </a:p>
+          <a:p>
+            <a:pPr>
+              <a:lnSpc>
+                <a:spcPct val="150000"/>
+              </a:lnSpc>
+            </a:pPr>
+            <a:endParaRPr lang="en-US" altLang="zh-TW" sz="2000" dirty="0">
+              <a:solidFill>
+                <a:schemeClr val="tx1"/>
+              </a:solidFill>
+              <a:latin typeface="Times New Roman" panose="02020603050405020304" pitchFamily="18" charset="0"/>
+              <a:ea typeface="標楷體" panose="03000509000000000000" pitchFamily="65" charset="-120"/>
+              <a:cs typeface="Times New Roman" panose="02020603050405020304" pitchFamily="18" charset="0"/>
+            </a:endParaRPr>
+          </a:p>
+          <a:p>
+            <a:pPr>
+              <a:lnSpc>
+                <a:spcPct val="150000"/>
+              </a:lnSpc>
+            </a:pPr>
+            <a:r>
+              <a:rPr lang="zh-TW" altLang="en-US" sz="2000" dirty="0">
+                <a:solidFill>
+                  <a:schemeClr val="tx1"/>
+                </a:solidFill>
+                <a:latin typeface="Times New Roman" panose="02020603050405020304" pitchFamily="18" charset="0"/>
+                <a:ea typeface="標楷體" panose="03000509000000000000" pitchFamily="65" charset="-120"/>
+                <a:cs typeface="Times New Roman" panose="02020603050405020304" pitchFamily="18" charset="0"/>
+              </a:rPr>
+              <a:t>優勢</a:t>
+            </a:r>
+            <a:endParaRPr lang="en-US" altLang="zh-TW" sz="2000" dirty="0">
+              <a:solidFill>
+                <a:schemeClr val="tx1"/>
+              </a:solidFill>
+              <a:latin typeface="Times New Roman" panose="02020603050405020304" pitchFamily="18" charset="0"/>
+              <a:ea typeface="標楷體" panose="03000509000000000000" pitchFamily="65" charset="-120"/>
+              <a:cs typeface="Times New Roman" panose="02020603050405020304" pitchFamily="18" charset="0"/>
+            </a:endParaRPr>
+          </a:p>
+          <a:p>
+            <a:pPr lvl="1">
+              <a:lnSpc>
+                <a:spcPts val="3000"/>
+              </a:lnSpc>
+            </a:pPr>
+            <a:r>
+              <a:rPr lang="en-US" altLang="zh-TW" sz="1600" dirty="0" err="1">
+                <a:latin typeface="Times New Roman" panose="02020603050405020304" pitchFamily="18" charset="0"/>
+                <a:ea typeface="標楷體" panose="03000509000000000000" pitchFamily="65" charset="-120"/>
+                <a:cs typeface="Times New Roman" panose="02020603050405020304" pitchFamily="18" charset="0"/>
+              </a:rPr>
+              <a:t>LiteX</a:t>
+            </a:r>
+            <a:r>
+              <a:rPr lang="en-US" altLang="zh-TW" sz="1600" dirty="0">
+                <a:latin typeface="Times New Roman" panose="02020603050405020304" pitchFamily="18" charset="0"/>
+                <a:ea typeface="標楷體" panose="03000509000000000000" pitchFamily="65" charset="-120"/>
+                <a:cs typeface="Times New Roman" panose="02020603050405020304" pitchFamily="18" charset="0"/>
+              </a:rPr>
+              <a:t> </a:t>
+            </a:r>
+            <a:r>
+              <a:rPr lang="zh-TW" altLang="en-US" sz="1600" dirty="0">
+                <a:latin typeface="Times New Roman" panose="02020603050405020304" pitchFamily="18" charset="0"/>
+                <a:ea typeface="標楷體" panose="03000509000000000000" pitchFamily="65" charset="-120"/>
+                <a:cs typeface="Times New Roman" panose="02020603050405020304" pitchFamily="18" charset="0"/>
+              </a:rPr>
+              <a:t>的互連與建置估能，減少建立整套系統的工作</a:t>
+            </a:r>
+            <a:endParaRPr lang="en-US" altLang="zh-TW" sz="1600" dirty="0">
+              <a:latin typeface="Times New Roman" panose="02020603050405020304" pitchFamily="18" charset="0"/>
+              <a:ea typeface="標楷體" panose="03000509000000000000" pitchFamily="65" charset="-120"/>
+              <a:cs typeface="Times New Roman" panose="02020603050405020304" pitchFamily="18" charset="0"/>
+            </a:endParaRPr>
+          </a:p>
+          <a:p>
+            <a:pPr lvl="1">
+              <a:lnSpc>
+                <a:spcPts val="3000"/>
+              </a:lnSpc>
+            </a:pPr>
+            <a:r>
+              <a:rPr lang="zh-TW" altLang="en-US" sz="1600" dirty="0">
+                <a:latin typeface="Times New Roman" panose="02020603050405020304" pitchFamily="18" charset="0"/>
+                <a:ea typeface="標楷體" panose="03000509000000000000" pitchFamily="65" charset="-120"/>
+                <a:cs typeface="Times New Roman" panose="02020603050405020304" pitchFamily="18" charset="0"/>
+              </a:rPr>
+              <a:t>既有框架及 </a:t>
+            </a:r>
+            <a:r>
+              <a:rPr lang="en-US" altLang="zh-TW" sz="1600" dirty="0" err="1">
+                <a:latin typeface="Times New Roman" panose="02020603050405020304" pitchFamily="18" charset="0"/>
+                <a:ea typeface="標楷體" panose="03000509000000000000" pitchFamily="65" charset="-120"/>
+                <a:cs typeface="Times New Roman" panose="02020603050405020304" pitchFamily="18" charset="0"/>
+              </a:rPr>
+              <a:t>LiteVideo</a:t>
+            </a:r>
+            <a:r>
+              <a:rPr lang="zh-TW" altLang="en-US" sz="1600" dirty="0">
+                <a:latin typeface="Times New Roman" panose="02020603050405020304" pitchFamily="18" charset="0"/>
+                <a:ea typeface="標楷體" panose="03000509000000000000" pitchFamily="65" charset="-120"/>
+                <a:cs typeface="Times New Roman" panose="02020603050405020304" pitchFamily="18" charset="0"/>
+              </a:rPr>
+              <a:t>、</a:t>
+            </a:r>
+            <a:r>
+              <a:rPr lang="en-US" altLang="zh-TW" sz="1600" dirty="0" err="1">
+                <a:latin typeface="Times New Roman" panose="02020603050405020304" pitchFamily="18" charset="0"/>
+                <a:ea typeface="標楷體" panose="03000509000000000000" pitchFamily="65" charset="-120"/>
+                <a:cs typeface="Times New Roman" panose="02020603050405020304" pitchFamily="18" charset="0"/>
+              </a:rPr>
+              <a:t>LitePCIe</a:t>
+            </a:r>
+            <a:r>
+              <a:rPr lang="zh-TW" altLang="en-US" sz="1600" dirty="0">
+                <a:latin typeface="Times New Roman" panose="02020603050405020304" pitchFamily="18" charset="0"/>
+                <a:ea typeface="標楷體" panose="03000509000000000000" pitchFamily="65" charset="-120"/>
+                <a:cs typeface="Times New Roman" panose="02020603050405020304" pitchFamily="18" charset="0"/>
+              </a:rPr>
+              <a:t>、</a:t>
+            </a:r>
+            <a:r>
+              <a:rPr lang="en-US" altLang="zh-TW" sz="1600" dirty="0" err="1">
+                <a:latin typeface="Times New Roman" panose="02020603050405020304" pitchFamily="18" charset="0"/>
+                <a:ea typeface="標楷體" panose="03000509000000000000" pitchFamily="65" charset="-120"/>
+                <a:cs typeface="Times New Roman" panose="02020603050405020304" pitchFamily="18" charset="0"/>
+              </a:rPr>
+              <a:t>LiteDRAM</a:t>
+            </a:r>
+            <a:r>
+              <a:rPr lang="en-US" altLang="zh-TW" sz="1600" dirty="0">
+                <a:latin typeface="Times New Roman" panose="02020603050405020304" pitchFamily="18" charset="0"/>
+                <a:ea typeface="標楷體" panose="03000509000000000000" pitchFamily="65" charset="-120"/>
+                <a:cs typeface="Times New Roman" panose="02020603050405020304" pitchFamily="18" charset="0"/>
+              </a:rPr>
+              <a:t> </a:t>
+            </a:r>
+            <a:r>
+              <a:rPr lang="zh-TW" altLang="en-US" sz="1600" dirty="0">
+                <a:latin typeface="Times New Roman" panose="02020603050405020304" pitchFamily="18" charset="0"/>
+                <a:ea typeface="標楷體" panose="03000509000000000000" pitchFamily="65" charset="-120"/>
+                <a:cs typeface="Times New Roman" panose="02020603050405020304" pitchFamily="18" charset="0"/>
+              </a:rPr>
+              <a:t>等模組可減少重複開發</a:t>
+            </a:r>
+            <a:endParaRPr lang="en-US" altLang="zh-TW" sz="1600" dirty="0">
+              <a:latin typeface="Times New Roman" panose="02020603050405020304" pitchFamily="18" charset="0"/>
+              <a:ea typeface="標楷體" panose="03000509000000000000" pitchFamily="65" charset="-120"/>
+              <a:cs typeface="Times New Roman" panose="02020603050405020304" pitchFamily="18" charset="0"/>
+            </a:endParaRPr>
+          </a:p>
+          <a:p>
+            <a:pPr>
+              <a:lnSpc>
+                <a:spcPts val="3000"/>
+              </a:lnSpc>
+            </a:pPr>
+            <a:r>
+              <a:rPr lang="zh-TW" altLang="en-US" sz="2000" dirty="0">
+                <a:latin typeface="Times New Roman" panose="02020603050405020304" pitchFamily="18" charset="0"/>
+                <a:ea typeface="標楷體" panose="03000509000000000000" pitchFamily="65" charset="-120"/>
+                <a:cs typeface="Times New Roman" panose="02020603050405020304" pitchFamily="18" charset="0"/>
+              </a:rPr>
+              <a:t>風險與待評估事項</a:t>
+            </a:r>
+          </a:p>
+          <a:p>
+            <a:pPr lvl="1">
+              <a:lnSpc>
+                <a:spcPts val="3000"/>
+              </a:lnSpc>
+            </a:pPr>
+            <a:r>
+              <a:rPr lang="zh-TW" altLang="en-US" sz="1600" dirty="0">
+                <a:latin typeface="Times New Roman" panose="02020603050405020304" pitchFamily="18" charset="0"/>
+                <a:ea typeface="標楷體" panose="03000509000000000000" pitchFamily="65" charset="-120"/>
+                <a:cs typeface="Times New Roman" panose="02020603050405020304" pitchFamily="18" charset="0"/>
+              </a:rPr>
+              <a:t>須確認目標 </a:t>
+            </a:r>
+            <a:r>
+              <a:rPr lang="en-US" altLang="zh-TW" sz="1600" dirty="0">
+                <a:latin typeface="Times New Roman" panose="02020603050405020304" pitchFamily="18" charset="0"/>
+                <a:ea typeface="標楷體" panose="03000509000000000000" pitchFamily="65" charset="-120"/>
+                <a:cs typeface="Times New Roman" panose="02020603050405020304" pitchFamily="18" charset="0"/>
+              </a:rPr>
+              <a:t>FPGA</a:t>
+            </a:r>
+            <a:r>
+              <a:rPr lang="zh-TW" altLang="en-US" sz="1600" dirty="0">
+                <a:latin typeface="Times New Roman" panose="02020603050405020304" pitchFamily="18" charset="0"/>
+                <a:ea typeface="標楷體" panose="03000509000000000000" pitchFamily="65" charset="-120"/>
+                <a:cs typeface="Times New Roman" panose="02020603050405020304" pitchFamily="18" charset="0"/>
+              </a:rPr>
+              <a:t>、</a:t>
+            </a:r>
+            <a:r>
+              <a:rPr lang="en-US" altLang="zh-TW" sz="1600" dirty="0">
+                <a:latin typeface="Times New Roman" panose="02020603050405020304" pitchFamily="18" charset="0"/>
+                <a:ea typeface="標楷體" panose="03000509000000000000" pitchFamily="65" charset="-120"/>
+                <a:cs typeface="Times New Roman" panose="02020603050405020304" pitchFamily="18" charset="0"/>
+              </a:rPr>
+              <a:t>PCIe </a:t>
+            </a:r>
+            <a:r>
+              <a:rPr lang="zh-TW" altLang="en-US" sz="1600" dirty="0">
+                <a:latin typeface="Times New Roman" panose="02020603050405020304" pitchFamily="18" charset="0"/>
+                <a:ea typeface="標楷體" panose="03000509000000000000" pitchFamily="65" charset="-120"/>
+                <a:cs typeface="Times New Roman" panose="02020603050405020304" pitchFamily="18" charset="0"/>
+              </a:rPr>
+              <a:t>介面、記憶體及工具鏈的支援情況</a:t>
+            </a:r>
+            <a:endParaRPr lang="en-US" altLang="zh-TW" sz="1600" dirty="0">
+              <a:latin typeface="Times New Roman" panose="02020603050405020304" pitchFamily="18" charset="0"/>
+              <a:ea typeface="標楷體" panose="03000509000000000000" pitchFamily="65" charset="-120"/>
+              <a:cs typeface="Times New Roman" panose="02020603050405020304" pitchFamily="18" charset="0"/>
+            </a:endParaRPr>
+          </a:p>
+          <a:p>
+            <a:pPr lvl="1">
+              <a:lnSpc>
+                <a:spcPts val="3000"/>
+              </a:lnSpc>
+            </a:pPr>
+            <a:r>
+              <a:rPr lang="en-US" altLang="zh-TW" sz="1600" dirty="0" err="1">
+                <a:latin typeface="Times New Roman" panose="02020603050405020304" pitchFamily="18" charset="0"/>
+                <a:ea typeface="標楷體" panose="03000509000000000000" pitchFamily="65" charset="-120"/>
+                <a:cs typeface="Times New Roman" panose="02020603050405020304" pitchFamily="18" charset="0"/>
+              </a:rPr>
+              <a:t>LiteVideo</a:t>
+            </a:r>
+            <a:r>
+              <a:rPr lang="en-US" altLang="zh-TW" sz="1600" dirty="0">
+                <a:latin typeface="Times New Roman" panose="02020603050405020304" pitchFamily="18" charset="0"/>
+                <a:ea typeface="標楷體" panose="03000509000000000000" pitchFamily="65" charset="-120"/>
+                <a:cs typeface="Times New Roman" panose="02020603050405020304" pitchFamily="18" charset="0"/>
+              </a:rPr>
+              <a:t> </a:t>
+            </a:r>
+            <a:r>
+              <a:rPr lang="zh-TW" altLang="en-US" sz="1600" dirty="0">
+                <a:latin typeface="Times New Roman" panose="02020603050405020304" pitchFamily="18" charset="0"/>
+                <a:ea typeface="標楷體" panose="03000509000000000000" pitchFamily="65" charset="-120"/>
+                <a:cs typeface="Times New Roman" panose="02020603050405020304" pitchFamily="18" charset="0"/>
+              </a:rPr>
+              <a:t>可用性與 </a:t>
+            </a:r>
+            <a:r>
+              <a:rPr lang="en-US" altLang="zh-TW" sz="1600" dirty="0">
+                <a:latin typeface="Times New Roman" panose="02020603050405020304" pitchFamily="18" charset="0"/>
+                <a:ea typeface="標楷體" panose="03000509000000000000" pitchFamily="65" charset="-120"/>
+                <a:cs typeface="Times New Roman" panose="02020603050405020304" pitchFamily="18" charset="0"/>
+              </a:rPr>
+              <a:t>NeTV2 </a:t>
+            </a:r>
+            <a:r>
+              <a:rPr lang="zh-TW" altLang="en-US" sz="1600" dirty="0">
+                <a:latin typeface="Times New Roman" panose="02020603050405020304" pitchFamily="18" charset="0"/>
+                <a:ea typeface="標楷體" panose="03000509000000000000" pitchFamily="65" charset="-120"/>
+                <a:cs typeface="Times New Roman" panose="02020603050405020304" pitchFamily="18" charset="0"/>
+              </a:rPr>
+              <a:t>是否能提供可重用的 </a:t>
+            </a:r>
+            <a:r>
+              <a:rPr lang="en-US" altLang="zh-TW" sz="1600" dirty="0">
+                <a:latin typeface="Times New Roman" panose="02020603050405020304" pitchFamily="18" charset="0"/>
+                <a:ea typeface="標楷體" panose="03000509000000000000" pitchFamily="65" charset="-120"/>
+                <a:cs typeface="Times New Roman" panose="02020603050405020304" pitchFamily="18" charset="0"/>
+              </a:rPr>
+              <a:t>HDMI </a:t>
+            </a:r>
+            <a:r>
+              <a:rPr lang="zh-TW" altLang="en-US" sz="1600" dirty="0">
+                <a:latin typeface="Times New Roman" panose="02020603050405020304" pitchFamily="18" charset="0"/>
+                <a:ea typeface="標楷體" panose="03000509000000000000" pitchFamily="65" charset="-120"/>
+                <a:cs typeface="Times New Roman" panose="02020603050405020304" pitchFamily="18" charset="0"/>
+              </a:rPr>
+              <a:t>影像端 </a:t>
+            </a:r>
+            <a:r>
+              <a:rPr lang="en-US" altLang="zh-TW" sz="1600" dirty="0">
+                <a:latin typeface="Times New Roman" panose="02020603050405020304" pitchFamily="18" charset="0"/>
+                <a:ea typeface="標楷體" panose="03000509000000000000" pitchFamily="65" charset="-120"/>
+                <a:cs typeface="Times New Roman" panose="02020603050405020304" pitchFamily="18" charset="0"/>
+              </a:rPr>
+              <a:t>RTL</a:t>
+            </a:r>
+          </a:p>
+          <a:p>
+            <a:pPr lvl="1">
+              <a:lnSpc>
+                <a:spcPts val="3000"/>
+              </a:lnSpc>
+            </a:pPr>
+            <a:endParaRPr lang="zh-TW" altLang="en-US" sz="1200" dirty="0">
+              <a:latin typeface="Times New Roman" panose="02020603050405020304" pitchFamily="18" charset="0"/>
+              <a:ea typeface="標楷體" panose="03000509000000000000" pitchFamily="65" charset="-120"/>
+              <a:cs typeface="Times New Roman" panose="02020603050405020304" pitchFamily="18" charset="0"/>
+            </a:endParaRPr>
+          </a:p>
+          <a:p>
+            <a:pPr lvl="1">
+              <a:lnSpc>
+                <a:spcPts val="3000"/>
+              </a:lnSpc>
+            </a:pPr>
+            <a:endParaRPr lang="en-US" altLang="zh-TW" sz="1600" dirty="0">
+              <a:latin typeface="Times New Roman" panose="02020603050405020304" pitchFamily="18" charset="0"/>
+              <a:ea typeface="標楷體" panose="03000509000000000000" pitchFamily="65" charset="-120"/>
+              <a:cs typeface="Times New Roman" panose="02020603050405020304" pitchFamily="18" charset="0"/>
+            </a:endParaRPr>
+          </a:p>
+          <a:p>
+            <a:pPr lvl="1">
+              <a:lnSpc>
+                <a:spcPts val="3000"/>
+              </a:lnSpc>
+            </a:pPr>
+            <a:endParaRPr lang="zh-TW" altLang="en-US" sz="1600" dirty="0">
+              <a:latin typeface="Times New Roman" panose="02020603050405020304" pitchFamily="18" charset="0"/>
+              <a:ea typeface="標楷體" panose="03000509000000000000" pitchFamily="65" charset="-120"/>
+              <a:cs typeface="Times New Roman" panose="02020603050405020304" pitchFamily="18" charset="0"/>
+            </a:endParaRPr>
+          </a:p>
+          <a:p>
+            <a:pPr lvl="1">
+              <a:lnSpc>
+                <a:spcPts val="3000"/>
+              </a:lnSpc>
+            </a:pPr>
+            <a:endParaRPr lang="en-US" altLang="zh-TW" sz="1600" dirty="0">
+              <a:solidFill>
+                <a:schemeClr val="tx1"/>
+              </a:solidFill>
+              <a:latin typeface="Times New Roman" panose="02020603050405020304" pitchFamily="18" charset="0"/>
+              <a:ea typeface="標楷體" panose="03000509000000000000" pitchFamily="65" charset="-120"/>
+              <a:cs typeface="Times New Roman" panose="02020603050405020304" pitchFamily="18" charset="0"/>
+            </a:endParaRPr>
+          </a:p>
+          <a:p>
+            <a:pPr lvl="1">
+              <a:lnSpc>
+                <a:spcPts val="3000"/>
+              </a:lnSpc>
+            </a:pPr>
+            <a:endParaRPr lang="zh-TW" altLang="en-US" sz="1600" dirty="0">
+              <a:latin typeface="Times New Roman" panose="02020603050405020304" pitchFamily="18" charset="0"/>
+              <a:ea typeface="標楷體" panose="03000509000000000000" pitchFamily="65" charset="-120"/>
+              <a:cs typeface="Times New Roman" panose="02020603050405020304" pitchFamily="18" charset="0"/>
+            </a:endParaRPr>
+          </a:p>
+          <a:p>
+            <a:pPr lvl="1">
+              <a:lnSpc>
+                <a:spcPts val="3000"/>
+              </a:lnSpc>
+            </a:pPr>
+            <a:endParaRPr lang="en-US" altLang="zh-TW" sz="1600" dirty="0">
+              <a:solidFill>
+                <a:schemeClr val="tx1"/>
+              </a:solidFill>
+              <a:latin typeface="Times New Roman" panose="02020603050405020304" pitchFamily="18" charset="0"/>
+              <a:ea typeface="標楷體" panose="03000509000000000000" pitchFamily="65" charset="-120"/>
+              <a:cs typeface="Times New Roman" panose="02020603050405020304" pitchFamily="18" charset="0"/>
+            </a:endParaRPr>
+          </a:p>
+        </p:txBody>
+      </p:sp>
+      <p:pic>
+        <p:nvPicPr>
+          <p:cNvPr id="10" name="圖片 9">
+            <a:extLst>
+              <a:ext uri="{FF2B5EF4-FFF2-40B4-BE49-F238E27FC236}">
+                <a16:creationId xmlns:a16="http://schemas.microsoft.com/office/drawing/2014/main" id="{A60169C1-DABD-C18E-CA96-E01B44C30E51}"/>
+              </a:ext>
+            </a:extLst>
+          </p:cNvPr>
+          <p:cNvPicPr>
+            <a:picLocks noChangeAspect="1"/>
+          </p:cNvPicPr>
+          <p:nvPr/>
+        </p:nvPicPr>
+        <p:blipFill>
+          <a:blip r:embed="rId3"/>
+          <a:stretch>
+            <a:fillRect/>
+          </a:stretch>
+        </p:blipFill>
+        <p:spPr>
+          <a:xfrm>
+            <a:off x="395968" y="1593078"/>
+            <a:ext cx="9114064" cy="981248"/>
+          </a:xfrm>
+          <a:prstGeom prst="rect">
+            <a:avLst/>
+          </a:prstGeom>
+        </p:spPr>
+      </p:pic>
+    </p:spTree>
+    <p:extLst>
+      <p:ext uri="{BB962C8B-B14F-4D97-AF65-F5344CB8AC3E}">
+        <p14:creationId xmlns:p14="http://schemas.microsoft.com/office/powerpoint/2010/main" val="302465700"/>
+      </p:ext>
+    </p:extLst>
+  </p:cSld>
+  <p:clrMapOvr>
+    <a:masterClrMapping/>
+  </p:clrMapOvr>
+</p:sld>
+</file>
+
+<file path=ppt/slides/slide9.xml><?xml version="1.0" encoding="utf-8"?>
+<p:sld xmlns:a="http://schemas.openxmlformats.org/drawingml/2006/main" xmlns:r="http://schemas.openxmlformats.org/officeDocument/2006/relationships" xmlns:p="http://schemas.openxmlformats.org/presentationml/2006/main">
+  <p:cSld>
+    <p:spTree>
+      <p:nvGrpSpPr>
+        <p:cNvPr id="1" name="">
+          <a:extLst>
+            <a:ext uri="{FF2B5EF4-FFF2-40B4-BE49-F238E27FC236}">
+              <a16:creationId xmlns:a16="http://schemas.microsoft.com/office/drawing/2014/main" id="{C25E9AAA-7E36-1E17-83F9-FD3A18A28BE9}"/>
+            </a:ext>
+          </a:extLst>
+        </p:cNvPr>
+        <p:cNvGrpSpPr/>
+        <p:nvPr/>
+      </p:nvGrpSpPr>
+      <p:grpSpPr>
+        <a:xfrm>
+          <a:off x="0" y="0"/>
+          <a:ext cx="0" cy="0"/>
+          <a:chOff x="0" y="0"/>
+          <a:chExt cx="0" cy="0"/>
+        </a:xfrm>
+      </p:grpSpPr>
+      <p:sp>
+        <p:nvSpPr>
+          <p:cNvPr id="15" name="標題 1">
+            <a:extLst>
+              <a:ext uri="{FF2B5EF4-FFF2-40B4-BE49-F238E27FC236}">
+                <a16:creationId xmlns:a16="http://schemas.microsoft.com/office/drawing/2014/main" id="{142C8726-E890-9988-40FC-8984FDA21FEE}"/>
+              </a:ext>
+            </a:extLst>
+          </p:cNvPr>
+          <p:cNvSpPr>
+            <a:spLocks noGrp="1"/>
+          </p:cNvSpPr>
+          <p:nvPr>
+            <p:ph type="title"/>
+          </p:nvPr>
+        </p:nvSpPr>
+        <p:spPr>
+          <a:xfrm>
+            <a:off x="609602" y="609600"/>
+            <a:ext cx="8077200" cy="533400"/>
+          </a:xfrm>
+          <a:ln>
+            <a:noFill/>
+          </a:ln>
+        </p:spPr>
+        <p:txBody>
+          <a:bodyPr/>
+          <a:lstStyle/>
+          <a:p>
             <a:pPr fontAlgn="t"/>
             <a:r>
               <a:rPr lang="zh-TW" altLang="en-US" dirty="0">
@@ -17185,7 +19509,39 @@
                 <a:ea typeface="標楷體" panose="03000509000000000000" pitchFamily="65" charset="-120"/>
                 <a:cs typeface="Times New Roman" panose="02020603050405020304" pitchFamily="18" charset="0"/>
               </a:rPr>
-              <a:t>: Video</a:t>
+              <a:t>: Xilinx</a:t>
+            </a:r>
+            <a:r>
+              <a:rPr lang="zh-TW" altLang="en-US" dirty="0">
+                <a:latin typeface="Times New Roman" panose="02020603050405020304" pitchFamily="18" charset="0"/>
+                <a:ea typeface="標楷體" panose="03000509000000000000" pitchFamily="65" charset="-120"/>
+                <a:cs typeface="Times New Roman" panose="02020603050405020304" pitchFamily="18" charset="0"/>
+              </a:rPr>
+              <a:t> </a:t>
+            </a:r>
+            <a:r>
+              <a:rPr lang="en-US" altLang="zh-TW" dirty="0">
+                <a:latin typeface="Times New Roman" panose="02020603050405020304" pitchFamily="18" charset="0"/>
+                <a:ea typeface="標楷體" panose="03000509000000000000" pitchFamily="65" charset="-120"/>
+                <a:cs typeface="Times New Roman" panose="02020603050405020304" pitchFamily="18" charset="0"/>
+              </a:rPr>
+              <a:t>/</a:t>
+            </a:r>
+            <a:r>
+              <a:rPr lang="zh-TW" altLang="en-US" dirty="0">
+                <a:latin typeface="Times New Roman" panose="02020603050405020304" pitchFamily="18" charset="0"/>
+                <a:ea typeface="標楷體" panose="03000509000000000000" pitchFamily="65" charset="-120"/>
+                <a:cs typeface="Times New Roman" panose="02020603050405020304" pitchFamily="18" charset="0"/>
+              </a:rPr>
+              <a:t> </a:t>
+            </a:r>
+            <a:r>
+              <a:rPr lang="en-US" altLang="zh-TW" dirty="0">
+                <a:latin typeface="Times New Roman" panose="02020603050405020304" pitchFamily="18" charset="0"/>
+                <a:ea typeface="標楷體" panose="03000509000000000000" pitchFamily="65" charset="-120"/>
+                <a:cs typeface="Times New Roman" panose="02020603050405020304" pitchFamily="18" charset="0"/>
+              </a:rPr>
+              <a:t>Video</a:t>
             </a:r>
             <a:r>
               <a:rPr lang="zh-TW" altLang="en-US" dirty="0">
@@ -17900,506 +20256,6 @@
     <p:extLst>
       <p:ext uri="{BB962C8B-B14F-4D97-AF65-F5344CB8AC3E}">
         <p14:creationId xmlns:p14="http://schemas.microsoft.com/office/powerpoint/2010/main" val="3015781900"/>
-      </p:ext>
-    </p:extLst>
-  </p:cSld>
-  <p:clrMapOvr>
-    <a:masterClrMapping/>
-  </p:clrMapOvr>
-</p:sld>
-</file>
-
-<file path=ppt/slides/slide9.xml><?xml version="1.0" encoding="utf-8"?>
-<p:sld xmlns:a="http://schemas.openxmlformats.org/drawingml/2006/main" xmlns:r="http://schemas.openxmlformats.org/officeDocument/2006/relationships" xmlns:p="http://schemas.openxmlformats.org/presentationml/2006/main">
-  <p:cSld>
-    <p:spTree>
-      <p:nvGrpSpPr>
-        <p:cNvPr id="1" name="">
-          <a:extLst>
-            <a:ext uri="{FF2B5EF4-FFF2-40B4-BE49-F238E27FC236}">
-              <a16:creationId xmlns:a16="http://schemas.microsoft.com/office/drawing/2014/main" id="{C25E9AAA-7E36-1E17-83F9-FD3A18A28BE9}"/>
-            </a:ext>
-          </a:extLst>
-        </p:cNvPr>
-        <p:cNvGrpSpPr/>
-        <p:nvPr/>
-      </p:nvGrpSpPr>
-      <p:grpSpPr>
-        <a:xfrm>
-          <a:off x="0" y="0"/>
-          <a:ext cx="0" cy="0"/>
-          <a:chOff x="0" y="0"/>
-          <a:chExt cx="0" cy="0"/>
-        </a:xfrm>
-      </p:grpSpPr>
-      <p:sp>
-        <p:nvSpPr>
-          <p:cNvPr id="15" name="標題 1">
-            <a:extLst>
-              <a:ext uri="{FF2B5EF4-FFF2-40B4-BE49-F238E27FC236}">
-                <a16:creationId xmlns:a16="http://schemas.microsoft.com/office/drawing/2014/main" id="{142C8726-E890-9988-40FC-8984FDA21FEE}"/>
-              </a:ext>
-            </a:extLst>
-          </p:cNvPr>
-          <p:cNvSpPr>
-            <a:spLocks noGrp="1"/>
-          </p:cNvSpPr>
-          <p:nvPr>
-            <p:ph type="title"/>
-          </p:nvPr>
-        </p:nvSpPr>
-        <p:spPr>
-          <a:xfrm>
-            <a:off x="609602" y="609600"/>
-            <a:ext cx="8077200" cy="533400"/>
-          </a:xfrm>
-          <a:ln>
-            <a:noFill/>
-          </a:ln>
-        </p:spPr>
-        <p:txBody>
-          <a:bodyPr/>
-          <a:lstStyle/>
-          <a:p>
-            <a:pPr fontAlgn="t"/>
-            <a:r>
-              <a:rPr lang="zh-TW" altLang="en-US" dirty="0">
-                <a:latin typeface="Times New Roman" panose="02020603050405020304" pitchFamily="18" charset="0"/>
-                <a:ea typeface="標楷體" panose="03000509000000000000" pitchFamily="65" charset="-120"/>
-                <a:cs typeface="Times New Roman" panose="02020603050405020304" pitchFamily="18" charset="0"/>
-              </a:rPr>
-              <a:t>本次進度</a:t>
-            </a:r>
-            <a:r>
-              <a:rPr lang="en-US" altLang="zh-TW" dirty="0">
-                <a:latin typeface="Times New Roman" panose="02020603050405020304" pitchFamily="18" charset="0"/>
-                <a:ea typeface="標楷體" panose="03000509000000000000" pitchFamily="65" charset="-120"/>
-                <a:cs typeface="Times New Roman" panose="02020603050405020304" pitchFamily="18" charset="0"/>
-              </a:rPr>
-              <a:t>: DMA</a:t>
-            </a:r>
-            <a:r>
-              <a:rPr lang="zh-TW" altLang="en-US" dirty="0">
-                <a:latin typeface="Times New Roman" panose="02020603050405020304" pitchFamily="18" charset="0"/>
-                <a:ea typeface="標楷體" panose="03000509000000000000" pitchFamily="65" charset="-120"/>
-                <a:cs typeface="Times New Roman" panose="02020603050405020304" pitchFamily="18" charset="0"/>
-              </a:rPr>
-              <a:t> </a:t>
-            </a:r>
-            <a:r>
-              <a:rPr lang="en-US" altLang="zh-TW" dirty="0">
-                <a:latin typeface="Times New Roman" panose="02020603050405020304" pitchFamily="18" charset="0"/>
-                <a:ea typeface="標楷體" panose="03000509000000000000" pitchFamily="65" charset="-120"/>
-                <a:cs typeface="Times New Roman" panose="02020603050405020304" pitchFamily="18" charset="0"/>
-              </a:rPr>
-              <a:t>IP</a:t>
-            </a:r>
-            <a:r>
-              <a:rPr lang="zh-TW" altLang="en-US" dirty="0">
-                <a:latin typeface="Times New Roman" panose="02020603050405020304" pitchFamily="18" charset="0"/>
-                <a:ea typeface="標楷體" panose="03000509000000000000" pitchFamily="65" charset="-120"/>
-                <a:cs typeface="Times New Roman" panose="02020603050405020304" pitchFamily="18" charset="0"/>
-              </a:rPr>
-              <a:t> </a:t>
-            </a:r>
-            <a:r>
-              <a:rPr lang="en-US" altLang="zh-TW" dirty="0">
-                <a:latin typeface="Times New Roman" panose="02020603050405020304" pitchFamily="18" charset="0"/>
-                <a:ea typeface="標楷體" panose="03000509000000000000" pitchFamily="65" charset="-120"/>
-                <a:cs typeface="Times New Roman" panose="02020603050405020304" pitchFamily="18" charset="0"/>
-              </a:rPr>
-              <a:t>Drivers</a:t>
-            </a:r>
-            <a:endParaRPr lang="zh-TW" altLang="en-US" dirty="0">
-              <a:latin typeface="Times New Roman" panose="02020603050405020304" pitchFamily="18" charset="0"/>
-              <a:ea typeface="標楷體" panose="03000509000000000000" pitchFamily="65" charset="-120"/>
-              <a:cs typeface="Times New Roman" panose="02020603050405020304" pitchFamily="18" charset="0"/>
-            </a:endParaRPr>
-          </a:p>
-        </p:txBody>
-      </p:sp>
-      <p:sp>
-        <p:nvSpPr>
-          <p:cNvPr id="2" name="文字版面配置區 6">
-            <a:extLst>
-              <a:ext uri="{FF2B5EF4-FFF2-40B4-BE49-F238E27FC236}">
-                <a16:creationId xmlns:a16="http://schemas.microsoft.com/office/drawing/2014/main" id="{D929304B-5341-8BBF-E71F-AF5F2FE7268A}"/>
-              </a:ext>
-            </a:extLst>
-          </p:cNvPr>
-          <p:cNvSpPr txBox="1"/>
-          <p:nvPr/>
-        </p:nvSpPr>
-        <p:spPr>
-          <a:xfrm>
-            <a:off x="609602" y="935857"/>
-            <a:ext cx="8686796" cy="4700685"/>
-          </a:xfrm>
-          <a:prstGeom prst="rect">
-            <a:avLst/>
-          </a:prstGeom>
-          <a:noFill/>
-          <a:ln>
-            <a:noFill/>
-          </a:ln>
-        </p:spPr>
-        <p:txBody>
-          <a:bodyPr spcFirstLastPara="1" wrap="square" lIns="91425" tIns="45700" rIns="91425" bIns="45700" anchor="t" anchorCtr="0">
-            <a:noAutofit/>
-          </a:bodyPr>
-          <a:lstStyle>
-            <a:defPPr marR="0" lvl="0" algn="l" rtl="0">
-              <a:lnSpc>
-                <a:spcPct val="100000"/>
-              </a:lnSpc>
-              <a:spcBef>
-                <a:spcPts val="0"/>
-              </a:spcBef>
-              <a:spcAft>
-                <a:spcPts val="0"/>
-              </a:spcAft>
-            </a:defPPr>
-            <a:lvl1pPr marL="457200" marR="0" lvl="0" indent="-406400" algn="l" rtl="0">
-              <a:lnSpc>
-                <a:spcPct val="100000"/>
-              </a:lnSpc>
-              <a:spcBef>
-                <a:spcPts val="560"/>
-              </a:spcBef>
-              <a:spcAft>
-                <a:spcPts val="0"/>
-              </a:spcAft>
-              <a:buClr>
-                <a:schemeClr val="accent2"/>
-              </a:buClr>
-              <a:buSzPts val="2800"/>
-              <a:buFont typeface="Noto Sans Symbols"/>
-              <a:buChar char="❖"/>
-              <a:defRPr sz="2800" b="0" i="0" u="none" strike="noStrike" cap="none">
-                <a:solidFill>
-                  <a:schemeClr val="dk1"/>
-                </a:solidFill>
-                <a:latin typeface="Times New Roman"/>
-                <a:ea typeface="Times New Roman"/>
-                <a:cs typeface="Times New Roman"/>
-                <a:sym typeface="Times New Roman"/>
-              </a:defRPr>
-            </a:lvl1pPr>
-            <a:lvl2pPr marL="914400" marR="0" lvl="1" indent="-381000" algn="l" rtl="0">
-              <a:lnSpc>
-                <a:spcPct val="100000"/>
-              </a:lnSpc>
-              <a:spcBef>
-                <a:spcPts val="480"/>
-              </a:spcBef>
-              <a:spcAft>
-                <a:spcPts val="0"/>
-              </a:spcAft>
-              <a:buClr>
-                <a:srgbClr val="FF5050"/>
-              </a:buClr>
-              <a:buSzPts val="2400"/>
-              <a:buFont typeface="Noto Sans Symbols"/>
-              <a:buChar char="▪"/>
-              <a:defRPr sz="2400" b="0" i="0" u="none" strike="noStrike" cap="none">
-                <a:solidFill>
-                  <a:schemeClr val="dk1"/>
-                </a:solidFill>
-                <a:latin typeface="Times New Roman"/>
-                <a:ea typeface="Times New Roman"/>
-                <a:cs typeface="Times New Roman"/>
-                <a:sym typeface="Times New Roman"/>
-              </a:defRPr>
-            </a:lvl2pPr>
-            <a:lvl3pPr marL="1371600" marR="0" lvl="2" indent="-355600" algn="l" rtl="0">
-              <a:lnSpc>
-                <a:spcPct val="100000"/>
-              </a:lnSpc>
-              <a:spcBef>
-                <a:spcPts val="400"/>
-              </a:spcBef>
-              <a:spcAft>
-                <a:spcPts val="0"/>
-              </a:spcAft>
-              <a:buClr>
-                <a:srgbClr val="6699FF"/>
-              </a:buClr>
-              <a:buSzPts val="2000"/>
-              <a:buFont typeface="Times New Roman"/>
-              <a:buChar char="•"/>
-              <a:defRPr sz="2000" b="0" i="0" u="none" strike="noStrike" cap="none">
-                <a:solidFill>
-                  <a:schemeClr val="dk1"/>
-                </a:solidFill>
-                <a:latin typeface="Times New Roman"/>
-                <a:ea typeface="Times New Roman"/>
-                <a:cs typeface="Times New Roman"/>
-                <a:sym typeface="Times New Roman"/>
-              </a:defRPr>
-            </a:lvl3pPr>
-            <a:lvl4pPr marL="1828800" marR="0" lvl="3" indent="-355600" algn="l" rtl="0">
-              <a:lnSpc>
-                <a:spcPct val="100000"/>
-              </a:lnSpc>
-              <a:spcBef>
-                <a:spcPts val="400"/>
-              </a:spcBef>
-              <a:spcAft>
-                <a:spcPts val="0"/>
-              </a:spcAft>
-              <a:buClr>
-                <a:srgbClr val="FF5050"/>
-              </a:buClr>
-              <a:buSzPts val="2000"/>
-              <a:buFont typeface="Times New Roman"/>
-              <a:buChar char="o"/>
-              <a:defRPr sz="2000" b="0" i="0" u="none" strike="noStrike" cap="none">
-                <a:solidFill>
-                  <a:schemeClr val="dk1"/>
-                </a:solidFill>
-                <a:latin typeface="Times New Roman"/>
-                <a:ea typeface="Times New Roman"/>
-                <a:cs typeface="Times New Roman"/>
-                <a:sym typeface="Times New Roman"/>
-              </a:defRPr>
-            </a:lvl4pPr>
-            <a:lvl5pPr marL="2286000" marR="0" lvl="4" indent="-355600" algn="l" rtl="0">
-              <a:lnSpc>
-                <a:spcPct val="100000"/>
-              </a:lnSpc>
-              <a:spcBef>
-                <a:spcPts val="400"/>
-              </a:spcBef>
-              <a:spcAft>
-                <a:spcPts val="0"/>
-              </a:spcAft>
-              <a:buClr>
-                <a:srgbClr val="FF5050"/>
-              </a:buClr>
-              <a:buSzPts val="2000"/>
-              <a:buFont typeface="Times New Roman"/>
-              <a:buChar char="o"/>
-              <a:defRPr sz="2000" b="0" i="0" u="none" strike="noStrike" cap="none">
-                <a:solidFill>
-                  <a:schemeClr val="dk1"/>
-                </a:solidFill>
-                <a:latin typeface="Times New Roman"/>
-                <a:ea typeface="Times New Roman"/>
-                <a:cs typeface="Times New Roman"/>
-                <a:sym typeface="Times New Roman"/>
-              </a:defRPr>
-            </a:lvl5pPr>
-            <a:lvl6pPr marL="2743200" marR="0" lvl="5" indent="-355600" algn="l" rtl="0">
-              <a:lnSpc>
-                <a:spcPct val="100000"/>
-              </a:lnSpc>
-              <a:spcBef>
-                <a:spcPts val="400"/>
-              </a:spcBef>
-              <a:spcAft>
-                <a:spcPts val="0"/>
-              </a:spcAft>
-              <a:buClr>
-                <a:srgbClr val="FF5050"/>
-              </a:buClr>
-              <a:buSzPts val="2000"/>
-              <a:buFont typeface="Times New Roman"/>
-              <a:buChar char="o"/>
-              <a:defRPr sz="2000" b="0" i="0" u="none" strike="noStrike" cap="none">
-                <a:solidFill>
-                  <a:schemeClr val="dk1"/>
-                </a:solidFill>
-                <a:latin typeface="Times New Roman"/>
-                <a:ea typeface="Times New Roman"/>
-                <a:cs typeface="Times New Roman"/>
-                <a:sym typeface="Times New Roman"/>
-              </a:defRPr>
-            </a:lvl6pPr>
-            <a:lvl7pPr marL="3200400" marR="0" lvl="6" indent="-355600" algn="l" rtl="0">
-              <a:lnSpc>
-                <a:spcPct val="100000"/>
-              </a:lnSpc>
-              <a:spcBef>
-                <a:spcPts val="400"/>
-              </a:spcBef>
-              <a:spcAft>
-                <a:spcPts val="0"/>
-              </a:spcAft>
-              <a:buClr>
-                <a:srgbClr val="FF5050"/>
-              </a:buClr>
-              <a:buSzPts val="2000"/>
-              <a:buFont typeface="Times New Roman"/>
-              <a:buChar char="o"/>
-              <a:defRPr sz="2000" b="0" i="0" u="none" strike="noStrike" cap="none">
-                <a:solidFill>
-                  <a:schemeClr val="dk1"/>
-                </a:solidFill>
-                <a:latin typeface="Times New Roman"/>
-                <a:ea typeface="Times New Roman"/>
-                <a:cs typeface="Times New Roman"/>
-                <a:sym typeface="Times New Roman"/>
-              </a:defRPr>
-            </a:lvl7pPr>
-            <a:lvl8pPr marL="3657600" marR="0" lvl="7" indent="-355600" algn="l" rtl="0">
-              <a:lnSpc>
-                <a:spcPct val="100000"/>
-              </a:lnSpc>
-              <a:spcBef>
-                <a:spcPts val="400"/>
-              </a:spcBef>
-              <a:spcAft>
-                <a:spcPts val="0"/>
-              </a:spcAft>
-              <a:buClr>
-                <a:srgbClr val="FF5050"/>
-              </a:buClr>
-              <a:buSzPts val="2000"/>
-              <a:buFont typeface="Times New Roman"/>
-              <a:buChar char="o"/>
-              <a:defRPr sz="2000" b="0" i="0" u="none" strike="noStrike" cap="none">
-                <a:solidFill>
-                  <a:schemeClr val="dk1"/>
-                </a:solidFill>
-                <a:latin typeface="Times New Roman"/>
-                <a:ea typeface="Times New Roman"/>
-                <a:cs typeface="Times New Roman"/>
-                <a:sym typeface="Times New Roman"/>
-              </a:defRPr>
-            </a:lvl8pPr>
-            <a:lvl9pPr marL="4114800" marR="0" lvl="8" indent="-355600" algn="l" rtl="0">
-              <a:lnSpc>
-                <a:spcPct val="100000"/>
-              </a:lnSpc>
-              <a:spcBef>
-                <a:spcPts val="400"/>
-              </a:spcBef>
-              <a:spcAft>
-                <a:spcPts val="0"/>
-              </a:spcAft>
-              <a:buClr>
-                <a:srgbClr val="FF5050"/>
-              </a:buClr>
-              <a:buSzPts val="2000"/>
-              <a:buFont typeface="Times New Roman"/>
-              <a:buChar char="o"/>
-              <a:defRPr sz="2000" b="0" i="0" u="none" strike="noStrike" cap="none">
-                <a:solidFill>
-                  <a:schemeClr val="dk1"/>
-                </a:solidFill>
-                <a:latin typeface="Times New Roman"/>
-                <a:ea typeface="Times New Roman"/>
-                <a:cs typeface="Times New Roman"/>
-                <a:sym typeface="Times New Roman"/>
-              </a:defRPr>
-            </a:lvl9pPr>
-          </a:lstStyle>
-          <a:p>
-            <a:pPr>
-              <a:lnSpc>
-                <a:spcPct val="150000"/>
-              </a:lnSpc>
-            </a:pPr>
-            <a:r>
-              <a:rPr lang="zh-TW" altLang="en-US" sz="2000" dirty="0">
-                <a:solidFill>
-                  <a:schemeClr val="tx1"/>
-                </a:solidFill>
-                <a:latin typeface="Times New Roman" panose="02020603050405020304" pitchFamily="18" charset="0"/>
-                <a:ea typeface="標楷體" panose="03000509000000000000" pitchFamily="65" charset="-120"/>
-                <a:cs typeface="Times New Roman" panose="02020603050405020304" pitchFamily="18" charset="0"/>
-              </a:rPr>
-              <a:t>定位</a:t>
-            </a:r>
-            <a:endParaRPr lang="en-US" altLang="zh-TW" sz="2000" dirty="0">
-              <a:solidFill>
-                <a:schemeClr val="tx1"/>
-              </a:solidFill>
-              <a:latin typeface="Times New Roman" panose="02020603050405020304" pitchFamily="18" charset="0"/>
-              <a:ea typeface="標楷體" panose="03000509000000000000" pitchFamily="65" charset="-120"/>
-              <a:cs typeface="Times New Roman" panose="02020603050405020304" pitchFamily="18" charset="0"/>
-            </a:endParaRPr>
-          </a:p>
-          <a:p>
-            <a:pPr lvl="1">
-              <a:lnSpc>
-                <a:spcPts val="3000"/>
-              </a:lnSpc>
-            </a:pPr>
-            <a:r>
-              <a:rPr lang="zh-TW" altLang="en-US" sz="1600" dirty="0">
-                <a:latin typeface="Times New Roman" panose="02020603050405020304" pitchFamily="18" charset="0"/>
-                <a:ea typeface="標楷體" panose="03000509000000000000" pitchFamily="65" charset="-120"/>
-                <a:cs typeface="Times New Roman" panose="02020603050405020304" pitchFamily="18" charset="0"/>
-              </a:rPr>
-              <a:t> </a:t>
-            </a:r>
-          </a:p>
-          <a:p>
-            <a:pPr lvl="1">
-              <a:lnSpc>
-                <a:spcPts val="3000"/>
-              </a:lnSpc>
-            </a:pPr>
-            <a:endParaRPr lang="en-US" altLang="zh-TW" sz="1600" dirty="0">
-              <a:solidFill>
-                <a:schemeClr val="tx1"/>
-              </a:solidFill>
-              <a:latin typeface="Times New Roman" panose="02020603050405020304" pitchFamily="18" charset="0"/>
-              <a:ea typeface="標楷體" panose="03000509000000000000" pitchFamily="65" charset="-120"/>
-              <a:cs typeface="Times New Roman" panose="02020603050405020304" pitchFamily="18" charset="0"/>
-            </a:endParaRPr>
-          </a:p>
-        </p:txBody>
-      </p:sp>
-      <p:sp>
-        <p:nvSpPr>
-          <p:cNvPr id="3" name="文字方塊 2">
-            <a:extLst>
-              <a:ext uri="{FF2B5EF4-FFF2-40B4-BE49-F238E27FC236}">
-                <a16:creationId xmlns:a16="http://schemas.microsoft.com/office/drawing/2014/main" id="{B17A7646-77F3-2568-68C1-545F7C189BE6}"/>
-              </a:ext>
-            </a:extLst>
-          </p:cNvPr>
-          <p:cNvSpPr txBox="1"/>
-          <p:nvPr/>
-        </p:nvSpPr>
-        <p:spPr>
-          <a:xfrm>
-            <a:off x="1787236" y="6384072"/>
-            <a:ext cx="5802283" cy="276999"/>
-          </a:xfrm>
-          <a:prstGeom prst="rect">
-            <a:avLst/>
-          </a:prstGeom>
-          <a:noFill/>
-        </p:spPr>
-        <p:txBody>
-          <a:bodyPr wrap="square">
-            <a:spAutoFit/>
-          </a:bodyPr>
-          <a:lstStyle/>
-          <a:p>
-            <a:r>
-              <a:rPr lang="en-US" altLang="zh-TW" sz="1200" dirty="0">
-                <a:latin typeface="Times New Roman" panose="02020603050405020304" pitchFamily="18" charset="0"/>
-                <a:ea typeface="標楷體" panose="03000509000000000000" pitchFamily="65" charset="-120"/>
-                <a:cs typeface="Times New Roman" panose="02020603050405020304" pitchFamily="18" charset="0"/>
-              </a:rPr>
-              <a:t>[5] https://github.com/Xilinx/dma_ip_drivers</a:t>
-            </a:r>
-            <a:endParaRPr lang="zh-TW" altLang="en-US" sz="1200" dirty="0">
-              <a:latin typeface="Times New Roman" panose="02020603050405020304" pitchFamily="18" charset="0"/>
-              <a:ea typeface="標楷體" panose="03000509000000000000" pitchFamily="65" charset="-120"/>
-              <a:cs typeface="Times New Roman" panose="02020603050405020304" pitchFamily="18" charset="0"/>
-            </a:endParaRPr>
-          </a:p>
-        </p:txBody>
-      </p:sp>
-    </p:spTree>
-    <p:extLst>
-      <p:ext uri="{BB962C8B-B14F-4D97-AF65-F5344CB8AC3E}">
-        <p14:creationId xmlns:p14="http://schemas.microsoft.com/office/powerpoint/2010/main" val="3407462930"/>
       </p:ext>
     </p:extLst>
   </p:cSld>
